--- a/parameter-visualisation/parameter_visualisation.pptx
+++ b/parameter-visualisation/parameter_visualisation.pptx
@@ -8,6 +8,7 @@
     <p:sldId id="256" r:id="rId2"/>
     <p:sldId id="258" r:id="rId3"/>
     <p:sldId id="257" r:id="rId4"/>
+    <p:sldId id="259" r:id="rId5"/>
   </p:sldIdLst>
   <p:sldSz cx="12192000" cy="6858000"/>
   <p:notesSz cx="6858000" cy="9144000"/>
@@ -106,6 +107,11 @@
       </a:defRPr>
     </a:lvl9pPr>
   </p:defaultTextStyle>
+  <p:extLst>
+    <p:ext uri="{EFAFB233-063F-42B5-8137-9DF3F51BA10A}">
+      <p15:sldGuideLst xmlns:p15="http://schemas.microsoft.com/office/powerpoint/2012/main"/>
+    </p:ext>
+  </p:extLst>
 </p:presentation>
 </file>
 
@@ -19596,7 +19602,7 @@
           <a:p>
             <a:fld id="{830D4AAE-87F1-49BA-A98E-415997C9383F}" type="datetimeFigureOut">
               <a:rPr lang="en-AU" smtClean="0"/>
-              <a:t>13/04/2026</a:t>
+              <a:t>14/04/2026</a:t>
             </a:fld>
             <a:endParaRPr lang="en-AU"/>
           </a:p>
@@ -19796,7 +19802,7 @@
           <a:p>
             <a:fld id="{830D4AAE-87F1-49BA-A98E-415997C9383F}" type="datetimeFigureOut">
               <a:rPr lang="en-AU" smtClean="0"/>
-              <a:t>13/04/2026</a:t>
+              <a:t>14/04/2026</a:t>
             </a:fld>
             <a:endParaRPr lang="en-AU"/>
           </a:p>
@@ -20006,7 +20012,7 @@
           <a:p>
             <a:fld id="{830D4AAE-87F1-49BA-A98E-415997C9383F}" type="datetimeFigureOut">
               <a:rPr lang="en-AU" smtClean="0"/>
-              <a:t>13/04/2026</a:t>
+              <a:t>14/04/2026</a:t>
             </a:fld>
             <a:endParaRPr lang="en-AU"/>
           </a:p>
@@ -20206,7 +20212,7 @@
           <a:p>
             <a:fld id="{830D4AAE-87F1-49BA-A98E-415997C9383F}" type="datetimeFigureOut">
               <a:rPr lang="en-AU" smtClean="0"/>
-              <a:t>13/04/2026</a:t>
+              <a:t>14/04/2026</a:t>
             </a:fld>
             <a:endParaRPr lang="en-AU"/>
           </a:p>
@@ -20482,7 +20488,7 @@
           <a:p>
             <a:fld id="{830D4AAE-87F1-49BA-A98E-415997C9383F}" type="datetimeFigureOut">
               <a:rPr lang="en-AU" smtClean="0"/>
-              <a:t>13/04/2026</a:t>
+              <a:t>14/04/2026</a:t>
             </a:fld>
             <a:endParaRPr lang="en-AU"/>
           </a:p>
@@ -20750,7 +20756,7 @@
           <a:p>
             <a:fld id="{830D4AAE-87F1-49BA-A98E-415997C9383F}" type="datetimeFigureOut">
               <a:rPr lang="en-AU" smtClean="0"/>
-              <a:t>13/04/2026</a:t>
+              <a:t>14/04/2026</a:t>
             </a:fld>
             <a:endParaRPr lang="en-AU"/>
           </a:p>
@@ -21165,7 +21171,7 @@
           <a:p>
             <a:fld id="{830D4AAE-87F1-49BA-A98E-415997C9383F}" type="datetimeFigureOut">
               <a:rPr lang="en-AU" smtClean="0"/>
-              <a:t>13/04/2026</a:t>
+              <a:t>14/04/2026</a:t>
             </a:fld>
             <a:endParaRPr lang="en-AU"/>
           </a:p>
@@ -21307,7 +21313,7 @@
           <a:p>
             <a:fld id="{830D4AAE-87F1-49BA-A98E-415997C9383F}" type="datetimeFigureOut">
               <a:rPr lang="en-AU" smtClean="0"/>
-              <a:t>13/04/2026</a:t>
+              <a:t>14/04/2026</a:t>
             </a:fld>
             <a:endParaRPr lang="en-AU"/>
           </a:p>
@@ -21420,7 +21426,7 @@
           <a:p>
             <a:fld id="{830D4AAE-87F1-49BA-A98E-415997C9383F}" type="datetimeFigureOut">
               <a:rPr lang="en-AU" smtClean="0"/>
-              <a:t>13/04/2026</a:t>
+              <a:t>14/04/2026</a:t>
             </a:fld>
             <a:endParaRPr lang="en-AU"/>
           </a:p>
@@ -21733,7 +21739,7 @@
           <a:p>
             <a:fld id="{830D4AAE-87F1-49BA-A98E-415997C9383F}" type="datetimeFigureOut">
               <a:rPr lang="en-AU" smtClean="0"/>
-              <a:t>13/04/2026</a:t>
+              <a:t>14/04/2026</a:t>
             </a:fld>
             <a:endParaRPr lang="en-AU"/>
           </a:p>
@@ -22022,7 +22028,7 @@
           <a:p>
             <a:fld id="{830D4AAE-87F1-49BA-A98E-415997C9383F}" type="datetimeFigureOut">
               <a:rPr lang="en-AU" smtClean="0"/>
-              <a:t>13/04/2026</a:t>
+              <a:t>14/04/2026</a:t>
             </a:fld>
             <a:endParaRPr lang="en-AU"/>
           </a:p>
@@ -22265,7 +22271,7 @@
           <a:p>
             <a:fld id="{830D4AAE-87F1-49BA-A98E-415997C9383F}" type="datetimeFigureOut">
               <a:rPr lang="en-AU" smtClean="0"/>
-              <a:t>13/04/2026</a:t>
+              <a:t>14/04/2026</a:t>
             </a:fld>
             <a:endParaRPr lang="en-AU"/>
           </a:p>
@@ -50663,6 +50669,551 @@
 </p:sld>
 </file>
 
+<file path=ppt/slides/slide4.xml><?xml version="1.0" encoding="utf-8"?>
+<p:sld xmlns:a="http://schemas.openxmlformats.org/drawingml/2006/main" xmlns:r="http://schemas.openxmlformats.org/officeDocument/2006/relationships" xmlns:p="http://schemas.openxmlformats.org/presentationml/2006/main">
+  <p:cSld>
+    <p:spTree>
+      <p:nvGrpSpPr>
+        <p:cNvPr id="1" name=""/>
+        <p:cNvGrpSpPr/>
+        <p:nvPr/>
+      </p:nvGrpSpPr>
+      <p:grpSpPr>
+        <a:xfrm>
+          <a:off x="0" y="0"/>
+          <a:ext cx="0" cy="0"/>
+          <a:chOff x="0" y="0"/>
+          <a:chExt cx="0" cy="0"/>
+        </a:xfrm>
+      </p:grpSpPr>
+      <p:graphicFrame>
+        <p:nvGraphicFramePr>
+          <p:cNvPr id="4" name="Table 3">
+            <a:extLst>
+              <a:ext uri="{FF2B5EF4-FFF2-40B4-BE49-F238E27FC236}">
+                <a16:creationId xmlns:a16="http://schemas.microsoft.com/office/drawing/2014/main" id="{B8C3D3DD-8CC7-8272-0078-13777989A861}"/>
+              </a:ext>
+            </a:extLst>
+          </p:cNvPr>
+          <p:cNvGraphicFramePr>
+            <a:graphicFrameLocks noGrp="1"/>
+          </p:cNvGraphicFramePr>
+          <p:nvPr>
+            <p:extLst>
+              <p:ext uri="{D42A27DB-BD31-4B8C-83A1-F6EECF244321}">
+                <p14:modId xmlns:p14="http://schemas.microsoft.com/office/powerpoint/2010/main" val="2891846755"/>
+              </p:ext>
+            </p:extLst>
+          </p:nvPr>
+        </p:nvGraphicFramePr>
+        <p:xfrm>
+          <a:off x="1400905" y="1453008"/>
+          <a:ext cx="9677403" cy="3951984"/>
+        </p:xfrm>
+        <a:graphic>
+          <a:graphicData uri="http://schemas.openxmlformats.org/drawingml/2006/table">
+            <a:tbl>
+              <a:tblPr firstRow="1" bandRow="1">
+                <a:tableStyleId>{5C22544A-7EE6-4342-B048-85BDC9FD1C3A}</a:tableStyleId>
+              </a:tblPr>
+              <a:tblGrid>
+                <a:gridCol w="2259271">
+                  <a:extLst>
+                    <a:ext uri="{9D8B030D-6E8A-4147-A177-3AD203B41FA5}">
+                      <a16:colId xmlns:a16="http://schemas.microsoft.com/office/drawing/2014/main" val="3539826412"/>
+                    </a:ext>
+                  </a:extLst>
+                </a:gridCol>
+                <a:gridCol w="2186779">
+                  <a:extLst>
+                    <a:ext uri="{9D8B030D-6E8A-4147-A177-3AD203B41FA5}">
+                      <a16:colId xmlns:a16="http://schemas.microsoft.com/office/drawing/2014/main" val="1863496724"/>
+                    </a:ext>
+                  </a:extLst>
+                </a:gridCol>
+                <a:gridCol w="2017636">
+                  <a:extLst>
+                    <a:ext uri="{9D8B030D-6E8A-4147-A177-3AD203B41FA5}">
+                      <a16:colId xmlns:a16="http://schemas.microsoft.com/office/drawing/2014/main" val="299769321"/>
+                    </a:ext>
+                  </a:extLst>
+                </a:gridCol>
+                <a:gridCol w="1695578">
+                  <a:extLst>
+                    <a:ext uri="{9D8B030D-6E8A-4147-A177-3AD203B41FA5}">
+                      <a16:colId xmlns:a16="http://schemas.microsoft.com/office/drawing/2014/main" val="3776062356"/>
+                    </a:ext>
+                  </a:extLst>
+                </a:gridCol>
+                <a:gridCol w="1518139">
+                  <a:extLst>
+                    <a:ext uri="{9D8B030D-6E8A-4147-A177-3AD203B41FA5}">
+                      <a16:colId xmlns:a16="http://schemas.microsoft.com/office/drawing/2014/main" val="3835133573"/>
+                    </a:ext>
+                  </a:extLst>
+                </a:gridCol>
+              </a:tblGrid>
+              <a:tr h="658664">
+                <a:tc>
+                  <a:txBody>
+                    <a:bodyPr/>
+                    <a:lstStyle/>
+                    <a:p>
+                      <a:r>
+                        <a:rPr lang="en-AU" dirty="0"/>
+                        <a:t>Nesting layer</a:t>
+                      </a:r>
+                    </a:p>
+                  </a:txBody>
+                  <a:tcPr/>
+                </a:tc>
+                <a:tc>
+                  <a:txBody>
+                    <a:bodyPr/>
+                    <a:lstStyle/>
+                    <a:p>
+                      <a:r>
+                        <a:rPr lang="en-AU" dirty="0"/>
+                        <a:t>Oleg</a:t>
+                      </a:r>
+                    </a:p>
+                  </a:txBody>
+                  <a:tcPr/>
+                </a:tc>
+                <a:tc>
+                  <a:txBody>
+                    <a:bodyPr/>
+                    <a:lstStyle/>
+                    <a:p>
+                      <a:r>
+                        <a:rPr lang="en-AU" dirty="0"/>
+                        <a:t>Nigel (ITRUSST)</a:t>
+                      </a:r>
+                    </a:p>
+                  </a:txBody>
+                  <a:tcPr/>
+                </a:tc>
+                <a:tc>
+                  <a:txBody>
+                    <a:bodyPr/>
+                    <a:lstStyle/>
+                    <a:p>
+                      <a:endParaRPr lang="en-AU"/>
+                    </a:p>
+                  </a:txBody>
+                  <a:tcPr/>
+                </a:tc>
+                <a:tc>
+                  <a:txBody>
+                    <a:bodyPr/>
+                    <a:lstStyle/>
+                    <a:p>
+                      <a:endParaRPr lang="en-AU"/>
+                    </a:p>
+                  </a:txBody>
+                  <a:tcPr/>
+                </a:tc>
+                <a:extLst>
+                  <a:ext uri="{0D108BD9-81ED-4DB2-BD59-A6C34878D82A}">
+                    <a16:rowId xmlns:a16="http://schemas.microsoft.com/office/drawing/2014/main" val="2955893253"/>
+                  </a:ext>
+                </a:extLst>
+              </a:tr>
+              <a:tr h="658664">
+                <a:tc>
+                  <a:txBody>
+                    <a:bodyPr/>
+                    <a:lstStyle/>
+                    <a:p>
+                      <a:r>
+                        <a:rPr lang="en-AU" dirty="0"/>
+                        <a:t>Layer -1</a:t>
+                      </a:r>
+                    </a:p>
+                  </a:txBody>
+                  <a:tcPr/>
+                </a:tc>
+                <a:tc>
+                  <a:txBody>
+                    <a:bodyPr/>
+                    <a:lstStyle/>
+                    <a:p>
+                      <a:r>
+                        <a:rPr lang="en-AU" dirty="0"/>
+                        <a:t>Pulse</a:t>
+                      </a:r>
+                    </a:p>
+                  </a:txBody>
+                  <a:tcPr/>
+                </a:tc>
+                <a:tc>
+                  <a:txBody>
+                    <a:bodyPr/>
+                    <a:lstStyle/>
+                    <a:p>
+                      <a:r>
+                        <a:rPr lang="en-AU" dirty="0"/>
+                        <a:t>Pulse</a:t>
+                      </a:r>
+                    </a:p>
+                  </a:txBody>
+                  <a:tcPr/>
+                </a:tc>
+                <a:tc>
+                  <a:txBody>
+                    <a:bodyPr/>
+                    <a:lstStyle/>
+                    <a:p>
+                      <a:endParaRPr lang="en-AU"/>
+                    </a:p>
+                  </a:txBody>
+                  <a:tcPr/>
+                </a:tc>
+                <a:tc>
+                  <a:txBody>
+                    <a:bodyPr/>
+                    <a:lstStyle/>
+                    <a:p>
+                      <a:endParaRPr lang="en-AU"/>
+                    </a:p>
+                  </a:txBody>
+                  <a:tcPr/>
+                </a:tc>
+                <a:extLst>
+                  <a:ext uri="{0D108BD9-81ED-4DB2-BD59-A6C34878D82A}">
+                    <a16:rowId xmlns:a16="http://schemas.microsoft.com/office/drawing/2014/main" val="139951084"/>
+                  </a:ext>
+                </a:extLst>
+              </a:tr>
+              <a:tr h="658664">
+                <a:tc>
+                  <a:txBody>
+                    <a:bodyPr/>
+                    <a:lstStyle/>
+                    <a:p>
+                      <a:r>
+                        <a:rPr lang="en-AU" dirty="0"/>
+                        <a:t>Layer 0</a:t>
+                      </a:r>
+                    </a:p>
+                    <a:p>
+                      <a:r>
+                        <a:rPr lang="en-AU" dirty="0"/>
+                        <a:t>Layer 0.5 (optional)</a:t>
+                      </a:r>
+                    </a:p>
+                  </a:txBody>
+                  <a:tcPr/>
+                </a:tc>
+                <a:tc>
+                  <a:txBody>
+                    <a:bodyPr/>
+                    <a:lstStyle/>
+                    <a:p>
+                      <a:r>
+                        <a:rPr lang="en-AU" dirty="0"/>
+                        <a:t>Stimulus (instance)</a:t>
+                      </a:r>
+                    </a:p>
+                    <a:p>
+                      <a:r>
+                        <a:rPr lang="en-AU" dirty="0"/>
+                        <a:t>Burst</a:t>
+                      </a:r>
+                    </a:p>
+                  </a:txBody>
+                  <a:tcPr/>
+                </a:tc>
+                <a:tc>
+                  <a:txBody>
+                    <a:bodyPr/>
+                    <a:lstStyle/>
+                    <a:p>
+                      <a:r>
+                        <a:rPr lang="en-AU" dirty="0"/>
+                        <a:t>Pulse train</a:t>
+                      </a:r>
+                    </a:p>
+                  </a:txBody>
+                  <a:tcPr/>
+                </a:tc>
+                <a:tc>
+                  <a:txBody>
+                    <a:bodyPr/>
+                    <a:lstStyle/>
+                    <a:p>
+                      <a:endParaRPr lang="en-AU"/>
+                    </a:p>
+                  </a:txBody>
+                  <a:tcPr/>
+                </a:tc>
+                <a:tc>
+                  <a:txBody>
+                    <a:bodyPr/>
+                    <a:lstStyle/>
+                    <a:p>
+                      <a:endParaRPr lang="en-AU"/>
+                    </a:p>
+                  </a:txBody>
+                  <a:tcPr/>
+                </a:tc>
+                <a:extLst>
+                  <a:ext uri="{0D108BD9-81ED-4DB2-BD59-A6C34878D82A}">
+                    <a16:rowId xmlns:a16="http://schemas.microsoft.com/office/drawing/2014/main" val="92929540"/>
+                  </a:ext>
+                </a:extLst>
+              </a:tr>
+              <a:tr h="658664">
+                <a:tc>
+                  <a:txBody>
+                    <a:bodyPr/>
+                    <a:lstStyle/>
+                    <a:p>
+                      <a:r>
+                        <a:rPr lang="en-AU" dirty="0"/>
+                        <a:t>Layer 1</a:t>
+                      </a:r>
+                    </a:p>
+                  </a:txBody>
+                  <a:tcPr/>
+                </a:tc>
+                <a:tc>
+                  <a:txBody>
+                    <a:bodyPr/>
+                    <a:lstStyle/>
+                    <a:p>
+                      <a:r>
+                        <a:rPr lang="en-AU" dirty="0"/>
+                        <a:t>Train</a:t>
+                      </a:r>
+                    </a:p>
+                  </a:txBody>
+                  <a:tcPr/>
+                </a:tc>
+                <a:tc>
+                  <a:txBody>
+                    <a:bodyPr/>
+                    <a:lstStyle/>
+                    <a:p>
+                      <a:r>
+                        <a:rPr lang="en-AU" dirty="0"/>
+                        <a:t>Pulse train repeat</a:t>
+                      </a:r>
+                    </a:p>
+                  </a:txBody>
+                  <a:tcPr/>
+                </a:tc>
+                <a:tc>
+                  <a:txBody>
+                    <a:bodyPr/>
+                    <a:lstStyle/>
+                    <a:p>
+                      <a:endParaRPr lang="en-AU"/>
+                    </a:p>
+                  </a:txBody>
+                  <a:tcPr/>
+                </a:tc>
+                <a:tc>
+                  <a:txBody>
+                    <a:bodyPr/>
+                    <a:lstStyle/>
+                    <a:p>
+                      <a:endParaRPr lang="en-AU"/>
+                    </a:p>
+                  </a:txBody>
+                  <a:tcPr/>
+                </a:tc>
+                <a:extLst>
+                  <a:ext uri="{0D108BD9-81ED-4DB2-BD59-A6C34878D82A}">
+                    <a16:rowId xmlns:a16="http://schemas.microsoft.com/office/drawing/2014/main" val="2479919590"/>
+                  </a:ext>
+                </a:extLst>
+              </a:tr>
+              <a:tr h="658664">
+                <a:tc>
+                  <a:txBody>
+                    <a:bodyPr/>
+                    <a:lstStyle/>
+                    <a:p>
+                      <a:r>
+                        <a:rPr lang="en-AU" dirty="0"/>
+                        <a:t>Layer 2</a:t>
+                      </a:r>
+                    </a:p>
+                  </a:txBody>
+                  <a:tcPr/>
+                </a:tc>
+                <a:tc>
+                  <a:txBody>
+                    <a:bodyPr/>
+                    <a:lstStyle/>
+                    <a:p>
+                      <a:r>
+                        <a:rPr lang="en-AU" dirty="0"/>
+                        <a:t>Sequence</a:t>
+                      </a:r>
+                    </a:p>
+                  </a:txBody>
+                  <a:tcPr/>
+                </a:tc>
+                <a:tc>
+                  <a:txBody>
+                    <a:bodyPr/>
+                    <a:lstStyle/>
+                    <a:p>
+                      <a:r>
+                        <a:rPr lang="en-AU" dirty="0"/>
+                        <a:t>Repeat 2</a:t>
+                      </a:r>
+                    </a:p>
+                  </a:txBody>
+                  <a:tcPr/>
+                </a:tc>
+                <a:tc>
+                  <a:txBody>
+                    <a:bodyPr/>
+                    <a:lstStyle/>
+                    <a:p>
+                      <a:endParaRPr lang="en-AU"/>
+                    </a:p>
+                  </a:txBody>
+                  <a:tcPr/>
+                </a:tc>
+                <a:tc>
+                  <a:txBody>
+                    <a:bodyPr/>
+                    <a:lstStyle/>
+                    <a:p>
+                      <a:endParaRPr lang="en-AU"/>
+                    </a:p>
+                  </a:txBody>
+                  <a:tcPr/>
+                </a:tc>
+                <a:extLst>
+                  <a:ext uri="{0D108BD9-81ED-4DB2-BD59-A6C34878D82A}">
+                    <a16:rowId xmlns:a16="http://schemas.microsoft.com/office/drawing/2014/main" val="2408620604"/>
+                  </a:ext>
+                </a:extLst>
+              </a:tr>
+              <a:tr h="658664">
+                <a:tc>
+                  <a:txBody>
+                    <a:bodyPr/>
+                    <a:lstStyle/>
+                    <a:p>
+                      <a:r>
+                        <a:rPr lang="en-AU" dirty="0"/>
+                        <a:t>Layer 3</a:t>
+                      </a:r>
+                    </a:p>
+                  </a:txBody>
+                  <a:tcPr/>
+                </a:tc>
+                <a:tc>
+                  <a:txBody>
+                    <a:bodyPr/>
+                    <a:lstStyle/>
+                    <a:p>
+                      <a:r>
+                        <a:rPr lang="en-AU" dirty="0"/>
+                        <a:t>Meta-protocol</a:t>
+                      </a:r>
+                    </a:p>
+                  </a:txBody>
+                  <a:tcPr/>
+                </a:tc>
+                <a:tc>
+                  <a:txBody>
+                    <a:bodyPr/>
+                    <a:lstStyle/>
+                    <a:p>
+                      <a:r>
+                        <a:rPr lang="en-AU" dirty="0"/>
+                        <a:t>Undefined (could use repeat 3)</a:t>
+                      </a:r>
+                    </a:p>
+                  </a:txBody>
+                  <a:tcPr/>
+                </a:tc>
+                <a:tc>
+                  <a:txBody>
+                    <a:bodyPr/>
+                    <a:lstStyle/>
+                    <a:p>
+                      <a:endParaRPr lang="en-AU"/>
+                    </a:p>
+                  </a:txBody>
+                  <a:tcPr/>
+                </a:tc>
+                <a:tc>
+                  <a:txBody>
+                    <a:bodyPr/>
+                    <a:lstStyle/>
+                    <a:p>
+                      <a:endParaRPr lang="en-AU" dirty="0"/>
+                    </a:p>
+                  </a:txBody>
+                  <a:tcPr/>
+                </a:tc>
+                <a:extLst>
+                  <a:ext uri="{0D108BD9-81ED-4DB2-BD59-A6C34878D82A}">
+                    <a16:rowId xmlns:a16="http://schemas.microsoft.com/office/drawing/2014/main" val="2952362299"/>
+                  </a:ext>
+                </a:extLst>
+              </a:tr>
+            </a:tbl>
+          </a:graphicData>
+        </a:graphic>
+      </p:graphicFrame>
+      <p:sp>
+        <p:nvSpPr>
+          <p:cNvPr id="5" name="TextBox 4">
+            <a:extLst>
+              <a:ext uri="{FF2B5EF4-FFF2-40B4-BE49-F238E27FC236}">
+                <a16:creationId xmlns:a16="http://schemas.microsoft.com/office/drawing/2014/main" id="{22BC2000-A32A-4197-EC2F-32975667BD08}"/>
+              </a:ext>
+            </a:extLst>
+          </p:cNvPr>
+          <p:cNvSpPr txBox="1"/>
+          <p:nvPr/>
+        </p:nvSpPr>
+        <p:spPr>
+          <a:xfrm>
+            <a:off x="3766037" y="351715"/>
+            <a:ext cx="4659923" cy="461665"/>
+          </a:xfrm>
+          <a:prstGeom prst="rect">
+            <a:avLst/>
+          </a:prstGeom>
+          <a:noFill/>
+        </p:spPr>
+        <p:txBody>
+          <a:bodyPr wrap="square" rtlCol="0">
+            <a:spAutoFit/>
+          </a:bodyPr>
+          <a:lstStyle/>
+          <a:p>
+            <a:pPr algn="ctr"/>
+            <a:r>
+              <a:rPr lang="en-AU" sz="2400" dirty="0"/>
+              <a:t>Nomenclature for timings</a:t>
+            </a:r>
+          </a:p>
+        </p:txBody>
+      </p:sp>
+    </p:spTree>
+    <p:extLst>
+      <p:ext uri="{BB962C8B-B14F-4D97-AF65-F5344CB8AC3E}">
+        <p14:creationId xmlns:p14="http://schemas.microsoft.com/office/powerpoint/2010/main" val="2176270820"/>
+      </p:ext>
+    </p:extLst>
+  </p:cSld>
+  <p:clrMapOvr>
+    <a:masterClrMapping/>
+  </p:clrMapOvr>
+</p:sld>
+</file>
+
 <file path=ppt/theme/theme1.xml><?xml version="1.0" encoding="utf-8"?>
 <a:theme xmlns:a="http://schemas.openxmlformats.org/drawingml/2006/main" name="Office Theme">
   <a:themeElements>

--- a/parameter-visualisation/parameter_visualisation.pptx
+++ b/parameter-visualisation/parameter_visualisation.pptx
@@ -6,9 +6,14 @@
   </p:sldMasterIdLst>
   <p:sldIdLst>
     <p:sldId id="256" r:id="rId2"/>
-    <p:sldId id="258" r:id="rId3"/>
-    <p:sldId id="257" r:id="rId4"/>
-    <p:sldId id="259" r:id="rId5"/>
+    <p:sldId id="260" r:id="rId3"/>
+    <p:sldId id="258" r:id="rId4"/>
+    <p:sldId id="257" r:id="rId5"/>
+    <p:sldId id="262" r:id="rId6"/>
+    <p:sldId id="261" r:id="rId7"/>
+    <p:sldId id="263" r:id="rId8"/>
+    <p:sldId id="264" r:id="rId9"/>
+    <p:sldId id="259" r:id="rId10"/>
   </p:sldIdLst>
   <p:sldSz cx="12192000" cy="6858000"/>
   <p:notesSz cx="6858000" cy="9144000"/>
@@ -19602,7 +19607,7 @@
           <a:p>
             <a:fld id="{830D4AAE-87F1-49BA-A98E-415997C9383F}" type="datetimeFigureOut">
               <a:rPr lang="en-AU" smtClean="0"/>
-              <a:t>14/04/2026</a:t>
+              <a:t>20/04/2026</a:t>
             </a:fld>
             <a:endParaRPr lang="en-AU"/>
           </a:p>
@@ -19802,7 +19807,7 @@
           <a:p>
             <a:fld id="{830D4AAE-87F1-49BA-A98E-415997C9383F}" type="datetimeFigureOut">
               <a:rPr lang="en-AU" smtClean="0"/>
-              <a:t>14/04/2026</a:t>
+              <a:t>20/04/2026</a:t>
             </a:fld>
             <a:endParaRPr lang="en-AU"/>
           </a:p>
@@ -20012,7 +20017,7 @@
           <a:p>
             <a:fld id="{830D4AAE-87F1-49BA-A98E-415997C9383F}" type="datetimeFigureOut">
               <a:rPr lang="en-AU" smtClean="0"/>
-              <a:t>14/04/2026</a:t>
+              <a:t>20/04/2026</a:t>
             </a:fld>
             <a:endParaRPr lang="en-AU"/>
           </a:p>
@@ -20212,7 +20217,7 @@
           <a:p>
             <a:fld id="{830D4AAE-87F1-49BA-A98E-415997C9383F}" type="datetimeFigureOut">
               <a:rPr lang="en-AU" smtClean="0"/>
-              <a:t>14/04/2026</a:t>
+              <a:t>20/04/2026</a:t>
             </a:fld>
             <a:endParaRPr lang="en-AU"/>
           </a:p>
@@ -20488,7 +20493,7 @@
           <a:p>
             <a:fld id="{830D4AAE-87F1-49BA-A98E-415997C9383F}" type="datetimeFigureOut">
               <a:rPr lang="en-AU" smtClean="0"/>
-              <a:t>14/04/2026</a:t>
+              <a:t>20/04/2026</a:t>
             </a:fld>
             <a:endParaRPr lang="en-AU"/>
           </a:p>
@@ -20756,7 +20761,7 @@
           <a:p>
             <a:fld id="{830D4AAE-87F1-49BA-A98E-415997C9383F}" type="datetimeFigureOut">
               <a:rPr lang="en-AU" smtClean="0"/>
-              <a:t>14/04/2026</a:t>
+              <a:t>20/04/2026</a:t>
             </a:fld>
             <a:endParaRPr lang="en-AU"/>
           </a:p>
@@ -21171,7 +21176,7 @@
           <a:p>
             <a:fld id="{830D4AAE-87F1-49BA-A98E-415997C9383F}" type="datetimeFigureOut">
               <a:rPr lang="en-AU" smtClean="0"/>
-              <a:t>14/04/2026</a:t>
+              <a:t>20/04/2026</a:t>
             </a:fld>
             <a:endParaRPr lang="en-AU"/>
           </a:p>
@@ -21313,7 +21318,7 @@
           <a:p>
             <a:fld id="{830D4AAE-87F1-49BA-A98E-415997C9383F}" type="datetimeFigureOut">
               <a:rPr lang="en-AU" smtClean="0"/>
-              <a:t>14/04/2026</a:t>
+              <a:t>20/04/2026</a:t>
             </a:fld>
             <a:endParaRPr lang="en-AU"/>
           </a:p>
@@ -21426,7 +21431,7 @@
           <a:p>
             <a:fld id="{830D4AAE-87F1-49BA-A98E-415997C9383F}" type="datetimeFigureOut">
               <a:rPr lang="en-AU" smtClean="0"/>
-              <a:t>14/04/2026</a:t>
+              <a:t>20/04/2026</a:t>
             </a:fld>
             <a:endParaRPr lang="en-AU"/>
           </a:p>
@@ -21739,7 +21744,7 @@
           <a:p>
             <a:fld id="{830D4AAE-87F1-49BA-A98E-415997C9383F}" type="datetimeFigureOut">
               <a:rPr lang="en-AU" smtClean="0"/>
-              <a:t>14/04/2026</a:t>
+              <a:t>20/04/2026</a:t>
             </a:fld>
             <a:endParaRPr lang="en-AU"/>
           </a:p>
@@ -22028,7 +22033,7 @@
           <a:p>
             <a:fld id="{830D4AAE-87F1-49BA-A98E-415997C9383F}" type="datetimeFigureOut">
               <a:rPr lang="en-AU" smtClean="0"/>
-              <a:t>14/04/2026</a:t>
+              <a:t>20/04/2026</a:t>
             </a:fld>
             <a:endParaRPr lang="en-AU"/>
           </a:p>
@@ -22271,7 +22276,7 @@
           <a:p>
             <a:fld id="{830D4AAE-87F1-49BA-A98E-415997C9383F}" type="datetimeFigureOut">
               <a:rPr lang="en-AU" smtClean="0"/>
-              <a:t>14/04/2026</a:t>
+              <a:t>20/04/2026</a:t>
             </a:fld>
             <a:endParaRPr lang="en-AU"/>
           </a:p>
@@ -29454,6 +29459,41 @@
           </a:p>
         </p:txBody>
       </p:sp>
+      <p:sp>
+        <p:nvSpPr>
+          <p:cNvPr id="2" name="TextBox 1">
+            <a:extLst>
+              <a:ext uri="{FF2B5EF4-FFF2-40B4-BE49-F238E27FC236}">
+                <a16:creationId xmlns:a16="http://schemas.microsoft.com/office/drawing/2014/main" id="{15437974-E4B8-3F0C-706D-9C9B6D01F458}"/>
+              </a:ext>
+            </a:extLst>
+          </p:cNvPr>
+          <p:cNvSpPr txBox="1"/>
+          <p:nvPr/>
+        </p:nvSpPr>
+        <p:spPr>
+          <a:xfrm>
+            <a:off x="6606999" y="3967671"/>
+            <a:ext cx="2548721" cy="276999"/>
+          </a:xfrm>
+          <a:prstGeom prst="rect">
+            <a:avLst/>
+          </a:prstGeom>
+          <a:noFill/>
+        </p:spPr>
+        <p:txBody>
+          <a:bodyPr wrap="square" rtlCol="0">
+            <a:spAutoFit/>
+          </a:bodyPr>
+          <a:lstStyle/>
+          <a:p>
+            <a:r>
+              <a:rPr lang="en-AU" sz="1200" dirty="0"/>
+              <a:t>See TUS for ITRUSST layer model</a:t>
+            </a:r>
+          </a:p>
+        </p:txBody>
+      </p:sp>
     </p:spTree>
     <p:extLst>
       <p:ext uri="{BB962C8B-B14F-4D97-AF65-F5344CB8AC3E}">
@@ -29468,6 +29508,6843 @@
 </file>
 
 <file path=ppt/slides/slide2.xml><?xml version="1.0" encoding="utf-8"?>
+<p:sld xmlns:a="http://schemas.openxmlformats.org/drawingml/2006/main" xmlns:r="http://schemas.openxmlformats.org/officeDocument/2006/relationships" xmlns:p="http://schemas.openxmlformats.org/presentationml/2006/main">
+  <p:cSld>
+    <p:spTree>
+      <p:nvGrpSpPr>
+        <p:cNvPr id="1" name="">
+          <a:extLst>
+            <a:ext uri="{FF2B5EF4-FFF2-40B4-BE49-F238E27FC236}">
+              <a16:creationId xmlns:a16="http://schemas.microsoft.com/office/drawing/2014/main" id="{E8F19460-3DD9-E7FC-FEA0-DFD217568F01}"/>
+            </a:ext>
+          </a:extLst>
+        </p:cNvPr>
+        <p:cNvGrpSpPr/>
+        <p:nvPr/>
+      </p:nvGrpSpPr>
+      <p:grpSpPr>
+        <a:xfrm>
+          <a:off x="0" y="0"/>
+          <a:ext cx="0" cy="0"/>
+          <a:chOff x="0" y="0"/>
+          <a:chExt cx="0" cy="0"/>
+        </a:xfrm>
+      </p:grpSpPr>
+      <p:grpSp>
+        <p:nvGrpSpPr>
+          <p:cNvPr id="23" name="Group 22">
+            <a:extLst>
+              <a:ext uri="{FF2B5EF4-FFF2-40B4-BE49-F238E27FC236}">
+                <a16:creationId xmlns:a16="http://schemas.microsoft.com/office/drawing/2014/main" id="{2995ACEA-585E-D3FA-D7ED-C8876D913523}"/>
+              </a:ext>
+            </a:extLst>
+          </p:cNvPr>
+          <p:cNvGrpSpPr/>
+          <p:nvPr/>
+        </p:nvGrpSpPr>
+        <p:grpSpPr>
+          <a:xfrm>
+            <a:off x="2782444" y="877210"/>
+            <a:ext cx="1447800" cy="912438"/>
+            <a:chOff x="1852246" y="2053498"/>
+            <a:chExt cx="1447800" cy="1279758"/>
+          </a:xfrm>
+        </p:grpSpPr>
+        <p:sp>
+          <p:nvSpPr>
+            <p:cNvPr id="12" name="Freeform: Shape 11">
+              <a:extLst>
+                <a:ext uri="{FF2B5EF4-FFF2-40B4-BE49-F238E27FC236}">
+                  <a16:creationId xmlns:a16="http://schemas.microsoft.com/office/drawing/2014/main" id="{F4793CF3-9FF4-99D5-2813-67761AB00EFC}"/>
+                </a:ext>
+              </a:extLst>
+            </p:cNvPr>
+            <p:cNvSpPr/>
+            <p:nvPr/>
+          </p:nvSpPr>
+          <p:spPr>
+            <a:xfrm flipV="1">
+              <a:off x="2403229" y="2053498"/>
+              <a:ext cx="160434" cy="642813"/>
+            </a:xfrm>
+            <a:custGeom>
+              <a:avLst/>
+              <a:gdLst>
+                <a:gd name="csX0" fmla="*/ 0 w 1406769"/>
+                <a:gd name="csY0" fmla="*/ 0 h 17584"/>
+                <a:gd name="csX1" fmla="*/ 580292 w 1406769"/>
+                <a:gd name="csY1" fmla="*/ 5861 h 17584"/>
+                <a:gd name="csX2" fmla="*/ 1406769 w 1406769"/>
+                <a:gd name="csY2" fmla="*/ 17584 h 17584"/>
+                <a:gd name="csX0" fmla="*/ 0 w 1406769"/>
+                <a:gd name="csY0" fmla="*/ 0 h 80411"/>
+                <a:gd name="csX1" fmla="*/ 674077 w 1406769"/>
+                <a:gd name="csY1" fmla="*/ 80255 h 80411"/>
+                <a:gd name="csX2" fmla="*/ 1406769 w 1406769"/>
+                <a:gd name="csY2" fmla="*/ 17584 h 80411"/>
+                <a:gd name="csX0" fmla="*/ 0 w 973015"/>
+                <a:gd name="csY0" fmla="*/ 801 h 81181"/>
+                <a:gd name="csX1" fmla="*/ 674077 w 973015"/>
+                <a:gd name="csY1" fmla="*/ 81056 h 81181"/>
+                <a:gd name="csX2" fmla="*/ 973015 w 973015"/>
+                <a:gd name="csY2" fmla="*/ 125 h 81181"/>
+                <a:gd name="csX0" fmla="*/ 0 w 973015"/>
+                <a:gd name="csY0" fmla="*/ 676 h 81191"/>
+                <a:gd name="csX1" fmla="*/ 674077 w 973015"/>
+                <a:gd name="csY1" fmla="*/ 80931 h 81191"/>
+                <a:gd name="csX2" fmla="*/ 973015 w 973015"/>
+                <a:gd name="csY2" fmla="*/ 0 h 81191"/>
+                <a:gd name="csX0" fmla="*/ 0 w 533400"/>
+                <a:gd name="csY0" fmla="*/ 676 h 81191"/>
+                <a:gd name="csX1" fmla="*/ 234462 w 533400"/>
+                <a:gd name="csY1" fmla="*/ 80931 h 81191"/>
+                <a:gd name="csX2" fmla="*/ 533400 w 533400"/>
+                <a:gd name="csY2" fmla="*/ 0 h 81191"/>
+                <a:gd name="csX0" fmla="*/ 0 w 533400"/>
+                <a:gd name="csY0" fmla="*/ 676 h 81191"/>
+                <a:gd name="csX1" fmla="*/ 234462 w 533400"/>
+                <a:gd name="csY1" fmla="*/ 80931 h 81191"/>
+                <a:gd name="csX2" fmla="*/ 533400 w 533400"/>
+                <a:gd name="csY2" fmla="*/ 0 h 81191"/>
+                <a:gd name="csX0" fmla="*/ 0 w 533400"/>
+                <a:gd name="csY0" fmla="*/ 676 h 81191"/>
+                <a:gd name="csX1" fmla="*/ 234462 w 533400"/>
+                <a:gd name="csY1" fmla="*/ 80931 h 81191"/>
+                <a:gd name="csX2" fmla="*/ 533400 w 533400"/>
+                <a:gd name="csY2" fmla="*/ 0 h 81191"/>
+                <a:gd name="csX0" fmla="*/ 0 w 533400"/>
+                <a:gd name="csY0" fmla="*/ 676 h 80931"/>
+                <a:gd name="csX1" fmla="*/ 234462 w 533400"/>
+                <a:gd name="csY1" fmla="*/ 80931 h 80931"/>
+                <a:gd name="csX2" fmla="*/ 533400 w 533400"/>
+                <a:gd name="csY2" fmla="*/ 0 h 80931"/>
+                <a:gd name="csX0" fmla="*/ 0 w 533400"/>
+                <a:gd name="csY0" fmla="*/ 676 h 80931"/>
+                <a:gd name="csX1" fmla="*/ 234462 w 533400"/>
+                <a:gd name="csY1" fmla="*/ 80931 h 80931"/>
+                <a:gd name="csX2" fmla="*/ 533400 w 533400"/>
+                <a:gd name="csY2" fmla="*/ 0 h 80931"/>
+                <a:gd name="csX0" fmla="*/ 0 w 533400"/>
+                <a:gd name="csY0" fmla="*/ 676 h 80931"/>
+                <a:gd name="csX1" fmla="*/ 234462 w 533400"/>
+                <a:gd name="csY1" fmla="*/ 80931 h 80931"/>
+                <a:gd name="csX2" fmla="*/ 533400 w 533400"/>
+                <a:gd name="csY2" fmla="*/ 0 h 80931"/>
+                <a:gd name="csX0" fmla="*/ 0 w 533400"/>
+                <a:gd name="csY0" fmla="*/ 676 h 80931"/>
+                <a:gd name="csX1" fmla="*/ 234462 w 533400"/>
+                <a:gd name="csY1" fmla="*/ 80931 h 80931"/>
+                <a:gd name="csX2" fmla="*/ 533400 w 533400"/>
+                <a:gd name="csY2" fmla="*/ 0 h 80931"/>
+                <a:gd name="csX0" fmla="*/ 0 w 387093"/>
+                <a:gd name="csY0" fmla="*/ 4058 h 84313"/>
+                <a:gd name="csX1" fmla="*/ 234462 w 387093"/>
+                <a:gd name="csY1" fmla="*/ 84313 h 84313"/>
+                <a:gd name="csX2" fmla="*/ 381000 w 387093"/>
+                <a:gd name="csY2" fmla="*/ 0 h 84313"/>
+                <a:gd name="csX0" fmla="*/ 0 w 397865"/>
+                <a:gd name="csY0" fmla="*/ 4058 h 84313"/>
+                <a:gd name="csX1" fmla="*/ 234462 w 397865"/>
+                <a:gd name="csY1" fmla="*/ 84313 h 84313"/>
+                <a:gd name="csX2" fmla="*/ 381000 w 397865"/>
+                <a:gd name="csY2" fmla="*/ 0 h 84313"/>
+                <a:gd name="csX0" fmla="*/ 71 w 263121"/>
+                <a:gd name="csY0" fmla="*/ 0 h 85665"/>
+                <a:gd name="csX1" fmla="*/ 99718 w 263121"/>
+                <a:gd name="csY1" fmla="*/ 85665 h 85665"/>
+                <a:gd name="csX2" fmla="*/ 246256 w 263121"/>
+                <a:gd name="csY2" fmla="*/ 1352 h 85665"/>
+                <a:gd name="csX0" fmla="*/ 18318 w 281368"/>
+                <a:gd name="csY0" fmla="*/ 0 h 85665"/>
+                <a:gd name="csX1" fmla="*/ 117965 w 281368"/>
+                <a:gd name="csY1" fmla="*/ 85665 h 85665"/>
+                <a:gd name="csX2" fmla="*/ 264503 w 281368"/>
+                <a:gd name="csY2" fmla="*/ 1352 h 85665"/>
+                <a:gd name="csX0" fmla="*/ 18318 w 302294"/>
+                <a:gd name="csY0" fmla="*/ 0 h 85665"/>
+                <a:gd name="csX1" fmla="*/ 117965 w 302294"/>
+                <a:gd name="csY1" fmla="*/ 85665 h 85665"/>
+                <a:gd name="csX2" fmla="*/ 264503 w 302294"/>
+                <a:gd name="csY2" fmla="*/ 1352 h 85665"/>
+                <a:gd name="csX0" fmla="*/ 18318 w 276972"/>
+                <a:gd name="csY0" fmla="*/ 0 h 85665"/>
+                <a:gd name="csX1" fmla="*/ 117965 w 276972"/>
+                <a:gd name="csY1" fmla="*/ 85665 h 85665"/>
+                <a:gd name="csX2" fmla="*/ 264503 w 276972"/>
+                <a:gd name="csY2" fmla="*/ 1352 h 85665"/>
+                <a:gd name="csX0" fmla="*/ 18318 w 264503"/>
+                <a:gd name="csY0" fmla="*/ 0 h 85665"/>
+                <a:gd name="csX1" fmla="*/ 117965 w 264503"/>
+                <a:gd name="csY1" fmla="*/ 85665 h 85665"/>
+                <a:gd name="csX2" fmla="*/ 264503 w 264503"/>
+                <a:gd name="csY2" fmla="*/ 1352 h 85665"/>
+                <a:gd name="csX0" fmla="*/ 0 w 246185"/>
+                <a:gd name="csY0" fmla="*/ 0 h 85665"/>
+                <a:gd name="csX1" fmla="*/ 99647 w 246185"/>
+                <a:gd name="csY1" fmla="*/ 85665 h 85665"/>
+                <a:gd name="csX2" fmla="*/ 246185 w 246185"/>
+                <a:gd name="csY2" fmla="*/ 1352 h 85665"/>
+                <a:gd name="csX0" fmla="*/ 0 w 168395"/>
+                <a:gd name="csY0" fmla="*/ 677 h 86342"/>
+                <a:gd name="csX1" fmla="*/ 99647 w 168395"/>
+                <a:gd name="csY1" fmla="*/ 86342 h 86342"/>
+                <a:gd name="csX2" fmla="*/ 158262 w 168395"/>
+                <a:gd name="csY2" fmla="*/ 0 h 86342"/>
+                <a:gd name="csX0" fmla="*/ 0 w 158262"/>
+                <a:gd name="csY0" fmla="*/ 677 h 86342"/>
+                <a:gd name="csX1" fmla="*/ 99647 w 158262"/>
+                <a:gd name="csY1" fmla="*/ 86342 h 86342"/>
+                <a:gd name="csX2" fmla="*/ 158262 w 158262"/>
+                <a:gd name="csY2" fmla="*/ 0 h 86342"/>
+                <a:gd name="csX0" fmla="*/ 0 w 158262"/>
+                <a:gd name="csY0" fmla="*/ 677 h 74168"/>
+                <a:gd name="csX1" fmla="*/ 99647 w 158262"/>
+                <a:gd name="csY1" fmla="*/ 74168 h 74168"/>
+                <a:gd name="csX2" fmla="*/ 158262 w 158262"/>
+                <a:gd name="csY2" fmla="*/ 0 h 74168"/>
+                <a:gd name="csX0" fmla="*/ 0 w 158262"/>
+                <a:gd name="csY0" fmla="*/ 677 h 74168"/>
+                <a:gd name="csX1" fmla="*/ 99647 w 158262"/>
+                <a:gd name="csY1" fmla="*/ 74168 h 74168"/>
+                <a:gd name="csX2" fmla="*/ 158262 w 158262"/>
+                <a:gd name="csY2" fmla="*/ 0 h 74168"/>
+                <a:gd name="csX0" fmla="*/ 0 w 158262"/>
+                <a:gd name="csY0" fmla="*/ 677 h 74168"/>
+                <a:gd name="csX1" fmla="*/ 99647 w 158262"/>
+                <a:gd name="csY1" fmla="*/ 74168 h 74168"/>
+                <a:gd name="csX2" fmla="*/ 158262 w 158262"/>
+                <a:gd name="csY2" fmla="*/ 0 h 74168"/>
+                <a:gd name="csX0" fmla="*/ 0 w 160434"/>
+                <a:gd name="csY0" fmla="*/ 677 h 74168"/>
+                <a:gd name="csX1" fmla="*/ 99647 w 160434"/>
+                <a:gd name="csY1" fmla="*/ 74168 h 74168"/>
+                <a:gd name="csX2" fmla="*/ 158262 w 160434"/>
+                <a:gd name="csY2" fmla="*/ 0 h 74168"/>
+              </a:gdLst>
+              <a:ahLst/>
+              <a:cxnLst>
+                <a:cxn ang="0">
+                  <a:pos x="csX0" y="csY0"/>
+                </a:cxn>
+                <a:cxn ang="0">
+                  <a:pos x="csX1" y="csY1"/>
+                </a:cxn>
+                <a:cxn ang="0">
+                  <a:pos x="csX2" y="csY2"/>
+                </a:cxn>
+              </a:cxnLst>
+              <a:rect l="l" t="t" r="r" b="b"/>
+              <a:pathLst>
+                <a:path w="160434" h="74168">
+                  <a:moveTo>
+                    <a:pt x="0" y="677"/>
+                  </a:moveTo>
+                  <a:cubicBezTo>
+                    <a:pt x="7816" y="51100"/>
+                    <a:pt x="-13676" y="60943"/>
+                    <a:pt x="99647" y="74168"/>
+                  </a:cubicBezTo>
+                  <a:cubicBezTo>
+                    <a:pt x="187570" y="59816"/>
+                    <a:pt x="152401" y="46139"/>
+                    <a:pt x="158262" y="0"/>
+                  </a:cubicBezTo>
+                </a:path>
+              </a:pathLst>
+            </a:custGeom>
+            <a:noFill/>
+          </p:spPr>
+          <p:style>
+            <a:lnRef idx="2">
+              <a:schemeClr val="accent1">
+                <a:shade val="15000"/>
+              </a:schemeClr>
+            </a:lnRef>
+            <a:fillRef idx="1">
+              <a:schemeClr val="accent1"/>
+            </a:fillRef>
+            <a:effectRef idx="0">
+              <a:schemeClr val="accent1"/>
+            </a:effectRef>
+            <a:fontRef idx="minor">
+              <a:schemeClr val="lt1"/>
+            </a:fontRef>
+          </p:style>
+          <p:txBody>
+            <a:bodyPr rtlCol="0" anchor="ctr"/>
+            <a:lstStyle/>
+            <a:p>
+              <a:pPr algn="ctr"/>
+              <a:endParaRPr lang="en-AU"/>
+            </a:p>
+          </p:txBody>
+        </p:sp>
+        <p:cxnSp>
+          <p:nvCxnSpPr>
+            <p:cNvPr id="17" name="Straight Connector 16">
+              <a:extLst>
+                <a:ext uri="{FF2B5EF4-FFF2-40B4-BE49-F238E27FC236}">
+                  <a16:creationId xmlns:a16="http://schemas.microsoft.com/office/drawing/2014/main" id="{B3644FF0-7FC6-7F2B-2D78-F95E6DD14E2C}"/>
+                </a:ext>
+              </a:extLst>
+            </p:cNvPr>
+            <p:cNvCxnSpPr>
+              <a:cxnSpLocks/>
+            </p:cNvCxnSpPr>
+            <p:nvPr/>
+          </p:nvCxnSpPr>
+          <p:spPr>
+            <a:xfrm>
+              <a:off x="1852246" y="2690440"/>
+              <a:ext cx="550983" cy="0"/>
+            </a:xfrm>
+            <a:prstGeom prst="line">
+              <a:avLst/>
+            </a:prstGeom>
+            <a:ln>
+              <a:solidFill>
+                <a:schemeClr val="tx1"/>
+              </a:solidFill>
+            </a:ln>
+          </p:spPr>
+          <p:style>
+            <a:lnRef idx="2">
+              <a:schemeClr val="accent1"/>
+            </a:lnRef>
+            <a:fillRef idx="0">
+              <a:schemeClr val="accent1"/>
+            </a:fillRef>
+            <a:effectRef idx="1">
+              <a:schemeClr val="accent1"/>
+            </a:effectRef>
+            <a:fontRef idx="minor">
+              <a:schemeClr val="tx1"/>
+            </a:fontRef>
+          </p:style>
+        </p:cxnSp>
+        <p:cxnSp>
+          <p:nvCxnSpPr>
+            <p:cNvPr id="19" name="Straight Connector 18">
+              <a:extLst>
+                <a:ext uri="{FF2B5EF4-FFF2-40B4-BE49-F238E27FC236}">
+                  <a16:creationId xmlns:a16="http://schemas.microsoft.com/office/drawing/2014/main" id="{D0154532-0412-A74C-92B2-83A5C981D776}"/>
+                </a:ext>
+              </a:extLst>
+            </p:cNvPr>
+            <p:cNvCxnSpPr>
+              <a:cxnSpLocks/>
+            </p:cNvCxnSpPr>
+            <p:nvPr/>
+          </p:nvCxnSpPr>
+          <p:spPr>
+            <a:xfrm>
+              <a:off x="2718235" y="2690440"/>
+              <a:ext cx="581811" cy="0"/>
+            </a:xfrm>
+            <a:prstGeom prst="line">
+              <a:avLst/>
+            </a:prstGeom>
+            <a:ln>
+              <a:solidFill>
+                <a:schemeClr val="tx2"/>
+              </a:solidFill>
+            </a:ln>
+          </p:spPr>
+          <p:style>
+            <a:lnRef idx="2">
+              <a:schemeClr val="accent1"/>
+            </a:lnRef>
+            <a:fillRef idx="0">
+              <a:schemeClr val="accent1"/>
+            </a:fillRef>
+            <a:effectRef idx="1">
+              <a:schemeClr val="accent1"/>
+            </a:effectRef>
+            <a:fontRef idx="minor">
+              <a:schemeClr val="tx1"/>
+            </a:fontRef>
+          </p:style>
+        </p:cxnSp>
+        <p:sp>
+          <p:nvSpPr>
+            <p:cNvPr id="20" name="Freeform: Shape 19">
+              <a:extLst>
+                <a:ext uri="{FF2B5EF4-FFF2-40B4-BE49-F238E27FC236}">
+                  <a16:creationId xmlns:a16="http://schemas.microsoft.com/office/drawing/2014/main" id="{CC8BAAFD-4A8F-2B66-C84D-EC4146F31AE5}"/>
+                </a:ext>
+              </a:extLst>
+            </p:cNvPr>
+            <p:cNvSpPr/>
+            <p:nvPr/>
+          </p:nvSpPr>
+          <p:spPr>
+            <a:xfrm rot="10800000" flipV="1">
+              <a:off x="2557801" y="2690443"/>
+              <a:ext cx="160434" cy="642813"/>
+            </a:xfrm>
+            <a:custGeom>
+              <a:avLst/>
+              <a:gdLst>
+                <a:gd name="csX0" fmla="*/ 0 w 1406769"/>
+                <a:gd name="csY0" fmla="*/ 0 h 17584"/>
+                <a:gd name="csX1" fmla="*/ 580292 w 1406769"/>
+                <a:gd name="csY1" fmla="*/ 5861 h 17584"/>
+                <a:gd name="csX2" fmla="*/ 1406769 w 1406769"/>
+                <a:gd name="csY2" fmla="*/ 17584 h 17584"/>
+                <a:gd name="csX0" fmla="*/ 0 w 1406769"/>
+                <a:gd name="csY0" fmla="*/ 0 h 80411"/>
+                <a:gd name="csX1" fmla="*/ 674077 w 1406769"/>
+                <a:gd name="csY1" fmla="*/ 80255 h 80411"/>
+                <a:gd name="csX2" fmla="*/ 1406769 w 1406769"/>
+                <a:gd name="csY2" fmla="*/ 17584 h 80411"/>
+                <a:gd name="csX0" fmla="*/ 0 w 973015"/>
+                <a:gd name="csY0" fmla="*/ 801 h 81181"/>
+                <a:gd name="csX1" fmla="*/ 674077 w 973015"/>
+                <a:gd name="csY1" fmla="*/ 81056 h 81181"/>
+                <a:gd name="csX2" fmla="*/ 973015 w 973015"/>
+                <a:gd name="csY2" fmla="*/ 125 h 81181"/>
+                <a:gd name="csX0" fmla="*/ 0 w 973015"/>
+                <a:gd name="csY0" fmla="*/ 676 h 81191"/>
+                <a:gd name="csX1" fmla="*/ 674077 w 973015"/>
+                <a:gd name="csY1" fmla="*/ 80931 h 81191"/>
+                <a:gd name="csX2" fmla="*/ 973015 w 973015"/>
+                <a:gd name="csY2" fmla="*/ 0 h 81191"/>
+                <a:gd name="csX0" fmla="*/ 0 w 533400"/>
+                <a:gd name="csY0" fmla="*/ 676 h 81191"/>
+                <a:gd name="csX1" fmla="*/ 234462 w 533400"/>
+                <a:gd name="csY1" fmla="*/ 80931 h 81191"/>
+                <a:gd name="csX2" fmla="*/ 533400 w 533400"/>
+                <a:gd name="csY2" fmla="*/ 0 h 81191"/>
+                <a:gd name="csX0" fmla="*/ 0 w 533400"/>
+                <a:gd name="csY0" fmla="*/ 676 h 81191"/>
+                <a:gd name="csX1" fmla="*/ 234462 w 533400"/>
+                <a:gd name="csY1" fmla="*/ 80931 h 81191"/>
+                <a:gd name="csX2" fmla="*/ 533400 w 533400"/>
+                <a:gd name="csY2" fmla="*/ 0 h 81191"/>
+                <a:gd name="csX0" fmla="*/ 0 w 533400"/>
+                <a:gd name="csY0" fmla="*/ 676 h 81191"/>
+                <a:gd name="csX1" fmla="*/ 234462 w 533400"/>
+                <a:gd name="csY1" fmla="*/ 80931 h 81191"/>
+                <a:gd name="csX2" fmla="*/ 533400 w 533400"/>
+                <a:gd name="csY2" fmla="*/ 0 h 81191"/>
+                <a:gd name="csX0" fmla="*/ 0 w 533400"/>
+                <a:gd name="csY0" fmla="*/ 676 h 80931"/>
+                <a:gd name="csX1" fmla="*/ 234462 w 533400"/>
+                <a:gd name="csY1" fmla="*/ 80931 h 80931"/>
+                <a:gd name="csX2" fmla="*/ 533400 w 533400"/>
+                <a:gd name="csY2" fmla="*/ 0 h 80931"/>
+                <a:gd name="csX0" fmla="*/ 0 w 533400"/>
+                <a:gd name="csY0" fmla="*/ 676 h 80931"/>
+                <a:gd name="csX1" fmla="*/ 234462 w 533400"/>
+                <a:gd name="csY1" fmla="*/ 80931 h 80931"/>
+                <a:gd name="csX2" fmla="*/ 533400 w 533400"/>
+                <a:gd name="csY2" fmla="*/ 0 h 80931"/>
+                <a:gd name="csX0" fmla="*/ 0 w 533400"/>
+                <a:gd name="csY0" fmla="*/ 676 h 80931"/>
+                <a:gd name="csX1" fmla="*/ 234462 w 533400"/>
+                <a:gd name="csY1" fmla="*/ 80931 h 80931"/>
+                <a:gd name="csX2" fmla="*/ 533400 w 533400"/>
+                <a:gd name="csY2" fmla="*/ 0 h 80931"/>
+                <a:gd name="csX0" fmla="*/ 0 w 533400"/>
+                <a:gd name="csY0" fmla="*/ 676 h 80931"/>
+                <a:gd name="csX1" fmla="*/ 234462 w 533400"/>
+                <a:gd name="csY1" fmla="*/ 80931 h 80931"/>
+                <a:gd name="csX2" fmla="*/ 533400 w 533400"/>
+                <a:gd name="csY2" fmla="*/ 0 h 80931"/>
+                <a:gd name="csX0" fmla="*/ 0 w 387093"/>
+                <a:gd name="csY0" fmla="*/ 4058 h 84313"/>
+                <a:gd name="csX1" fmla="*/ 234462 w 387093"/>
+                <a:gd name="csY1" fmla="*/ 84313 h 84313"/>
+                <a:gd name="csX2" fmla="*/ 381000 w 387093"/>
+                <a:gd name="csY2" fmla="*/ 0 h 84313"/>
+                <a:gd name="csX0" fmla="*/ 0 w 397865"/>
+                <a:gd name="csY0" fmla="*/ 4058 h 84313"/>
+                <a:gd name="csX1" fmla="*/ 234462 w 397865"/>
+                <a:gd name="csY1" fmla="*/ 84313 h 84313"/>
+                <a:gd name="csX2" fmla="*/ 381000 w 397865"/>
+                <a:gd name="csY2" fmla="*/ 0 h 84313"/>
+                <a:gd name="csX0" fmla="*/ 71 w 263121"/>
+                <a:gd name="csY0" fmla="*/ 0 h 85665"/>
+                <a:gd name="csX1" fmla="*/ 99718 w 263121"/>
+                <a:gd name="csY1" fmla="*/ 85665 h 85665"/>
+                <a:gd name="csX2" fmla="*/ 246256 w 263121"/>
+                <a:gd name="csY2" fmla="*/ 1352 h 85665"/>
+                <a:gd name="csX0" fmla="*/ 18318 w 281368"/>
+                <a:gd name="csY0" fmla="*/ 0 h 85665"/>
+                <a:gd name="csX1" fmla="*/ 117965 w 281368"/>
+                <a:gd name="csY1" fmla="*/ 85665 h 85665"/>
+                <a:gd name="csX2" fmla="*/ 264503 w 281368"/>
+                <a:gd name="csY2" fmla="*/ 1352 h 85665"/>
+                <a:gd name="csX0" fmla="*/ 18318 w 302294"/>
+                <a:gd name="csY0" fmla="*/ 0 h 85665"/>
+                <a:gd name="csX1" fmla="*/ 117965 w 302294"/>
+                <a:gd name="csY1" fmla="*/ 85665 h 85665"/>
+                <a:gd name="csX2" fmla="*/ 264503 w 302294"/>
+                <a:gd name="csY2" fmla="*/ 1352 h 85665"/>
+                <a:gd name="csX0" fmla="*/ 18318 w 276972"/>
+                <a:gd name="csY0" fmla="*/ 0 h 85665"/>
+                <a:gd name="csX1" fmla="*/ 117965 w 276972"/>
+                <a:gd name="csY1" fmla="*/ 85665 h 85665"/>
+                <a:gd name="csX2" fmla="*/ 264503 w 276972"/>
+                <a:gd name="csY2" fmla="*/ 1352 h 85665"/>
+                <a:gd name="csX0" fmla="*/ 18318 w 264503"/>
+                <a:gd name="csY0" fmla="*/ 0 h 85665"/>
+                <a:gd name="csX1" fmla="*/ 117965 w 264503"/>
+                <a:gd name="csY1" fmla="*/ 85665 h 85665"/>
+                <a:gd name="csX2" fmla="*/ 264503 w 264503"/>
+                <a:gd name="csY2" fmla="*/ 1352 h 85665"/>
+                <a:gd name="csX0" fmla="*/ 0 w 246185"/>
+                <a:gd name="csY0" fmla="*/ 0 h 85665"/>
+                <a:gd name="csX1" fmla="*/ 99647 w 246185"/>
+                <a:gd name="csY1" fmla="*/ 85665 h 85665"/>
+                <a:gd name="csX2" fmla="*/ 246185 w 246185"/>
+                <a:gd name="csY2" fmla="*/ 1352 h 85665"/>
+                <a:gd name="csX0" fmla="*/ 0 w 168395"/>
+                <a:gd name="csY0" fmla="*/ 677 h 86342"/>
+                <a:gd name="csX1" fmla="*/ 99647 w 168395"/>
+                <a:gd name="csY1" fmla="*/ 86342 h 86342"/>
+                <a:gd name="csX2" fmla="*/ 158262 w 168395"/>
+                <a:gd name="csY2" fmla="*/ 0 h 86342"/>
+                <a:gd name="csX0" fmla="*/ 0 w 158262"/>
+                <a:gd name="csY0" fmla="*/ 677 h 86342"/>
+                <a:gd name="csX1" fmla="*/ 99647 w 158262"/>
+                <a:gd name="csY1" fmla="*/ 86342 h 86342"/>
+                <a:gd name="csX2" fmla="*/ 158262 w 158262"/>
+                <a:gd name="csY2" fmla="*/ 0 h 86342"/>
+                <a:gd name="csX0" fmla="*/ 0 w 158262"/>
+                <a:gd name="csY0" fmla="*/ 677 h 74168"/>
+                <a:gd name="csX1" fmla="*/ 99647 w 158262"/>
+                <a:gd name="csY1" fmla="*/ 74168 h 74168"/>
+                <a:gd name="csX2" fmla="*/ 158262 w 158262"/>
+                <a:gd name="csY2" fmla="*/ 0 h 74168"/>
+                <a:gd name="csX0" fmla="*/ 0 w 158262"/>
+                <a:gd name="csY0" fmla="*/ 677 h 74168"/>
+                <a:gd name="csX1" fmla="*/ 99647 w 158262"/>
+                <a:gd name="csY1" fmla="*/ 74168 h 74168"/>
+                <a:gd name="csX2" fmla="*/ 158262 w 158262"/>
+                <a:gd name="csY2" fmla="*/ 0 h 74168"/>
+                <a:gd name="csX0" fmla="*/ 0 w 158262"/>
+                <a:gd name="csY0" fmla="*/ 677 h 74168"/>
+                <a:gd name="csX1" fmla="*/ 99647 w 158262"/>
+                <a:gd name="csY1" fmla="*/ 74168 h 74168"/>
+                <a:gd name="csX2" fmla="*/ 158262 w 158262"/>
+                <a:gd name="csY2" fmla="*/ 0 h 74168"/>
+                <a:gd name="csX0" fmla="*/ 0 w 160434"/>
+                <a:gd name="csY0" fmla="*/ 677 h 74168"/>
+                <a:gd name="csX1" fmla="*/ 99647 w 160434"/>
+                <a:gd name="csY1" fmla="*/ 74168 h 74168"/>
+                <a:gd name="csX2" fmla="*/ 158262 w 160434"/>
+                <a:gd name="csY2" fmla="*/ 0 h 74168"/>
+              </a:gdLst>
+              <a:ahLst/>
+              <a:cxnLst>
+                <a:cxn ang="0">
+                  <a:pos x="csX0" y="csY0"/>
+                </a:cxn>
+                <a:cxn ang="0">
+                  <a:pos x="csX1" y="csY1"/>
+                </a:cxn>
+                <a:cxn ang="0">
+                  <a:pos x="csX2" y="csY2"/>
+                </a:cxn>
+              </a:cxnLst>
+              <a:rect l="l" t="t" r="r" b="b"/>
+              <a:pathLst>
+                <a:path w="160434" h="74168">
+                  <a:moveTo>
+                    <a:pt x="0" y="677"/>
+                  </a:moveTo>
+                  <a:cubicBezTo>
+                    <a:pt x="7816" y="51100"/>
+                    <a:pt x="-13676" y="60943"/>
+                    <a:pt x="99647" y="74168"/>
+                  </a:cubicBezTo>
+                  <a:cubicBezTo>
+                    <a:pt x="187570" y="59816"/>
+                    <a:pt x="152401" y="46139"/>
+                    <a:pt x="158262" y="0"/>
+                  </a:cubicBezTo>
+                </a:path>
+              </a:pathLst>
+            </a:custGeom>
+            <a:noFill/>
+          </p:spPr>
+          <p:style>
+            <a:lnRef idx="2">
+              <a:schemeClr val="accent1">
+                <a:shade val="15000"/>
+              </a:schemeClr>
+            </a:lnRef>
+            <a:fillRef idx="1">
+              <a:schemeClr val="accent1"/>
+            </a:fillRef>
+            <a:effectRef idx="0">
+              <a:schemeClr val="accent1"/>
+            </a:effectRef>
+            <a:fontRef idx="minor">
+              <a:schemeClr val="lt1"/>
+            </a:fontRef>
+          </p:style>
+          <p:txBody>
+            <a:bodyPr rtlCol="0" anchor="ctr"/>
+            <a:lstStyle/>
+            <a:p>
+              <a:pPr algn="ctr"/>
+              <a:endParaRPr lang="en-AU"/>
+            </a:p>
+          </p:txBody>
+        </p:sp>
+      </p:grpSp>
+      <p:cxnSp>
+        <p:nvCxnSpPr>
+          <p:cNvPr id="30" name="Straight Connector 29">
+            <a:extLst>
+              <a:ext uri="{FF2B5EF4-FFF2-40B4-BE49-F238E27FC236}">
+                <a16:creationId xmlns:a16="http://schemas.microsoft.com/office/drawing/2014/main" id="{F14059D6-D0A9-54C9-C8F3-74E6E5126313}"/>
+              </a:ext>
+            </a:extLst>
+          </p:cNvPr>
+          <p:cNvCxnSpPr>
+            <a:cxnSpLocks/>
+          </p:cNvCxnSpPr>
+          <p:nvPr/>
+        </p:nvCxnSpPr>
+        <p:spPr>
+          <a:xfrm>
+            <a:off x="2090721" y="4574946"/>
+            <a:ext cx="2926756" cy="0"/>
+          </a:xfrm>
+          <a:prstGeom prst="line">
+            <a:avLst/>
+          </a:prstGeom>
+          <a:ln>
+            <a:solidFill>
+              <a:schemeClr val="tx1"/>
+            </a:solidFill>
+          </a:ln>
+        </p:spPr>
+        <p:style>
+          <a:lnRef idx="2">
+            <a:schemeClr val="accent1"/>
+          </a:lnRef>
+          <a:fillRef idx="0">
+            <a:schemeClr val="accent1"/>
+          </a:fillRef>
+          <a:effectRef idx="1">
+            <a:schemeClr val="accent1"/>
+          </a:effectRef>
+          <a:fontRef idx="minor">
+            <a:schemeClr val="tx1"/>
+          </a:fontRef>
+        </p:style>
+      </p:cxnSp>
+      <p:cxnSp>
+        <p:nvCxnSpPr>
+          <p:cNvPr id="32" name="Straight Connector 31">
+            <a:extLst>
+              <a:ext uri="{FF2B5EF4-FFF2-40B4-BE49-F238E27FC236}">
+                <a16:creationId xmlns:a16="http://schemas.microsoft.com/office/drawing/2014/main" id="{AAB742FC-F756-2746-EB11-3947A783A178}"/>
+              </a:ext>
+            </a:extLst>
+          </p:cNvPr>
+          <p:cNvCxnSpPr>
+            <a:cxnSpLocks/>
+          </p:cNvCxnSpPr>
+          <p:nvPr/>
+        </p:nvCxnSpPr>
+        <p:spPr>
+          <a:xfrm>
+            <a:off x="2057123" y="2989317"/>
+            <a:ext cx="2274278" cy="0"/>
+          </a:xfrm>
+          <a:prstGeom prst="line">
+            <a:avLst/>
+          </a:prstGeom>
+          <a:ln>
+            <a:solidFill>
+              <a:schemeClr val="tx1"/>
+            </a:solidFill>
+          </a:ln>
+        </p:spPr>
+        <p:style>
+          <a:lnRef idx="2">
+            <a:schemeClr val="accent1"/>
+          </a:lnRef>
+          <a:fillRef idx="0">
+            <a:schemeClr val="accent1"/>
+          </a:fillRef>
+          <a:effectRef idx="1">
+            <a:schemeClr val="accent1"/>
+          </a:effectRef>
+          <a:fontRef idx="minor">
+            <a:schemeClr val="tx1"/>
+          </a:fontRef>
+        </p:style>
+      </p:cxnSp>
+      <p:cxnSp>
+        <p:nvCxnSpPr>
+          <p:cNvPr id="33" name="Straight Connector 32">
+            <a:extLst>
+              <a:ext uri="{FF2B5EF4-FFF2-40B4-BE49-F238E27FC236}">
+                <a16:creationId xmlns:a16="http://schemas.microsoft.com/office/drawing/2014/main" id="{2BF7E43F-EC83-F1E3-D5ED-29C04C29759E}"/>
+              </a:ext>
+            </a:extLst>
+          </p:cNvPr>
+          <p:cNvCxnSpPr>
+            <a:cxnSpLocks/>
+          </p:cNvCxnSpPr>
+          <p:nvPr/>
+        </p:nvCxnSpPr>
+        <p:spPr>
+          <a:xfrm flipV="1">
+            <a:off x="2319321" y="4363930"/>
+            <a:ext cx="0" cy="422032"/>
+          </a:xfrm>
+          <a:prstGeom prst="line">
+            <a:avLst/>
+          </a:prstGeom>
+          <a:ln>
+            <a:solidFill>
+              <a:schemeClr val="tx1"/>
+            </a:solidFill>
+          </a:ln>
+        </p:spPr>
+        <p:style>
+          <a:lnRef idx="2">
+            <a:schemeClr val="accent1"/>
+          </a:lnRef>
+          <a:fillRef idx="0">
+            <a:schemeClr val="accent1"/>
+          </a:fillRef>
+          <a:effectRef idx="1">
+            <a:schemeClr val="accent1"/>
+          </a:effectRef>
+          <a:fontRef idx="minor">
+            <a:schemeClr val="tx1"/>
+          </a:fontRef>
+        </p:style>
+      </p:cxnSp>
+      <p:cxnSp>
+        <p:nvCxnSpPr>
+          <p:cNvPr id="35" name="Straight Connector 34">
+            <a:extLst>
+              <a:ext uri="{FF2B5EF4-FFF2-40B4-BE49-F238E27FC236}">
+                <a16:creationId xmlns:a16="http://schemas.microsoft.com/office/drawing/2014/main" id="{34BE44B4-468E-A9A0-356F-480061F183E0}"/>
+              </a:ext>
+            </a:extLst>
+          </p:cNvPr>
+          <p:cNvCxnSpPr>
+            <a:cxnSpLocks/>
+          </p:cNvCxnSpPr>
+          <p:nvPr/>
+        </p:nvCxnSpPr>
+        <p:spPr>
+          <a:xfrm flipV="1">
+            <a:off x="2418965" y="4363930"/>
+            <a:ext cx="0" cy="422032"/>
+          </a:xfrm>
+          <a:prstGeom prst="line">
+            <a:avLst/>
+          </a:prstGeom>
+          <a:ln>
+            <a:solidFill>
+              <a:schemeClr val="tx1"/>
+            </a:solidFill>
+          </a:ln>
+        </p:spPr>
+        <p:style>
+          <a:lnRef idx="2">
+            <a:schemeClr val="accent1"/>
+          </a:lnRef>
+          <a:fillRef idx="0">
+            <a:schemeClr val="accent1"/>
+          </a:fillRef>
+          <a:effectRef idx="1">
+            <a:schemeClr val="accent1"/>
+          </a:effectRef>
+          <a:fontRef idx="minor">
+            <a:schemeClr val="tx1"/>
+          </a:fontRef>
+        </p:style>
+      </p:cxnSp>
+      <p:cxnSp>
+        <p:nvCxnSpPr>
+          <p:cNvPr id="36" name="Straight Connector 35">
+            <a:extLst>
+              <a:ext uri="{FF2B5EF4-FFF2-40B4-BE49-F238E27FC236}">
+                <a16:creationId xmlns:a16="http://schemas.microsoft.com/office/drawing/2014/main" id="{B0B834A3-E562-7754-726A-69FEDA2F3E43}"/>
+              </a:ext>
+            </a:extLst>
+          </p:cNvPr>
+          <p:cNvCxnSpPr>
+            <a:cxnSpLocks/>
+          </p:cNvCxnSpPr>
+          <p:nvPr/>
+        </p:nvCxnSpPr>
+        <p:spPr>
+          <a:xfrm flipV="1">
+            <a:off x="2512751" y="4363930"/>
+            <a:ext cx="0" cy="422032"/>
+          </a:xfrm>
+          <a:prstGeom prst="line">
+            <a:avLst/>
+          </a:prstGeom>
+          <a:ln>
+            <a:solidFill>
+              <a:schemeClr val="tx1"/>
+            </a:solidFill>
+          </a:ln>
+        </p:spPr>
+        <p:style>
+          <a:lnRef idx="2">
+            <a:schemeClr val="accent1"/>
+          </a:lnRef>
+          <a:fillRef idx="0">
+            <a:schemeClr val="accent1"/>
+          </a:fillRef>
+          <a:effectRef idx="1">
+            <a:schemeClr val="accent1"/>
+          </a:effectRef>
+          <a:fontRef idx="minor">
+            <a:schemeClr val="tx1"/>
+          </a:fontRef>
+        </p:style>
+      </p:cxnSp>
+      <p:cxnSp>
+        <p:nvCxnSpPr>
+          <p:cNvPr id="37" name="Straight Connector 36">
+            <a:extLst>
+              <a:ext uri="{FF2B5EF4-FFF2-40B4-BE49-F238E27FC236}">
+                <a16:creationId xmlns:a16="http://schemas.microsoft.com/office/drawing/2014/main" id="{B3BCABEB-22D1-F142-68EE-19CB0877A0A5}"/>
+              </a:ext>
+            </a:extLst>
+          </p:cNvPr>
+          <p:cNvCxnSpPr>
+            <a:cxnSpLocks/>
+          </p:cNvCxnSpPr>
+          <p:nvPr/>
+        </p:nvCxnSpPr>
+        <p:spPr>
+          <a:xfrm flipV="1">
+            <a:off x="2991880" y="4363930"/>
+            <a:ext cx="0" cy="422032"/>
+          </a:xfrm>
+          <a:prstGeom prst="line">
+            <a:avLst/>
+          </a:prstGeom>
+          <a:ln>
+            <a:solidFill>
+              <a:schemeClr val="tx1"/>
+            </a:solidFill>
+          </a:ln>
+        </p:spPr>
+        <p:style>
+          <a:lnRef idx="2">
+            <a:schemeClr val="accent1"/>
+          </a:lnRef>
+          <a:fillRef idx="0">
+            <a:schemeClr val="accent1"/>
+          </a:fillRef>
+          <a:effectRef idx="1">
+            <a:schemeClr val="accent1"/>
+          </a:effectRef>
+          <a:fontRef idx="minor">
+            <a:schemeClr val="tx1"/>
+          </a:fontRef>
+        </p:style>
+      </p:cxnSp>
+      <p:cxnSp>
+        <p:nvCxnSpPr>
+          <p:cNvPr id="38" name="Straight Connector 37">
+            <a:extLst>
+              <a:ext uri="{FF2B5EF4-FFF2-40B4-BE49-F238E27FC236}">
+                <a16:creationId xmlns:a16="http://schemas.microsoft.com/office/drawing/2014/main" id="{299F2840-C5AB-41D1-D4F3-F4BD0A27CE2C}"/>
+              </a:ext>
+            </a:extLst>
+          </p:cNvPr>
+          <p:cNvCxnSpPr>
+            <a:cxnSpLocks/>
+          </p:cNvCxnSpPr>
+          <p:nvPr/>
+        </p:nvCxnSpPr>
+        <p:spPr>
+          <a:xfrm flipV="1">
+            <a:off x="3091524" y="4363930"/>
+            <a:ext cx="0" cy="422032"/>
+          </a:xfrm>
+          <a:prstGeom prst="line">
+            <a:avLst/>
+          </a:prstGeom>
+          <a:ln>
+            <a:solidFill>
+              <a:schemeClr val="tx1"/>
+            </a:solidFill>
+          </a:ln>
+        </p:spPr>
+        <p:style>
+          <a:lnRef idx="2">
+            <a:schemeClr val="accent1"/>
+          </a:lnRef>
+          <a:fillRef idx="0">
+            <a:schemeClr val="accent1"/>
+          </a:fillRef>
+          <a:effectRef idx="1">
+            <a:schemeClr val="accent1"/>
+          </a:effectRef>
+          <a:fontRef idx="minor">
+            <a:schemeClr val="tx1"/>
+          </a:fontRef>
+        </p:style>
+      </p:cxnSp>
+      <p:cxnSp>
+        <p:nvCxnSpPr>
+          <p:cNvPr id="39" name="Straight Connector 38">
+            <a:extLst>
+              <a:ext uri="{FF2B5EF4-FFF2-40B4-BE49-F238E27FC236}">
+                <a16:creationId xmlns:a16="http://schemas.microsoft.com/office/drawing/2014/main" id="{90D4E57E-24E6-94F6-6050-0AC5001D863B}"/>
+              </a:ext>
+            </a:extLst>
+          </p:cNvPr>
+          <p:cNvCxnSpPr>
+            <a:cxnSpLocks/>
+          </p:cNvCxnSpPr>
+          <p:nvPr/>
+        </p:nvCxnSpPr>
+        <p:spPr>
+          <a:xfrm flipV="1">
+            <a:off x="3185310" y="4363930"/>
+            <a:ext cx="0" cy="422032"/>
+          </a:xfrm>
+          <a:prstGeom prst="line">
+            <a:avLst/>
+          </a:prstGeom>
+          <a:ln>
+            <a:solidFill>
+              <a:schemeClr val="tx1"/>
+            </a:solidFill>
+          </a:ln>
+        </p:spPr>
+        <p:style>
+          <a:lnRef idx="2">
+            <a:schemeClr val="accent1"/>
+          </a:lnRef>
+          <a:fillRef idx="0">
+            <a:schemeClr val="accent1"/>
+          </a:fillRef>
+          <a:effectRef idx="1">
+            <a:schemeClr val="accent1"/>
+          </a:effectRef>
+          <a:fontRef idx="minor">
+            <a:schemeClr val="tx1"/>
+          </a:fontRef>
+        </p:style>
+      </p:cxnSp>
+      <p:cxnSp>
+        <p:nvCxnSpPr>
+          <p:cNvPr id="40" name="Straight Connector 39">
+            <a:extLst>
+              <a:ext uri="{FF2B5EF4-FFF2-40B4-BE49-F238E27FC236}">
+                <a16:creationId xmlns:a16="http://schemas.microsoft.com/office/drawing/2014/main" id="{1D2A8DFF-16E6-FD74-9D38-1F9BDB18646E}"/>
+              </a:ext>
+            </a:extLst>
+          </p:cNvPr>
+          <p:cNvCxnSpPr>
+            <a:cxnSpLocks/>
+          </p:cNvCxnSpPr>
+          <p:nvPr/>
+        </p:nvCxnSpPr>
+        <p:spPr>
+          <a:xfrm flipV="1">
+            <a:off x="3642511" y="4363930"/>
+            <a:ext cx="0" cy="422032"/>
+          </a:xfrm>
+          <a:prstGeom prst="line">
+            <a:avLst/>
+          </a:prstGeom>
+          <a:ln>
+            <a:solidFill>
+              <a:schemeClr val="tx1"/>
+            </a:solidFill>
+          </a:ln>
+        </p:spPr>
+        <p:style>
+          <a:lnRef idx="2">
+            <a:schemeClr val="accent1"/>
+          </a:lnRef>
+          <a:fillRef idx="0">
+            <a:schemeClr val="accent1"/>
+          </a:fillRef>
+          <a:effectRef idx="1">
+            <a:schemeClr val="accent1"/>
+          </a:effectRef>
+          <a:fontRef idx="minor">
+            <a:schemeClr val="tx1"/>
+          </a:fontRef>
+        </p:style>
+      </p:cxnSp>
+      <p:cxnSp>
+        <p:nvCxnSpPr>
+          <p:cNvPr id="41" name="Straight Connector 40">
+            <a:extLst>
+              <a:ext uri="{FF2B5EF4-FFF2-40B4-BE49-F238E27FC236}">
+                <a16:creationId xmlns:a16="http://schemas.microsoft.com/office/drawing/2014/main" id="{610F2BD3-A779-CC68-293B-5E0C66D06A02}"/>
+              </a:ext>
+            </a:extLst>
+          </p:cNvPr>
+          <p:cNvCxnSpPr>
+            <a:cxnSpLocks/>
+          </p:cNvCxnSpPr>
+          <p:nvPr/>
+        </p:nvCxnSpPr>
+        <p:spPr>
+          <a:xfrm flipV="1">
+            <a:off x="3742155" y="4363930"/>
+            <a:ext cx="0" cy="422032"/>
+          </a:xfrm>
+          <a:prstGeom prst="line">
+            <a:avLst/>
+          </a:prstGeom>
+          <a:ln>
+            <a:solidFill>
+              <a:schemeClr val="tx1"/>
+            </a:solidFill>
+          </a:ln>
+        </p:spPr>
+        <p:style>
+          <a:lnRef idx="2">
+            <a:schemeClr val="accent1"/>
+          </a:lnRef>
+          <a:fillRef idx="0">
+            <a:schemeClr val="accent1"/>
+          </a:fillRef>
+          <a:effectRef idx="1">
+            <a:schemeClr val="accent1"/>
+          </a:effectRef>
+          <a:fontRef idx="minor">
+            <a:schemeClr val="tx1"/>
+          </a:fontRef>
+        </p:style>
+      </p:cxnSp>
+      <p:cxnSp>
+        <p:nvCxnSpPr>
+          <p:cNvPr id="42" name="Straight Connector 41">
+            <a:extLst>
+              <a:ext uri="{FF2B5EF4-FFF2-40B4-BE49-F238E27FC236}">
+                <a16:creationId xmlns:a16="http://schemas.microsoft.com/office/drawing/2014/main" id="{0AAF2433-260A-FECE-7256-FE627BEC4000}"/>
+              </a:ext>
+            </a:extLst>
+          </p:cNvPr>
+          <p:cNvCxnSpPr>
+            <a:cxnSpLocks/>
+          </p:cNvCxnSpPr>
+          <p:nvPr/>
+        </p:nvCxnSpPr>
+        <p:spPr>
+          <a:xfrm flipV="1">
+            <a:off x="3835941" y="4363930"/>
+            <a:ext cx="0" cy="422032"/>
+          </a:xfrm>
+          <a:prstGeom prst="line">
+            <a:avLst/>
+          </a:prstGeom>
+          <a:ln>
+            <a:solidFill>
+              <a:schemeClr val="tx1"/>
+            </a:solidFill>
+          </a:ln>
+        </p:spPr>
+        <p:style>
+          <a:lnRef idx="2">
+            <a:schemeClr val="accent1"/>
+          </a:lnRef>
+          <a:fillRef idx="0">
+            <a:schemeClr val="accent1"/>
+          </a:fillRef>
+          <a:effectRef idx="1">
+            <a:schemeClr val="accent1"/>
+          </a:effectRef>
+          <a:fontRef idx="minor">
+            <a:schemeClr val="tx1"/>
+          </a:fontRef>
+        </p:style>
+      </p:cxnSp>
+      <p:cxnSp>
+        <p:nvCxnSpPr>
+          <p:cNvPr id="43" name="Straight Connector 42">
+            <a:extLst>
+              <a:ext uri="{FF2B5EF4-FFF2-40B4-BE49-F238E27FC236}">
+                <a16:creationId xmlns:a16="http://schemas.microsoft.com/office/drawing/2014/main" id="{770D02FE-CC74-65F4-AF85-B99C38E763B2}"/>
+              </a:ext>
+            </a:extLst>
+          </p:cNvPr>
+          <p:cNvCxnSpPr>
+            <a:cxnSpLocks/>
+          </p:cNvCxnSpPr>
+          <p:nvPr/>
+        </p:nvCxnSpPr>
+        <p:spPr>
+          <a:xfrm flipV="1">
+            <a:off x="2453211" y="2778301"/>
+            <a:ext cx="0" cy="422032"/>
+          </a:xfrm>
+          <a:prstGeom prst="line">
+            <a:avLst/>
+          </a:prstGeom>
+          <a:ln>
+            <a:solidFill>
+              <a:schemeClr val="tx1"/>
+            </a:solidFill>
+          </a:ln>
+        </p:spPr>
+        <p:style>
+          <a:lnRef idx="2">
+            <a:schemeClr val="accent1"/>
+          </a:lnRef>
+          <a:fillRef idx="0">
+            <a:schemeClr val="accent1"/>
+          </a:fillRef>
+          <a:effectRef idx="1">
+            <a:schemeClr val="accent1"/>
+          </a:effectRef>
+          <a:fontRef idx="minor">
+            <a:schemeClr val="tx1"/>
+          </a:fontRef>
+        </p:style>
+      </p:cxnSp>
+      <p:cxnSp>
+        <p:nvCxnSpPr>
+          <p:cNvPr id="44" name="Straight Connector 43">
+            <a:extLst>
+              <a:ext uri="{FF2B5EF4-FFF2-40B4-BE49-F238E27FC236}">
+                <a16:creationId xmlns:a16="http://schemas.microsoft.com/office/drawing/2014/main" id="{FFC740B4-DA7A-EEC2-24DD-210DA1AC582E}"/>
+              </a:ext>
+            </a:extLst>
+          </p:cNvPr>
+          <p:cNvCxnSpPr>
+            <a:cxnSpLocks/>
+          </p:cNvCxnSpPr>
+          <p:nvPr/>
+        </p:nvCxnSpPr>
+        <p:spPr>
+          <a:xfrm flipV="1">
+            <a:off x="3031984" y="2778301"/>
+            <a:ext cx="0" cy="422032"/>
+          </a:xfrm>
+          <a:prstGeom prst="line">
+            <a:avLst/>
+          </a:prstGeom>
+          <a:ln>
+            <a:solidFill>
+              <a:schemeClr val="tx1"/>
+            </a:solidFill>
+          </a:ln>
+        </p:spPr>
+        <p:style>
+          <a:lnRef idx="2">
+            <a:schemeClr val="accent1"/>
+          </a:lnRef>
+          <a:fillRef idx="0">
+            <a:schemeClr val="accent1"/>
+          </a:fillRef>
+          <a:effectRef idx="1">
+            <a:schemeClr val="accent1"/>
+          </a:effectRef>
+          <a:fontRef idx="minor">
+            <a:schemeClr val="tx1"/>
+          </a:fontRef>
+        </p:style>
+      </p:cxnSp>
+      <p:cxnSp>
+        <p:nvCxnSpPr>
+          <p:cNvPr id="45" name="Straight Connector 44">
+            <a:extLst>
+              <a:ext uri="{FF2B5EF4-FFF2-40B4-BE49-F238E27FC236}">
+                <a16:creationId xmlns:a16="http://schemas.microsoft.com/office/drawing/2014/main" id="{21DA030B-377E-44E7-A58C-4117B8E6AA7D}"/>
+              </a:ext>
+            </a:extLst>
+          </p:cNvPr>
+          <p:cNvCxnSpPr>
+            <a:cxnSpLocks/>
+          </p:cNvCxnSpPr>
+          <p:nvPr/>
+        </p:nvCxnSpPr>
+        <p:spPr>
+          <a:xfrm flipV="1">
+            <a:off x="3582971" y="2778301"/>
+            <a:ext cx="0" cy="422032"/>
+          </a:xfrm>
+          <a:prstGeom prst="line">
+            <a:avLst/>
+          </a:prstGeom>
+          <a:ln>
+            <a:solidFill>
+              <a:schemeClr val="tx1"/>
+            </a:solidFill>
+          </a:ln>
+        </p:spPr>
+        <p:style>
+          <a:lnRef idx="2">
+            <a:schemeClr val="accent1"/>
+          </a:lnRef>
+          <a:fillRef idx="0">
+            <a:schemeClr val="accent1"/>
+          </a:fillRef>
+          <a:effectRef idx="1">
+            <a:schemeClr val="accent1"/>
+          </a:effectRef>
+          <a:fontRef idx="minor">
+            <a:schemeClr val="tx1"/>
+          </a:fontRef>
+        </p:style>
+      </p:cxnSp>
+      <p:cxnSp>
+        <p:nvCxnSpPr>
+          <p:cNvPr id="48" name="Straight Connector 47">
+            <a:extLst>
+              <a:ext uri="{FF2B5EF4-FFF2-40B4-BE49-F238E27FC236}">
+                <a16:creationId xmlns:a16="http://schemas.microsoft.com/office/drawing/2014/main" id="{B0FC27AE-C35D-CD72-5E03-953A322C57A2}"/>
+              </a:ext>
+            </a:extLst>
+          </p:cNvPr>
+          <p:cNvCxnSpPr>
+            <a:cxnSpLocks/>
+          </p:cNvCxnSpPr>
+          <p:nvPr/>
+        </p:nvCxnSpPr>
+        <p:spPr>
+          <a:xfrm flipV="1">
+            <a:off x="2442136" y="2743129"/>
+            <a:ext cx="0" cy="246188"/>
+          </a:xfrm>
+          <a:prstGeom prst="line">
+            <a:avLst/>
+          </a:prstGeom>
+          <a:ln>
+            <a:solidFill>
+              <a:srgbClr val="FF0000"/>
+            </a:solidFill>
+          </a:ln>
+        </p:spPr>
+        <p:style>
+          <a:lnRef idx="2">
+            <a:schemeClr val="accent1"/>
+          </a:lnRef>
+          <a:fillRef idx="0">
+            <a:schemeClr val="accent1"/>
+          </a:fillRef>
+          <a:effectRef idx="1">
+            <a:schemeClr val="accent1"/>
+          </a:effectRef>
+          <a:fontRef idx="minor">
+            <a:schemeClr val="tx1"/>
+          </a:fontRef>
+        </p:style>
+      </p:cxnSp>
+      <p:cxnSp>
+        <p:nvCxnSpPr>
+          <p:cNvPr id="52" name="Straight Connector 51">
+            <a:extLst>
+              <a:ext uri="{FF2B5EF4-FFF2-40B4-BE49-F238E27FC236}">
+                <a16:creationId xmlns:a16="http://schemas.microsoft.com/office/drawing/2014/main" id="{94FE5F4A-3585-0642-D05C-464D41A2D7F3}"/>
+              </a:ext>
+            </a:extLst>
+          </p:cNvPr>
+          <p:cNvCxnSpPr>
+            <a:cxnSpLocks/>
+          </p:cNvCxnSpPr>
+          <p:nvPr/>
+        </p:nvCxnSpPr>
+        <p:spPr>
+          <a:xfrm flipH="1">
+            <a:off x="2441487" y="2743129"/>
+            <a:ext cx="1680747" cy="0"/>
+          </a:xfrm>
+          <a:prstGeom prst="line">
+            <a:avLst/>
+          </a:prstGeom>
+          <a:ln>
+            <a:solidFill>
+              <a:srgbClr val="FF0000"/>
+            </a:solidFill>
+          </a:ln>
+        </p:spPr>
+        <p:style>
+          <a:lnRef idx="2">
+            <a:schemeClr val="accent1"/>
+          </a:lnRef>
+          <a:fillRef idx="0">
+            <a:schemeClr val="accent1"/>
+          </a:fillRef>
+          <a:effectRef idx="1">
+            <a:schemeClr val="accent1"/>
+          </a:effectRef>
+          <a:fontRef idx="minor">
+            <a:schemeClr val="tx1"/>
+          </a:fontRef>
+        </p:style>
+      </p:cxnSp>
+      <p:cxnSp>
+        <p:nvCxnSpPr>
+          <p:cNvPr id="55" name="Straight Connector 54">
+            <a:extLst>
+              <a:ext uri="{FF2B5EF4-FFF2-40B4-BE49-F238E27FC236}">
+                <a16:creationId xmlns:a16="http://schemas.microsoft.com/office/drawing/2014/main" id="{3890ED14-EDAE-AB01-CFE9-AA4F8EFEB8D8}"/>
+              </a:ext>
+            </a:extLst>
+          </p:cNvPr>
+          <p:cNvCxnSpPr>
+            <a:cxnSpLocks/>
+          </p:cNvCxnSpPr>
+          <p:nvPr/>
+        </p:nvCxnSpPr>
+        <p:spPr>
+          <a:xfrm flipV="1">
+            <a:off x="4128096" y="2743129"/>
+            <a:ext cx="0" cy="246188"/>
+          </a:xfrm>
+          <a:prstGeom prst="line">
+            <a:avLst/>
+          </a:prstGeom>
+          <a:ln>
+            <a:solidFill>
+              <a:srgbClr val="FF0000"/>
+            </a:solidFill>
+          </a:ln>
+        </p:spPr>
+        <p:style>
+          <a:lnRef idx="2">
+            <a:schemeClr val="accent1"/>
+          </a:lnRef>
+          <a:fillRef idx="0">
+            <a:schemeClr val="accent1"/>
+          </a:fillRef>
+          <a:effectRef idx="1">
+            <a:schemeClr val="accent1"/>
+          </a:effectRef>
+          <a:fontRef idx="minor">
+            <a:schemeClr val="tx1"/>
+          </a:fontRef>
+        </p:style>
+      </p:cxnSp>
+      <p:grpSp>
+        <p:nvGrpSpPr>
+          <p:cNvPr id="62" name="Group 61">
+            <a:extLst>
+              <a:ext uri="{FF2B5EF4-FFF2-40B4-BE49-F238E27FC236}">
+                <a16:creationId xmlns:a16="http://schemas.microsoft.com/office/drawing/2014/main" id="{DFCA549C-4076-B979-10C5-8A147B0C2052}"/>
+              </a:ext>
+            </a:extLst>
+          </p:cNvPr>
+          <p:cNvGrpSpPr/>
+          <p:nvPr/>
+        </p:nvGrpSpPr>
+        <p:grpSpPr>
+          <a:xfrm>
+            <a:off x="2301735" y="4328758"/>
+            <a:ext cx="341819" cy="246188"/>
+            <a:chOff x="2301735" y="3868613"/>
+            <a:chExt cx="341819" cy="246188"/>
+          </a:xfrm>
+        </p:grpSpPr>
+        <p:cxnSp>
+          <p:nvCxnSpPr>
+            <p:cNvPr id="58" name="Straight Connector 57">
+              <a:extLst>
+                <a:ext uri="{FF2B5EF4-FFF2-40B4-BE49-F238E27FC236}">
+                  <a16:creationId xmlns:a16="http://schemas.microsoft.com/office/drawing/2014/main" id="{D085B0AE-540F-E2FA-406E-15032AA26632}"/>
+                </a:ext>
+              </a:extLst>
+            </p:cNvPr>
+            <p:cNvCxnSpPr>
+              <a:cxnSpLocks/>
+            </p:cNvCxnSpPr>
+            <p:nvPr/>
+          </p:nvCxnSpPr>
+          <p:spPr>
+            <a:xfrm flipV="1">
+              <a:off x="2301735" y="3868613"/>
+              <a:ext cx="0" cy="246188"/>
+            </a:xfrm>
+            <a:prstGeom prst="line">
+              <a:avLst/>
+            </a:prstGeom>
+            <a:ln>
+              <a:solidFill>
+                <a:srgbClr val="FF0000"/>
+              </a:solidFill>
+            </a:ln>
+          </p:spPr>
+          <p:style>
+            <a:lnRef idx="2">
+              <a:schemeClr val="accent1"/>
+            </a:lnRef>
+            <a:fillRef idx="0">
+              <a:schemeClr val="accent1"/>
+            </a:fillRef>
+            <a:effectRef idx="1">
+              <a:schemeClr val="accent1"/>
+            </a:effectRef>
+            <a:fontRef idx="minor">
+              <a:schemeClr val="tx1"/>
+            </a:fontRef>
+          </p:style>
+        </p:cxnSp>
+        <p:cxnSp>
+          <p:nvCxnSpPr>
+            <p:cNvPr id="59" name="Straight Connector 58">
+              <a:extLst>
+                <a:ext uri="{FF2B5EF4-FFF2-40B4-BE49-F238E27FC236}">
+                  <a16:creationId xmlns:a16="http://schemas.microsoft.com/office/drawing/2014/main" id="{52666017-D011-7443-AB2B-AEDC6A90C2A8}"/>
+                </a:ext>
+              </a:extLst>
+            </p:cNvPr>
+            <p:cNvCxnSpPr>
+              <a:cxnSpLocks/>
+            </p:cNvCxnSpPr>
+            <p:nvPr/>
+          </p:nvCxnSpPr>
+          <p:spPr>
+            <a:xfrm flipH="1">
+              <a:off x="2301735" y="3868613"/>
+              <a:ext cx="341819" cy="0"/>
+            </a:xfrm>
+            <a:prstGeom prst="line">
+              <a:avLst/>
+            </a:prstGeom>
+            <a:ln>
+              <a:solidFill>
+                <a:srgbClr val="FF0000"/>
+              </a:solidFill>
+            </a:ln>
+          </p:spPr>
+          <p:style>
+            <a:lnRef idx="2">
+              <a:schemeClr val="accent1"/>
+            </a:lnRef>
+            <a:fillRef idx="0">
+              <a:schemeClr val="accent1"/>
+            </a:fillRef>
+            <a:effectRef idx="1">
+              <a:schemeClr val="accent1"/>
+            </a:effectRef>
+            <a:fontRef idx="minor">
+              <a:schemeClr val="tx1"/>
+            </a:fontRef>
+          </p:style>
+        </p:cxnSp>
+        <p:cxnSp>
+          <p:nvCxnSpPr>
+            <p:cNvPr id="61" name="Straight Connector 60">
+              <a:extLst>
+                <a:ext uri="{FF2B5EF4-FFF2-40B4-BE49-F238E27FC236}">
+                  <a16:creationId xmlns:a16="http://schemas.microsoft.com/office/drawing/2014/main" id="{6D6BDD59-47F3-8FBE-4499-6882ACFFFAC1}"/>
+                </a:ext>
+              </a:extLst>
+            </p:cNvPr>
+            <p:cNvCxnSpPr>
+              <a:cxnSpLocks/>
+            </p:cNvCxnSpPr>
+            <p:nvPr/>
+          </p:nvCxnSpPr>
+          <p:spPr>
+            <a:xfrm flipV="1">
+              <a:off x="2643554" y="3868613"/>
+              <a:ext cx="0" cy="246188"/>
+            </a:xfrm>
+            <a:prstGeom prst="line">
+              <a:avLst/>
+            </a:prstGeom>
+            <a:ln>
+              <a:solidFill>
+                <a:srgbClr val="FF0000"/>
+              </a:solidFill>
+            </a:ln>
+          </p:spPr>
+          <p:style>
+            <a:lnRef idx="2">
+              <a:schemeClr val="accent1"/>
+            </a:lnRef>
+            <a:fillRef idx="0">
+              <a:schemeClr val="accent1"/>
+            </a:fillRef>
+            <a:effectRef idx="1">
+              <a:schemeClr val="accent1"/>
+            </a:effectRef>
+            <a:fontRef idx="minor">
+              <a:schemeClr val="tx1"/>
+            </a:fontRef>
+          </p:style>
+        </p:cxnSp>
+      </p:grpSp>
+      <p:grpSp>
+        <p:nvGrpSpPr>
+          <p:cNvPr id="63" name="Group 62">
+            <a:extLst>
+              <a:ext uri="{FF2B5EF4-FFF2-40B4-BE49-F238E27FC236}">
+                <a16:creationId xmlns:a16="http://schemas.microsoft.com/office/drawing/2014/main" id="{536A6A95-123C-E1C5-06E7-6E79F842F22D}"/>
+              </a:ext>
+            </a:extLst>
+          </p:cNvPr>
+          <p:cNvGrpSpPr/>
+          <p:nvPr/>
+        </p:nvGrpSpPr>
+        <p:grpSpPr>
+          <a:xfrm>
+            <a:off x="2970489" y="4328758"/>
+            <a:ext cx="341819" cy="246188"/>
+            <a:chOff x="2301735" y="3868613"/>
+            <a:chExt cx="341819" cy="246188"/>
+          </a:xfrm>
+        </p:grpSpPr>
+        <p:cxnSp>
+          <p:nvCxnSpPr>
+            <p:cNvPr id="64" name="Straight Connector 63">
+              <a:extLst>
+                <a:ext uri="{FF2B5EF4-FFF2-40B4-BE49-F238E27FC236}">
+                  <a16:creationId xmlns:a16="http://schemas.microsoft.com/office/drawing/2014/main" id="{9DE9F661-A64E-3855-1DDB-67E25D9F208E}"/>
+                </a:ext>
+              </a:extLst>
+            </p:cNvPr>
+            <p:cNvCxnSpPr>
+              <a:cxnSpLocks/>
+            </p:cNvCxnSpPr>
+            <p:nvPr/>
+          </p:nvCxnSpPr>
+          <p:spPr>
+            <a:xfrm flipV="1">
+              <a:off x="2301735" y="3868613"/>
+              <a:ext cx="0" cy="246188"/>
+            </a:xfrm>
+            <a:prstGeom prst="line">
+              <a:avLst/>
+            </a:prstGeom>
+            <a:ln>
+              <a:solidFill>
+                <a:srgbClr val="FF0000"/>
+              </a:solidFill>
+            </a:ln>
+          </p:spPr>
+          <p:style>
+            <a:lnRef idx="2">
+              <a:schemeClr val="accent1"/>
+            </a:lnRef>
+            <a:fillRef idx="0">
+              <a:schemeClr val="accent1"/>
+            </a:fillRef>
+            <a:effectRef idx="1">
+              <a:schemeClr val="accent1"/>
+            </a:effectRef>
+            <a:fontRef idx="minor">
+              <a:schemeClr val="tx1"/>
+            </a:fontRef>
+          </p:style>
+        </p:cxnSp>
+        <p:cxnSp>
+          <p:nvCxnSpPr>
+            <p:cNvPr id="65" name="Straight Connector 64">
+              <a:extLst>
+                <a:ext uri="{FF2B5EF4-FFF2-40B4-BE49-F238E27FC236}">
+                  <a16:creationId xmlns:a16="http://schemas.microsoft.com/office/drawing/2014/main" id="{2FA12A95-8B5A-4DF3-970A-D5896588B46B}"/>
+                </a:ext>
+              </a:extLst>
+            </p:cNvPr>
+            <p:cNvCxnSpPr>
+              <a:cxnSpLocks/>
+            </p:cNvCxnSpPr>
+            <p:nvPr/>
+          </p:nvCxnSpPr>
+          <p:spPr>
+            <a:xfrm flipH="1">
+              <a:off x="2301735" y="3868613"/>
+              <a:ext cx="341819" cy="0"/>
+            </a:xfrm>
+            <a:prstGeom prst="line">
+              <a:avLst/>
+            </a:prstGeom>
+            <a:ln>
+              <a:solidFill>
+                <a:srgbClr val="FF0000"/>
+              </a:solidFill>
+            </a:ln>
+          </p:spPr>
+          <p:style>
+            <a:lnRef idx="2">
+              <a:schemeClr val="accent1"/>
+            </a:lnRef>
+            <a:fillRef idx="0">
+              <a:schemeClr val="accent1"/>
+            </a:fillRef>
+            <a:effectRef idx="1">
+              <a:schemeClr val="accent1"/>
+            </a:effectRef>
+            <a:fontRef idx="minor">
+              <a:schemeClr val="tx1"/>
+            </a:fontRef>
+          </p:style>
+        </p:cxnSp>
+        <p:cxnSp>
+          <p:nvCxnSpPr>
+            <p:cNvPr id="66" name="Straight Connector 65">
+              <a:extLst>
+                <a:ext uri="{FF2B5EF4-FFF2-40B4-BE49-F238E27FC236}">
+                  <a16:creationId xmlns:a16="http://schemas.microsoft.com/office/drawing/2014/main" id="{3F1684F8-EB16-75E1-51BC-7323C135DC3E}"/>
+                </a:ext>
+              </a:extLst>
+            </p:cNvPr>
+            <p:cNvCxnSpPr>
+              <a:cxnSpLocks/>
+            </p:cNvCxnSpPr>
+            <p:nvPr/>
+          </p:nvCxnSpPr>
+          <p:spPr>
+            <a:xfrm flipV="1">
+              <a:off x="2643554" y="3868613"/>
+              <a:ext cx="0" cy="246188"/>
+            </a:xfrm>
+            <a:prstGeom prst="line">
+              <a:avLst/>
+            </a:prstGeom>
+            <a:ln>
+              <a:solidFill>
+                <a:srgbClr val="FF0000"/>
+              </a:solidFill>
+            </a:ln>
+          </p:spPr>
+          <p:style>
+            <a:lnRef idx="2">
+              <a:schemeClr val="accent1"/>
+            </a:lnRef>
+            <a:fillRef idx="0">
+              <a:schemeClr val="accent1"/>
+            </a:fillRef>
+            <a:effectRef idx="1">
+              <a:schemeClr val="accent1"/>
+            </a:effectRef>
+            <a:fontRef idx="minor">
+              <a:schemeClr val="tx1"/>
+            </a:fontRef>
+          </p:style>
+        </p:cxnSp>
+      </p:grpSp>
+      <p:grpSp>
+        <p:nvGrpSpPr>
+          <p:cNvPr id="67" name="Group 66">
+            <a:extLst>
+              <a:ext uri="{FF2B5EF4-FFF2-40B4-BE49-F238E27FC236}">
+                <a16:creationId xmlns:a16="http://schemas.microsoft.com/office/drawing/2014/main" id="{37494A72-8FED-276D-6C38-C27D87E8134A}"/>
+              </a:ext>
+            </a:extLst>
+          </p:cNvPr>
+          <p:cNvGrpSpPr/>
+          <p:nvPr/>
+        </p:nvGrpSpPr>
+        <p:grpSpPr>
+          <a:xfrm>
+            <a:off x="3621123" y="4334616"/>
+            <a:ext cx="341819" cy="246188"/>
+            <a:chOff x="2301735" y="3868613"/>
+            <a:chExt cx="341819" cy="246188"/>
+          </a:xfrm>
+        </p:grpSpPr>
+        <p:cxnSp>
+          <p:nvCxnSpPr>
+            <p:cNvPr id="68" name="Straight Connector 67">
+              <a:extLst>
+                <a:ext uri="{FF2B5EF4-FFF2-40B4-BE49-F238E27FC236}">
+                  <a16:creationId xmlns:a16="http://schemas.microsoft.com/office/drawing/2014/main" id="{28B76F4E-BDCF-E798-EE64-BDC4392A05B1}"/>
+                </a:ext>
+              </a:extLst>
+            </p:cNvPr>
+            <p:cNvCxnSpPr>
+              <a:cxnSpLocks/>
+            </p:cNvCxnSpPr>
+            <p:nvPr/>
+          </p:nvCxnSpPr>
+          <p:spPr>
+            <a:xfrm flipV="1">
+              <a:off x="2301735" y="3868613"/>
+              <a:ext cx="0" cy="246188"/>
+            </a:xfrm>
+            <a:prstGeom prst="line">
+              <a:avLst/>
+            </a:prstGeom>
+            <a:ln>
+              <a:solidFill>
+                <a:srgbClr val="FF0000"/>
+              </a:solidFill>
+            </a:ln>
+          </p:spPr>
+          <p:style>
+            <a:lnRef idx="2">
+              <a:schemeClr val="accent1"/>
+            </a:lnRef>
+            <a:fillRef idx="0">
+              <a:schemeClr val="accent1"/>
+            </a:fillRef>
+            <a:effectRef idx="1">
+              <a:schemeClr val="accent1"/>
+            </a:effectRef>
+            <a:fontRef idx="minor">
+              <a:schemeClr val="tx1"/>
+            </a:fontRef>
+          </p:style>
+        </p:cxnSp>
+        <p:cxnSp>
+          <p:nvCxnSpPr>
+            <p:cNvPr id="69" name="Straight Connector 68">
+              <a:extLst>
+                <a:ext uri="{FF2B5EF4-FFF2-40B4-BE49-F238E27FC236}">
+                  <a16:creationId xmlns:a16="http://schemas.microsoft.com/office/drawing/2014/main" id="{2A56607F-3900-99DE-DE2E-DA362F302C2E}"/>
+                </a:ext>
+              </a:extLst>
+            </p:cNvPr>
+            <p:cNvCxnSpPr>
+              <a:cxnSpLocks/>
+            </p:cNvCxnSpPr>
+            <p:nvPr/>
+          </p:nvCxnSpPr>
+          <p:spPr>
+            <a:xfrm flipH="1">
+              <a:off x="2301735" y="3868613"/>
+              <a:ext cx="341819" cy="0"/>
+            </a:xfrm>
+            <a:prstGeom prst="line">
+              <a:avLst/>
+            </a:prstGeom>
+            <a:ln>
+              <a:solidFill>
+                <a:srgbClr val="FF0000"/>
+              </a:solidFill>
+            </a:ln>
+          </p:spPr>
+          <p:style>
+            <a:lnRef idx="2">
+              <a:schemeClr val="accent1"/>
+            </a:lnRef>
+            <a:fillRef idx="0">
+              <a:schemeClr val="accent1"/>
+            </a:fillRef>
+            <a:effectRef idx="1">
+              <a:schemeClr val="accent1"/>
+            </a:effectRef>
+            <a:fontRef idx="minor">
+              <a:schemeClr val="tx1"/>
+            </a:fontRef>
+          </p:style>
+        </p:cxnSp>
+        <p:cxnSp>
+          <p:nvCxnSpPr>
+            <p:cNvPr id="70" name="Straight Connector 69">
+              <a:extLst>
+                <a:ext uri="{FF2B5EF4-FFF2-40B4-BE49-F238E27FC236}">
+                  <a16:creationId xmlns:a16="http://schemas.microsoft.com/office/drawing/2014/main" id="{564AB712-FF97-C474-8231-E2F93028A548}"/>
+                </a:ext>
+              </a:extLst>
+            </p:cNvPr>
+            <p:cNvCxnSpPr>
+              <a:cxnSpLocks/>
+            </p:cNvCxnSpPr>
+            <p:nvPr/>
+          </p:nvCxnSpPr>
+          <p:spPr>
+            <a:xfrm flipV="1">
+              <a:off x="2643554" y="3868613"/>
+              <a:ext cx="0" cy="246188"/>
+            </a:xfrm>
+            <a:prstGeom prst="line">
+              <a:avLst/>
+            </a:prstGeom>
+            <a:ln>
+              <a:solidFill>
+                <a:srgbClr val="FF0000"/>
+              </a:solidFill>
+            </a:ln>
+          </p:spPr>
+          <p:style>
+            <a:lnRef idx="2">
+              <a:schemeClr val="accent1"/>
+            </a:lnRef>
+            <a:fillRef idx="0">
+              <a:schemeClr val="accent1"/>
+            </a:fillRef>
+            <a:effectRef idx="1">
+              <a:schemeClr val="accent1"/>
+            </a:effectRef>
+            <a:fontRef idx="minor">
+              <a:schemeClr val="tx1"/>
+            </a:fontRef>
+          </p:style>
+        </p:cxnSp>
+      </p:grpSp>
+      <p:grpSp>
+        <p:nvGrpSpPr>
+          <p:cNvPr id="120" name="Group 119">
+            <a:extLst>
+              <a:ext uri="{FF2B5EF4-FFF2-40B4-BE49-F238E27FC236}">
+                <a16:creationId xmlns:a16="http://schemas.microsoft.com/office/drawing/2014/main" id="{5FCB060A-EEA6-AA58-6C38-54E61E43205D}"/>
+              </a:ext>
+            </a:extLst>
+          </p:cNvPr>
+          <p:cNvGrpSpPr/>
+          <p:nvPr/>
+        </p:nvGrpSpPr>
+        <p:grpSpPr>
+          <a:xfrm>
+            <a:off x="2284149" y="4264280"/>
+            <a:ext cx="2106792" cy="310666"/>
+            <a:chOff x="2284149" y="3804135"/>
+            <a:chExt cx="2106792" cy="310666"/>
+          </a:xfrm>
+        </p:grpSpPr>
+        <p:cxnSp>
+          <p:nvCxnSpPr>
+            <p:cNvPr id="71" name="Straight Connector 70">
+              <a:extLst>
+                <a:ext uri="{FF2B5EF4-FFF2-40B4-BE49-F238E27FC236}">
+                  <a16:creationId xmlns:a16="http://schemas.microsoft.com/office/drawing/2014/main" id="{3FBCFD9B-1AB3-87A2-A77F-67FAEEED00F3}"/>
+                </a:ext>
+              </a:extLst>
+            </p:cNvPr>
+            <p:cNvCxnSpPr>
+              <a:cxnSpLocks/>
+            </p:cNvCxnSpPr>
+            <p:nvPr/>
+          </p:nvCxnSpPr>
+          <p:spPr>
+            <a:xfrm flipV="1">
+              <a:off x="2284149" y="3804138"/>
+              <a:ext cx="0" cy="310663"/>
+            </a:xfrm>
+            <a:prstGeom prst="line">
+              <a:avLst/>
+            </a:prstGeom>
+            <a:ln>
+              <a:solidFill>
+                <a:schemeClr val="accent1">
+                  <a:lumMod val="60000"/>
+                  <a:lumOff val="40000"/>
+                </a:schemeClr>
+              </a:solidFill>
+            </a:ln>
+          </p:spPr>
+          <p:style>
+            <a:lnRef idx="2">
+              <a:schemeClr val="accent1"/>
+            </a:lnRef>
+            <a:fillRef idx="0">
+              <a:schemeClr val="accent1"/>
+            </a:fillRef>
+            <a:effectRef idx="1">
+              <a:schemeClr val="accent1"/>
+            </a:effectRef>
+            <a:fontRef idx="minor">
+              <a:schemeClr val="tx1"/>
+            </a:fontRef>
+          </p:style>
+        </p:cxnSp>
+        <p:cxnSp>
+          <p:nvCxnSpPr>
+            <p:cNvPr id="73" name="Straight Connector 72">
+              <a:extLst>
+                <a:ext uri="{FF2B5EF4-FFF2-40B4-BE49-F238E27FC236}">
+                  <a16:creationId xmlns:a16="http://schemas.microsoft.com/office/drawing/2014/main" id="{20E0FC8C-6EA9-C9DD-A767-25DB553A2D64}"/>
+                </a:ext>
+              </a:extLst>
+            </p:cNvPr>
+            <p:cNvCxnSpPr>
+              <a:cxnSpLocks/>
+            </p:cNvCxnSpPr>
+            <p:nvPr/>
+          </p:nvCxnSpPr>
+          <p:spPr>
+            <a:xfrm flipH="1">
+              <a:off x="2284149" y="3804135"/>
+              <a:ext cx="2106792" cy="0"/>
+            </a:xfrm>
+            <a:prstGeom prst="line">
+              <a:avLst/>
+            </a:prstGeom>
+            <a:ln>
+              <a:solidFill>
+                <a:schemeClr val="accent1">
+                  <a:lumMod val="60000"/>
+                  <a:lumOff val="40000"/>
+                </a:schemeClr>
+              </a:solidFill>
+            </a:ln>
+          </p:spPr>
+          <p:style>
+            <a:lnRef idx="2">
+              <a:schemeClr val="accent1"/>
+            </a:lnRef>
+            <a:fillRef idx="0">
+              <a:schemeClr val="accent1"/>
+            </a:fillRef>
+            <a:effectRef idx="1">
+              <a:schemeClr val="accent1"/>
+            </a:effectRef>
+            <a:fontRef idx="minor">
+              <a:schemeClr val="tx1"/>
+            </a:fontRef>
+          </p:style>
+        </p:cxnSp>
+        <p:cxnSp>
+          <p:nvCxnSpPr>
+            <p:cNvPr id="75" name="Straight Connector 74">
+              <a:extLst>
+                <a:ext uri="{FF2B5EF4-FFF2-40B4-BE49-F238E27FC236}">
+                  <a16:creationId xmlns:a16="http://schemas.microsoft.com/office/drawing/2014/main" id="{26FE4645-63CC-FC74-B7AA-C5597F7AFE5D}"/>
+                </a:ext>
+              </a:extLst>
+            </p:cNvPr>
+            <p:cNvCxnSpPr>
+              <a:cxnSpLocks/>
+            </p:cNvCxnSpPr>
+            <p:nvPr/>
+          </p:nvCxnSpPr>
+          <p:spPr>
+            <a:xfrm flipV="1">
+              <a:off x="4383228" y="3804138"/>
+              <a:ext cx="0" cy="310663"/>
+            </a:xfrm>
+            <a:prstGeom prst="line">
+              <a:avLst/>
+            </a:prstGeom>
+            <a:ln>
+              <a:solidFill>
+                <a:schemeClr val="accent1">
+                  <a:lumMod val="60000"/>
+                  <a:lumOff val="40000"/>
+                </a:schemeClr>
+              </a:solidFill>
+            </a:ln>
+          </p:spPr>
+          <p:style>
+            <a:lnRef idx="2">
+              <a:schemeClr val="accent1"/>
+            </a:lnRef>
+            <a:fillRef idx="0">
+              <a:schemeClr val="accent1"/>
+            </a:fillRef>
+            <a:effectRef idx="1">
+              <a:schemeClr val="accent1"/>
+            </a:effectRef>
+            <a:fontRef idx="minor">
+              <a:schemeClr val="tx1"/>
+            </a:fontRef>
+          </p:style>
+        </p:cxnSp>
+      </p:grpSp>
+      <p:cxnSp>
+        <p:nvCxnSpPr>
+          <p:cNvPr id="77" name="Straight Connector 76">
+            <a:extLst>
+              <a:ext uri="{FF2B5EF4-FFF2-40B4-BE49-F238E27FC236}">
+                <a16:creationId xmlns:a16="http://schemas.microsoft.com/office/drawing/2014/main" id="{E7656232-DEA7-107B-BBA9-E2C774F373B6}"/>
+              </a:ext>
+            </a:extLst>
+          </p:cNvPr>
+          <p:cNvCxnSpPr>
+            <a:cxnSpLocks/>
+          </p:cNvCxnSpPr>
+          <p:nvPr/>
+        </p:nvCxnSpPr>
+        <p:spPr>
+          <a:xfrm>
+            <a:off x="2090721" y="6119460"/>
+            <a:ext cx="2926756" cy="0"/>
+          </a:xfrm>
+          <a:prstGeom prst="line">
+            <a:avLst/>
+          </a:prstGeom>
+          <a:ln>
+            <a:solidFill>
+              <a:schemeClr val="tx1"/>
+            </a:solidFill>
+          </a:ln>
+        </p:spPr>
+        <p:style>
+          <a:lnRef idx="2">
+            <a:schemeClr val="accent1"/>
+          </a:lnRef>
+          <a:fillRef idx="0">
+            <a:schemeClr val="accent1"/>
+          </a:fillRef>
+          <a:effectRef idx="1">
+            <a:schemeClr val="accent1"/>
+          </a:effectRef>
+          <a:fontRef idx="minor">
+            <a:schemeClr val="tx1"/>
+          </a:fontRef>
+        </p:style>
+      </p:cxnSp>
+      <p:cxnSp>
+        <p:nvCxnSpPr>
+          <p:cNvPr id="78" name="Straight Connector 77">
+            <a:extLst>
+              <a:ext uri="{FF2B5EF4-FFF2-40B4-BE49-F238E27FC236}">
+                <a16:creationId xmlns:a16="http://schemas.microsoft.com/office/drawing/2014/main" id="{7218DF97-D2A9-7F1D-B427-45FBA26DFEE5}"/>
+              </a:ext>
+            </a:extLst>
+          </p:cNvPr>
+          <p:cNvCxnSpPr>
+            <a:cxnSpLocks/>
+          </p:cNvCxnSpPr>
+          <p:nvPr/>
+        </p:nvCxnSpPr>
+        <p:spPr>
+          <a:xfrm flipV="1">
+            <a:off x="2279214" y="5908444"/>
+            <a:ext cx="0" cy="422032"/>
+          </a:xfrm>
+          <a:prstGeom prst="line">
+            <a:avLst/>
+          </a:prstGeom>
+          <a:ln>
+            <a:solidFill>
+              <a:schemeClr val="tx1"/>
+            </a:solidFill>
+          </a:ln>
+        </p:spPr>
+        <p:style>
+          <a:lnRef idx="2">
+            <a:schemeClr val="accent1"/>
+          </a:lnRef>
+          <a:fillRef idx="0">
+            <a:schemeClr val="accent1"/>
+          </a:fillRef>
+          <a:effectRef idx="1">
+            <a:schemeClr val="accent1"/>
+          </a:effectRef>
+          <a:fontRef idx="minor">
+            <a:schemeClr val="tx1"/>
+          </a:fontRef>
+        </p:style>
+      </p:cxnSp>
+      <p:cxnSp>
+        <p:nvCxnSpPr>
+          <p:cNvPr id="79" name="Straight Connector 78">
+            <a:extLst>
+              <a:ext uri="{FF2B5EF4-FFF2-40B4-BE49-F238E27FC236}">
+                <a16:creationId xmlns:a16="http://schemas.microsoft.com/office/drawing/2014/main" id="{DF337293-7A7F-E9A8-51C5-F6BC76CD3D67}"/>
+              </a:ext>
+            </a:extLst>
+          </p:cNvPr>
+          <p:cNvCxnSpPr>
+            <a:cxnSpLocks/>
+          </p:cNvCxnSpPr>
+          <p:nvPr/>
+        </p:nvCxnSpPr>
+        <p:spPr>
+          <a:xfrm flipV="1">
+            <a:off x="2319321" y="5908444"/>
+            <a:ext cx="0" cy="422032"/>
+          </a:xfrm>
+          <a:prstGeom prst="line">
+            <a:avLst/>
+          </a:prstGeom>
+          <a:ln>
+            <a:solidFill>
+              <a:schemeClr val="tx1"/>
+            </a:solidFill>
+          </a:ln>
+        </p:spPr>
+        <p:style>
+          <a:lnRef idx="2">
+            <a:schemeClr val="accent1"/>
+          </a:lnRef>
+          <a:fillRef idx="0">
+            <a:schemeClr val="accent1"/>
+          </a:fillRef>
+          <a:effectRef idx="1">
+            <a:schemeClr val="accent1"/>
+          </a:effectRef>
+          <a:fontRef idx="minor">
+            <a:schemeClr val="tx1"/>
+          </a:fontRef>
+        </p:style>
+      </p:cxnSp>
+      <p:cxnSp>
+        <p:nvCxnSpPr>
+          <p:cNvPr id="80" name="Straight Connector 79">
+            <a:extLst>
+              <a:ext uri="{FF2B5EF4-FFF2-40B4-BE49-F238E27FC236}">
+                <a16:creationId xmlns:a16="http://schemas.microsoft.com/office/drawing/2014/main" id="{565C4438-0F9F-CDAA-1BFF-0B13EEA8A40C}"/>
+              </a:ext>
+            </a:extLst>
+          </p:cNvPr>
+          <p:cNvCxnSpPr>
+            <a:cxnSpLocks/>
+          </p:cNvCxnSpPr>
+          <p:nvPr/>
+        </p:nvCxnSpPr>
+        <p:spPr>
+          <a:xfrm flipV="1">
+            <a:off x="2361274" y="5908444"/>
+            <a:ext cx="0" cy="422032"/>
+          </a:xfrm>
+          <a:prstGeom prst="line">
+            <a:avLst/>
+          </a:prstGeom>
+          <a:ln>
+            <a:solidFill>
+              <a:schemeClr val="tx1"/>
+            </a:solidFill>
+          </a:ln>
+        </p:spPr>
+        <p:style>
+          <a:lnRef idx="2">
+            <a:schemeClr val="accent1"/>
+          </a:lnRef>
+          <a:fillRef idx="0">
+            <a:schemeClr val="accent1"/>
+          </a:fillRef>
+          <a:effectRef idx="1">
+            <a:schemeClr val="accent1"/>
+          </a:effectRef>
+          <a:fontRef idx="minor">
+            <a:schemeClr val="tx1"/>
+          </a:fontRef>
+        </p:style>
+      </p:cxnSp>
+      <p:cxnSp>
+        <p:nvCxnSpPr>
+          <p:cNvPr id="81" name="Straight Connector 80">
+            <a:extLst>
+              <a:ext uri="{FF2B5EF4-FFF2-40B4-BE49-F238E27FC236}">
+                <a16:creationId xmlns:a16="http://schemas.microsoft.com/office/drawing/2014/main" id="{BB693523-3986-686A-2EC2-94B5A0BF6A4A}"/>
+              </a:ext>
+            </a:extLst>
+          </p:cNvPr>
+          <p:cNvCxnSpPr>
+            <a:cxnSpLocks/>
+          </p:cNvCxnSpPr>
+          <p:nvPr/>
+        </p:nvCxnSpPr>
+        <p:spPr>
+          <a:xfrm flipV="1">
+            <a:off x="2525406" y="5914300"/>
+            <a:ext cx="0" cy="422032"/>
+          </a:xfrm>
+          <a:prstGeom prst="line">
+            <a:avLst/>
+          </a:prstGeom>
+          <a:ln>
+            <a:solidFill>
+              <a:schemeClr val="tx1"/>
+            </a:solidFill>
+          </a:ln>
+        </p:spPr>
+        <p:style>
+          <a:lnRef idx="2">
+            <a:schemeClr val="accent1"/>
+          </a:lnRef>
+          <a:fillRef idx="0">
+            <a:schemeClr val="accent1"/>
+          </a:fillRef>
+          <a:effectRef idx="1">
+            <a:schemeClr val="accent1"/>
+          </a:effectRef>
+          <a:fontRef idx="minor">
+            <a:schemeClr val="tx1"/>
+          </a:fontRef>
+        </p:style>
+      </p:cxnSp>
+      <p:cxnSp>
+        <p:nvCxnSpPr>
+          <p:cNvPr id="82" name="Straight Connector 81">
+            <a:extLst>
+              <a:ext uri="{FF2B5EF4-FFF2-40B4-BE49-F238E27FC236}">
+                <a16:creationId xmlns:a16="http://schemas.microsoft.com/office/drawing/2014/main" id="{05EB3DA2-536E-81F6-AA20-7A6C13A2B8E7}"/>
+              </a:ext>
+            </a:extLst>
+          </p:cNvPr>
+          <p:cNvCxnSpPr>
+            <a:cxnSpLocks/>
+          </p:cNvCxnSpPr>
+          <p:nvPr/>
+        </p:nvCxnSpPr>
+        <p:spPr>
+          <a:xfrm flipV="1">
+            <a:off x="2565513" y="5914300"/>
+            <a:ext cx="0" cy="422032"/>
+          </a:xfrm>
+          <a:prstGeom prst="line">
+            <a:avLst/>
+          </a:prstGeom>
+          <a:ln>
+            <a:solidFill>
+              <a:schemeClr val="tx1"/>
+            </a:solidFill>
+          </a:ln>
+        </p:spPr>
+        <p:style>
+          <a:lnRef idx="2">
+            <a:schemeClr val="accent1"/>
+          </a:lnRef>
+          <a:fillRef idx="0">
+            <a:schemeClr val="accent1"/>
+          </a:fillRef>
+          <a:effectRef idx="1">
+            <a:schemeClr val="accent1"/>
+          </a:effectRef>
+          <a:fontRef idx="minor">
+            <a:schemeClr val="tx1"/>
+          </a:fontRef>
+        </p:style>
+      </p:cxnSp>
+      <p:cxnSp>
+        <p:nvCxnSpPr>
+          <p:cNvPr id="83" name="Straight Connector 82">
+            <a:extLst>
+              <a:ext uri="{FF2B5EF4-FFF2-40B4-BE49-F238E27FC236}">
+                <a16:creationId xmlns:a16="http://schemas.microsoft.com/office/drawing/2014/main" id="{D6639EB9-A232-9EBC-0B62-E93513764074}"/>
+              </a:ext>
+            </a:extLst>
+          </p:cNvPr>
+          <p:cNvCxnSpPr>
+            <a:cxnSpLocks/>
+          </p:cNvCxnSpPr>
+          <p:nvPr/>
+        </p:nvCxnSpPr>
+        <p:spPr>
+          <a:xfrm flipV="1">
+            <a:off x="2607466" y="5914300"/>
+            <a:ext cx="0" cy="422032"/>
+          </a:xfrm>
+          <a:prstGeom prst="line">
+            <a:avLst/>
+          </a:prstGeom>
+          <a:ln>
+            <a:solidFill>
+              <a:schemeClr val="tx1"/>
+            </a:solidFill>
+          </a:ln>
+        </p:spPr>
+        <p:style>
+          <a:lnRef idx="2">
+            <a:schemeClr val="accent1"/>
+          </a:lnRef>
+          <a:fillRef idx="0">
+            <a:schemeClr val="accent1"/>
+          </a:fillRef>
+          <a:effectRef idx="1">
+            <a:schemeClr val="accent1"/>
+          </a:effectRef>
+          <a:fontRef idx="minor">
+            <a:schemeClr val="tx1"/>
+          </a:fontRef>
+        </p:style>
+      </p:cxnSp>
+      <p:cxnSp>
+        <p:nvCxnSpPr>
+          <p:cNvPr id="84" name="Straight Connector 83">
+            <a:extLst>
+              <a:ext uri="{FF2B5EF4-FFF2-40B4-BE49-F238E27FC236}">
+                <a16:creationId xmlns:a16="http://schemas.microsoft.com/office/drawing/2014/main" id="{AC6137BA-E8AE-0A8C-7D5D-637B5F0723B4}"/>
+              </a:ext>
+            </a:extLst>
+          </p:cNvPr>
+          <p:cNvCxnSpPr>
+            <a:cxnSpLocks/>
+          </p:cNvCxnSpPr>
+          <p:nvPr/>
+        </p:nvCxnSpPr>
+        <p:spPr>
+          <a:xfrm flipV="1">
+            <a:off x="2771590" y="5914294"/>
+            <a:ext cx="0" cy="422032"/>
+          </a:xfrm>
+          <a:prstGeom prst="line">
+            <a:avLst/>
+          </a:prstGeom>
+          <a:ln>
+            <a:solidFill>
+              <a:schemeClr val="tx1"/>
+            </a:solidFill>
+          </a:ln>
+        </p:spPr>
+        <p:style>
+          <a:lnRef idx="2">
+            <a:schemeClr val="accent1"/>
+          </a:lnRef>
+          <a:fillRef idx="0">
+            <a:schemeClr val="accent1"/>
+          </a:fillRef>
+          <a:effectRef idx="1">
+            <a:schemeClr val="accent1"/>
+          </a:effectRef>
+          <a:fontRef idx="minor">
+            <a:schemeClr val="tx1"/>
+          </a:fontRef>
+        </p:style>
+      </p:cxnSp>
+      <p:cxnSp>
+        <p:nvCxnSpPr>
+          <p:cNvPr id="85" name="Straight Connector 84">
+            <a:extLst>
+              <a:ext uri="{FF2B5EF4-FFF2-40B4-BE49-F238E27FC236}">
+                <a16:creationId xmlns:a16="http://schemas.microsoft.com/office/drawing/2014/main" id="{AB73425E-6D56-746D-B880-9566EFFC3D80}"/>
+              </a:ext>
+            </a:extLst>
+          </p:cNvPr>
+          <p:cNvCxnSpPr>
+            <a:cxnSpLocks/>
+          </p:cNvCxnSpPr>
+          <p:nvPr/>
+        </p:nvCxnSpPr>
+        <p:spPr>
+          <a:xfrm flipV="1">
+            <a:off x="2811697" y="5914294"/>
+            <a:ext cx="0" cy="422032"/>
+          </a:xfrm>
+          <a:prstGeom prst="line">
+            <a:avLst/>
+          </a:prstGeom>
+          <a:ln>
+            <a:solidFill>
+              <a:schemeClr val="tx1"/>
+            </a:solidFill>
+          </a:ln>
+        </p:spPr>
+        <p:style>
+          <a:lnRef idx="2">
+            <a:schemeClr val="accent1"/>
+          </a:lnRef>
+          <a:fillRef idx="0">
+            <a:schemeClr val="accent1"/>
+          </a:fillRef>
+          <a:effectRef idx="1">
+            <a:schemeClr val="accent1"/>
+          </a:effectRef>
+          <a:fontRef idx="minor">
+            <a:schemeClr val="tx1"/>
+          </a:fontRef>
+        </p:style>
+      </p:cxnSp>
+      <p:cxnSp>
+        <p:nvCxnSpPr>
+          <p:cNvPr id="86" name="Straight Connector 85">
+            <a:extLst>
+              <a:ext uri="{FF2B5EF4-FFF2-40B4-BE49-F238E27FC236}">
+                <a16:creationId xmlns:a16="http://schemas.microsoft.com/office/drawing/2014/main" id="{9F4FB117-79E9-B4F0-1582-A0A51E9D4731}"/>
+              </a:ext>
+            </a:extLst>
+          </p:cNvPr>
+          <p:cNvCxnSpPr>
+            <a:cxnSpLocks/>
+          </p:cNvCxnSpPr>
+          <p:nvPr/>
+        </p:nvCxnSpPr>
+        <p:spPr>
+          <a:xfrm flipV="1">
+            <a:off x="2853650" y="5914294"/>
+            <a:ext cx="0" cy="422032"/>
+          </a:xfrm>
+          <a:prstGeom prst="line">
+            <a:avLst/>
+          </a:prstGeom>
+          <a:ln>
+            <a:solidFill>
+              <a:schemeClr val="tx1"/>
+            </a:solidFill>
+          </a:ln>
+        </p:spPr>
+        <p:style>
+          <a:lnRef idx="2">
+            <a:schemeClr val="accent1"/>
+          </a:lnRef>
+          <a:fillRef idx="0">
+            <a:schemeClr val="accent1"/>
+          </a:fillRef>
+          <a:effectRef idx="1">
+            <a:schemeClr val="accent1"/>
+          </a:effectRef>
+          <a:fontRef idx="minor">
+            <a:schemeClr val="tx1"/>
+          </a:fontRef>
+        </p:style>
+      </p:cxnSp>
+      <p:cxnSp>
+        <p:nvCxnSpPr>
+          <p:cNvPr id="87" name="Straight Connector 86">
+            <a:extLst>
+              <a:ext uri="{FF2B5EF4-FFF2-40B4-BE49-F238E27FC236}">
+                <a16:creationId xmlns:a16="http://schemas.microsoft.com/office/drawing/2014/main" id="{B0FFE979-A236-9725-BED9-16920D8BE69D}"/>
+              </a:ext>
+            </a:extLst>
+          </p:cNvPr>
+          <p:cNvCxnSpPr>
+            <a:cxnSpLocks/>
+          </p:cNvCxnSpPr>
+          <p:nvPr/>
+        </p:nvCxnSpPr>
+        <p:spPr>
+          <a:xfrm flipV="1">
+            <a:off x="3498426" y="5908429"/>
+            <a:ext cx="0" cy="422032"/>
+          </a:xfrm>
+          <a:prstGeom prst="line">
+            <a:avLst/>
+          </a:prstGeom>
+          <a:ln>
+            <a:solidFill>
+              <a:schemeClr val="tx1"/>
+            </a:solidFill>
+          </a:ln>
+        </p:spPr>
+        <p:style>
+          <a:lnRef idx="2">
+            <a:schemeClr val="accent1"/>
+          </a:lnRef>
+          <a:fillRef idx="0">
+            <a:schemeClr val="accent1"/>
+          </a:fillRef>
+          <a:effectRef idx="1">
+            <a:schemeClr val="accent1"/>
+          </a:effectRef>
+          <a:fontRef idx="minor">
+            <a:schemeClr val="tx1"/>
+          </a:fontRef>
+        </p:style>
+      </p:cxnSp>
+      <p:cxnSp>
+        <p:nvCxnSpPr>
+          <p:cNvPr id="88" name="Straight Connector 87">
+            <a:extLst>
+              <a:ext uri="{FF2B5EF4-FFF2-40B4-BE49-F238E27FC236}">
+                <a16:creationId xmlns:a16="http://schemas.microsoft.com/office/drawing/2014/main" id="{15B8FB85-E885-0CCD-317D-8C9F57281428}"/>
+              </a:ext>
+            </a:extLst>
+          </p:cNvPr>
+          <p:cNvCxnSpPr>
+            <a:cxnSpLocks/>
+          </p:cNvCxnSpPr>
+          <p:nvPr/>
+        </p:nvCxnSpPr>
+        <p:spPr>
+          <a:xfrm flipV="1">
+            <a:off x="3538533" y="5908429"/>
+            <a:ext cx="0" cy="422032"/>
+          </a:xfrm>
+          <a:prstGeom prst="line">
+            <a:avLst/>
+          </a:prstGeom>
+          <a:ln>
+            <a:solidFill>
+              <a:schemeClr val="tx1"/>
+            </a:solidFill>
+          </a:ln>
+        </p:spPr>
+        <p:style>
+          <a:lnRef idx="2">
+            <a:schemeClr val="accent1"/>
+          </a:lnRef>
+          <a:fillRef idx="0">
+            <a:schemeClr val="accent1"/>
+          </a:fillRef>
+          <a:effectRef idx="1">
+            <a:schemeClr val="accent1"/>
+          </a:effectRef>
+          <a:fontRef idx="minor">
+            <a:schemeClr val="tx1"/>
+          </a:fontRef>
+        </p:style>
+      </p:cxnSp>
+      <p:cxnSp>
+        <p:nvCxnSpPr>
+          <p:cNvPr id="89" name="Straight Connector 88">
+            <a:extLst>
+              <a:ext uri="{FF2B5EF4-FFF2-40B4-BE49-F238E27FC236}">
+                <a16:creationId xmlns:a16="http://schemas.microsoft.com/office/drawing/2014/main" id="{814E436B-1DC3-7044-7E01-1DD3BAE20111}"/>
+              </a:ext>
+            </a:extLst>
+          </p:cNvPr>
+          <p:cNvCxnSpPr>
+            <a:cxnSpLocks/>
+          </p:cNvCxnSpPr>
+          <p:nvPr/>
+        </p:nvCxnSpPr>
+        <p:spPr>
+          <a:xfrm flipV="1">
+            <a:off x="3580486" y="5908429"/>
+            <a:ext cx="0" cy="422032"/>
+          </a:xfrm>
+          <a:prstGeom prst="line">
+            <a:avLst/>
+          </a:prstGeom>
+          <a:ln>
+            <a:solidFill>
+              <a:schemeClr val="tx1"/>
+            </a:solidFill>
+          </a:ln>
+        </p:spPr>
+        <p:style>
+          <a:lnRef idx="2">
+            <a:schemeClr val="accent1"/>
+          </a:lnRef>
+          <a:fillRef idx="0">
+            <a:schemeClr val="accent1"/>
+          </a:fillRef>
+          <a:effectRef idx="1">
+            <a:schemeClr val="accent1"/>
+          </a:effectRef>
+          <a:fontRef idx="minor">
+            <a:schemeClr val="tx1"/>
+          </a:fontRef>
+        </p:style>
+      </p:cxnSp>
+      <p:cxnSp>
+        <p:nvCxnSpPr>
+          <p:cNvPr id="90" name="Straight Connector 89">
+            <a:extLst>
+              <a:ext uri="{FF2B5EF4-FFF2-40B4-BE49-F238E27FC236}">
+                <a16:creationId xmlns:a16="http://schemas.microsoft.com/office/drawing/2014/main" id="{42DA55B2-2EC8-F638-8A12-89ADA1E6B4C3}"/>
+              </a:ext>
+            </a:extLst>
+          </p:cNvPr>
+          <p:cNvCxnSpPr>
+            <a:cxnSpLocks/>
+          </p:cNvCxnSpPr>
+          <p:nvPr/>
+        </p:nvCxnSpPr>
+        <p:spPr>
+          <a:xfrm flipV="1">
+            <a:off x="3762200" y="5908423"/>
+            <a:ext cx="0" cy="422032"/>
+          </a:xfrm>
+          <a:prstGeom prst="line">
+            <a:avLst/>
+          </a:prstGeom>
+          <a:ln>
+            <a:solidFill>
+              <a:schemeClr val="tx1"/>
+            </a:solidFill>
+          </a:ln>
+        </p:spPr>
+        <p:style>
+          <a:lnRef idx="2">
+            <a:schemeClr val="accent1"/>
+          </a:lnRef>
+          <a:fillRef idx="0">
+            <a:schemeClr val="accent1"/>
+          </a:fillRef>
+          <a:effectRef idx="1">
+            <a:schemeClr val="accent1"/>
+          </a:effectRef>
+          <a:fontRef idx="minor">
+            <a:schemeClr val="tx1"/>
+          </a:fontRef>
+        </p:style>
+      </p:cxnSp>
+      <p:cxnSp>
+        <p:nvCxnSpPr>
+          <p:cNvPr id="91" name="Straight Connector 90">
+            <a:extLst>
+              <a:ext uri="{FF2B5EF4-FFF2-40B4-BE49-F238E27FC236}">
+                <a16:creationId xmlns:a16="http://schemas.microsoft.com/office/drawing/2014/main" id="{E531EB60-4D1E-92EB-7C3D-201ADCD75B91}"/>
+              </a:ext>
+            </a:extLst>
+          </p:cNvPr>
+          <p:cNvCxnSpPr>
+            <a:cxnSpLocks/>
+          </p:cNvCxnSpPr>
+          <p:nvPr/>
+        </p:nvCxnSpPr>
+        <p:spPr>
+          <a:xfrm flipV="1">
+            <a:off x="3802307" y="5908423"/>
+            <a:ext cx="0" cy="422032"/>
+          </a:xfrm>
+          <a:prstGeom prst="line">
+            <a:avLst/>
+          </a:prstGeom>
+          <a:ln>
+            <a:solidFill>
+              <a:schemeClr val="tx1"/>
+            </a:solidFill>
+          </a:ln>
+        </p:spPr>
+        <p:style>
+          <a:lnRef idx="2">
+            <a:schemeClr val="accent1"/>
+          </a:lnRef>
+          <a:fillRef idx="0">
+            <a:schemeClr val="accent1"/>
+          </a:fillRef>
+          <a:effectRef idx="1">
+            <a:schemeClr val="accent1"/>
+          </a:effectRef>
+          <a:fontRef idx="minor">
+            <a:schemeClr val="tx1"/>
+          </a:fontRef>
+        </p:style>
+      </p:cxnSp>
+      <p:cxnSp>
+        <p:nvCxnSpPr>
+          <p:cNvPr id="92" name="Straight Connector 91">
+            <a:extLst>
+              <a:ext uri="{FF2B5EF4-FFF2-40B4-BE49-F238E27FC236}">
+                <a16:creationId xmlns:a16="http://schemas.microsoft.com/office/drawing/2014/main" id="{3B664967-A5C6-A9C9-0A98-1C0CE933466A}"/>
+              </a:ext>
+            </a:extLst>
+          </p:cNvPr>
+          <p:cNvCxnSpPr>
+            <a:cxnSpLocks/>
+          </p:cNvCxnSpPr>
+          <p:nvPr/>
+        </p:nvCxnSpPr>
+        <p:spPr>
+          <a:xfrm flipV="1">
+            <a:off x="3844260" y="5908423"/>
+            <a:ext cx="0" cy="422032"/>
+          </a:xfrm>
+          <a:prstGeom prst="line">
+            <a:avLst/>
+          </a:prstGeom>
+          <a:ln>
+            <a:solidFill>
+              <a:schemeClr val="tx1"/>
+            </a:solidFill>
+          </a:ln>
+        </p:spPr>
+        <p:style>
+          <a:lnRef idx="2">
+            <a:schemeClr val="accent1"/>
+          </a:lnRef>
+          <a:fillRef idx="0">
+            <a:schemeClr val="accent1"/>
+          </a:fillRef>
+          <a:effectRef idx="1">
+            <a:schemeClr val="accent1"/>
+          </a:effectRef>
+          <a:fontRef idx="minor">
+            <a:schemeClr val="tx1"/>
+          </a:fontRef>
+        </p:style>
+      </p:cxnSp>
+      <p:cxnSp>
+        <p:nvCxnSpPr>
+          <p:cNvPr id="93" name="Straight Connector 92">
+            <a:extLst>
+              <a:ext uri="{FF2B5EF4-FFF2-40B4-BE49-F238E27FC236}">
+                <a16:creationId xmlns:a16="http://schemas.microsoft.com/office/drawing/2014/main" id="{4FD52CEF-3E43-92BA-6DAF-8C851428CF19}"/>
+              </a:ext>
+            </a:extLst>
+          </p:cNvPr>
+          <p:cNvCxnSpPr>
+            <a:cxnSpLocks/>
+          </p:cNvCxnSpPr>
+          <p:nvPr/>
+        </p:nvCxnSpPr>
+        <p:spPr>
+          <a:xfrm flipV="1">
+            <a:off x="4014246" y="5908419"/>
+            <a:ext cx="0" cy="422032"/>
+          </a:xfrm>
+          <a:prstGeom prst="line">
+            <a:avLst/>
+          </a:prstGeom>
+          <a:ln>
+            <a:solidFill>
+              <a:schemeClr val="tx1"/>
+            </a:solidFill>
+          </a:ln>
+        </p:spPr>
+        <p:style>
+          <a:lnRef idx="2">
+            <a:schemeClr val="accent1"/>
+          </a:lnRef>
+          <a:fillRef idx="0">
+            <a:schemeClr val="accent1"/>
+          </a:fillRef>
+          <a:effectRef idx="1">
+            <a:schemeClr val="accent1"/>
+          </a:effectRef>
+          <a:fontRef idx="minor">
+            <a:schemeClr val="tx1"/>
+          </a:fontRef>
+        </p:style>
+      </p:cxnSp>
+      <p:cxnSp>
+        <p:nvCxnSpPr>
+          <p:cNvPr id="94" name="Straight Connector 93">
+            <a:extLst>
+              <a:ext uri="{FF2B5EF4-FFF2-40B4-BE49-F238E27FC236}">
+                <a16:creationId xmlns:a16="http://schemas.microsoft.com/office/drawing/2014/main" id="{29C0431C-6CAA-D2DF-6009-197B747BB421}"/>
+              </a:ext>
+            </a:extLst>
+          </p:cNvPr>
+          <p:cNvCxnSpPr>
+            <a:cxnSpLocks/>
+          </p:cNvCxnSpPr>
+          <p:nvPr/>
+        </p:nvCxnSpPr>
+        <p:spPr>
+          <a:xfrm flipV="1">
+            <a:off x="4054353" y="5908419"/>
+            <a:ext cx="0" cy="422032"/>
+          </a:xfrm>
+          <a:prstGeom prst="line">
+            <a:avLst/>
+          </a:prstGeom>
+          <a:ln>
+            <a:solidFill>
+              <a:schemeClr val="tx1"/>
+            </a:solidFill>
+          </a:ln>
+        </p:spPr>
+        <p:style>
+          <a:lnRef idx="2">
+            <a:schemeClr val="accent1"/>
+          </a:lnRef>
+          <a:fillRef idx="0">
+            <a:schemeClr val="accent1"/>
+          </a:fillRef>
+          <a:effectRef idx="1">
+            <a:schemeClr val="accent1"/>
+          </a:effectRef>
+          <a:fontRef idx="minor">
+            <a:schemeClr val="tx1"/>
+          </a:fontRef>
+        </p:style>
+      </p:cxnSp>
+      <p:cxnSp>
+        <p:nvCxnSpPr>
+          <p:cNvPr id="95" name="Straight Connector 94">
+            <a:extLst>
+              <a:ext uri="{FF2B5EF4-FFF2-40B4-BE49-F238E27FC236}">
+                <a16:creationId xmlns:a16="http://schemas.microsoft.com/office/drawing/2014/main" id="{BB1CFF1B-C374-A4B1-16C4-0E4A4179D816}"/>
+              </a:ext>
+            </a:extLst>
+          </p:cNvPr>
+          <p:cNvCxnSpPr>
+            <a:cxnSpLocks/>
+          </p:cNvCxnSpPr>
+          <p:nvPr/>
+        </p:nvCxnSpPr>
+        <p:spPr>
+          <a:xfrm flipV="1">
+            <a:off x="4096306" y="5908419"/>
+            <a:ext cx="0" cy="422032"/>
+          </a:xfrm>
+          <a:prstGeom prst="line">
+            <a:avLst/>
+          </a:prstGeom>
+          <a:ln>
+            <a:solidFill>
+              <a:schemeClr val="tx1"/>
+            </a:solidFill>
+          </a:ln>
+        </p:spPr>
+        <p:style>
+          <a:lnRef idx="2">
+            <a:schemeClr val="accent1"/>
+          </a:lnRef>
+          <a:fillRef idx="0">
+            <a:schemeClr val="accent1"/>
+          </a:fillRef>
+          <a:effectRef idx="1">
+            <a:schemeClr val="accent1"/>
+          </a:effectRef>
+          <a:fontRef idx="minor">
+            <a:schemeClr val="tx1"/>
+          </a:fontRef>
+        </p:style>
+      </p:cxnSp>
+      <p:grpSp>
+        <p:nvGrpSpPr>
+          <p:cNvPr id="96" name="Group 95">
+            <a:extLst>
+              <a:ext uri="{FF2B5EF4-FFF2-40B4-BE49-F238E27FC236}">
+                <a16:creationId xmlns:a16="http://schemas.microsoft.com/office/drawing/2014/main" id="{38848691-254D-4AC3-282B-8B166E864623}"/>
+              </a:ext>
+            </a:extLst>
+          </p:cNvPr>
+          <p:cNvGrpSpPr/>
+          <p:nvPr/>
+        </p:nvGrpSpPr>
+        <p:grpSpPr>
+          <a:xfrm>
+            <a:off x="2264260" y="5867398"/>
+            <a:ext cx="138976" cy="246188"/>
+            <a:chOff x="2301735" y="3868613"/>
+            <a:chExt cx="341819" cy="246188"/>
+          </a:xfrm>
+        </p:grpSpPr>
+        <p:cxnSp>
+          <p:nvCxnSpPr>
+            <p:cNvPr id="97" name="Straight Connector 96">
+              <a:extLst>
+                <a:ext uri="{FF2B5EF4-FFF2-40B4-BE49-F238E27FC236}">
+                  <a16:creationId xmlns:a16="http://schemas.microsoft.com/office/drawing/2014/main" id="{7FC30960-2DD7-1803-98E9-07E5AD48C08D}"/>
+                </a:ext>
+              </a:extLst>
+            </p:cNvPr>
+            <p:cNvCxnSpPr>
+              <a:cxnSpLocks/>
+            </p:cNvCxnSpPr>
+            <p:nvPr/>
+          </p:nvCxnSpPr>
+          <p:spPr>
+            <a:xfrm flipV="1">
+              <a:off x="2301735" y="3868613"/>
+              <a:ext cx="0" cy="246188"/>
+            </a:xfrm>
+            <a:prstGeom prst="line">
+              <a:avLst/>
+            </a:prstGeom>
+            <a:ln>
+              <a:solidFill>
+                <a:srgbClr val="FF0000"/>
+              </a:solidFill>
+            </a:ln>
+          </p:spPr>
+          <p:style>
+            <a:lnRef idx="2">
+              <a:schemeClr val="accent1"/>
+            </a:lnRef>
+            <a:fillRef idx="0">
+              <a:schemeClr val="accent1"/>
+            </a:fillRef>
+            <a:effectRef idx="1">
+              <a:schemeClr val="accent1"/>
+            </a:effectRef>
+            <a:fontRef idx="minor">
+              <a:schemeClr val="tx1"/>
+            </a:fontRef>
+          </p:style>
+        </p:cxnSp>
+        <p:cxnSp>
+          <p:nvCxnSpPr>
+            <p:cNvPr id="98" name="Straight Connector 97">
+              <a:extLst>
+                <a:ext uri="{FF2B5EF4-FFF2-40B4-BE49-F238E27FC236}">
+                  <a16:creationId xmlns:a16="http://schemas.microsoft.com/office/drawing/2014/main" id="{60863417-FF2C-05B8-0BF5-AD55C8ED15B4}"/>
+                </a:ext>
+              </a:extLst>
+            </p:cNvPr>
+            <p:cNvCxnSpPr>
+              <a:cxnSpLocks/>
+            </p:cNvCxnSpPr>
+            <p:nvPr/>
+          </p:nvCxnSpPr>
+          <p:spPr>
+            <a:xfrm flipH="1">
+              <a:off x="2301735" y="3868613"/>
+              <a:ext cx="341819" cy="0"/>
+            </a:xfrm>
+            <a:prstGeom prst="line">
+              <a:avLst/>
+            </a:prstGeom>
+            <a:ln>
+              <a:solidFill>
+                <a:srgbClr val="FF0000"/>
+              </a:solidFill>
+            </a:ln>
+          </p:spPr>
+          <p:style>
+            <a:lnRef idx="2">
+              <a:schemeClr val="accent1"/>
+            </a:lnRef>
+            <a:fillRef idx="0">
+              <a:schemeClr val="accent1"/>
+            </a:fillRef>
+            <a:effectRef idx="1">
+              <a:schemeClr val="accent1"/>
+            </a:effectRef>
+            <a:fontRef idx="minor">
+              <a:schemeClr val="tx1"/>
+            </a:fontRef>
+          </p:style>
+        </p:cxnSp>
+        <p:cxnSp>
+          <p:nvCxnSpPr>
+            <p:cNvPr id="99" name="Straight Connector 98">
+              <a:extLst>
+                <a:ext uri="{FF2B5EF4-FFF2-40B4-BE49-F238E27FC236}">
+                  <a16:creationId xmlns:a16="http://schemas.microsoft.com/office/drawing/2014/main" id="{CC082579-B701-8945-6710-10323F7D7053}"/>
+                </a:ext>
+              </a:extLst>
+            </p:cNvPr>
+            <p:cNvCxnSpPr>
+              <a:cxnSpLocks/>
+            </p:cNvCxnSpPr>
+            <p:nvPr/>
+          </p:nvCxnSpPr>
+          <p:spPr>
+            <a:xfrm flipV="1">
+              <a:off x="2643554" y="3868613"/>
+              <a:ext cx="0" cy="246188"/>
+            </a:xfrm>
+            <a:prstGeom prst="line">
+              <a:avLst/>
+            </a:prstGeom>
+            <a:ln>
+              <a:solidFill>
+                <a:srgbClr val="FF0000"/>
+              </a:solidFill>
+            </a:ln>
+          </p:spPr>
+          <p:style>
+            <a:lnRef idx="2">
+              <a:schemeClr val="accent1"/>
+            </a:lnRef>
+            <a:fillRef idx="0">
+              <a:schemeClr val="accent1"/>
+            </a:fillRef>
+            <a:effectRef idx="1">
+              <a:schemeClr val="accent1"/>
+            </a:effectRef>
+            <a:fontRef idx="minor">
+              <a:schemeClr val="tx1"/>
+            </a:fontRef>
+          </p:style>
+        </p:cxnSp>
+      </p:grpSp>
+      <p:grpSp>
+        <p:nvGrpSpPr>
+          <p:cNvPr id="100" name="Group 99">
+            <a:extLst>
+              <a:ext uri="{FF2B5EF4-FFF2-40B4-BE49-F238E27FC236}">
+                <a16:creationId xmlns:a16="http://schemas.microsoft.com/office/drawing/2014/main" id="{EE27E81E-00E7-131B-05D8-E2E4E212AF34}"/>
+              </a:ext>
+            </a:extLst>
+          </p:cNvPr>
+          <p:cNvGrpSpPr/>
+          <p:nvPr/>
+        </p:nvGrpSpPr>
+        <p:grpSpPr>
+          <a:xfrm>
+            <a:off x="2510447" y="5873253"/>
+            <a:ext cx="138976" cy="246188"/>
+            <a:chOff x="2301735" y="3868613"/>
+            <a:chExt cx="341819" cy="246188"/>
+          </a:xfrm>
+        </p:grpSpPr>
+        <p:cxnSp>
+          <p:nvCxnSpPr>
+            <p:cNvPr id="101" name="Straight Connector 100">
+              <a:extLst>
+                <a:ext uri="{FF2B5EF4-FFF2-40B4-BE49-F238E27FC236}">
+                  <a16:creationId xmlns:a16="http://schemas.microsoft.com/office/drawing/2014/main" id="{AAD7EBD4-0273-5AB3-C01B-F785B5870089}"/>
+                </a:ext>
+              </a:extLst>
+            </p:cNvPr>
+            <p:cNvCxnSpPr>
+              <a:cxnSpLocks/>
+            </p:cNvCxnSpPr>
+            <p:nvPr/>
+          </p:nvCxnSpPr>
+          <p:spPr>
+            <a:xfrm flipV="1">
+              <a:off x="2301735" y="3868613"/>
+              <a:ext cx="0" cy="246188"/>
+            </a:xfrm>
+            <a:prstGeom prst="line">
+              <a:avLst/>
+            </a:prstGeom>
+            <a:ln>
+              <a:solidFill>
+                <a:srgbClr val="FF0000"/>
+              </a:solidFill>
+            </a:ln>
+          </p:spPr>
+          <p:style>
+            <a:lnRef idx="2">
+              <a:schemeClr val="accent1"/>
+            </a:lnRef>
+            <a:fillRef idx="0">
+              <a:schemeClr val="accent1"/>
+            </a:fillRef>
+            <a:effectRef idx="1">
+              <a:schemeClr val="accent1"/>
+            </a:effectRef>
+            <a:fontRef idx="minor">
+              <a:schemeClr val="tx1"/>
+            </a:fontRef>
+          </p:style>
+        </p:cxnSp>
+        <p:cxnSp>
+          <p:nvCxnSpPr>
+            <p:cNvPr id="102" name="Straight Connector 101">
+              <a:extLst>
+                <a:ext uri="{FF2B5EF4-FFF2-40B4-BE49-F238E27FC236}">
+                  <a16:creationId xmlns:a16="http://schemas.microsoft.com/office/drawing/2014/main" id="{BF999733-703D-9736-EDF8-71E3DC80961D}"/>
+                </a:ext>
+              </a:extLst>
+            </p:cNvPr>
+            <p:cNvCxnSpPr>
+              <a:cxnSpLocks/>
+            </p:cNvCxnSpPr>
+            <p:nvPr/>
+          </p:nvCxnSpPr>
+          <p:spPr>
+            <a:xfrm flipH="1">
+              <a:off x="2301735" y="3868613"/>
+              <a:ext cx="341819" cy="0"/>
+            </a:xfrm>
+            <a:prstGeom prst="line">
+              <a:avLst/>
+            </a:prstGeom>
+            <a:ln>
+              <a:solidFill>
+                <a:srgbClr val="FF0000"/>
+              </a:solidFill>
+            </a:ln>
+          </p:spPr>
+          <p:style>
+            <a:lnRef idx="2">
+              <a:schemeClr val="accent1"/>
+            </a:lnRef>
+            <a:fillRef idx="0">
+              <a:schemeClr val="accent1"/>
+            </a:fillRef>
+            <a:effectRef idx="1">
+              <a:schemeClr val="accent1"/>
+            </a:effectRef>
+            <a:fontRef idx="minor">
+              <a:schemeClr val="tx1"/>
+            </a:fontRef>
+          </p:style>
+        </p:cxnSp>
+        <p:cxnSp>
+          <p:nvCxnSpPr>
+            <p:cNvPr id="103" name="Straight Connector 102">
+              <a:extLst>
+                <a:ext uri="{FF2B5EF4-FFF2-40B4-BE49-F238E27FC236}">
+                  <a16:creationId xmlns:a16="http://schemas.microsoft.com/office/drawing/2014/main" id="{3C0D3674-8A12-4A2D-7489-79355B6F8A0B}"/>
+                </a:ext>
+              </a:extLst>
+            </p:cNvPr>
+            <p:cNvCxnSpPr>
+              <a:cxnSpLocks/>
+            </p:cNvCxnSpPr>
+            <p:nvPr/>
+          </p:nvCxnSpPr>
+          <p:spPr>
+            <a:xfrm flipV="1">
+              <a:off x="2643554" y="3868613"/>
+              <a:ext cx="0" cy="246188"/>
+            </a:xfrm>
+            <a:prstGeom prst="line">
+              <a:avLst/>
+            </a:prstGeom>
+            <a:ln>
+              <a:solidFill>
+                <a:srgbClr val="FF0000"/>
+              </a:solidFill>
+            </a:ln>
+          </p:spPr>
+          <p:style>
+            <a:lnRef idx="2">
+              <a:schemeClr val="accent1"/>
+            </a:lnRef>
+            <a:fillRef idx="0">
+              <a:schemeClr val="accent1"/>
+            </a:fillRef>
+            <a:effectRef idx="1">
+              <a:schemeClr val="accent1"/>
+            </a:effectRef>
+            <a:fontRef idx="minor">
+              <a:schemeClr val="tx1"/>
+            </a:fontRef>
+          </p:style>
+        </p:cxnSp>
+      </p:grpSp>
+      <p:grpSp>
+        <p:nvGrpSpPr>
+          <p:cNvPr id="104" name="Group 103">
+            <a:extLst>
+              <a:ext uri="{FF2B5EF4-FFF2-40B4-BE49-F238E27FC236}">
+                <a16:creationId xmlns:a16="http://schemas.microsoft.com/office/drawing/2014/main" id="{39A518E8-C771-09D0-3FB4-643323AA95DB}"/>
+              </a:ext>
+            </a:extLst>
+          </p:cNvPr>
+          <p:cNvGrpSpPr/>
+          <p:nvPr/>
+        </p:nvGrpSpPr>
+        <p:grpSpPr>
+          <a:xfrm>
+            <a:off x="2756635" y="5867389"/>
+            <a:ext cx="138976" cy="246188"/>
+            <a:chOff x="2301735" y="3868613"/>
+            <a:chExt cx="341819" cy="246188"/>
+          </a:xfrm>
+        </p:grpSpPr>
+        <p:cxnSp>
+          <p:nvCxnSpPr>
+            <p:cNvPr id="105" name="Straight Connector 104">
+              <a:extLst>
+                <a:ext uri="{FF2B5EF4-FFF2-40B4-BE49-F238E27FC236}">
+                  <a16:creationId xmlns:a16="http://schemas.microsoft.com/office/drawing/2014/main" id="{170647E5-32CA-53A9-A273-37BBE373F7B6}"/>
+                </a:ext>
+              </a:extLst>
+            </p:cNvPr>
+            <p:cNvCxnSpPr>
+              <a:cxnSpLocks/>
+            </p:cNvCxnSpPr>
+            <p:nvPr/>
+          </p:nvCxnSpPr>
+          <p:spPr>
+            <a:xfrm flipV="1">
+              <a:off x="2301735" y="3868613"/>
+              <a:ext cx="0" cy="246188"/>
+            </a:xfrm>
+            <a:prstGeom prst="line">
+              <a:avLst/>
+            </a:prstGeom>
+            <a:ln>
+              <a:solidFill>
+                <a:srgbClr val="FF0000"/>
+              </a:solidFill>
+            </a:ln>
+          </p:spPr>
+          <p:style>
+            <a:lnRef idx="2">
+              <a:schemeClr val="accent1"/>
+            </a:lnRef>
+            <a:fillRef idx="0">
+              <a:schemeClr val="accent1"/>
+            </a:fillRef>
+            <a:effectRef idx="1">
+              <a:schemeClr val="accent1"/>
+            </a:effectRef>
+            <a:fontRef idx="minor">
+              <a:schemeClr val="tx1"/>
+            </a:fontRef>
+          </p:style>
+        </p:cxnSp>
+        <p:cxnSp>
+          <p:nvCxnSpPr>
+            <p:cNvPr id="106" name="Straight Connector 105">
+              <a:extLst>
+                <a:ext uri="{FF2B5EF4-FFF2-40B4-BE49-F238E27FC236}">
+                  <a16:creationId xmlns:a16="http://schemas.microsoft.com/office/drawing/2014/main" id="{B0FB8836-A945-AE40-F16A-872EBB3DD964}"/>
+                </a:ext>
+              </a:extLst>
+            </p:cNvPr>
+            <p:cNvCxnSpPr>
+              <a:cxnSpLocks/>
+            </p:cNvCxnSpPr>
+            <p:nvPr/>
+          </p:nvCxnSpPr>
+          <p:spPr>
+            <a:xfrm flipH="1">
+              <a:off x="2301735" y="3868613"/>
+              <a:ext cx="341819" cy="0"/>
+            </a:xfrm>
+            <a:prstGeom prst="line">
+              <a:avLst/>
+            </a:prstGeom>
+            <a:ln>
+              <a:solidFill>
+                <a:srgbClr val="FF0000"/>
+              </a:solidFill>
+            </a:ln>
+          </p:spPr>
+          <p:style>
+            <a:lnRef idx="2">
+              <a:schemeClr val="accent1"/>
+            </a:lnRef>
+            <a:fillRef idx="0">
+              <a:schemeClr val="accent1"/>
+            </a:fillRef>
+            <a:effectRef idx="1">
+              <a:schemeClr val="accent1"/>
+            </a:effectRef>
+            <a:fontRef idx="minor">
+              <a:schemeClr val="tx1"/>
+            </a:fontRef>
+          </p:style>
+        </p:cxnSp>
+        <p:cxnSp>
+          <p:nvCxnSpPr>
+            <p:cNvPr id="107" name="Straight Connector 106">
+              <a:extLst>
+                <a:ext uri="{FF2B5EF4-FFF2-40B4-BE49-F238E27FC236}">
+                  <a16:creationId xmlns:a16="http://schemas.microsoft.com/office/drawing/2014/main" id="{04641AEE-5CCC-53A4-C2B2-054C3B45778A}"/>
+                </a:ext>
+              </a:extLst>
+            </p:cNvPr>
+            <p:cNvCxnSpPr>
+              <a:cxnSpLocks/>
+            </p:cNvCxnSpPr>
+            <p:nvPr/>
+          </p:nvCxnSpPr>
+          <p:spPr>
+            <a:xfrm flipV="1">
+              <a:off x="2643554" y="3868613"/>
+              <a:ext cx="0" cy="246188"/>
+            </a:xfrm>
+            <a:prstGeom prst="line">
+              <a:avLst/>
+            </a:prstGeom>
+            <a:ln>
+              <a:solidFill>
+                <a:srgbClr val="FF0000"/>
+              </a:solidFill>
+            </a:ln>
+          </p:spPr>
+          <p:style>
+            <a:lnRef idx="2">
+              <a:schemeClr val="accent1"/>
+            </a:lnRef>
+            <a:fillRef idx="0">
+              <a:schemeClr val="accent1"/>
+            </a:fillRef>
+            <a:effectRef idx="1">
+              <a:schemeClr val="accent1"/>
+            </a:effectRef>
+            <a:fontRef idx="minor">
+              <a:schemeClr val="tx1"/>
+            </a:fontRef>
+          </p:style>
+        </p:cxnSp>
+      </p:grpSp>
+      <p:grpSp>
+        <p:nvGrpSpPr>
+          <p:cNvPr id="108" name="Group 107">
+            <a:extLst>
+              <a:ext uri="{FF2B5EF4-FFF2-40B4-BE49-F238E27FC236}">
+                <a16:creationId xmlns:a16="http://schemas.microsoft.com/office/drawing/2014/main" id="{CFBA4F93-B82A-E220-A2E3-3F6FCF2FC589}"/>
+              </a:ext>
+            </a:extLst>
+          </p:cNvPr>
+          <p:cNvGrpSpPr/>
+          <p:nvPr/>
+        </p:nvGrpSpPr>
+        <p:grpSpPr>
+          <a:xfrm>
+            <a:off x="3483471" y="5879105"/>
+            <a:ext cx="138976" cy="246188"/>
+            <a:chOff x="2301735" y="3868613"/>
+            <a:chExt cx="341819" cy="246188"/>
+          </a:xfrm>
+        </p:grpSpPr>
+        <p:cxnSp>
+          <p:nvCxnSpPr>
+            <p:cNvPr id="109" name="Straight Connector 108">
+              <a:extLst>
+                <a:ext uri="{FF2B5EF4-FFF2-40B4-BE49-F238E27FC236}">
+                  <a16:creationId xmlns:a16="http://schemas.microsoft.com/office/drawing/2014/main" id="{BEE3B64A-C242-2DB3-2518-746409E73073}"/>
+                </a:ext>
+              </a:extLst>
+            </p:cNvPr>
+            <p:cNvCxnSpPr>
+              <a:cxnSpLocks/>
+            </p:cNvCxnSpPr>
+            <p:nvPr/>
+          </p:nvCxnSpPr>
+          <p:spPr>
+            <a:xfrm flipV="1">
+              <a:off x="2301735" y="3868613"/>
+              <a:ext cx="0" cy="246188"/>
+            </a:xfrm>
+            <a:prstGeom prst="line">
+              <a:avLst/>
+            </a:prstGeom>
+            <a:ln>
+              <a:solidFill>
+                <a:srgbClr val="FF0000"/>
+              </a:solidFill>
+            </a:ln>
+          </p:spPr>
+          <p:style>
+            <a:lnRef idx="2">
+              <a:schemeClr val="accent1"/>
+            </a:lnRef>
+            <a:fillRef idx="0">
+              <a:schemeClr val="accent1"/>
+            </a:fillRef>
+            <a:effectRef idx="1">
+              <a:schemeClr val="accent1"/>
+            </a:effectRef>
+            <a:fontRef idx="minor">
+              <a:schemeClr val="tx1"/>
+            </a:fontRef>
+          </p:style>
+        </p:cxnSp>
+        <p:cxnSp>
+          <p:nvCxnSpPr>
+            <p:cNvPr id="110" name="Straight Connector 109">
+              <a:extLst>
+                <a:ext uri="{FF2B5EF4-FFF2-40B4-BE49-F238E27FC236}">
+                  <a16:creationId xmlns:a16="http://schemas.microsoft.com/office/drawing/2014/main" id="{4161563D-3D1F-5506-247A-146754B5AF39}"/>
+                </a:ext>
+              </a:extLst>
+            </p:cNvPr>
+            <p:cNvCxnSpPr>
+              <a:cxnSpLocks/>
+            </p:cNvCxnSpPr>
+            <p:nvPr/>
+          </p:nvCxnSpPr>
+          <p:spPr>
+            <a:xfrm flipH="1">
+              <a:off x="2301735" y="3868613"/>
+              <a:ext cx="341819" cy="0"/>
+            </a:xfrm>
+            <a:prstGeom prst="line">
+              <a:avLst/>
+            </a:prstGeom>
+            <a:ln>
+              <a:solidFill>
+                <a:srgbClr val="FF0000"/>
+              </a:solidFill>
+            </a:ln>
+          </p:spPr>
+          <p:style>
+            <a:lnRef idx="2">
+              <a:schemeClr val="accent1"/>
+            </a:lnRef>
+            <a:fillRef idx="0">
+              <a:schemeClr val="accent1"/>
+            </a:fillRef>
+            <a:effectRef idx="1">
+              <a:schemeClr val="accent1"/>
+            </a:effectRef>
+            <a:fontRef idx="minor">
+              <a:schemeClr val="tx1"/>
+            </a:fontRef>
+          </p:style>
+        </p:cxnSp>
+        <p:cxnSp>
+          <p:nvCxnSpPr>
+            <p:cNvPr id="111" name="Straight Connector 110">
+              <a:extLst>
+                <a:ext uri="{FF2B5EF4-FFF2-40B4-BE49-F238E27FC236}">
+                  <a16:creationId xmlns:a16="http://schemas.microsoft.com/office/drawing/2014/main" id="{14CAC2BE-E925-36EA-E56F-96EEC1EDDF29}"/>
+                </a:ext>
+              </a:extLst>
+            </p:cNvPr>
+            <p:cNvCxnSpPr>
+              <a:cxnSpLocks/>
+            </p:cNvCxnSpPr>
+            <p:nvPr/>
+          </p:nvCxnSpPr>
+          <p:spPr>
+            <a:xfrm flipV="1">
+              <a:off x="2643554" y="3868613"/>
+              <a:ext cx="0" cy="246188"/>
+            </a:xfrm>
+            <a:prstGeom prst="line">
+              <a:avLst/>
+            </a:prstGeom>
+            <a:ln>
+              <a:solidFill>
+                <a:srgbClr val="FF0000"/>
+              </a:solidFill>
+            </a:ln>
+          </p:spPr>
+          <p:style>
+            <a:lnRef idx="2">
+              <a:schemeClr val="accent1"/>
+            </a:lnRef>
+            <a:fillRef idx="0">
+              <a:schemeClr val="accent1"/>
+            </a:fillRef>
+            <a:effectRef idx="1">
+              <a:schemeClr val="accent1"/>
+            </a:effectRef>
+            <a:fontRef idx="minor">
+              <a:schemeClr val="tx1"/>
+            </a:fontRef>
+          </p:style>
+        </p:cxnSp>
+      </p:grpSp>
+      <p:grpSp>
+        <p:nvGrpSpPr>
+          <p:cNvPr id="112" name="Group 111">
+            <a:extLst>
+              <a:ext uri="{FF2B5EF4-FFF2-40B4-BE49-F238E27FC236}">
+                <a16:creationId xmlns:a16="http://schemas.microsoft.com/office/drawing/2014/main" id="{1B34EDC5-4075-CADC-DBE3-7D3C73AD1E9A}"/>
+              </a:ext>
+            </a:extLst>
+          </p:cNvPr>
+          <p:cNvGrpSpPr/>
+          <p:nvPr/>
+        </p:nvGrpSpPr>
+        <p:grpSpPr>
+          <a:xfrm>
+            <a:off x="3747243" y="5879101"/>
+            <a:ext cx="138976" cy="246188"/>
+            <a:chOff x="2301735" y="3868613"/>
+            <a:chExt cx="341819" cy="246188"/>
+          </a:xfrm>
+        </p:grpSpPr>
+        <p:cxnSp>
+          <p:nvCxnSpPr>
+            <p:cNvPr id="113" name="Straight Connector 112">
+              <a:extLst>
+                <a:ext uri="{FF2B5EF4-FFF2-40B4-BE49-F238E27FC236}">
+                  <a16:creationId xmlns:a16="http://schemas.microsoft.com/office/drawing/2014/main" id="{B4441A26-E3A7-2395-E094-8BBA369AFA2E}"/>
+                </a:ext>
+              </a:extLst>
+            </p:cNvPr>
+            <p:cNvCxnSpPr>
+              <a:cxnSpLocks/>
+            </p:cNvCxnSpPr>
+            <p:nvPr/>
+          </p:nvCxnSpPr>
+          <p:spPr>
+            <a:xfrm flipV="1">
+              <a:off x="2301735" y="3868613"/>
+              <a:ext cx="0" cy="246188"/>
+            </a:xfrm>
+            <a:prstGeom prst="line">
+              <a:avLst/>
+            </a:prstGeom>
+            <a:ln>
+              <a:solidFill>
+                <a:srgbClr val="FF0000"/>
+              </a:solidFill>
+            </a:ln>
+          </p:spPr>
+          <p:style>
+            <a:lnRef idx="2">
+              <a:schemeClr val="accent1"/>
+            </a:lnRef>
+            <a:fillRef idx="0">
+              <a:schemeClr val="accent1"/>
+            </a:fillRef>
+            <a:effectRef idx="1">
+              <a:schemeClr val="accent1"/>
+            </a:effectRef>
+            <a:fontRef idx="minor">
+              <a:schemeClr val="tx1"/>
+            </a:fontRef>
+          </p:style>
+        </p:cxnSp>
+        <p:cxnSp>
+          <p:nvCxnSpPr>
+            <p:cNvPr id="114" name="Straight Connector 113">
+              <a:extLst>
+                <a:ext uri="{FF2B5EF4-FFF2-40B4-BE49-F238E27FC236}">
+                  <a16:creationId xmlns:a16="http://schemas.microsoft.com/office/drawing/2014/main" id="{C5A826B8-2631-D84E-E7CE-2D068763668D}"/>
+                </a:ext>
+              </a:extLst>
+            </p:cNvPr>
+            <p:cNvCxnSpPr>
+              <a:cxnSpLocks/>
+            </p:cNvCxnSpPr>
+            <p:nvPr/>
+          </p:nvCxnSpPr>
+          <p:spPr>
+            <a:xfrm flipH="1">
+              <a:off x="2301735" y="3868613"/>
+              <a:ext cx="341819" cy="0"/>
+            </a:xfrm>
+            <a:prstGeom prst="line">
+              <a:avLst/>
+            </a:prstGeom>
+            <a:ln>
+              <a:solidFill>
+                <a:srgbClr val="FF0000"/>
+              </a:solidFill>
+            </a:ln>
+          </p:spPr>
+          <p:style>
+            <a:lnRef idx="2">
+              <a:schemeClr val="accent1"/>
+            </a:lnRef>
+            <a:fillRef idx="0">
+              <a:schemeClr val="accent1"/>
+            </a:fillRef>
+            <a:effectRef idx="1">
+              <a:schemeClr val="accent1"/>
+            </a:effectRef>
+            <a:fontRef idx="minor">
+              <a:schemeClr val="tx1"/>
+            </a:fontRef>
+          </p:style>
+        </p:cxnSp>
+        <p:cxnSp>
+          <p:nvCxnSpPr>
+            <p:cNvPr id="115" name="Straight Connector 114">
+              <a:extLst>
+                <a:ext uri="{FF2B5EF4-FFF2-40B4-BE49-F238E27FC236}">
+                  <a16:creationId xmlns:a16="http://schemas.microsoft.com/office/drawing/2014/main" id="{7A991655-97F8-C4DE-21A3-565449EDD32F}"/>
+                </a:ext>
+              </a:extLst>
+            </p:cNvPr>
+            <p:cNvCxnSpPr>
+              <a:cxnSpLocks/>
+            </p:cNvCxnSpPr>
+            <p:nvPr/>
+          </p:nvCxnSpPr>
+          <p:spPr>
+            <a:xfrm flipV="1">
+              <a:off x="2643554" y="3868613"/>
+              <a:ext cx="0" cy="246188"/>
+            </a:xfrm>
+            <a:prstGeom prst="line">
+              <a:avLst/>
+            </a:prstGeom>
+            <a:ln>
+              <a:solidFill>
+                <a:srgbClr val="FF0000"/>
+              </a:solidFill>
+            </a:ln>
+          </p:spPr>
+          <p:style>
+            <a:lnRef idx="2">
+              <a:schemeClr val="accent1"/>
+            </a:lnRef>
+            <a:fillRef idx="0">
+              <a:schemeClr val="accent1"/>
+            </a:fillRef>
+            <a:effectRef idx="1">
+              <a:schemeClr val="accent1"/>
+            </a:effectRef>
+            <a:fontRef idx="minor">
+              <a:schemeClr val="tx1"/>
+            </a:fontRef>
+          </p:style>
+        </p:cxnSp>
+      </p:grpSp>
+      <p:grpSp>
+        <p:nvGrpSpPr>
+          <p:cNvPr id="116" name="Group 115">
+            <a:extLst>
+              <a:ext uri="{FF2B5EF4-FFF2-40B4-BE49-F238E27FC236}">
+                <a16:creationId xmlns:a16="http://schemas.microsoft.com/office/drawing/2014/main" id="{DEDE29F6-4996-BD4E-31E7-542EE06483E2}"/>
+              </a:ext>
+            </a:extLst>
+          </p:cNvPr>
+          <p:cNvGrpSpPr/>
+          <p:nvPr/>
+        </p:nvGrpSpPr>
+        <p:grpSpPr>
+          <a:xfrm>
+            <a:off x="3999294" y="5879097"/>
+            <a:ext cx="138976" cy="246188"/>
+            <a:chOff x="2301735" y="3868613"/>
+            <a:chExt cx="341819" cy="246188"/>
+          </a:xfrm>
+        </p:grpSpPr>
+        <p:cxnSp>
+          <p:nvCxnSpPr>
+            <p:cNvPr id="117" name="Straight Connector 116">
+              <a:extLst>
+                <a:ext uri="{FF2B5EF4-FFF2-40B4-BE49-F238E27FC236}">
+                  <a16:creationId xmlns:a16="http://schemas.microsoft.com/office/drawing/2014/main" id="{B1E81E1D-1346-269F-4939-C22C204F2C73}"/>
+                </a:ext>
+              </a:extLst>
+            </p:cNvPr>
+            <p:cNvCxnSpPr>
+              <a:cxnSpLocks/>
+            </p:cNvCxnSpPr>
+            <p:nvPr/>
+          </p:nvCxnSpPr>
+          <p:spPr>
+            <a:xfrm flipV="1">
+              <a:off x="2301735" y="3868613"/>
+              <a:ext cx="0" cy="246188"/>
+            </a:xfrm>
+            <a:prstGeom prst="line">
+              <a:avLst/>
+            </a:prstGeom>
+            <a:ln>
+              <a:solidFill>
+                <a:srgbClr val="FF0000"/>
+              </a:solidFill>
+            </a:ln>
+          </p:spPr>
+          <p:style>
+            <a:lnRef idx="2">
+              <a:schemeClr val="accent1"/>
+            </a:lnRef>
+            <a:fillRef idx="0">
+              <a:schemeClr val="accent1"/>
+            </a:fillRef>
+            <a:effectRef idx="1">
+              <a:schemeClr val="accent1"/>
+            </a:effectRef>
+            <a:fontRef idx="minor">
+              <a:schemeClr val="tx1"/>
+            </a:fontRef>
+          </p:style>
+        </p:cxnSp>
+        <p:cxnSp>
+          <p:nvCxnSpPr>
+            <p:cNvPr id="118" name="Straight Connector 117">
+              <a:extLst>
+                <a:ext uri="{FF2B5EF4-FFF2-40B4-BE49-F238E27FC236}">
+                  <a16:creationId xmlns:a16="http://schemas.microsoft.com/office/drawing/2014/main" id="{76C16394-2D57-4B1A-37EF-B1B76B4D9F3D}"/>
+                </a:ext>
+              </a:extLst>
+            </p:cNvPr>
+            <p:cNvCxnSpPr>
+              <a:cxnSpLocks/>
+            </p:cNvCxnSpPr>
+            <p:nvPr/>
+          </p:nvCxnSpPr>
+          <p:spPr>
+            <a:xfrm flipH="1">
+              <a:off x="2301735" y="3868613"/>
+              <a:ext cx="341819" cy="0"/>
+            </a:xfrm>
+            <a:prstGeom prst="line">
+              <a:avLst/>
+            </a:prstGeom>
+            <a:ln>
+              <a:solidFill>
+                <a:srgbClr val="FF0000"/>
+              </a:solidFill>
+            </a:ln>
+          </p:spPr>
+          <p:style>
+            <a:lnRef idx="2">
+              <a:schemeClr val="accent1"/>
+            </a:lnRef>
+            <a:fillRef idx="0">
+              <a:schemeClr val="accent1"/>
+            </a:fillRef>
+            <a:effectRef idx="1">
+              <a:schemeClr val="accent1"/>
+            </a:effectRef>
+            <a:fontRef idx="minor">
+              <a:schemeClr val="tx1"/>
+            </a:fontRef>
+          </p:style>
+        </p:cxnSp>
+        <p:cxnSp>
+          <p:nvCxnSpPr>
+            <p:cNvPr id="119" name="Straight Connector 118">
+              <a:extLst>
+                <a:ext uri="{FF2B5EF4-FFF2-40B4-BE49-F238E27FC236}">
+                  <a16:creationId xmlns:a16="http://schemas.microsoft.com/office/drawing/2014/main" id="{D3EA0CD5-57F3-D881-786D-B9EF06FC568E}"/>
+                </a:ext>
+              </a:extLst>
+            </p:cNvPr>
+            <p:cNvCxnSpPr>
+              <a:cxnSpLocks/>
+            </p:cNvCxnSpPr>
+            <p:nvPr/>
+          </p:nvCxnSpPr>
+          <p:spPr>
+            <a:xfrm flipV="1">
+              <a:off x="2643554" y="3868613"/>
+              <a:ext cx="0" cy="246188"/>
+            </a:xfrm>
+            <a:prstGeom prst="line">
+              <a:avLst/>
+            </a:prstGeom>
+            <a:ln>
+              <a:solidFill>
+                <a:srgbClr val="FF0000"/>
+              </a:solidFill>
+            </a:ln>
+          </p:spPr>
+          <p:style>
+            <a:lnRef idx="2">
+              <a:schemeClr val="accent1"/>
+            </a:lnRef>
+            <a:fillRef idx="0">
+              <a:schemeClr val="accent1"/>
+            </a:fillRef>
+            <a:effectRef idx="1">
+              <a:schemeClr val="accent1"/>
+            </a:effectRef>
+            <a:fontRef idx="minor">
+              <a:schemeClr val="tx1"/>
+            </a:fontRef>
+          </p:style>
+        </p:cxnSp>
+      </p:grpSp>
+      <p:grpSp>
+        <p:nvGrpSpPr>
+          <p:cNvPr id="121" name="Group 120">
+            <a:extLst>
+              <a:ext uri="{FF2B5EF4-FFF2-40B4-BE49-F238E27FC236}">
+                <a16:creationId xmlns:a16="http://schemas.microsoft.com/office/drawing/2014/main" id="{8079D6EA-7B72-2DA3-857E-1ECAC674BB60}"/>
+              </a:ext>
+            </a:extLst>
+          </p:cNvPr>
+          <p:cNvGrpSpPr/>
+          <p:nvPr/>
+        </p:nvGrpSpPr>
+        <p:grpSpPr>
+          <a:xfrm>
+            <a:off x="2258912" y="5802928"/>
+            <a:ext cx="832612" cy="310666"/>
+            <a:chOff x="2284149" y="3804135"/>
+            <a:chExt cx="2106792" cy="310666"/>
+          </a:xfrm>
+        </p:grpSpPr>
+        <p:cxnSp>
+          <p:nvCxnSpPr>
+            <p:cNvPr id="122" name="Straight Connector 121">
+              <a:extLst>
+                <a:ext uri="{FF2B5EF4-FFF2-40B4-BE49-F238E27FC236}">
+                  <a16:creationId xmlns:a16="http://schemas.microsoft.com/office/drawing/2014/main" id="{1A1F1121-A3A6-0093-8CF8-F04C6D907B42}"/>
+                </a:ext>
+              </a:extLst>
+            </p:cNvPr>
+            <p:cNvCxnSpPr>
+              <a:cxnSpLocks/>
+            </p:cNvCxnSpPr>
+            <p:nvPr/>
+          </p:nvCxnSpPr>
+          <p:spPr>
+            <a:xfrm flipV="1">
+              <a:off x="2284149" y="3804138"/>
+              <a:ext cx="0" cy="310663"/>
+            </a:xfrm>
+            <a:prstGeom prst="line">
+              <a:avLst/>
+            </a:prstGeom>
+            <a:ln>
+              <a:solidFill>
+                <a:schemeClr val="accent1">
+                  <a:lumMod val="60000"/>
+                  <a:lumOff val="40000"/>
+                </a:schemeClr>
+              </a:solidFill>
+            </a:ln>
+          </p:spPr>
+          <p:style>
+            <a:lnRef idx="2">
+              <a:schemeClr val="accent1"/>
+            </a:lnRef>
+            <a:fillRef idx="0">
+              <a:schemeClr val="accent1"/>
+            </a:fillRef>
+            <a:effectRef idx="1">
+              <a:schemeClr val="accent1"/>
+            </a:effectRef>
+            <a:fontRef idx="minor">
+              <a:schemeClr val="tx1"/>
+            </a:fontRef>
+          </p:style>
+        </p:cxnSp>
+        <p:cxnSp>
+          <p:nvCxnSpPr>
+            <p:cNvPr id="123" name="Straight Connector 122">
+              <a:extLst>
+                <a:ext uri="{FF2B5EF4-FFF2-40B4-BE49-F238E27FC236}">
+                  <a16:creationId xmlns:a16="http://schemas.microsoft.com/office/drawing/2014/main" id="{A96E8A8D-BA39-97B6-3E77-BCF9F29EBE51}"/>
+                </a:ext>
+              </a:extLst>
+            </p:cNvPr>
+            <p:cNvCxnSpPr>
+              <a:cxnSpLocks/>
+            </p:cNvCxnSpPr>
+            <p:nvPr/>
+          </p:nvCxnSpPr>
+          <p:spPr>
+            <a:xfrm flipH="1">
+              <a:off x="2284149" y="3804135"/>
+              <a:ext cx="2106792" cy="0"/>
+            </a:xfrm>
+            <a:prstGeom prst="line">
+              <a:avLst/>
+            </a:prstGeom>
+            <a:ln>
+              <a:solidFill>
+                <a:schemeClr val="accent1">
+                  <a:lumMod val="60000"/>
+                  <a:lumOff val="40000"/>
+                </a:schemeClr>
+              </a:solidFill>
+            </a:ln>
+          </p:spPr>
+          <p:style>
+            <a:lnRef idx="2">
+              <a:schemeClr val="accent1"/>
+            </a:lnRef>
+            <a:fillRef idx="0">
+              <a:schemeClr val="accent1"/>
+            </a:fillRef>
+            <a:effectRef idx="1">
+              <a:schemeClr val="accent1"/>
+            </a:effectRef>
+            <a:fontRef idx="minor">
+              <a:schemeClr val="tx1"/>
+            </a:fontRef>
+          </p:style>
+        </p:cxnSp>
+        <p:cxnSp>
+          <p:nvCxnSpPr>
+            <p:cNvPr id="124" name="Straight Connector 123">
+              <a:extLst>
+                <a:ext uri="{FF2B5EF4-FFF2-40B4-BE49-F238E27FC236}">
+                  <a16:creationId xmlns:a16="http://schemas.microsoft.com/office/drawing/2014/main" id="{3303F38D-A55A-5BD4-DBD8-60174D03519B}"/>
+                </a:ext>
+              </a:extLst>
+            </p:cNvPr>
+            <p:cNvCxnSpPr>
+              <a:cxnSpLocks/>
+            </p:cNvCxnSpPr>
+            <p:nvPr/>
+          </p:nvCxnSpPr>
+          <p:spPr>
+            <a:xfrm flipV="1">
+              <a:off x="4383228" y="3804138"/>
+              <a:ext cx="0" cy="310663"/>
+            </a:xfrm>
+            <a:prstGeom prst="line">
+              <a:avLst/>
+            </a:prstGeom>
+            <a:ln>
+              <a:solidFill>
+                <a:schemeClr val="accent1">
+                  <a:lumMod val="60000"/>
+                  <a:lumOff val="40000"/>
+                </a:schemeClr>
+              </a:solidFill>
+            </a:ln>
+          </p:spPr>
+          <p:style>
+            <a:lnRef idx="2">
+              <a:schemeClr val="accent1"/>
+            </a:lnRef>
+            <a:fillRef idx="0">
+              <a:schemeClr val="accent1"/>
+            </a:fillRef>
+            <a:effectRef idx="1">
+              <a:schemeClr val="accent1"/>
+            </a:effectRef>
+            <a:fontRef idx="minor">
+              <a:schemeClr val="tx1"/>
+            </a:fontRef>
+          </p:style>
+        </p:cxnSp>
+      </p:grpSp>
+      <p:grpSp>
+        <p:nvGrpSpPr>
+          <p:cNvPr id="125" name="Group 124">
+            <a:extLst>
+              <a:ext uri="{FF2B5EF4-FFF2-40B4-BE49-F238E27FC236}">
+                <a16:creationId xmlns:a16="http://schemas.microsoft.com/office/drawing/2014/main" id="{2C57E229-3307-4119-667A-05DF20444465}"/>
+              </a:ext>
+            </a:extLst>
+          </p:cNvPr>
+          <p:cNvGrpSpPr/>
+          <p:nvPr/>
+        </p:nvGrpSpPr>
+        <p:grpSpPr>
+          <a:xfrm>
+            <a:off x="3473638" y="5802928"/>
+            <a:ext cx="832612" cy="310666"/>
+            <a:chOff x="2284149" y="3804135"/>
+            <a:chExt cx="2106792" cy="310666"/>
+          </a:xfrm>
+        </p:grpSpPr>
+        <p:cxnSp>
+          <p:nvCxnSpPr>
+            <p:cNvPr id="126" name="Straight Connector 125">
+              <a:extLst>
+                <a:ext uri="{FF2B5EF4-FFF2-40B4-BE49-F238E27FC236}">
+                  <a16:creationId xmlns:a16="http://schemas.microsoft.com/office/drawing/2014/main" id="{13920B85-A53A-BD11-5739-4BFF9B91340E}"/>
+                </a:ext>
+              </a:extLst>
+            </p:cNvPr>
+            <p:cNvCxnSpPr>
+              <a:cxnSpLocks/>
+            </p:cNvCxnSpPr>
+            <p:nvPr/>
+          </p:nvCxnSpPr>
+          <p:spPr>
+            <a:xfrm flipV="1">
+              <a:off x="2284149" y="3804138"/>
+              <a:ext cx="0" cy="310663"/>
+            </a:xfrm>
+            <a:prstGeom prst="line">
+              <a:avLst/>
+            </a:prstGeom>
+            <a:ln>
+              <a:solidFill>
+                <a:schemeClr val="accent1">
+                  <a:lumMod val="60000"/>
+                  <a:lumOff val="40000"/>
+                </a:schemeClr>
+              </a:solidFill>
+            </a:ln>
+          </p:spPr>
+          <p:style>
+            <a:lnRef idx="2">
+              <a:schemeClr val="accent1"/>
+            </a:lnRef>
+            <a:fillRef idx="0">
+              <a:schemeClr val="accent1"/>
+            </a:fillRef>
+            <a:effectRef idx="1">
+              <a:schemeClr val="accent1"/>
+            </a:effectRef>
+            <a:fontRef idx="minor">
+              <a:schemeClr val="tx1"/>
+            </a:fontRef>
+          </p:style>
+        </p:cxnSp>
+        <p:cxnSp>
+          <p:nvCxnSpPr>
+            <p:cNvPr id="127" name="Straight Connector 126">
+              <a:extLst>
+                <a:ext uri="{FF2B5EF4-FFF2-40B4-BE49-F238E27FC236}">
+                  <a16:creationId xmlns:a16="http://schemas.microsoft.com/office/drawing/2014/main" id="{878002B4-968F-0054-A2E0-CDDF26A85460}"/>
+                </a:ext>
+              </a:extLst>
+            </p:cNvPr>
+            <p:cNvCxnSpPr>
+              <a:cxnSpLocks/>
+            </p:cNvCxnSpPr>
+            <p:nvPr/>
+          </p:nvCxnSpPr>
+          <p:spPr>
+            <a:xfrm flipH="1">
+              <a:off x="2284149" y="3804135"/>
+              <a:ext cx="2106792" cy="0"/>
+            </a:xfrm>
+            <a:prstGeom prst="line">
+              <a:avLst/>
+            </a:prstGeom>
+            <a:ln>
+              <a:solidFill>
+                <a:schemeClr val="accent1">
+                  <a:lumMod val="60000"/>
+                  <a:lumOff val="40000"/>
+                </a:schemeClr>
+              </a:solidFill>
+            </a:ln>
+          </p:spPr>
+          <p:style>
+            <a:lnRef idx="2">
+              <a:schemeClr val="accent1"/>
+            </a:lnRef>
+            <a:fillRef idx="0">
+              <a:schemeClr val="accent1"/>
+            </a:fillRef>
+            <a:effectRef idx="1">
+              <a:schemeClr val="accent1"/>
+            </a:effectRef>
+            <a:fontRef idx="minor">
+              <a:schemeClr val="tx1"/>
+            </a:fontRef>
+          </p:style>
+        </p:cxnSp>
+        <p:cxnSp>
+          <p:nvCxnSpPr>
+            <p:cNvPr id="128" name="Straight Connector 127">
+              <a:extLst>
+                <a:ext uri="{FF2B5EF4-FFF2-40B4-BE49-F238E27FC236}">
+                  <a16:creationId xmlns:a16="http://schemas.microsoft.com/office/drawing/2014/main" id="{8AB85A6E-6207-3E47-4A5E-47AD9ACED584}"/>
+                </a:ext>
+              </a:extLst>
+            </p:cNvPr>
+            <p:cNvCxnSpPr>
+              <a:cxnSpLocks/>
+            </p:cNvCxnSpPr>
+            <p:nvPr/>
+          </p:nvCxnSpPr>
+          <p:spPr>
+            <a:xfrm flipV="1">
+              <a:off x="4383228" y="3804138"/>
+              <a:ext cx="0" cy="310663"/>
+            </a:xfrm>
+            <a:prstGeom prst="line">
+              <a:avLst/>
+            </a:prstGeom>
+            <a:ln>
+              <a:solidFill>
+                <a:schemeClr val="accent1">
+                  <a:lumMod val="60000"/>
+                  <a:lumOff val="40000"/>
+                </a:schemeClr>
+              </a:solidFill>
+            </a:ln>
+          </p:spPr>
+          <p:style>
+            <a:lnRef idx="2">
+              <a:schemeClr val="accent1"/>
+            </a:lnRef>
+            <a:fillRef idx="0">
+              <a:schemeClr val="accent1"/>
+            </a:fillRef>
+            <a:effectRef idx="1">
+              <a:schemeClr val="accent1"/>
+            </a:effectRef>
+            <a:fontRef idx="minor">
+              <a:schemeClr val="tx1"/>
+            </a:fontRef>
+          </p:style>
+        </p:cxnSp>
+      </p:grpSp>
+      <p:grpSp>
+        <p:nvGrpSpPr>
+          <p:cNvPr id="129" name="Group 128">
+            <a:extLst>
+              <a:ext uri="{FF2B5EF4-FFF2-40B4-BE49-F238E27FC236}">
+                <a16:creationId xmlns:a16="http://schemas.microsoft.com/office/drawing/2014/main" id="{519A3605-759D-F443-A600-CAD4E486ACF0}"/>
+              </a:ext>
+            </a:extLst>
+          </p:cNvPr>
+          <p:cNvGrpSpPr/>
+          <p:nvPr/>
+        </p:nvGrpSpPr>
+        <p:grpSpPr>
+          <a:xfrm>
+            <a:off x="2237736" y="5726736"/>
+            <a:ext cx="2691817" cy="380995"/>
+            <a:chOff x="2284149" y="3804135"/>
+            <a:chExt cx="2106792" cy="310666"/>
+          </a:xfrm>
+        </p:grpSpPr>
+        <p:cxnSp>
+          <p:nvCxnSpPr>
+            <p:cNvPr id="130" name="Straight Connector 129">
+              <a:extLst>
+                <a:ext uri="{FF2B5EF4-FFF2-40B4-BE49-F238E27FC236}">
+                  <a16:creationId xmlns:a16="http://schemas.microsoft.com/office/drawing/2014/main" id="{DE05E8B0-5C71-5B7A-DD76-15A9A1ECD3DF}"/>
+                </a:ext>
+              </a:extLst>
+            </p:cNvPr>
+            <p:cNvCxnSpPr>
+              <a:cxnSpLocks/>
+            </p:cNvCxnSpPr>
+            <p:nvPr/>
+          </p:nvCxnSpPr>
+          <p:spPr>
+            <a:xfrm flipV="1">
+              <a:off x="2284149" y="3804138"/>
+              <a:ext cx="0" cy="310663"/>
+            </a:xfrm>
+            <a:prstGeom prst="line">
+              <a:avLst/>
+            </a:prstGeom>
+            <a:ln>
+              <a:solidFill>
+                <a:schemeClr val="accent6">
+                  <a:lumMod val="60000"/>
+                  <a:lumOff val="40000"/>
+                </a:schemeClr>
+              </a:solidFill>
+            </a:ln>
+          </p:spPr>
+          <p:style>
+            <a:lnRef idx="2">
+              <a:schemeClr val="accent1"/>
+            </a:lnRef>
+            <a:fillRef idx="0">
+              <a:schemeClr val="accent1"/>
+            </a:fillRef>
+            <a:effectRef idx="1">
+              <a:schemeClr val="accent1"/>
+            </a:effectRef>
+            <a:fontRef idx="minor">
+              <a:schemeClr val="tx1"/>
+            </a:fontRef>
+          </p:style>
+        </p:cxnSp>
+        <p:cxnSp>
+          <p:nvCxnSpPr>
+            <p:cNvPr id="131" name="Straight Connector 130">
+              <a:extLst>
+                <a:ext uri="{FF2B5EF4-FFF2-40B4-BE49-F238E27FC236}">
+                  <a16:creationId xmlns:a16="http://schemas.microsoft.com/office/drawing/2014/main" id="{242A89B5-CE03-580B-5953-DFED99BC87EB}"/>
+                </a:ext>
+              </a:extLst>
+            </p:cNvPr>
+            <p:cNvCxnSpPr>
+              <a:cxnSpLocks/>
+            </p:cNvCxnSpPr>
+            <p:nvPr/>
+          </p:nvCxnSpPr>
+          <p:spPr>
+            <a:xfrm flipH="1">
+              <a:off x="2284149" y="3804135"/>
+              <a:ext cx="2106792" cy="0"/>
+            </a:xfrm>
+            <a:prstGeom prst="line">
+              <a:avLst/>
+            </a:prstGeom>
+            <a:ln>
+              <a:solidFill>
+                <a:schemeClr val="accent6">
+                  <a:lumMod val="60000"/>
+                  <a:lumOff val="40000"/>
+                </a:schemeClr>
+              </a:solidFill>
+            </a:ln>
+          </p:spPr>
+          <p:style>
+            <a:lnRef idx="2">
+              <a:schemeClr val="accent1"/>
+            </a:lnRef>
+            <a:fillRef idx="0">
+              <a:schemeClr val="accent1"/>
+            </a:fillRef>
+            <a:effectRef idx="1">
+              <a:schemeClr val="accent1"/>
+            </a:effectRef>
+            <a:fontRef idx="minor">
+              <a:schemeClr val="tx1"/>
+            </a:fontRef>
+          </p:style>
+        </p:cxnSp>
+        <p:cxnSp>
+          <p:nvCxnSpPr>
+            <p:cNvPr id="132" name="Straight Connector 131">
+              <a:extLst>
+                <a:ext uri="{FF2B5EF4-FFF2-40B4-BE49-F238E27FC236}">
+                  <a16:creationId xmlns:a16="http://schemas.microsoft.com/office/drawing/2014/main" id="{B1580A2A-C6CB-CE2A-0561-0D05C821E484}"/>
+                </a:ext>
+              </a:extLst>
+            </p:cNvPr>
+            <p:cNvCxnSpPr>
+              <a:cxnSpLocks/>
+            </p:cNvCxnSpPr>
+            <p:nvPr/>
+          </p:nvCxnSpPr>
+          <p:spPr>
+            <a:xfrm flipV="1">
+              <a:off x="4387816" y="3804138"/>
+              <a:ext cx="0" cy="310663"/>
+            </a:xfrm>
+            <a:prstGeom prst="line">
+              <a:avLst/>
+            </a:prstGeom>
+            <a:ln>
+              <a:solidFill>
+                <a:schemeClr val="accent6">
+                  <a:lumMod val="60000"/>
+                  <a:lumOff val="40000"/>
+                </a:schemeClr>
+              </a:solidFill>
+            </a:ln>
+          </p:spPr>
+          <p:style>
+            <a:lnRef idx="2">
+              <a:schemeClr val="accent1"/>
+            </a:lnRef>
+            <a:fillRef idx="0">
+              <a:schemeClr val="accent1"/>
+            </a:fillRef>
+            <a:effectRef idx="1">
+              <a:schemeClr val="accent1"/>
+            </a:effectRef>
+            <a:fontRef idx="minor">
+              <a:schemeClr val="tx1"/>
+            </a:fontRef>
+          </p:style>
+        </p:cxnSp>
+      </p:grpSp>
+      <p:sp>
+        <p:nvSpPr>
+          <p:cNvPr id="133" name="TextBox 132">
+            <a:extLst>
+              <a:ext uri="{FF2B5EF4-FFF2-40B4-BE49-F238E27FC236}">
+                <a16:creationId xmlns:a16="http://schemas.microsoft.com/office/drawing/2014/main" id="{2E0EB3C7-F102-A719-370B-0DA8F03E40DD}"/>
+              </a:ext>
+            </a:extLst>
+          </p:cNvPr>
+          <p:cNvSpPr txBox="1"/>
+          <p:nvPr/>
+        </p:nvSpPr>
+        <p:spPr>
+          <a:xfrm>
+            <a:off x="2358491" y="2316689"/>
+            <a:ext cx="1818927" cy="246221"/>
+          </a:xfrm>
+          <a:prstGeom prst="rect">
+            <a:avLst/>
+          </a:prstGeom>
+          <a:noFill/>
+        </p:spPr>
+        <p:txBody>
+          <a:bodyPr wrap="square" rtlCol="0">
+            <a:spAutoFit/>
+          </a:bodyPr>
+          <a:lstStyle/>
+          <a:p>
+            <a:r>
+              <a:rPr lang="en-AU" sz="1000" dirty="0" err="1">
+                <a:solidFill>
+                  <a:srgbClr val="FF0000"/>
+                </a:solidFill>
+              </a:rPr>
+              <a:t>stimulus_count</a:t>
+            </a:r>
+            <a:r>
+              <a:rPr lang="en-AU" sz="1000" dirty="0">
+                <a:solidFill>
+                  <a:srgbClr val="FF0000"/>
+                </a:solidFill>
+              </a:rPr>
+              <a:t> = 3</a:t>
+            </a:r>
+          </a:p>
+        </p:txBody>
+      </p:sp>
+      <p:sp>
+        <p:nvSpPr>
+          <p:cNvPr id="134" name="TextBox 133">
+            <a:extLst>
+              <a:ext uri="{FF2B5EF4-FFF2-40B4-BE49-F238E27FC236}">
+                <a16:creationId xmlns:a16="http://schemas.microsoft.com/office/drawing/2014/main" id="{A0525433-2B09-EB1A-D2F8-A18C1CD73E1C}"/>
+              </a:ext>
+            </a:extLst>
+          </p:cNvPr>
+          <p:cNvSpPr txBox="1"/>
+          <p:nvPr/>
+        </p:nvSpPr>
+        <p:spPr>
+          <a:xfrm>
+            <a:off x="2358490" y="2463088"/>
+            <a:ext cx="1818927" cy="246221"/>
+          </a:xfrm>
+          <a:prstGeom prst="rect">
+            <a:avLst/>
+          </a:prstGeom>
+          <a:noFill/>
+        </p:spPr>
+        <p:txBody>
+          <a:bodyPr wrap="square" rtlCol="0">
+            <a:spAutoFit/>
+          </a:bodyPr>
+          <a:lstStyle/>
+          <a:p>
+            <a:r>
+              <a:rPr lang="en-AU" sz="1000" dirty="0" err="1">
+                <a:solidFill>
+                  <a:srgbClr val="FF0000"/>
+                </a:solidFill>
+              </a:rPr>
+              <a:t>instance_duration</a:t>
+            </a:r>
+            <a:r>
+              <a:rPr lang="en-AU" sz="1000" dirty="0">
+                <a:solidFill>
+                  <a:srgbClr val="FF0000"/>
+                </a:solidFill>
+              </a:rPr>
+              <a:t> = 0.06 s</a:t>
+            </a:r>
+          </a:p>
+        </p:txBody>
+      </p:sp>
+      <p:sp>
+        <p:nvSpPr>
+          <p:cNvPr id="135" name="TextBox 134">
+            <a:extLst>
+              <a:ext uri="{FF2B5EF4-FFF2-40B4-BE49-F238E27FC236}">
+                <a16:creationId xmlns:a16="http://schemas.microsoft.com/office/drawing/2014/main" id="{49FE681E-58A8-1AAF-D4F3-3CE6C8EDC4D9}"/>
+              </a:ext>
+            </a:extLst>
+          </p:cNvPr>
+          <p:cNvSpPr txBox="1"/>
+          <p:nvPr/>
+        </p:nvSpPr>
+        <p:spPr>
+          <a:xfrm>
+            <a:off x="2359425" y="3217872"/>
+            <a:ext cx="2587712" cy="246221"/>
+          </a:xfrm>
+          <a:prstGeom prst="rect">
+            <a:avLst/>
+          </a:prstGeom>
+          <a:noFill/>
+        </p:spPr>
+        <p:txBody>
+          <a:bodyPr wrap="square" rtlCol="0">
+            <a:spAutoFit/>
+          </a:bodyPr>
+          <a:lstStyle/>
+          <a:p>
+            <a:r>
+              <a:rPr lang="en-AU" sz="1000" dirty="0" err="1">
+                <a:solidFill>
+                  <a:srgbClr val="FF0000"/>
+                </a:solidFill>
+              </a:rPr>
+              <a:t>stimulus_repetition_interval</a:t>
+            </a:r>
+            <a:r>
+              <a:rPr lang="en-AU" sz="1000" dirty="0">
+                <a:solidFill>
+                  <a:srgbClr val="FF0000"/>
+                </a:solidFill>
+              </a:rPr>
+              <a:t> = 0.02 s</a:t>
+            </a:r>
+          </a:p>
+        </p:txBody>
+      </p:sp>
+      <p:sp>
+        <p:nvSpPr>
+          <p:cNvPr id="136" name="TextBox 135">
+            <a:extLst>
+              <a:ext uri="{FF2B5EF4-FFF2-40B4-BE49-F238E27FC236}">
+                <a16:creationId xmlns:a16="http://schemas.microsoft.com/office/drawing/2014/main" id="{AEB0D066-B026-B895-1D27-69F0B38A06D4}"/>
+              </a:ext>
+            </a:extLst>
+          </p:cNvPr>
+          <p:cNvSpPr txBox="1"/>
+          <p:nvPr/>
+        </p:nvSpPr>
+        <p:spPr>
+          <a:xfrm>
+            <a:off x="2359425" y="3373227"/>
+            <a:ext cx="2447037" cy="246221"/>
+          </a:xfrm>
+          <a:prstGeom prst="rect">
+            <a:avLst/>
+          </a:prstGeom>
+          <a:noFill/>
+        </p:spPr>
+        <p:txBody>
+          <a:bodyPr wrap="square" rtlCol="0">
+            <a:spAutoFit/>
+          </a:bodyPr>
+          <a:lstStyle/>
+          <a:p>
+            <a:r>
+              <a:rPr lang="en-AU" sz="1000" dirty="0" err="1">
+                <a:solidFill>
+                  <a:srgbClr val="FF0000"/>
+                </a:solidFill>
+              </a:rPr>
+              <a:t>stimulus_repetition_frequency</a:t>
+            </a:r>
+            <a:r>
+              <a:rPr lang="en-AU" sz="1000" dirty="0">
+                <a:solidFill>
+                  <a:srgbClr val="FF0000"/>
+                </a:solidFill>
+              </a:rPr>
+              <a:t> = 50 Hz </a:t>
+            </a:r>
+          </a:p>
+        </p:txBody>
+      </p:sp>
+      <p:grpSp>
+        <p:nvGrpSpPr>
+          <p:cNvPr id="144" name="Group 143">
+            <a:extLst>
+              <a:ext uri="{FF2B5EF4-FFF2-40B4-BE49-F238E27FC236}">
+                <a16:creationId xmlns:a16="http://schemas.microsoft.com/office/drawing/2014/main" id="{B4217BD4-0AFC-DFB8-2140-4EFD84770EB6}"/>
+              </a:ext>
+            </a:extLst>
+          </p:cNvPr>
+          <p:cNvGrpSpPr/>
+          <p:nvPr/>
+        </p:nvGrpSpPr>
+        <p:grpSpPr>
+          <a:xfrm>
+            <a:off x="2433104" y="3188562"/>
+            <a:ext cx="591737" cy="64521"/>
+            <a:chOff x="2492644" y="3165184"/>
+            <a:chExt cx="591737" cy="64521"/>
+          </a:xfrm>
+        </p:grpSpPr>
+        <p:cxnSp>
+          <p:nvCxnSpPr>
+            <p:cNvPr id="137" name="Straight Connector 136">
+              <a:extLst>
+                <a:ext uri="{FF2B5EF4-FFF2-40B4-BE49-F238E27FC236}">
+                  <a16:creationId xmlns:a16="http://schemas.microsoft.com/office/drawing/2014/main" id="{4444E772-FD62-3DFE-7613-50C45B3653C4}"/>
+                </a:ext>
+              </a:extLst>
+            </p:cNvPr>
+            <p:cNvCxnSpPr>
+              <a:cxnSpLocks/>
+            </p:cNvCxnSpPr>
+            <p:nvPr/>
+          </p:nvCxnSpPr>
+          <p:spPr>
+            <a:xfrm flipH="1">
+              <a:off x="2501027" y="3194494"/>
+              <a:ext cx="583354" cy="0"/>
+            </a:xfrm>
+            <a:prstGeom prst="line">
+              <a:avLst/>
+            </a:prstGeom>
+            <a:ln>
+              <a:solidFill>
+                <a:srgbClr val="FF0000"/>
+              </a:solidFill>
+            </a:ln>
+          </p:spPr>
+          <p:style>
+            <a:lnRef idx="2">
+              <a:schemeClr val="accent1"/>
+            </a:lnRef>
+            <a:fillRef idx="0">
+              <a:schemeClr val="accent1"/>
+            </a:fillRef>
+            <a:effectRef idx="1">
+              <a:schemeClr val="accent1"/>
+            </a:effectRef>
+            <a:fontRef idx="minor">
+              <a:schemeClr val="tx1"/>
+            </a:fontRef>
+          </p:style>
+        </p:cxnSp>
+        <p:cxnSp>
+          <p:nvCxnSpPr>
+            <p:cNvPr id="139" name="Straight Connector 138">
+              <a:extLst>
+                <a:ext uri="{FF2B5EF4-FFF2-40B4-BE49-F238E27FC236}">
+                  <a16:creationId xmlns:a16="http://schemas.microsoft.com/office/drawing/2014/main" id="{0D38C990-48A1-660D-452B-824B59A65AEA}"/>
+                </a:ext>
+              </a:extLst>
+            </p:cNvPr>
+            <p:cNvCxnSpPr>
+              <a:cxnSpLocks/>
+            </p:cNvCxnSpPr>
+            <p:nvPr/>
+          </p:nvCxnSpPr>
+          <p:spPr>
+            <a:xfrm flipV="1">
+              <a:off x="3079800" y="3165184"/>
+              <a:ext cx="0" cy="64521"/>
+            </a:xfrm>
+            <a:prstGeom prst="line">
+              <a:avLst/>
+            </a:prstGeom>
+            <a:ln>
+              <a:solidFill>
+                <a:srgbClr val="FF0000"/>
+              </a:solidFill>
+            </a:ln>
+          </p:spPr>
+          <p:style>
+            <a:lnRef idx="2">
+              <a:schemeClr val="accent1"/>
+            </a:lnRef>
+            <a:fillRef idx="0">
+              <a:schemeClr val="accent1"/>
+            </a:fillRef>
+            <a:effectRef idx="1">
+              <a:schemeClr val="accent1"/>
+            </a:effectRef>
+            <a:fontRef idx="minor">
+              <a:schemeClr val="tx1"/>
+            </a:fontRef>
+          </p:style>
+        </p:cxnSp>
+        <p:cxnSp>
+          <p:nvCxnSpPr>
+            <p:cNvPr id="142" name="Straight Connector 141">
+              <a:extLst>
+                <a:ext uri="{FF2B5EF4-FFF2-40B4-BE49-F238E27FC236}">
+                  <a16:creationId xmlns:a16="http://schemas.microsoft.com/office/drawing/2014/main" id="{30A2C461-3C88-F055-9B99-2211D380E499}"/>
+                </a:ext>
+              </a:extLst>
+            </p:cNvPr>
+            <p:cNvCxnSpPr>
+              <a:cxnSpLocks/>
+            </p:cNvCxnSpPr>
+            <p:nvPr/>
+          </p:nvCxnSpPr>
+          <p:spPr>
+            <a:xfrm flipV="1">
+              <a:off x="2492644" y="3165184"/>
+              <a:ext cx="0" cy="64521"/>
+            </a:xfrm>
+            <a:prstGeom prst="line">
+              <a:avLst/>
+            </a:prstGeom>
+            <a:ln>
+              <a:solidFill>
+                <a:srgbClr val="FF0000"/>
+              </a:solidFill>
+            </a:ln>
+          </p:spPr>
+          <p:style>
+            <a:lnRef idx="2">
+              <a:schemeClr val="accent1"/>
+            </a:lnRef>
+            <a:fillRef idx="0">
+              <a:schemeClr val="accent1"/>
+            </a:fillRef>
+            <a:effectRef idx="1">
+              <a:schemeClr val="accent1"/>
+            </a:effectRef>
+            <a:fontRef idx="minor">
+              <a:schemeClr val="tx1"/>
+            </a:fontRef>
+          </p:style>
+        </p:cxnSp>
+      </p:grpSp>
+      <p:grpSp>
+        <p:nvGrpSpPr>
+          <p:cNvPr id="145" name="Group 144">
+            <a:extLst>
+              <a:ext uri="{FF2B5EF4-FFF2-40B4-BE49-F238E27FC236}">
+                <a16:creationId xmlns:a16="http://schemas.microsoft.com/office/drawing/2014/main" id="{183FA59D-D29C-E430-0A57-F6D828DE92C6}"/>
+              </a:ext>
+            </a:extLst>
+          </p:cNvPr>
+          <p:cNvGrpSpPr/>
+          <p:nvPr/>
+        </p:nvGrpSpPr>
+        <p:grpSpPr>
+          <a:xfrm>
+            <a:off x="2300500" y="4774184"/>
+            <a:ext cx="661770" cy="64521"/>
+            <a:chOff x="2492644" y="3165184"/>
+            <a:chExt cx="591737" cy="64521"/>
+          </a:xfrm>
+        </p:grpSpPr>
+        <p:cxnSp>
+          <p:nvCxnSpPr>
+            <p:cNvPr id="146" name="Straight Connector 145">
+              <a:extLst>
+                <a:ext uri="{FF2B5EF4-FFF2-40B4-BE49-F238E27FC236}">
+                  <a16:creationId xmlns:a16="http://schemas.microsoft.com/office/drawing/2014/main" id="{CEFE1019-BBF0-F606-B187-77369E36394D}"/>
+                </a:ext>
+              </a:extLst>
+            </p:cNvPr>
+            <p:cNvCxnSpPr>
+              <a:cxnSpLocks/>
+            </p:cNvCxnSpPr>
+            <p:nvPr/>
+          </p:nvCxnSpPr>
+          <p:spPr>
+            <a:xfrm flipH="1">
+              <a:off x="2501027" y="3194494"/>
+              <a:ext cx="583354" cy="0"/>
+            </a:xfrm>
+            <a:prstGeom prst="line">
+              <a:avLst/>
+            </a:prstGeom>
+            <a:ln>
+              <a:solidFill>
+                <a:schemeClr val="accent1">
+                  <a:lumMod val="60000"/>
+                  <a:lumOff val="40000"/>
+                </a:schemeClr>
+              </a:solidFill>
+            </a:ln>
+          </p:spPr>
+          <p:style>
+            <a:lnRef idx="2">
+              <a:schemeClr val="accent1"/>
+            </a:lnRef>
+            <a:fillRef idx="0">
+              <a:schemeClr val="accent1"/>
+            </a:fillRef>
+            <a:effectRef idx="1">
+              <a:schemeClr val="accent1"/>
+            </a:effectRef>
+            <a:fontRef idx="minor">
+              <a:schemeClr val="tx1"/>
+            </a:fontRef>
+          </p:style>
+        </p:cxnSp>
+        <p:cxnSp>
+          <p:nvCxnSpPr>
+            <p:cNvPr id="147" name="Straight Connector 146">
+              <a:extLst>
+                <a:ext uri="{FF2B5EF4-FFF2-40B4-BE49-F238E27FC236}">
+                  <a16:creationId xmlns:a16="http://schemas.microsoft.com/office/drawing/2014/main" id="{A6DF9BA4-D6B5-9F8C-5C17-6029E5C7F780}"/>
+                </a:ext>
+              </a:extLst>
+            </p:cNvPr>
+            <p:cNvCxnSpPr>
+              <a:cxnSpLocks/>
+            </p:cNvCxnSpPr>
+            <p:nvPr/>
+          </p:nvCxnSpPr>
+          <p:spPr>
+            <a:xfrm flipV="1">
+              <a:off x="3079800" y="3165184"/>
+              <a:ext cx="0" cy="64521"/>
+            </a:xfrm>
+            <a:prstGeom prst="line">
+              <a:avLst/>
+            </a:prstGeom>
+            <a:ln>
+              <a:solidFill>
+                <a:schemeClr val="accent1">
+                  <a:lumMod val="60000"/>
+                  <a:lumOff val="40000"/>
+                </a:schemeClr>
+              </a:solidFill>
+            </a:ln>
+          </p:spPr>
+          <p:style>
+            <a:lnRef idx="2">
+              <a:schemeClr val="accent1"/>
+            </a:lnRef>
+            <a:fillRef idx="0">
+              <a:schemeClr val="accent1"/>
+            </a:fillRef>
+            <a:effectRef idx="1">
+              <a:schemeClr val="accent1"/>
+            </a:effectRef>
+            <a:fontRef idx="minor">
+              <a:schemeClr val="tx1"/>
+            </a:fontRef>
+          </p:style>
+        </p:cxnSp>
+        <p:cxnSp>
+          <p:nvCxnSpPr>
+            <p:cNvPr id="148" name="Straight Connector 147">
+              <a:extLst>
+                <a:ext uri="{FF2B5EF4-FFF2-40B4-BE49-F238E27FC236}">
+                  <a16:creationId xmlns:a16="http://schemas.microsoft.com/office/drawing/2014/main" id="{71866753-C95A-88CA-54D8-12D6F3FC7419}"/>
+                </a:ext>
+              </a:extLst>
+            </p:cNvPr>
+            <p:cNvCxnSpPr>
+              <a:cxnSpLocks/>
+            </p:cNvCxnSpPr>
+            <p:nvPr/>
+          </p:nvCxnSpPr>
+          <p:spPr>
+            <a:xfrm flipV="1">
+              <a:off x="2492644" y="3165184"/>
+              <a:ext cx="0" cy="64521"/>
+            </a:xfrm>
+            <a:prstGeom prst="line">
+              <a:avLst/>
+            </a:prstGeom>
+            <a:ln>
+              <a:solidFill>
+                <a:schemeClr val="accent1">
+                  <a:lumMod val="60000"/>
+                  <a:lumOff val="40000"/>
+                </a:schemeClr>
+              </a:solidFill>
+            </a:ln>
+          </p:spPr>
+          <p:style>
+            <a:lnRef idx="2">
+              <a:schemeClr val="accent1"/>
+            </a:lnRef>
+            <a:fillRef idx="0">
+              <a:schemeClr val="accent1"/>
+            </a:fillRef>
+            <a:effectRef idx="1">
+              <a:schemeClr val="accent1"/>
+            </a:effectRef>
+            <a:fontRef idx="minor">
+              <a:schemeClr val="tx1"/>
+            </a:fontRef>
+          </p:style>
+        </p:cxnSp>
+      </p:grpSp>
+      <p:cxnSp>
+        <p:nvCxnSpPr>
+          <p:cNvPr id="149" name="Straight Connector 148">
+            <a:extLst>
+              <a:ext uri="{FF2B5EF4-FFF2-40B4-BE49-F238E27FC236}">
+                <a16:creationId xmlns:a16="http://schemas.microsoft.com/office/drawing/2014/main" id="{F0B63FAB-F25F-3F96-A7B4-9679EC66BA39}"/>
+              </a:ext>
+            </a:extLst>
+          </p:cNvPr>
+          <p:cNvCxnSpPr>
+            <a:cxnSpLocks/>
+          </p:cNvCxnSpPr>
+          <p:nvPr/>
+        </p:nvCxnSpPr>
+        <p:spPr>
+          <a:xfrm>
+            <a:off x="0" y="2168773"/>
+            <a:ext cx="12192000" cy="0"/>
+          </a:xfrm>
+          <a:prstGeom prst="line">
+            <a:avLst/>
+          </a:prstGeom>
+          <a:ln>
+            <a:solidFill>
+              <a:schemeClr val="accent5">
+                <a:lumMod val="20000"/>
+                <a:lumOff val="80000"/>
+              </a:schemeClr>
+            </a:solidFill>
+          </a:ln>
+        </p:spPr>
+        <p:style>
+          <a:lnRef idx="2">
+            <a:schemeClr val="accent1"/>
+          </a:lnRef>
+          <a:fillRef idx="0">
+            <a:schemeClr val="accent1"/>
+          </a:fillRef>
+          <a:effectRef idx="1">
+            <a:schemeClr val="accent1"/>
+          </a:effectRef>
+          <a:fontRef idx="minor">
+            <a:schemeClr val="tx1"/>
+          </a:fontRef>
+        </p:style>
+      </p:cxnSp>
+      <p:sp>
+        <p:nvSpPr>
+          <p:cNvPr id="152" name="TextBox 151">
+            <a:extLst>
+              <a:ext uri="{FF2B5EF4-FFF2-40B4-BE49-F238E27FC236}">
+                <a16:creationId xmlns:a16="http://schemas.microsoft.com/office/drawing/2014/main" id="{C43CBC91-4DDF-EB16-6A88-4F355B0E0622}"/>
+              </a:ext>
+            </a:extLst>
+          </p:cNvPr>
+          <p:cNvSpPr txBox="1"/>
+          <p:nvPr/>
+        </p:nvSpPr>
+        <p:spPr>
+          <a:xfrm>
+            <a:off x="83636" y="584281"/>
+            <a:ext cx="1818926" cy="461665"/>
+          </a:xfrm>
+          <a:prstGeom prst="rect">
+            <a:avLst/>
+          </a:prstGeom>
+          <a:noFill/>
+        </p:spPr>
+        <p:txBody>
+          <a:bodyPr wrap="square" rtlCol="0">
+            <a:spAutoFit/>
+          </a:bodyPr>
+          <a:lstStyle/>
+          <a:p>
+            <a:r>
+              <a:rPr lang="en-AU" sz="1200" dirty="0"/>
+              <a:t>Layer -1</a:t>
+            </a:r>
+          </a:p>
+          <a:p>
+            <a:r>
+              <a:rPr lang="en-AU" sz="1200" dirty="0"/>
+              <a:t>Stimulus characteristics</a:t>
+            </a:r>
+          </a:p>
+        </p:txBody>
+      </p:sp>
+      <p:cxnSp>
+        <p:nvCxnSpPr>
+          <p:cNvPr id="153" name="Straight Connector 152">
+            <a:extLst>
+              <a:ext uri="{FF2B5EF4-FFF2-40B4-BE49-F238E27FC236}">
+                <a16:creationId xmlns:a16="http://schemas.microsoft.com/office/drawing/2014/main" id="{3ECAC32E-0DCA-66C8-25A8-CBE6A779DD81}"/>
+              </a:ext>
+            </a:extLst>
+          </p:cNvPr>
+          <p:cNvCxnSpPr>
+            <a:cxnSpLocks/>
+          </p:cNvCxnSpPr>
+          <p:nvPr/>
+        </p:nvCxnSpPr>
+        <p:spPr>
+          <a:xfrm>
+            <a:off x="0" y="3763112"/>
+            <a:ext cx="12192000" cy="0"/>
+          </a:xfrm>
+          <a:prstGeom prst="line">
+            <a:avLst/>
+          </a:prstGeom>
+          <a:ln>
+            <a:solidFill>
+              <a:schemeClr val="accent5">
+                <a:lumMod val="20000"/>
+                <a:lumOff val="80000"/>
+              </a:schemeClr>
+            </a:solidFill>
+          </a:ln>
+        </p:spPr>
+        <p:style>
+          <a:lnRef idx="2">
+            <a:schemeClr val="accent1"/>
+          </a:lnRef>
+          <a:fillRef idx="0">
+            <a:schemeClr val="accent1"/>
+          </a:fillRef>
+          <a:effectRef idx="1">
+            <a:schemeClr val="accent1"/>
+          </a:effectRef>
+          <a:fontRef idx="minor">
+            <a:schemeClr val="tx1"/>
+          </a:fontRef>
+        </p:style>
+      </p:cxnSp>
+      <p:cxnSp>
+        <p:nvCxnSpPr>
+          <p:cNvPr id="154" name="Straight Connector 153">
+            <a:extLst>
+              <a:ext uri="{FF2B5EF4-FFF2-40B4-BE49-F238E27FC236}">
+                <a16:creationId xmlns:a16="http://schemas.microsoft.com/office/drawing/2014/main" id="{09147E9E-DF2A-BF5F-DA28-F19FC828E715}"/>
+              </a:ext>
+            </a:extLst>
+          </p:cNvPr>
+          <p:cNvCxnSpPr>
+            <a:cxnSpLocks/>
+          </p:cNvCxnSpPr>
+          <p:nvPr/>
+        </p:nvCxnSpPr>
+        <p:spPr>
+          <a:xfrm>
+            <a:off x="0" y="5292969"/>
+            <a:ext cx="12192000" cy="0"/>
+          </a:xfrm>
+          <a:prstGeom prst="line">
+            <a:avLst/>
+          </a:prstGeom>
+          <a:ln>
+            <a:solidFill>
+              <a:schemeClr val="accent5">
+                <a:lumMod val="20000"/>
+                <a:lumOff val="80000"/>
+              </a:schemeClr>
+            </a:solidFill>
+          </a:ln>
+        </p:spPr>
+        <p:style>
+          <a:lnRef idx="2">
+            <a:schemeClr val="accent1"/>
+          </a:lnRef>
+          <a:fillRef idx="0">
+            <a:schemeClr val="accent1"/>
+          </a:fillRef>
+          <a:effectRef idx="1">
+            <a:schemeClr val="accent1"/>
+          </a:effectRef>
+          <a:fontRef idx="minor">
+            <a:schemeClr val="tx1"/>
+          </a:fontRef>
+        </p:style>
+      </p:cxnSp>
+      <p:grpSp>
+        <p:nvGrpSpPr>
+          <p:cNvPr id="155" name="Group 154">
+            <a:extLst>
+              <a:ext uri="{FF2B5EF4-FFF2-40B4-BE49-F238E27FC236}">
+                <a16:creationId xmlns:a16="http://schemas.microsoft.com/office/drawing/2014/main" id="{16216332-C9B1-0207-B5DE-A8AF242BC356}"/>
+              </a:ext>
+            </a:extLst>
+          </p:cNvPr>
+          <p:cNvGrpSpPr/>
+          <p:nvPr/>
+        </p:nvGrpSpPr>
+        <p:grpSpPr>
+          <a:xfrm>
+            <a:off x="3359323" y="1823821"/>
+            <a:ext cx="270548" cy="52803"/>
+            <a:chOff x="2492644" y="3165184"/>
+            <a:chExt cx="591737" cy="64521"/>
+          </a:xfrm>
+        </p:grpSpPr>
+        <p:cxnSp>
+          <p:nvCxnSpPr>
+            <p:cNvPr id="156" name="Straight Connector 155">
+              <a:extLst>
+                <a:ext uri="{FF2B5EF4-FFF2-40B4-BE49-F238E27FC236}">
+                  <a16:creationId xmlns:a16="http://schemas.microsoft.com/office/drawing/2014/main" id="{E6721B58-EB7E-8E53-CC6E-0F3EFDB5D5D0}"/>
+                </a:ext>
+              </a:extLst>
+            </p:cNvPr>
+            <p:cNvCxnSpPr>
+              <a:cxnSpLocks/>
+            </p:cNvCxnSpPr>
+            <p:nvPr/>
+          </p:nvCxnSpPr>
+          <p:spPr>
+            <a:xfrm flipH="1">
+              <a:off x="2501027" y="3194494"/>
+              <a:ext cx="583354" cy="0"/>
+            </a:xfrm>
+            <a:prstGeom prst="line">
+              <a:avLst/>
+            </a:prstGeom>
+            <a:ln>
+              <a:solidFill>
+                <a:schemeClr val="tx1"/>
+              </a:solidFill>
+            </a:ln>
+          </p:spPr>
+          <p:style>
+            <a:lnRef idx="2">
+              <a:schemeClr val="accent1"/>
+            </a:lnRef>
+            <a:fillRef idx="0">
+              <a:schemeClr val="accent1"/>
+            </a:fillRef>
+            <a:effectRef idx="1">
+              <a:schemeClr val="accent1"/>
+            </a:effectRef>
+            <a:fontRef idx="minor">
+              <a:schemeClr val="tx1"/>
+            </a:fontRef>
+          </p:style>
+        </p:cxnSp>
+        <p:cxnSp>
+          <p:nvCxnSpPr>
+            <p:cNvPr id="157" name="Straight Connector 156">
+              <a:extLst>
+                <a:ext uri="{FF2B5EF4-FFF2-40B4-BE49-F238E27FC236}">
+                  <a16:creationId xmlns:a16="http://schemas.microsoft.com/office/drawing/2014/main" id="{4CBEEFD0-3D2B-DE73-2311-50C3E13D7FDF}"/>
+                </a:ext>
+              </a:extLst>
+            </p:cNvPr>
+            <p:cNvCxnSpPr>
+              <a:cxnSpLocks/>
+            </p:cNvCxnSpPr>
+            <p:nvPr/>
+          </p:nvCxnSpPr>
+          <p:spPr>
+            <a:xfrm flipV="1">
+              <a:off x="3079800" y="3165184"/>
+              <a:ext cx="0" cy="64521"/>
+            </a:xfrm>
+            <a:prstGeom prst="line">
+              <a:avLst/>
+            </a:prstGeom>
+            <a:ln>
+              <a:solidFill>
+                <a:schemeClr val="tx1"/>
+              </a:solidFill>
+            </a:ln>
+          </p:spPr>
+          <p:style>
+            <a:lnRef idx="2">
+              <a:schemeClr val="accent1"/>
+            </a:lnRef>
+            <a:fillRef idx="0">
+              <a:schemeClr val="accent1"/>
+            </a:fillRef>
+            <a:effectRef idx="1">
+              <a:schemeClr val="accent1"/>
+            </a:effectRef>
+            <a:fontRef idx="minor">
+              <a:schemeClr val="tx1"/>
+            </a:fontRef>
+          </p:style>
+        </p:cxnSp>
+        <p:cxnSp>
+          <p:nvCxnSpPr>
+            <p:cNvPr id="158" name="Straight Connector 157">
+              <a:extLst>
+                <a:ext uri="{FF2B5EF4-FFF2-40B4-BE49-F238E27FC236}">
+                  <a16:creationId xmlns:a16="http://schemas.microsoft.com/office/drawing/2014/main" id="{B2F0F5A4-AFB3-B39B-7D26-D7F92F3A4697}"/>
+                </a:ext>
+              </a:extLst>
+            </p:cNvPr>
+            <p:cNvCxnSpPr>
+              <a:cxnSpLocks/>
+            </p:cNvCxnSpPr>
+            <p:nvPr/>
+          </p:nvCxnSpPr>
+          <p:spPr>
+            <a:xfrm flipV="1">
+              <a:off x="2492644" y="3165184"/>
+              <a:ext cx="0" cy="64521"/>
+            </a:xfrm>
+            <a:prstGeom prst="line">
+              <a:avLst/>
+            </a:prstGeom>
+            <a:ln>
+              <a:solidFill>
+                <a:schemeClr val="tx1"/>
+              </a:solidFill>
+            </a:ln>
+          </p:spPr>
+          <p:style>
+            <a:lnRef idx="2">
+              <a:schemeClr val="accent1"/>
+            </a:lnRef>
+            <a:fillRef idx="0">
+              <a:schemeClr val="accent1"/>
+            </a:fillRef>
+            <a:effectRef idx="1">
+              <a:schemeClr val="accent1"/>
+            </a:effectRef>
+            <a:fontRef idx="minor">
+              <a:schemeClr val="tx1"/>
+            </a:fontRef>
+          </p:style>
+        </p:cxnSp>
+      </p:grpSp>
+      <p:sp>
+        <p:nvSpPr>
+          <p:cNvPr id="159" name="TextBox 158">
+            <a:extLst>
+              <a:ext uri="{FF2B5EF4-FFF2-40B4-BE49-F238E27FC236}">
+                <a16:creationId xmlns:a16="http://schemas.microsoft.com/office/drawing/2014/main" id="{7A218FAD-1F6C-6D20-F0AB-E83B93D31171}"/>
+              </a:ext>
+            </a:extLst>
+          </p:cNvPr>
+          <p:cNvSpPr txBox="1"/>
+          <p:nvPr/>
+        </p:nvSpPr>
+        <p:spPr>
+          <a:xfrm>
+            <a:off x="118817" y="2644346"/>
+            <a:ext cx="1670538" cy="461665"/>
+          </a:xfrm>
+          <a:prstGeom prst="rect">
+            <a:avLst/>
+          </a:prstGeom>
+          <a:noFill/>
+        </p:spPr>
+        <p:txBody>
+          <a:bodyPr wrap="square" rtlCol="0">
+            <a:spAutoFit/>
+          </a:bodyPr>
+          <a:lstStyle/>
+          <a:p>
+            <a:r>
+              <a:rPr lang="en-AU" sz="1200" dirty="0">
+                <a:solidFill>
+                  <a:srgbClr val="FF0000"/>
+                </a:solidFill>
+              </a:rPr>
+              <a:t>Layer 0</a:t>
+            </a:r>
+          </a:p>
+          <a:p>
+            <a:r>
+              <a:rPr lang="en-AU" sz="1200" dirty="0">
+                <a:solidFill>
+                  <a:srgbClr val="FF0000"/>
+                </a:solidFill>
+              </a:rPr>
+              <a:t>Instance [burst, train]</a:t>
+            </a:r>
+          </a:p>
+        </p:txBody>
+      </p:sp>
+      <p:sp>
+        <p:nvSpPr>
+          <p:cNvPr id="160" name="TextBox 159">
+            <a:extLst>
+              <a:ext uri="{FF2B5EF4-FFF2-40B4-BE49-F238E27FC236}">
+                <a16:creationId xmlns:a16="http://schemas.microsoft.com/office/drawing/2014/main" id="{DDDC2114-0150-EC4C-2002-8AAE2251DF5C}"/>
+              </a:ext>
+            </a:extLst>
+          </p:cNvPr>
+          <p:cNvSpPr txBox="1"/>
+          <p:nvPr/>
+        </p:nvSpPr>
+        <p:spPr>
+          <a:xfrm>
+            <a:off x="3031984" y="1888466"/>
+            <a:ext cx="1818927" cy="246221"/>
+          </a:xfrm>
+          <a:prstGeom prst="rect">
+            <a:avLst/>
+          </a:prstGeom>
+          <a:noFill/>
+        </p:spPr>
+        <p:txBody>
+          <a:bodyPr wrap="square" rtlCol="0">
+            <a:spAutoFit/>
+          </a:bodyPr>
+          <a:lstStyle/>
+          <a:p>
+            <a:r>
+              <a:rPr lang="en-AU" sz="1000" dirty="0" err="1"/>
+              <a:t>stimulus_duration</a:t>
+            </a:r>
+            <a:r>
+              <a:rPr lang="en-AU" sz="1000" dirty="0"/>
+              <a:t> = 0.002 s</a:t>
+            </a:r>
+          </a:p>
+        </p:txBody>
+      </p:sp>
+      <p:grpSp>
+        <p:nvGrpSpPr>
+          <p:cNvPr id="161" name="Group 160">
+            <a:extLst>
+              <a:ext uri="{FF2B5EF4-FFF2-40B4-BE49-F238E27FC236}">
+                <a16:creationId xmlns:a16="http://schemas.microsoft.com/office/drawing/2014/main" id="{1EB76D9C-6FE0-AB29-349B-51626E886244}"/>
+              </a:ext>
+            </a:extLst>
+          </p:cNvPr>
+          <p:cNvGrpSpPr/>
+          <p:nvPr/>
+        </p:nvGrpSpPr>
+        <p:grpSpPr>
+          <a:xfrm rot="16200000">
+            <a:off x="2092262" y="1289483"/>
+            <a:ext cx="928975" cy="69416"/>
+            <a:chOff x="2492644" y="3165184"/>
+            <a:chExt cx="591737" cy="64521"/>
+          </a:xfrm>
+        </p:grpSpPr>
+        <p:cxnSp>
+          <p:nvCxnSpPr>
+            <p:cNvPr id="162" name="Straight Connector 161">
+              <a:extLst>
+                <a:ext uri="{FF2B5EF4-FFF2-40B4-BE49-F238E27FC236}">
+                  <a16:creationId xmlns:a16="http://schemas.microsoft.com/office/drawing/2014/main" id="{EDE6B272-E0C7-A40B-708C-C3E2927BDCEB}"/>
+                </a:ext>
+              </a:extLst>
+            </p:cNvPr>
+            <p:cNvCxnSpPr>
+              <a:cxnSpLocks/>
+            </p:cNvCxnSpPr>
+            <p:nvPr/>
+          </p:nvCxnSpPr>
+          <p:spPr>
+            <a:xfrm flipH="1">
+              <a:off x="2501027" y="3194494"/>
+              <a:ext cx="583354" cy="0"/>
+            </a:xfrm>
+            <a:prstGeom prst="line">
+              <a:avLst/>
+            </a:prstGeom>
+            <a:ln>
+              <a:solidFill>
+                <a:schemeClr val="tx1"/>
+              </a:solidFill>
+            </a:ln>
+          </p:spPr>
+          <p:style>
+            <a:lnRef idx="2">
+              <a:schemeClr val="accent1"/>
+            </a:lnRef>
+            <a:fillRef idx="0">
+              <a:schemeClr val="accent1"/>
+            </a:fillRef>
+            <a:effectRef idx="1">
+              <a:schemeClr val="accent1"/>
+            </a:effectRef>
+            <a:fontRef idx="minor">
+              <a:schemeClr val="tx1"/>
+            </a:fontRef>
+          </p:style>
+        </p:cxnSp>
+        <p:cxnSp>
+          <p:nvCxnSpPr>
+            <p:cNvPr id="163" name="Straight Connector 162">
+              <a:extLst>
+                <a:ext uri="{FF2B5EF4-FFF2-40B4-BE49-F238E27FC236}">
+                  <a16:creationId xmlns:a16="http://schemas.microsoft.com/office/drawing/2014/main" id="{D1117EC5-412C-D8DD-1607-CF2D1FA72AB8}"/>
+                </a:ext>
+              </a:extLst>
+            </p:cNvPr>
+            <p:cNvCxnSpPr>
+              <a:cxnSpLocks/>
+            </p:cNvCxnSpPr>
+            <p:nvPr/>
+          </p:nvCxnSpPr>
+          <p:spPr>
+            <a:xfrm flipV="1">
+              <a:off x="3079800" y="3165184"/>
+              <a:ext cx="0" cy="64521"/>
+            </a:xfrm>
+            <a:prstGeom prst="line">
+              <a:avLst/>
+            </a:prstGeom>
+            <a:ln>
+              <a:solidFill>
+                <a:schemeClr val="tx1"/>
+              </a:solidFill>
+            </a:ln>
+          </p:spPr>
+          <p:style>
+            <a:lnRef idx="2">
+              <a:schemeClr val="accent1"/>
+            </a:lnRef>
+            <a:fillRef idx="0">
+              <a:schemeClr val="accent1"/>
+            </a:fillRef>
+            <a:effectRef idx="1">
+              <a:schemeClr val="accent1"/>
+            </a:effectRef>
+            <a:fontRef idx="minor">
+              <a:schemeClr val="tx1"/>
+            </a:fontRef>
+          </p:style>
+        </p:cxnSp>
+        <p:cxnSp>
+          <p:nvCxnSpPr>
+            <p:cNvPr id="164" name="Straight Connector 163">
+              <a:extLst>
+                <a:ext uri="{FF2B5EF4-FFF2-40B4-BE49-F238E27FC236}">
+                  <a16:creationId xmlns:a16="http://schemas.microsoft.com/office/drawing/2014/main" id="{A15C2303-36F4-8EA5-0D4E-4C658F1EAE8F}"/>
+                </a:ext>
+              </a:extLst>
+            </p:cNvPr>
+            <p:cNvCxnSpPr>
+              <a:cxnSpLocks/>
+            </p:cNvCxnSpPr>
+            <p:nvPr/>
+          </p:nvCxnSpPr>
+          <p:spPr>
+            <a:xfrm flipV="1">
+              <a:off x="2492644" y="3165184"/>
+              <a:ext cx="0" cy="64521"/>
+            </a:xfrm>
+            <a:prstGeom prst="line">
+              <a:avLst/>
+            </a:prstGeom>
+            <a:ln>
+              <a:solidFill>
+                <a:schemeClr val="tx1"/>
+              </a:solidFill>
+            </a:ln>
+          </p:spPr>
+          <p:style>
+            <a:lnRef idx="2">
+              <a:schemeClr val="accent1"/>
+            </a:lnRef>
+            <a:fillRef idx="0">
+              <a:schemeClr val="accent1"/>
+            </a:fillRef>
+            <a:effectRef idx="1">
+              <a:schemeClr val="accent1"/>
+            </a:effectRef>
+            <a:fontRef idx="minor">
+              <a:schemeClr val="tx1"/>
+            </a:fontRef>
+          </p:style>
+        </p:cxnSp>
+      </p:grpSp>
+      <p:sp>
+        <p:nvSpPr>
+          <p:cNvPr id="165" name="TextBox 164">
+            <a:extLst>
+              <a:ext uri="{FF2B5EF4-FFF2-40B4-BE49-F238E27FC236}">
+                <a16:creationId xmlns:a16="http://schemas.microsoft.com/office/drawing/2014/main" id="{6B23B8AD-A21C-A61A-9DF7-41CBBE71DA23}"/>
+              </a:ext>
+            </a:extLst>
+          </p:cNvPr>
+          <p:cNvSpPr txBox="1"/>
+          <p:nvPr/>
+        </p:nvSpPr>
+        <p:spPr>
+          <a:xfrm>
+            <a:off x="2786354" y="566932"/>
+            <a:ext cx="1818927" cy="400110"/>
+          </a:xfrm>
+          <a:prstGeom prst="rect">
+            <a:avLst/>
+          </a:prstGeom>
+          <a:noFill/>
+        </p:spPr>
+        <p:txBody>
+          <a:bodyPr wrap="square" rtlCol="0">
+            <a:spAutoFit/>
+          </a:bodyPr>
+          <a:lstStyle/>
+          <a:p>
+            <a:r>
+              <a:rPr lang="en-AU" sz="1000" dirty="0" err="1"/>
+              <a:t>stimulus_waveform</a:t>
+            </a:r>
+            <a:r>
+              <a:rPr lang="en-AU" sz="1000" dirty="0"/>
+              <a:t> = ‘biphasic’</a:t>
+            </a:r>
+          </a:p>
+        </p:txBody>
+      </p:sp>
+      <p:sp>
+        <p:nvSpPr>
+          <p:cNvPr id="166" name="TextBox 165">
+            <a:extLst>
+              <a:ext uri="{FF2B5EF4-FFF2-40B4-BE49-F238E27FC236}">
+                <a16:creationId xmlns:a16="http://schemas.microsoft.com/office/drawing/2014/main" id="{11181E7E-4AD9-9D7F-C70B-02D31FC857ED}"/>
+              </a:ext>
+            </a:extLst>
+          </p:cNvPr>
+          <p:cNvSpPr txBox="1"/>
+          <p:nvPr/>
+        </p:nvSpPr>
+        <p:spPr>
+          <a:xfrm>
+            <a:off x="1540396" y="1816501"/>
+            <a:ext cx="1818927" cy="400110"/>
+          </a:xfrm>
+          <a:prstGeom prst="rect">
+            <a:avLst/>
+          </a:prstGeom>
+          <a:noFill/>
+        </p:spPr>
+        <p:txBody>
+          <a:bodyPr wrap="square" rtlCol="0">
+            <a:spAutoFit/>
+          </a:bodyPr>
+          <a:lstStyle/>
+          <a:p>
+            <a:r>
+              <a:rPr lang="en-AU" sz="1000" dirty="0" err="1"/>
+              <a:t>stimulus_intensity</a:t>
+            </a:r>
+            <a:r>
+              <a:rPr lang="en-AU" sz="1000" dirty="0"/>
+              <a:t> = 40 %MSO</a:t>
+            </a:r>
+          </a:p>
+        </p:txBody>
+      </p:sp>
+      <p:sp>
+        <p:nvSpPr>
+          <p:cNvPr id="167" name="TextBox 166">
+            <a:extLst>
+              <a:ext uri="{FF2B5EF4-FFF2-40B4-BE49-F238E27FC236}">
+                <a16:creationId xmlns:a16="http://schemas.microsoft.com/office/drawing/2014/main" id="{3086A33D-3599-AD3F-049D-DC458F843CD6}"/>
+              </a:ext>
+            </a:extLst>
+          </p:cNvPr>
+          <p:cNvSpPr txBox="1"/>
+          <p:nvPr/>
+        </p:nvSpPr>
+        <p:spPr>
+          <a:xfrm>
+            <a:off x="2275846" y="3783661"/>
+            <a:ext cx="1818927" cy="246221"/>
+          </a:xfrm>
+          <a:prstGeom prst="rect">
+            <a:avLst/>
+          </a:prstGeom>
+          <a:noFill/>
+        </p:spPr>
+        <p:txBody>
+          <a:bodyPr wrap="square" rtlCol="0">
+            <a:spAutoFit/>
+          </a:bodyPr>
+          <a:lstStyle/>
+          <a:p>
+            <a:r>
+              <a:rPr lang="en-AU" sz="1000" dirty="0" err="1">
+                <a:solidFill>
+                  <a:schemeClr val="accent1">
+                    <a:lumMod val="60000"/>
+                    <a:lumOff val="40000"/>
+                  </a:schemeClr>
+                </a:solidFill>
+              </a:rPr>
+              <a:t>instance_count</a:t>
+            </a:r>
+            <a:r>
+              <a:rPr lang="en-AU" sz="1000" dirty="0">
+                <a:solidFill>
+                  <a:schemeClr val="accent1">
+                    <a:lumMod val="60000"/>
+                    <a:lumOff val="40000"/>
+                  </a:schemeClr>
+                </a:solidFill>
+              </a:rPr>
+              <a:t> = 3</a:t>
+            </a:r>
+          </a:p>
+        </p:txBody>
+      </p:sp>
+      <p:sp>
+        <p:nvSpPr>
+          <p:cNvPr id="168" name="TextBox 167">
+            <a:extLst>
+              <a:ext uri="{FF2B5EF4-FFF2-40B4-BE49-F238E27FC236}">
+                <a16:creationId xmlns:a16="http://schemas.microsoft.com/office/drawing/2014/main" id="{68AA038A-8A40-7AB3-35BF-C23248F759FC}"/>
+              </a:ext>
+            </a:extLst>
+          </p:cNvPr>
+          <p:cNvSpPr txBox="1"/>
+          <p:nvPr/>
+        </p:nvSpPr>
+        <p:spPr>
+          <a:xfrm>
+            <a:off x="2275846" y="3924277"/>
+            <a:ext cx="1818927" cy="246221"/>
+          </a:xfrm>
+          <a:prstGeom prst="rect">
+            <a:avLst/>
+          </a:prstGeom>
+          <a:noFill/>
+        </p:spPr>
+        <p:txBody>
+          <a:bodyPr wrap="square" rtlCol="0">
+            <a:spAutoFit/>
+          </a:bodyPr>
+          <a:lstStyle/>
+          <a:p>
+            <a:r>
+              <a:rPr lang="en-AU" sz="1000" dirty="0" err="1">
+                <a:solidFill>
+                  <a:schemeClr val="accent1">
+                    <a:lumMod val="60000"/>
+                    <a:lumOff val="40000"/>
+                  </a:schemeClr>
+                </a:solidFill>
+              </a:rPr>
+              <a:t>train_duration</a:t>
+            </a:r>
+            <a:r>
+              <a:rPr lang="en-AU" sz="1000" dirty="0">
+                <a:solidFill>
+                  <a:schemeClr val="accent1">
+                    <a:lumMod val="60000"/>
+                    <a:lumOff val="40000"/>
+                  </a:schemeClr>
+                </a:solidFill>
+              </a:rPr>
+              <a:t> = 0.6 s</a:t>
+            </a:r>
+          </a:p>
+        </p:txBody>
+      </p:sp>
+      <p:sp>
+        <p:nvSpPr>
+          <p:cNvPr id="169" name="TextBox 168">
+            <a:extLst>
+              <a:ext uri="{FF2B5EF4-FFF2-40B4-BE49-F238E27FC236}">
+                <a16:creationId xmlns:a16="http://schemas.microsoft.com/office/drawing/2014/main" id="{7960E46F-EDEE-D30C-9314-689129235372}"/>
+              </a:ext>
+            </a:extLst>
+          </p:cNvPr>
+          <p:cNvSpPr txBox="1"/>
+          <p:nvPr/>
+        </p:nvSpPr>
+        <p:spPr>
+          <a:xfrm>
+            <a:off x="2219673" y="4869365"/>
+            <a:ext cx="2151968" cy="246221"/>
+          </a:xfrm>
+          <a:prstGeom prst="rect">
+            <a:avLst/>
+          </a:prstGeom>
+          <a:noFill/>
+        </p:spPr>
+        <p:txBody>
+          <a:bodyPr wrap="square" rtlCol="0">
+            <a:spAutoFit/>
+          </a:bodyPr>
+          <a:lstStyle/>
+          <a:p>
+            <a:r>
+              <a:rPr lang="en-AU" sz="1000" dirty="0" err="1">
+                <a:solidFill>
+                  <a:schemeClr val="accent1">
+                    <a:lumMod val="60000"/>
+                    <a:lumOff val="40000"/>
+                  </a:schemeClr>
+                </a:solidFill>
+              </a:rPr>
+              <a:t>instance_repetition_interval</a:t>
+            </a:r>
+            <a:r>
+              <a:rPr lang="en-AU" sz="1000" dirty="0">
+                <a:solidFill>
+                  <a:schemeClr val="accent1">
+                    <a:lumMod val="60000"/>
+                    <a:lumOff val="40000"/>
+                  </a:schemeClr>
+                </a:solidFill>
+              </a:rPr>
+              <a:t> = 0.2 s</a:t>
+            </a:r>
+          </a:p>
+        </p:txBody>
+      </p:sp>
+      <p:sp>
+        <p:nvSpPr>
+          <p:cNvPr id="170" name="TextBox 169">
+            <a:extLst>
+              <a:ext uri="{FF2B5EF4-FFF2-40B4-BE49-F238E27FC236}">
+                <a16:creationId xmlns:a16="http://schemas.microsoft.com/office/drawing/2014/main" id="{95143E81-19AA-C77E-8503-070443593A67}"/>
+              </a:ext>
+            </a:extLst>
+          </p:cNvPr>
+          <p:cNvSpPr txBox="1"/>
+          <p:nvPr/>
+        </p:nvSpPr>
+        <p:spPr>
+          <a:xfrm>
+            <a:off x="2219673" y="5014593"/>
+            <a:ext cx="2219343" cy="246221"/>
+          </a:xfrm>
+          <a:prstGeom prst="rect">
+            <a:avLst/>
+          </a:prstGeom>
+          <a:noFill/>
+        </p:spPr>
+        <p:txBody>
+          <a:bodyPr wrap="square" rtlCol="0">
+            <a:spAutoFit/>
+          </a:bodyPr>
+          <a:lstStyle/>
+          <a:p>
+            <a:r>
+              <a:rPr lang="en-AU" sz="1000" dirty="0" err="1">
+                <a:solidFill>
+                  <a:schemeClr val="accent1">
+                    <a:lumMod val="60000"/>
+                    <a:lumOff val="40000"/>
+                  </a:schemeClr>
+                </a:solidFill>
+              </a:rPr>
+              <a:t>instance_repetition_frequency</a:t>
+            </a:r>
+            <a:r>
+              <a:rPr lang="en-AU" sz="1000" dirty="0">
+                <a:solidFill>
+                  <a:schemeClr val="accent1">
+                    <a:lumMod val="60000"/>
+                    <a:lumOff val="40000"/>
+                  </a:schemeClr>
+                </a:solidFill>
+              </a:rPr>
+              <a:t> = 5 Hz </a:t>
+            </a:r>
+          </a:p>
+        </p:txBody>
+      </p:sp>
+      <p:sp>
+        <p:nvSpPr>
+          <p:cNvPr id="171" name="TextBox 170">
+            <a:extLst>
+              <a:ext uri="{FF2B5EF4-FFF2-40B4-BE49-F238E27FC236}">
+                <a16:creationId xmlns:a16="http://schemas.microsoft.com/office/drawing/2014/main" id="{305CB989-61B3-AE33-94E4-346747E5171A}"/>
+              </a:ext>
+            </a:extLst>
+          </p:cNvPr>
+          <p:cNvSpPr txBox="1"/>
+          <p:nvPr/>
+        </p:nvSpPr>
+        <p:spPr>
+          <a:xfrm>
+            <a:off x="148108" y="3975174"/>
+            <a:ext cx="1670538" cy="461665"/>
+          </a:xfrm>
+          <a:prstGeom prst="rect">
+            <a:avLst/>
+          </a:prstGeom>
+          <a:noFill/>
+        </p:spPr>
+        <p:txBody>
+          <a:bodyPr wrap="square" rtlCol="0">
+            <a:spAutoFit/>
+          </a:bodyPr>
+          <a:lstStyle/>
+          <a:p>
+            <a:r>
+              <a:rPr lang="en-AU" sz="1200" dirty="0">
+                <a:solidFill>
+                  <a:schemeClr val="accent1">
+                    <a:lumMod val="60000"/>
+                    <a:lumOff val="40000"/>
+                  </a:schemeClr>
+                </a:solidFill>
+              </a:rPr>
+              <a:t>Layer 1</a:t>
+            </a:r>
+          </a:p>
+          <a:p>
+            <a:r>
+              <a:rPr lang="en-AU" sz="1200" dirty="0">
+                <a:solidFill>
+                  <a:schemeClr val="accent1">
+                    <a:lumMod val="60000"/>
+                    <a:lumOff val="40000"/>
+                  </a:schemeClr>
+                </a:solidFill>
+              </a:rPr>
+              <a:t>Train [repeat]</a:t>
+            </a:r>
+          </a:p>
+        </p:txBody>
+      </p:sp>
+      <p:sp>
+        <p:nvSpPr>
+          <p:cNvPr id="172" name="TextBox 171">
+            <a:extLst>
+              <a:ext uri="{FF2B5EF4-FFF2-40B4-BE49-F238E27FC236}">
+                <a16:creationId xmlns:a16="http://schemas.microsoft.com/office/drawing/2014/main" id="{3B9EA259-DF93-2BB4-ACA4-0707B33C80E6}"/>
+              </a:ext>
+            </a:extLst>
+          </p:cNvPr>
+          <p:cNvSpPr txBox="1"/>
+          <p:nvPr/>
+        </p:nvSpPr>
+        <p:spPr>
+          <a:xfrm>
+            <a:off x="158254" y="5505031"/>
+            <a:ext cx="1670538" cy="461665"/>
+          </a:xfrm>
+          <a:prstGeom prst="rect">
+            <a:avLst/>
+          </a:prstGeom>
+          <a:noFill/>
+        </p:spPr>
+        <p:txBody>
+          <a:bodyPr wrap="square" rtlCol="0">
+            <a:spAutoFit/>
+          </a:bodyPr>
+          <a:lstStyle/>
+          <a:p>
+            <a:r>
+              <a:rPr lang="en-AU" sz="1200" dirty="0">
+                <a:solidFill>
+                  <a:schemeClr val="accent6"/>
+                </a:solidFill>
+              </a:rPr>
+              <a:t>Layer 2</a:t>
+            </a:r>
+          </a:p>
+          <a:p>
+            <a:r>
+              <a:rPr lang="en-AU" sz="1200" dirty="0">
+                <a:solidFill>
+                  <a:schemeClr val="accent6"/>
+                </a:solidFill>
+              </a:rPr>
+              <a:t>Sequence [repeat2]</a:t>
+            </a:r>
+          </a:p>
+        </p:txBody>
+      </p:sp>
+      <p:sp>
+        <p:nvSpPr>
+          <p:cNvPr id="173" name="TextBox 172">
+            <a:extLst>
+              <a:ext uri="{FF2B5EF4-FFF2-40B4-BE49-F238E27FC236}">
+                <a16:creationId xmlns:a16="http://schemas.microsoft.com/office/drawing/2014/main" id="{0BAE057F-ED58-2A0C-4C31-0D6119D0B72F}"/>
+              </a:ext>
+            </a:extLst>
+          </p:cNvPr>
+          <p:cNvSpPr txBox="1"/>
+          <p:nvPr/>
+        </p:nvSpPr>
+        <p:spPr>
+          <a:xfrm>
+            <a:off x="2275846" y="5329658"/>
+            <a:ext cx="1818927" cy="246221"/>
+          </a:xfrm>
+          <a:prstGeom prst="rect">
+            <a:avLst/>
+          </a:prstGeom>
+          <a:noFill/>
+        </p:spPr>
+        <p:txBody>
+          <a:bodyPr wrap="square" rtlCol="0">
+            <a:spAutoFit/>
+          </a:bodyPr>
+          <a:lstStyle/>
+          <a:p>
+            <a:r>
+              <a:rPr lang="en-AU" sz="1000" dirty="0" err="1">
+                <a:solidFill>
+                  <a:schemeClr val="accent6"/>
+                </a:solidFill>
+              </a:rPr>
+              <a:t>train_count</a:t>
+            </a:r>
+            <a:r>
+              <a:rPr lang="en-AU" sz="1000" dirty="0">
+                <a:solidFill>
+                  <a:schemeClr val="accent6"/>
+                </a:solidFill>
+              </a:rPr>
+              <a:t> = 2</a:t>
+            </a:r>
+          </a:p>
+        </p:txBody>
+      </p:sp>
+      <p:sp>
+        <p:nvSpPr>
+          <p:cNvPr id="174" name="TextBox 173">
+            <a:extLst>
+              <a:ext uri="{FF2B5EF4-FFF2-40B4-BE49-F238E27FC236}">
+                <a16:creationId xmlns:a16="http://schemas.microsoft.com/office/drawing/2014/main" id="{1249E113-17BA-BAE9-F9A6-2A68774489E8}"/>
+              </a:ext>
+            </a:extLst>
+          </p:cNvPr>
+          <p:cNvSpPr txBox="1"/>
+          <p:nvPr/>
+        </p:nvSpPr>
+        <p:spPr>
+          <a:xfrm>
+            <a:off x="2275846" y="5452688"/>
+            <a:ext cx="1818927" cy="246221"/>
+          </a:xfrm>
+          <a:prstGeom prst="rect">
+            <a:avLst/>
+          </a:prstGeom>
+          <a:noFill/>
+        </p:spPr>
+        <p:txBody>
+          <a:bodyPr wrap="square" rtlCol="0">
+            <a:spAutoFit/>
+          </a:bodyPr>
+          <a:lstStyle/>
+          <a:p>
+            <a:r>
+              <a:rPr lang="en-AU" sz="1000" dirty="0" err="1">
+                <a:solidFill>
+                  <a:schemeClr val="accent6"/>
+                </a:solidFill>
+              </a:rPr>
+              <a:t>sequence_duration</a:t>
+            </a:r>
+            <a:r>
+              <a:rPr lang="en-AU" sz="1000" dirty="0">
+                <a:solidFill>
+                  <a:schemeClr val="accent6"/>
+                </a:solidFill>
+              </a:rPr>
+              <a:t> = 0.36 s</a:t>
+            </a:r>
+          </a:p>
+        </p:txBody>
+      </p:sp>
+      <p:sp>
+        <p:nvSpPr>
+          <p:cNvPr id="175" name="TextBox 174">
+            <a:extLst>
+              <a:ext uri="{FF2B5EF4-FFF2-40B4-BE49-F238E27FC236}">
+                <a16:creationId xmlns:a16="http://schemas.microsoft.com/office/drawing/2014/main" id="{DE5DE10A-5F02-00AD-091E-52EB0CC8E631}"/>
+              </a:ext>
+            </a:extLst>
+          </p:cNvPr>
+          <p:cNvSpPr txBox="1"/>
+          <p:nvPr/>
+        </p:nvSpPr>
+        <p:spPr>
+          <a:xfrm>
+            <a:off x="2219673" y="6397776"/>
+            <a:ext cx="2451972" cy="246221"/>
+          </a:xfrm>
+          <a:prstGeom prst="rect">
+            <a:avLst/>
+          </a:prstGeom>
+          <a:noFill/>
+        </p:spPr>
+        <p:txBody>
+          <a:bodyPr wrap="square" rtlCol="0">
+            <a:spAutoFit/>
+          </a:bodyPr>
+          <a:lstStyle/>
+          <a:p>
+            <a:r>
+              <a:rPr lang="en-AU" sz="1000" dirty="0" err="1">
+                <a:solidFill>
+                  <a:schemeClr val="accent6"/>
+                </a:solidFill>
+              </a:rPr>
+              <a:t>train_repetition_interval</a:t>
+            </a:r>
+            <a:r>
+              <a:rPr lang="en-AU" sz="1000" dirty="0">
+                <a:solidFill>
+                  <a:schemeClr val="accent6"/>
+                </a:solidFill>
+              </a:rPr>
+              <a:t> = 1 s</a:t>
+            </a:r>
+          </a:p>
+        </p:txBody>
+      </p:sp>
+      <p:sp>
+        <p:nvSpPr>
+          <p:cNvPr id="176" name="TextBox 175">
+            <a:extLst>
+              <a:ext uri="{FF2B5EF4-FFF2-40B4-BE49-F238E27FC236}">
+                <a16:creationId xmlns:a16="http://schemas.microsoft.com/office/drawing/2014/main" id="{D76719EF-8146-45D0-0B7C-DFC66C623CEE}"/>
+              </a:ext>
+            </a:extLst>
+          </p:cNvPr>
+          <p:cNvSpPr txBox="1"/>
+          <p:nvPr/>
+        </p:nvSpPr>
+        <p:spPr>
+          <a:xfrm>
+            <a:off x="2219673" y="6553131"/>
+            <a:ext cx="2219343" cy="246221"/>
+          </a:xfrm>
+          <a:prstGeom prst="rect">
+            <a:avLst/>
+          </a:prstGeom>
+          <a:noFill/>
+        </p:spPr>
+        <p:txBody>
+          <a:bodyPr wrap="square" rtlCol="0">
+            <a:spAutoFit/>
+          </a:bodyPr>
+          <a:lstStyle/>
+          <a:p>
+            <a:r>
+              <a:rPr lang="en-AU" sz="1000" dirty="0" err="1">
+                <a:solidFill>
+                  <a:schemeClr val="accent6"/>
+                </a:solidFill>
+              </a:rPr>
+              <a:t>train_repetition_frequency</a:t>
+            </a:r>
+            <a:r>
+              <a:rPr lang="en-AU" sz="1000" dirty="0">
+                <a:solidFill>
+                  <a:schemeClr val="accent6"/>
+                </a:solidFill>
+              </a:rPr>
+              <a:t> = 1 Hz </a:t>
+            </a:r>
+          </a:p>
+        </p:txBody>
+      </p:sp>
+      <p:grpSp>
+        <p:nvGrpSpPr>
+          <p:cNvPr id="177" name="Group 176">
+            <a:extLst>
+              <a:ext uri="{FF2B5EF4-FFF2-40B4-BE49-F238E27FC236}">
+                <a16:creationId xmlns:a16="http://schemas.microsoft.com/office/drawing/2014/main" id="{568EACFF-413D-5CEF-F7AC-B56484FD0A37}"/>
+              </a:ext>
+            </a:extLst>
+          </p:cNvPr>
+          <p:cNvGrpSpPr/>
+          <p:nvPr/>
+        </p:nvGrpSpPr>
+        <p:grpSpPr>
+          <a:xfrm>
+            <a:off x="2267915" y="6330451"/>
+            <a:ext cx="1228666" cy="64521"/>
+            <a:chOff x="2492644" y="3165184"/>
+            <a:chExt cx="591737" cy="64521"/>
+          </a:xfrm>
+        </p:grpSpPr>
+        <p:cxnSp>
+          <p:nvCxnSpPr>
+            <p:cNvPr id="178" name="Straight Connector 177">
+              <a:extLst>
+                <a:ext uri="{FF2B5EF4-FFF2-40B4-BE49-F238E27FC236}">
+                  <a16:creationId xmlns:a16="http://schemas.microsoft.com/office/drawing/2014/main" id="{6F5D47AB-DD1D-12D1-8824-D1C34A273748}"/>
+                </a:ext>
+              </a:extLst>
+            </p:cNvPr>
+            <p:cNvCxnSpPr>
+              <a:cxnSpLocks/>
+            </p:cNvCxnSpPr>
+            <p:nvPr/>
+          </p:nvCxnSpPr>
+          <p:spPr>
+            <a:xfrm flipH="1">
+              <a:off x="2501027" y="3194494"/>
+              <a:ext cx="583354" cy="0"/>
+            </a:xfrm>
+            <a:prstGeom prst="line">
+              <a:avLst/>
+            </a:prstGeom>
+            <a:ln>
+              <a:solidFill>
+                <a:schemeClr val="accent6"/>
+              </a:solidFill>
+            </a:ln>
+          </p:spPr>
+          <p:style>
+            <a:lnRef idx="2">
+              <a:schemeClr val="accent1"/>
+            </a:lnRef>
+            <a:fillRef idx="0">
+              <a:schemeClr val="accent1"/>
+            </a:fillRef>
+            <a:effectRef idx="1">
+              <a:schemeClr val="accent1"/>
+            </a:effectRef>
+            <a:fontRef idx="minor">
+              <a:schemeClr val="tx1"/>
+            </a:fontRef>
+          </p:style>
+        </p:cxnSp>
+        <p:cxnSp>
+          <p:nvCxnSpPr>
+            <p:cNvPr id="179" name="Straight Connector 178">
+              <a:extLst>
+                <a:ext uri="{FF2B5EF4-FFF2-40B4-BE49-F238E27FC236}">
+                  <a16:creationId xmlns:a16="http://schemas.microsoft.com/office/drawing/2014/main" id="{845698EF-CF46-D243-298A-1383564F35B5}"/>
+                </a:ext>
+              </a:extLst>
+            </p:cNvPr>
+            <p:cNvCxnSpPr>
+              <a:cxnSpLocks/>
+            </p:cNvCxnSpPr>
+            <p:nvPr/>
+          </p:nvCxnSpPr>
+          <p:spPr>
+            <a:xfrm flipV="1">
+              <a:off x="3079800" y="3165184"/>
+              <a:ext cx="0" cy="64521"/>
+            </a:xfrm>
+            <a:prstGeom prst="line">
+              <a:avLst/>
+            </a:prstGeom>
+            <a:ln>
+              <a:solidFill>
+                <a:schemeClr val="accent6"/>
+              </a:solidFill>
+            </a:ln>
+          </p:spPr>
+          <p:style>
+            <a:lnRef idx="2">
+              <a:schemeClr val="accent1"/>
+            </a:lnRef>
+            <a:fillRef idx="0">
+              <a:schemeClr val="accent1"/>
+            </a:fillRef>
+            <a:effectRef idx="1">
+              <a:schemeClr val="accent1"/>
+            </a:effectRef>
+            <a:fontRef idx="minor">
+              <a:schemeClr val="tx1"/>
+            </a:fontRef>
+          </p:style>
+        </p:cxnSp>
+        <p:cxnSp>
+          <p:nvCxnSpPr>
+            <p:cNvPr id="180" name="Straight Connector 179">
+              <a:extLst>
+                <a:ext uri="{FF2B5EF4-FFF2-40B4-BE49-F238E27FC236}">
+                  <a16:creationId xmlns:a16="http://schemas.microsoft.com/office/drawing/2014/main" id="{A8210F11-D9AA-0FE3-2FCB-C9FB1C621A84}"/>
+                </a:ext>
+              </a:extLst>
+            </p:cNvPr>
+            <p:cNvCxnSpPr>
+              <a:cxnSpLocks/>
+            </p:cNvCxnSpPr>
+            <p:nvPr/>
+          </p:nvCxnSpPr>
+          <p:spPr>
+            <a:xfrm flipV="1">
+              <a:off x="2492644" y="3165184"/>
+              <a:ext cx="0" cy="64521"/>
+            </a:xfrm>
+            <a:prstGeom prst="line">
+              <a:avLst/>
+            </a:prstGeom>
+            <a:ln>
+              <a:solidFill>
+                <a:schemeClr val="accent6"/>
+              </a:solidFill>
+            </a:ln>
+          </p:spPr>
+          <p:style>
+            <a:lnRef idx="2">
+              <a:schemeClr val="accent1"/>
+            </a:lnRef>
+            <a:fillRef idx="0">
+              <a:schemeClr val="accent1"/>
+            </a:fillRef>
+            <a:effectRef idx="1">
+              <a:schemeClr val="accent1"/>
+            </a:effectRef>
+            <a:fontRef idx="minor">
+              <a:schemeClr val="tx1"/>
+            </a:fontRef>
+          </p:style>
+        </p:cxnSp>
+      </p:grpSp>
+      <p:sp>
+        <p:nvSpPr>
+          <p:cNvPr id="181" name="TextBox 180">
+            <a:extLst>
+              <a:ext uri="{FF2B5EF4-FFF2-40B4-BE49-F238E27FC236}">
+                <a16:creationId xmlns:a16="http://schemas.microsoft.com/office/drawing/2014/main" id="{A6C2C89C-D9D9-79C4-860D-00C0D0F365F6}"/>
+              </a:ext>
+            </a:extLst>
+          </p:cNvPr>
+          <p:cNvSpPr txBox="1"/>
+          <p:nvPr/>
+        </p:nvSpPr>
+        <p:spPr>
+          <a:xfrm>
+            <a:off x="121261" y="3107558"/>
+            <a:ext cx="1456760" cy="553998"/>
+          </a:xfrm>
+          <a:prstGeom prst="rect">
+            <a:avLst/>
+          </a:prstGeom>
+          <a:noFill/>
+        </p:spPr>
+        <p:txBody>
+          <a:bodyPr wrap="square" rtlCol="0">
+            <a:spAutoFit/>
+          </a:bodyPr>
+          <a:lstStyle/>
+          <a:p>
+            <a:r>
+              <a:rPr lang="en-AU" sz="1000" dirty="0">
+                <a:solidFill>
+                  <a:srgbClr val="FF0000"/>
+                </a:solidFill>
+              </a:rPr>
+              <a:t>Required:</a:t>
+            </a:r>
+          </a:p>
+          <a:p>
+            <a:r>
+              <a:rPr lang="en-AU" sz="1000" dirty="0">
+                <a:solidFill>
+                  <a:srgbClr val="FF0000"/>
+                </a:solidFill>
+              </a:rPr>
+              <a:t>_count</a:t>
+            </a:r>
+          </a:p>
+          <a:p>
+            <a:r>
+              <a:rPr lang="en-AU" sz="1000" dirty="0">
+                <a:solidFill>
+                  <a:srgbClr val="FF0000"/>
+                </a:solidFill>
+              </a:rPr>
+              <a:t>_</a:t>
+            </a:r>
+            <a:r>
+              <a:rPr lang="en-AU" sz="1000" dirty="0" err="1">
+                <a:solidFill>
+                  <a:srgbClr val="FF0000"/>
+                </a:solidFill>
+              </a:rPr>
+              <a:t>repetition_interval</a:t>
+            </a:r>
+            <a:endParaRPr lang="en-AU" sz="1000" dirty="0">
+              <a:solidFill>
+                <a:srgbClr val="FF0000"/>
+              </a:solidFill>
+            </a:endParaRPr>
+          </a:p>
+        </p:txBody>
+      </p:sp>
+      <p:sp>
+        <p:nvSpPr>
+          <p:cNvPr id="182" name="TextBox 181">
+            <a:extLst>
+              <a:ext uri="{FF2B5EF4-FFF2-40B4-BE49-F238E27FC236}">
+                <a16:creationId xmlns:a16="http://schemas.microsoft.com/office/drawing/2014/main" id="{33BAA38E-D65A-8AD3-9AFF-FF995CA651B1}"/>
+              </a:ext>
+            </a:extLst>
+          </p:cNvPr>
+          <p:cNvSpPr txBox="1"/>
+          <p:nvPr/>
+        </p:nvSpPr>
+        <p:spPr>
+          <a:xfrm>
+            <a:off x="176761" y="4574946"/>
+            <a:ext cx="1456760" cy="553998"/>
+          </a:xfrm>
+          <a:prstGeom prst="rect">
+            <a:avLst/>
+          </a:prstGeom>
+          <a:noFill/>
+        </p:spPr>
+        <p:txBody>
+          <a:bodyPr wrap="square" rtlCol="0">
+            <a:spAutoFit/>
+          </a:bodyPr>
+          <a:lstStyle/>
+          <a:p>
+            <a:r>
+              <a:rPr lang="en-AU" sz="1000" dirty="0">
+                <a:solidFill>
+                  <a:schemeClr val="accent4"/>
+                </a:solidFill>
+              </a:rPr>
+              <a:t>Required:</a:t>
+            </a:r>
+          </a:p>
+          <a:p>
+            <a:r>
+              <a:rPr lang="en-AU" sz="1000" dirty="0">
+                <a:solidFill>
+                  <a:schemeClr val="accent4"/>
+                </a:solidFill>
+              </a:rPr>
+              <a:t>_count</a:t>
+            </a:r>
+          </a:p>
+          <a:p>
+            <a:r>
+              <a:rPr lang="en-AU" sz="1000" dirty="0">
+                <a:solidFill>
+                  <a:schemeClr val="accent4"/>
+                </a:solidFill>
+              </a:rPr>
+              <a:t>_</a:t>
+            </a:r>
+            <a:r>
+              <a:rPr lang="en-AU" sz="1000" dirty="0" err="1">
+                <a:solidFill>
+                  <a:schemeClr val="accent4"/>
+                </a:solidFill>
+              </a:rPr>
+              <a:t>repetition_interval</a:t>
+            </a:r>
+            <a:endParaRPr lang="en-AU" sz="1000" dirty="0">
+              <a:solidFill>
+                <a:schemeClr val="accent4"/>
+              </a:solidFill>
+            </a:endParaRPr>
+          </a:p>
+        </p:txBody>
+      </p:sp>
+      <p:sp>
+        <p:nvSpPr>
+          <p:cNvPr id="183" name="TextBox 182">
+            <a:extLst>
+              <a:ext uri="{FF2B5EF4-FFF2-40B4-BE49-F238E27FC236}">
+                <a16:creationId xmlns:a16="http://schemas.microsoft.com/office/drawing/2014/main" id="{86E25581-22E0-C581-DFD4-F9B3472272CD}"/>
+              </a:ext>
+            </a:extLst>
+          </p:cNvPr>
+          <p:cNvSpPr txBox="1"/>
+          <p:nvPr/>
+        </p:nvSpPr>
+        <p:spPr>
+          <a:xfrm>
+            <a:off x="176761" y="6119435"/>
+            <a:ext cx="1456760" cy="553998"/>
+          </a:xfrm>
+          <a:prstGeom prst="rect">
+            <a:avLst/>
+          </a:prstGeom>
+          <a:noFill/>
+        </p:spPr>
+        <p:txBody>
+          <a:bodyPr wrap="square" rtlCol="0">
+            <a:spAutoFit/>
+          </a:bodyPr>
+          <a:lstStyle/>
+          <a:p>
+            <a:r>
+              <a:rPr lang="en-AU" sz="1000" dirty="0">
+                <a:solidFill>
+                  <a:schemeClr val="accent6"/>
+                </a:solidFill>
+              </a:rPr>
+              <a:t>Required:</a:t>
+            </a:r>
+          </a:p>
+          <a:p>
+            <a:r>
+              <a:rPr lang="en-AU" sz="1000" dirty="0">
+                <a:solidFill>
+                  <a:schemeClr val="accent6"/>
+                </a:solidFill>
+              </a:rPr>
+              <a:t>_count</a:t>
+            </a:r>
+          </a:p>
+          <a:p>
+            <a:r>
+              <a:rPr lang="en-AU" sz="1000" dirty="0">
+                <a:solidFill>
+                  <a:schemeClr val="accent6"/>
+                </a:solidFill>
+              </a:rPr>
+              <a:t>_</a:t>
+            </a:r>
+            <a:r>
+              <a:rPr lang="en-AU" sz="1000" dirty="0" err="1">
+                <a:solidFill>
+                  <a:schemeClr val="accent6"/>
+                </a:solidFill>
+              </a:rPr>
+              <a:t>repetition_interval</a:t>
+            </a:r>
+            <a:endParaRPr lang="en-AU" sz="1000" dirty="0">
+              <a:solidFill>
+                <a:schemeClr val="accent6"/>
+              </a:solidFill>
+            </a:endParaRPr>
+          </a:p>
+        </p:txBody>
+      </p:sp>
+      <p:sp>
+        <p:nvSpPr>
+          <p:cNvPr id="184" name="TextBox 183">
+            <a:extLst>
+              <a:ext uri="{FF2B5EF4-FFF2-40B4-BE49-F238E27FC236}">
+                <a16:creationId xmlns:a16="http://schemas.microsoft.com/office/drawing/2014/main" id="{0E970B09-4751-BE10-4A7E-33C4B32361E7}"/>
+              </a:ext>
+            </a:extLst>
+          </p:cNvPr>
+          <p:cNvSpPr txBox="1"/>
+          <p:nvPr/>
+        </p:nvSpPr>
+        <p:spPr>
+          <a:xfrm>
+            <a:off x="83636" y="1267708"/>
+            <a:ext cx="1456760" cy="707886"/>
+          </a:xfrm>
+          <a:prstGeom prst="rect">
+            <a:avLst/>
+          </a:prstGeom>
+          <a:noFill/>
+        </p:spPr>
+        <p:txBody>
+          <a:bodyPr wrap="square" rtlCol="0">
+            <a:spAutoFit/>
+          </a:bodyPr>
+          <a:lstStyle/>
+          <a:p>
+            <a:r>
+              <a:rPr lang="en-AU" sz="1000" dirty="0"/>
+              <a:t>Required:</a:t>
+            </a:r>
+          </a:p>
+          <a:p>
+            <a:r>
+              <a:rPr lang="en-AU" sz="1000" dirty="0" err="1"/>
+              <a:t>stimulus_duration</a:t>
+            </a:r>
+            <a:endParaRPr lang="en-AU" sz="1000" dirty="0"/>
+          </a:p>
+          <a:p>
+            <a:r>
+              <a:rPr lang="en-AU" sz="1000" dirty="0" err="1"/>
+              <a:t>stimulus_waveform</a:t>
+            </a:r>
+            <a:endParaRPr lang="en-AU" sz="1000" dirty="0"/>
+          </a:p>
+          <a:p>
+            <a:r>
+              <a:rPr lang="en-AU" sz="1000" dirty="0" err="1"/>
+              <a:t>stimulus_intensity</a:t>
+            </a:r>
+            <a:endParaRPr lang="en-AU" sz="1000" dirty="0"/>
+          </a:p>
+        </p:txBody>
+      </p:sp>
+      <p:cxnSp>
+        <p:nvCxnSpPr>
+          <p:cNvPr id="185" name="Straight Connector 184">
+            <a:extLst>
+              <a:ext uri="{FF2B5EF4-FFF2-40B4-BE49-F238E27FC236}">
+                <a16:creationId xmlns:a16="http://schemas.microsoft.com/office/drawing/2014/main" id="{58D24FFE-C538-264A-36D4-28156D70A009}"/>
+              </a:ext>
+            </a:extLst>
+          </p:cNvPr>
+          <p:cNvCxnSpPr>
+            <a:cxnSpLocks/>
+          </p:cNvCxnSpPr>
+          <p:nvPr/>
+        </p:nvCxnSpPr>
+        <p:spPr>
+          <a:xfrm>
+            <a:off x="6524956" y="2946715"/>
+            <a:ext cx="1547724" cy="0"/>
+          </a:xfrm>
+          <a:prstGeom prst="line">
+            <a:avLst/>
+          </a:prstGeom>
+          <a:ln>
+            <a:solidFill>
+              <a:schemeClr val="tx1"/>
+            </a:solidFill>
+          </a:ln>
+        </p:spPr>
+        <p:style>
+          <a:lnRef idx="2">
+            <a:schemeClr val="accent1"/>
+          </a:lnRef>
+          <a:fillRef idx="0">
+            <a:schemeClr val="accent1"/>
+          </a:fillRef>
+          <a:effectRef idx="1">
+            <a:schemeClr val="accent1"/>
+          </a:effectRef>
+          <a:fontRef idx="minor">
+            <a:schemeClr val="tx1"/>
+          </a:fontRef>
+        </p:style>
+      </p:cxnSp>
+      <p:cxnSp>
+        <p:nvCxnSpPr>
+          <p:cNvPr id="186" name="Straight Connector 185">
+            <a:extLst>
+              <a:ext uri="{FF2B5EF4-FFF2-40B4-BE49-F238E27FC236}">
+                <a16:creationId xmlns:a16="http://schemas.microsoft.com/office/drawing/2014/main" id="{61036C71-0688-BA9E-DD2F-364CD219C1A4}"/>
+              </a:ext>
+            </a:extLst>
+          </p:cNvPr>
+          <p:cNvCxnSpPr>
+            <a:cxnSpLocks/>
+          </p:cNvCxnSpPr>
+          <p:nvPr/>
+        </p:nvCxnSpPr>
+        <p:spPr>
+          <a:xfrm flipV="1">
+            <a:off x="7085167" y="2823621"/>
+            <a:ext cx="0" cy="241335"/>
+          </a:xfrm>
+          <a:prstGeom prst="line">
+            <a:avLst/>
+          </a:prstGeom>
+          <a:ln>
+            <a:solidFill>
+              <a:schemeClr val="tx1"/>
+            </a:solidFill>
+          </a:ln>
+        </p:spPr>
+        <p:style>
+          <a:lnRef idx="2">
+            <a:schemeClr val="accent1"/>
+          </a:lnRef>
+          <a:fillRef idx="0">
+            <a:schemeClr val="accent1"/>
+          </a:fillRef>
+          <a:effectRef idx="1">
+            <a:schemeClr val="accent1"/>
+          </a:effectRef>
+          <a:fontRef idx="minor">
+            <a:schemeClr val="tx1"/>
+          </a:fontRef>
+        </p:style>
+      </p:cxnSp>
+      <p:cxnSp>
+        <p:nvCxnSpPr>
+          <p:cNvPr id="187" name="Straight Connector 186">
+            <a:extLst>
+              <a:ext uri="{FF2B5EF4-FFF2-40B4-BE49-F238E27FC236}">
+                <a16:creationId xmlns:a16="http://schemas.microsoft.com/office/drawing/2014/main" id="{45A3F18C-E22C-85FB-7A32-AA35D6C30C72}"/>
+              </a:ext>
+            </a:extLst>
+          </p:cNvPr>
+          <p:cNvCxnSpPr>
+            <a:cxnSpLocks/>
+          </p:cNvCxnSpPr>
+          <p:nvPr/>
+        </p:nvCxnSpPr>
+        <p:spPr>
+          <a:xfrm flipV="1">
+            <a:off x="7505680" y="2735699"/>
+            <a:ext cx="0" cy="422032"/>
+          </a:xfrm>
+          <a:prstGeom prst="line">
+            <a:avLst/>
+          </a:prstGeom>
+          <a:ln>
+            <a:solidFill>
+              <a:schemeClr val="tx1"/>
+            </a:solidFill>
+          </a:ln>
+        </p:spPr>
+        <p:style>
+          <a:lnRef idx="2">
+            <a:schemeClr val="accent1"/>
+          </a:lnRef>
+          <a:fillRef idx="0">
+            <a:schemeClr val="accent1"/>
+          </a:fillRef>
+          <a:effectRef idx="1">
+            <a:schemeClr val="accent1"/>
+          </a:effectRef>
+          <a:fontRef idx="minor">
+            <a:schemeClr val="tx1"/>
+          </a:fontRef>
+        </p:style>
+      </p:cxnSp>
+      <p:sp>
+        <p:nvSpPr>
+          <p:cNvPr id="194" name="TextBox 193">
+            <a:extLst>
+              <a:ext uri="{FF2B5EF4-FFF2-40B4-BE49-F238E27FC236}">
+                <a16:creationId xmlns:a16="http://schemas.microsoft.com/office/drawing/2014/main" id="{E7C7B04A-5525-1288-C29F-5C1F0E54B546}"/>
+              </a:ext>
+            </a:extLst>
+          </p:cNvPr>
+          <p:cNvSpPr txBox="1"/>
+          <p:nvPr/>
+        </p:nvSpPr>
+        <p:spPr>
+          <a:xfrm>
+            <a:off x="6407731" y="2442994"/>
+            <a:ext cx="1818927" cy="246221"/>
+          </a:xfrm>
+          <a:prstGeom prst="rect">
+            <a:avLst/>
+          </a:prstGeom>
+          <a:noFill/>
+        </p:spPr>
+        <p:txBody>
+          <a:bodyPr wrap="square" rtlCol="0">
+            <a:spAutoFit/>
+          </a:bodyPr>
+          <a:lstStyle/>
+          <a:p>
+            <a:r>
+              <a:rPr lang="en-AU" sz="1000" dirty="0" err="1">
+                <a:solidFill>
+                  <a:srgbClr val="FF0000"/>
+                </a:solidFill>
+              </a:rPr>
+              <a:t>stimulus_count</a:t>
+            </a:r>
+            <a:r>
+              <a:rPr lang="en-AU" sz="1000" dirty="0">
+                <a:solidFill>
+                  <a:srgbClr val="FF0000"/>
+                </a:solidFill>
+              </a:rPr>
+              <a:t> = 2</a:t>
+            </a:r>
+          </a:p>
+        </p:txBody>
+      </p:sp>
+      <p:sp>
+        <p:nvSpPr>
+          <p:cNvPr id="196" name="TextBox 195">
+            <a:extLst>
+              <a:ext uri="{FF2B5EF4-FFF2-40B4-BE49-F238E27FC236}">
+                <a16:creationId xmlns:a16="http://schemas.microsoft.com/office/drawing/2014/main" id="{94697400-8C16-484C-B887-1934B7F2572A}"/>
+              </a:ext>
+            </a:extLst>
+          </p:cNvPr>
+          <p:cNvSpPr txBox="1"/>
+          <p:nvPr/>
+        </p:nvSpPr>
+        <p:spPr>
+          <a:xfrm>
+            <a:off x="6407731" y="3213223"/>
+            <a:ext cx="2208727" cy="246221"/>
+          </a:xfrm>
+          <a:prstGeom prst="rect">
+            <a:avLst/>
+          </a:prstGeom>
+          <a:noFill/>
+        </p:spPr>
+        <p:txBody>
+          <a:bodyPr wrap="square" rtlCol="0">
+            <a:spAutoFit/>
+          </a:bodyPr>
+          <a:lstStyle/>
+          <a:p>
+            <a:r>
+              <a:rPr lang="en-AU" sz="1000" dirty="0" err="1">
+                <a:solidFill>
+                  <a:srgbClr val="FF0000"/>
+                </a:solidFill>
+              </a:rPr>
+              <a:t>stimulus_repetition_interval</a:t>
+            </a:r>
+            <a:r>
+              <a:rPr lang="en-AU" sz="1000" dirty="0">
+                <a:solidFill>
+                  <a:srgbClr val="FF0000"/>
+                </a:solidFill>
+              </a:rPr>
+              <a:t> = 0.02 s</a:t>
+            </a:r>
+          </a:p>
+        </p:txBody>
+      </p:sp>
+      <p:sp>
+        <p:nvSpPr>
+          <p:cNvPr id="198" name="TextBox 197">
+            <a:extLst>
+              <a:ext uri="{FF2B5EF4-FFF2-40B4-BE49-F238E27FC236}">
+                <a16:creationId xmlns:a16="http://schemas.microsoft.com/office/drawing/2014/main" id="{5DFBB2DC-58E1-339D-87C5-AD08F4EB3ACD}"/>
+              </a:ext>
+            </a:extLst>
+          </p:cNvPr>
+          <p:cNvSpPr txBox="1"/>
+          <p:nvPr/>
+        </p:nvSpPr>
+        <p:spPr>
+          <a:xfrm>
+            <a:off x="8662528" y="2162509"/>
+            <a:ext cx="3663356" cy="1631216"/>
+          </a:xfrm>
+          <a:prstGeom prst="rect">
+            <a:avLst/>
+          </a:prstGeom>
+          <a:noFill/>
+        </p:spPr>
+        <p:txBody>
+          <a:bodyPr wrap="square" rtlCol="0">
+            <a:spAutoFit/>
+          </a:bodyPr>
+          <a:lstStyle/>
+          <a:p>
+            <a:r>
+              <a:rPr lang="en-AU" sz="1000" dirty="0" err="1"/>
+              <a:t>stim_id</a:t>
+            </a:r>
+            <a:r>
+              <a:rPr lang="en-AU" sz="1000" dirty="0"/>
+              <a:t> = ‘stim2’</a:t>
+            </a:r>
+          </a:p>
+          <a:p>
+            <a:endParaRPr lang="en-AU" sz="1000" dirty="0"/>
+          </a:p>
+          <a:p>
+            <a:r>
+              <a:rPr lang="en-AU" sz="1000" i="1" dirty="0" err="1"/>
+              <a:t>nibs.json</a:t>
+            </a:r>
+            <a:r>
+              <a:rPr lang="en-AU" sz="1000" i="1" dirty="0"/>
+              <a:t> </a:t>
+            </a:r>
+            <a:r>
+              <a:rPr lang="en-AU" sz="1000" dirty="0"/>
+              <a:t>(if pulse characteristics change per pulse in instance)</a:t>
+            </a:r>
+          </a:p>
+          <a:p>
+            <a:r>
+              <a:rPr lang="en-AU" sz="1000" dirty="0" err="1"/>
+              <a:t>StimID</a:t>
+            </a:r>
+            <a:r>
+              <a:rPr lang="en-AU" sz="1000" dirty="0"/>
+              <a:t> = ‘stim2’</a:t>
+            </a:r>
+          </a:p>
+          <a:p>
+            <a:r>
+              <a:rPr lang="en-AU" sz="1000" dirty="0" err="1"/>
+              <a:t>StimDescription</a:t>
+            </a:r>
+            <a:r>
+              <a:rPr lang="en-AU" sz="1000" dirty="0"/>
+              <a:t> = ‘Paired pulse SICI condition’</a:t>
+            </a:r>
+          </a:p>
+          <a:p>
+            <a:r>
+              <a:rPr lang="en-AU" sz="1000" dirty="0" err="1"/>
+              <a:t>StimulusIntensityScalingVector</a:t>
+            </a:r>
+            <a:r>
+              <a:rPr lang="en-AU" sz="1000" dirty="0"/>
+              <a:t> = [30,40]</a:t>
+            </a:r>
+          </a:p>
+          <a:p>
+            <a:r>
+              <a:rPr lang="en-AU" sz="1000" dirty="0" err="1"/>
+              <a:t>StimulusIntensityScalingMethod</a:t>
+            </a:r>
+            <a:r>
+              <a:rPr lang="en-AU" sz="1000" dirty="0"/>
+              <a:t> = [‘</a:t>
+            </a:r>
+            <a:r>
+              <a:rPr lang="en-AU" sz="1000" dirty="0" err="1"/>
+              <a:t>absolute’,’absolute</a:t>
+            </a:r>
+            <a:r>
+              <a:rPr lang="en-AU" sz="1000" dirty="0"/>
+              <a:t>’]</a:t>
+            </a:r>
+          </a:p>
+          <a:p>
+            <a:r>
+              <a:rPr lang="en-AU" sz="1000" dirty="0" err="1"/>
+              <a:t>StimulusDurationScalingVector</a:t>
+            </a:r>
+            <a:r>
+              <a:rPr lang="en-AU" sz="1000" dirty="0"/>
+              <a:t> = [0.002,0.004]</a:t>
+            </a:r>
+          </a:p>
+          <a:p>
+            <a:r>
+              <a:rPr lang="en-AU" sz="1000" dirty="0" err="1"/>
+              <a:t>StimulusDurationScalingMethod</a:t>
+            </a:r>
+            <a:r>
+              <a:rPr lang="en-AU" sz="1000" dirty="0"/>
+              <a:t> = [‘</a:t>
+            </a:r>
+            <a:r>
+              <a:rPr lang="en-AU" sz="1000" dirty="0" err="1"/>
+              <a:t>absolute’,’absolute</a:t>
+            </a:r>
+            <a:r>
+              <a:rPr lang="en-AU" sz="1000" dirty="0"/>
+              <a:t>’]</a:t>
+            </a:r>
+          </a:p>
+          <a:p>
+            <a:endParaRPr lang="en-AU" sz="1000" dirty="0"/>
+          </a:p>
+        </p:txBody>
+      </p:sp>
+      <p:sp>
+        <p:nvSpPr>
+          <p:cNvPr id="199" name="TextBox 198">
+            <a:extLst>
+              <a:ext uri="{FF2B5EF4-FFF2-40B4-BE49-F238E27FC236}">
+                <a16:creationId xmlns:a16="http://schemas.microsoft.com/office/drawing/2014/main" id="{ED8A2773-A012-1851-F384-FC947774BAFD}"/>
+              </a:ext>
+            </a:extLst>
+          </p:cNvPr>
+          <p:cNvSpPr txBox="1"/>
+          <p:nvPr/>
+        </p:nvSpPr>
+        <p:spPr>
+          <a:xfrm>
+            <a:off x="4079683" y="2310398"/>
+            <a:ext cx="1818927" cy="246221"/>
+          </a:xfrm>
+          <a:prstGeom prst="rect">
+            <a:avLst/>
+          </a:prstGeom>
+          <a:noFill/>
+        </p:spPr>
+        <p:txBody>
+          <a:bodyPr wrap="square" rtlCol="0">
+            <a:spAutoFit/>
+          </a:bodyPr>
+          <a:lstStyle/>
+          <a:p>
+            <a:r>
+              <a:rPr lang="en-AU" sz="1000" dirty="0">
+                <a:solidFill>
+                  <a:srgbClr val="FF0000"/>
+                </a:solidFill>
+              </a:rPr>
+              <a:t>[</a:t>
+            </a:r>
+            <a:r>
+              <a:rPr lang="en-AU" sz="1000" dirty="0" err="1">
+                <a:solidFill>
+                  <a:srgbClr val="FF0000"/>
+                </a:solidFill>
+              </a:rPr>
+              <a:t>stimuli_in_instance</a:t>
+            </a:r>
+            <a:r>
+              <a:rPr lang="en-AU" sz="1000" dirty="0">
+                <a:solidFill>
+                  <a:srgbClr val="FF0000"/>
+                </a:solidFill>
+              </a:rPr>
+              <a:t>]</a:t>
+            </a:r>
+          </a:p>
+        </p:txBody>
+      </p:sp>
+      <p:sp>
+        <p:nvSpPr>
+          <p:cNvPr id="200" name="TextBox 199">
+            <a:extLst>
+              <a:ext uri="{FF2B5EF4-FFF2-40B4-BE49-F238E27FC236}">
+                <a16:creationId xmlns:a16="http://schemas.microsoft.com/office/drawing/2014/main" id="{B63BC4CC-25E4-3347-AC55-279D2DA778EC}"/>
+              </a:ext>
+            </a:extLst>
+          </p:cNvPr>
+          <p:cNvSpPr txBox="1"/>
+          <p:nvPr/>
+        </p:nvSpPr>
+        <p:spPr>
+          <a:xfrm>
+            <a:off x="4578768" y="560641"/>
+            <a:ext cx="2140281" cy="400110"/>
+          </a:xfrm>
+          <a:prstGeom prst="rect">
+            <a:avLst/>
+          </a:prstGeom>
+          <a:noFill/>
+        </p:spPr>
+        <p:txBody>
+          <a:bodyPr wrap="square" rtlCol="0">
+            <a:spAutoFit/>
+          </a:bodyPr>
+          <a:lstStyle/>
+          <a:p>
+            <a:r>
+              <a:rPr lang="en-AU" sz="1000" dirty="0"/>
+              <a:t>[</a:t>
+            </a:r>
+            <a:r>
+              <a:rPr lang="en-AU" sz="1000" dirty="0" err="1"/>
+              <a:t>stimulus_shape</a:t>
+            </a:r>
+            <a:r>
+              <a:rPr lang="en-AU" sz="1000" dirty="0"/>
+              <a:t>] – alternative names</a:t>
+            </a:r>
+          </a:p>
+        </p:txBody>
+      </p:sp>
+      <p:sp>
+        <p:nvSpPr>
+          <p:cNvPr id="203" name="TextBox 202">
+            <a:extLst>
+              <a:ext uri="{FF2B5EF4-FFF2-40B4-BE49-F238E27FC236}">
+                <a16:creationId xmlns:a16="http://schemas.microsoft.com/office/drawing/2014/main" id="{D65D7417-3CAC-CE1A-2D2F-C3DA205F2F68}"/>
+              </a:ext>
+            </a:extLst>
+          </p:cNvPr>
+          <p:cNvSpPr txBox="1"/>
+          <p:nvPr/>
+        </p:nvSpPr>
+        <p:spPr>
+          <a:xfrm>
+            <a:off x="3600300" y="36633"/>
+            <a:ext cx="4097215" cy="461665"/>
+          </a:xfrm>
+          <a:prstGeom prst="rect">
+            <a:avLst/>
+          </a:prstGeom>
+          <a:noFill/>
+        </p:spPr>
+        <p:txBody>
+          <a:bodyPr wrap="square" rtlCol="0">
+            <a:spAutoFit/>
+          </a:bodyPr>
+          <a:lstStyle/>
+          <a:p>
+            <a:pPr algn="ctr"/>
+            <a:r>
+              <a:rPr lang="en-AU" sz="2400" dirty="0"/>
+              <a:t>TMS (stimulus alternative) </a:t>
+            </a:r>
+          </a:p>
+        </p:txBody>
+      </p:sp>
+      <p:sp>
+        <p:nvSpPr>
+          <p:cNvPr id="204" name="TextBox 203">
+            <a:extLst>
+              <a:ext uri="{FF2B5EF4-FFF2-40B4-BE49-F238E27FC236}">
+                <a16:creationId xmlns:a16="http://schemas.microsoft.com/office/drawing/2014/main" id="{CFF68912-DA76-721F-226A-F40FC9DFFAB5}"/>
+              </a:ext>
+            </a:extLst>
+          </p:cNvPr>
+          <p:cNvSpPr txBox="1"/>
+          <p:nvPr/>
+        </p:nvSpPr>
+        <p:spPr>
+          <a:xfrm>
+            <a:off x="13513" y="2207657"/>
+            <a:ext cx="2511893" cy="461665"/>
+          </a:xfrm>
+          <a:prstGeom prst="rect">
+            <a:avLst/>
+          </a:prstGeom>
+          <a:noFill/>
+        </p:spPr>
+        <p:txBody>
+          <a:bodyPr wrap="square" rtlCol="0">
+            <a:spAutoFit/>
+          </a:bodyPr>
+          <a:lstStyle/>
+          <a:p>
+            <a:r>
+              <a:rPr lang="en-AU" sz="1200" dirty="0"/>
+              <a:t>Multiple stimulus timing parameters</a:t>
+            </a:r>
+          </a:p>
+        </p:txBody>
+      </p:sp>
+      <p:sp>
+        <p:nvSpPr>
+          <p:cNvPr id="205" name="TextBox 204">
+            <a:extLst>
+              <a:ext uri="{FF2B5EF4-FFF2-40B4-BE49-F238E27FC236}">
+                <a16:creationId xmlns:a16="http://schemas.microsoft.com/office/drawing/2014/main" id="{521AD7C5-9E67-753B-39B4-F7E75B4CA5AF}"/>
+              </a:ext>
+            </a:extLst>
+          </p:cNvPr>
+          <p:cNvSpPr txBox="1"/>
+          <p:nvPr/>
+        </p:nvSpPr>
+        <p:spPr>
+          <a:xfrm>
+            <a:off x="8662528" y="993392"/>
+            <a:ext cx="3392838" cy="1015663"/>
+          </a:xfrm>
+          <a:prstGeom prst="rect">
+            <a:avLst/>
+          </a:prstGeom>
+          <a:noFill/>
+        </p:spPr>
+        <p:txBody>
+          <a:bodyPr wrap="square" rtlCol="0">
+            <a:spAutoFit/>
+          </a:bodyPr>
+          <a:lstStyle/>
+          <a:p>
+            <a:r>
+              <a:rPr lang="en-AU" sz="1000" dirty="0" err="1"/>
+              <a:t>stim_id</a:t>
+            </a:r>
+            <a:r>
+              <a:rPr lang="en-AU" sz="1000" dirty="0"/>
+              <a:t> = ‘stim1’</a:t>
+            </a:r>
+          </a:p>
+          <a:p>
+            <a:endParaRPr lang="en-AU" sz="1000" dirty="0"/>
+          </a:p>
+          <a:p>
+            <a:r>
+              <a:rPr lang="en-AU" sz="1000" i="1" dirty="0" err="1"/>
+              <a:t>nibs.json</a:t>
+            </a:r>
+            <a:endParaRPr lang="en-AU" sz="1000" i="1" dirty="0"/>
+          </a:p>
+          <a:p>
+            <a:r>
+              <a:rPr lang="en-AU" sz="1000" dirty="0" err="1"/>
+              <a:t>StimID</a:t>
+            </a:r>
+            <a:r>
+              <a:rPr lang="en-AU" sz="1000" dirty="0"/>
+              <a:t> = ‘stim1’</a:t>
+            </a:r>
+          </a:p>
+          <a:p>
+            <a:r>
+              <a:rPr lang="en-AU" sz="1000" dirty="0" err="1"/>
+              <a:t>StimDescription</a:t>
+            </a:r>
+            <a:r>
+              <a:rPr lang="en-AU" sz="1000" dirty="0"/>
+              <a:t> = ‘Single pulse condition’</a:t>
+            </a:r>
+          </a:p>
+          <a:p>
+            <a:endParaRPr lang="en-AU" sz="1000" dirty="0"/>
+          </a:p>
+        </p:txBody>
+      </p:sp>
+      <p:sp>
+        <p:nvSpPr>
+          <p:cNvPr id="2" name="TextBox 1">
+            <a:extLst>
+              <a:ext uri="{FF2B5EF4-FFF2-40B4-BE49-F238E27FC236}">
+                <a16:creationId xmlns:a16="http://schemas.microsoft.com/office/drawing/2014/main" id="{5A73D2DC-3F9E-1DFD-C6D2-DA0A431EAD0E}"/>
+              </a:ext>
+            </a:extLst>
+          </p:cNvPr>
+          <p:cNvSpPr txBox="1"/>
+          <p:nvPr/>
+        </p:nvSpPr>
+        <p:spPr>
+          <a:xfrm>
+            <a:off x="6606999" y="3967671"/>
+            <a:ext cx="2548721" cy="276999"/>
+          </a:xfrm>
+          <a:prstGeom prst="rect">
+            <a:avLst/>
+          </a:prstGeom>
+          <a:noFill/>
+        </p:spPr>
+        <p:txBody>
+          <a:bodyPr wrap="square" rtlCol="0">
+            <a:spAutoFit/>
+          </a:bodyPr>
+          <a:lstStyle/>
+          <a:p>
+            <a:r>
+              <a:rPr lang="en-AU" sz="1200" dirty="0"/>
+              <a:t>See TUS for ITRUSST layer model</a:t>
+            </a:r>
+          </a:p>
+        </p:txBody>
+      </p:sp>
+    </p:spTree>
+    <p:extLst>
+      <p:ext uri="{BB962C8B-B14F-4D97-AF65-F5344CB8AC3E}">
+        <p14:creationId xmlns:p14="http://schemas.microsoft.com/office/powerpoint/2010/main" val="614205854"/>
+      </p:ext>
+    </p:extLst>
+  </p:cSld>
+  <p:clrMapOvr>
+    <a:masterClrMapping/>
+  </p:clrMapOvr>
+</p:sld>
+</file>
+
+<file path=ppt/slides/slide3.xml><?xml version="1.0" encoding="utf-8"?>
 <p:sld xmlns:a="http://schemas.openxmlformats.org/drawingml/2006/main" xmlns:r="http://schemas.openxmlformats.org/officeDocument/2006/relationships" xmlns:p="http://schemas.openxmlformats.org/presentationml/2006/main">
   <p:cSld>
     <p:spTree>
@@ -40294,7 +47171,7 @@
 </p:sld>
 </file>
 
-<file path=ppt/slides/slide3.xml><?xml version="1.0" encoding="utf-8"?>
+<file path=ppt/slides/slide4.xml><?xml version="1.0" encoding="utf-8"?>
 <p:sld xmlns:a="http://schemas.openxmlformats.org/drawingml/2006/main" xmlns:r="http://schemas.openxmlformats.org/officeDocument/2006/relationships" xmlns:p="http://schemas.openxmlformats.org/presentationml/2006/main">
   <p:cSld>
     <p:spTree>
@@ -50669,7 +57546,2343 @@
 </p:sld>
 </file>
 
-<file path=ppt/slides/slide4.xml><?xml version="1.0" encoding="utf-8"?>
+<file path=ppt/slides/slide5.xml><?xml version="1.0" encoding="utf-8"?>
+<p:sld xmlns:a="http://schemas.openxmlformats.org/drawingml/2006/main" xmlns:r="http://schemas.openxmlformats.org/officeDocument/2006/relationships" xmlns:p="http://schemas.openxmlformats.org/presentationml/2006/main">
+  <p:cSld>
+    <p:spTree>
+      <p:nvGrpSpPr>
+        <p:cNvPr id="1" name=""/>
+        <p:cNvGrpSpPr/>
+        <p:nvPr/>
+      </p:nvGrpSpPr>
+      <p:grpSpPr>
+        <a:xfrm>
+          <a:off x="0" y="0"/>
+          <a:ext cx="0" cy="0"/>
+          <a:chOff x="0" y="0"/>
+          <a:chExt cx="0" cy="0"/>
+        </a:xfrm>
+      </p:grpSpPr>
+      <p:pic>
+        <p:nvPicPr>
+          <p:cNvPr id="1026" name="Picture 2" descr="New Chapter: &quot;Transcranial Electrical Stimulation&quot; in Neural Engineering —  CCNY Neural Engineering Group">
+            <a:extLst>
+              <a:ext uri="{FF2B5EF4-FFF2-40B4-BE49-F238E27FC236}">
+                <a16:creationId xmlns:a16="http://schemas.microsoft.com/office/drawing/2014/main" id="{D10E7177-ABC2-D411-160B-35516C41B752}"/>
+              </a:ext>
+            </a:extLst>
+          </p:cNvPr>
+          <p:cNvPicPr>
+            <a:picLocks noChangeAspect="1" noChangeArrowheads="1"/>
+          </p:cNvPicPr>
+          <p:nvPr/>
+        </p:nvPicPr>
+        <p:blipFill>
+          <a:blip r:embed="rId2">
+            <a:extLst>
+              <a:ext uri="{28A0092B-C50C-407E-A947-70E740481C1C}">
+                <a14:useLocalDpi xmlns:a14="http://schemas.microsoft.com/office/drawing/2010/main" val="0"/>
+              </a:ext>
+            </a:extLst>
+          </a:blip>
+          <a:srcRect/>
+          <a:stretch>
+            <a:fillRect/>
+          </a:stretch>
+        </p:blipFill>
+        <p:spPr bwMode="auto">
+          <a:xfrm>
+            <a:off x="902921" y="0"/>
+            <a:ext cx="5861050" cy="6858000"/>
+          </a:xfrm>
+          <a:prstGeom prst="rect">
+            <a:avLst/>
+          </a:prstGeom>
+          <a:noFill/>
+          <a:extLst>
+            <a:ext uri="{909E8E84-426E-40DD-AFC4-6F175D3DCCD1}">
+              <a14:hiddenFill xmlns:a14="http://schemas.microsoft.com/office/drawing/2010/main">
+                <a:solidFill>
+                  <a:srgbClr val="FFFFFF"/>
+                </a:solidFill>
+              </a14:hiddenFill>
+            </a:ext>
+          </a:extLst>
+        </p:spPr>
+      </p:pic>
+      <p:sp>
+        <p:nvSpPr>
+          <p:cNvPr id="5" name="TextBox 4">
+            <a:extLst>
+              <a:ext uri="{FF2B5EF4-FFF2-40B4-BE49-F238E27FC236}">
+                <a16:creationId xmlns:a16="http://schemas.microsoft.com/office/drawing/2014/main" id="{4E96B7E7-E164-BAC5-6186-E0E3A66AF160}"/>
+              </a:ext>
+            </a:extLst>
+          </p:cNvPr>
+          <p:cNvSpPr txBox="1"/>
+          <p:nvPr/>
+        </p:nvSpPr>
+        <p:spPr>
+          <a:xfrm>
+            <a:off x="6635017" y="5515399"/>
+            <a:ext cx="5169878" cy="1200329"/>
+          </a:xfrm>
+          <a:prstGeom prst="rect">
+            <a:avLst/>
+          </a:prstGeom>
+          <a:noFill/>
+        </p:spPr>
+        <p:txBody>
+          <a:bodyPr wrap="square">
+            <a:spAutoFit/>
+          </a:bodyPr>
+          <a:lstStyle/>
+          <a:p>
+            <a:r>
+              <a:rPr lang="en-AU" b="1" dirty="0"/>
+              <a:t>FIGURE</a:t>
+            </a:r>
+          </a:p>
+          <a:p>
+            <a:r>
+              <a:rPr lang="en-AU" dirty="0"/>
+              <a:t>https://www.neuralengr.org/news/new-chapter-transcranial-electrical-stimulation-in-neural-engineering</a:t>
+            </a:r>
+          </a:p>
+        </p:txBody>
+      </p:sp>
+      <p:sp>
+        <p:nvSpPr>
+          <p:cNvPr id="7" name="TextBox 6">
+            <a:extLst>
+              <a:ext uri="{FF2B5EF4-FFF2-40B4-BE49-F238E27FC236}">
+                <a16:creationId xmlns:a16="http://schemas.microsoft.com/office/drawing/2014/main" id="{061E513F-8433-6E0B-76EC-009433B0013F}"/>
+              </a:ext>
+            </a:extLst>
+          </p:cNvPr>
+          <p:cNvSpPr txBox="1"/>
+          <p:nvPr/>
+        </p:nvSpPr>
+        <p:spPr>
+          <a:xfrm>
+            <a:off x="6635017" y="485728"/>
+            <a:ext cx="4654062" cy="2031325"/>
+          </a:xfrm>
+          <a:prstGeom prst="rect">
+            <a:avLst/>
+          </a:prstGeom>
+          <a:noFill/>
+        </p:spPr>
+        <p:txBody>
+          <a:bodyPr wrap="square">
+            <a:spAutoFit/>
+          </a:bodyPr>
+          <a:lstStyle/>
+          <a:p>
+            <a:r>
+              <a:rPr lang="en-GB" b="1" dirty="0"/>
+              <a:t>Fundamentals of transcranial electric and magnetic stimulation dose: Definition, selection, and reporting practices</a:t>
+            </a:r>
+          </a:p>
+          <a:p>
+            <a:endParaRPr lang="en-AU" dirty="0"/>
+          </a:p>
+          <a:p>
+            <a:endParaRPr lang="en-AU" dirty="0"/>
+          </a:p>
+          <a:p>
+            <a:r>
+              <a:rPr lang="en-AU" dirty="0"/>
+              <a:t>https://www.sciencedirect.com/science/article/pii/S1935861X11001495</a:t>
+            </a:r>
+          </a:p>
+        </p:txBody>
+      </p:sp>
+      <p:sp>
+        <p:nvSpPr>
+          <p:cNvPr id="9" name="TextBox 8">
+            <a:extLst>
+              <a:ext uri="{FF2B5EF4-FFF2-40B4-BE49-F238E27FC236}">
+                <a16:creationId xmlns:a16="http://schemas.microsoft.com/office/drawing/2014/main" id="{42C07800-D074-7281-632C-E023D752D7E0}"/>
+              </a:ext>
+            </a:extLst>
+          </p:cNvPr>
+          <p:cNvSpPr txBox="1"/>
+          <p:nvPr/>
+        </p:nvSpPr>
+        <p:spPr>
+          <a:xfrm>
+            <a:off x="6564923" y="2887033"/>
+            <a:ext cx="5169878" cy="1477328"/>
+          </a:xfrm>
+          <a:prstGeom prst="rect">
+            <a:avLst/>
+          </a:prstGeom>
+          <a:noFill/>
+        </p:spPr>
+        <p:txBody>
+          <a:bodyPr wrap="square">
+            <a:spAutoFit/>
+          </a:bodyPr>
+          <a:lstStyle/>
+          <a:p>
+            <a:r>
+              <a:rPr lang="en-AU" b="1" dirty="0"/>
+              <a:t>Transcranial electrical stimulation nomenclature</a:t>
+            </a:r>
+          </a:p>
+          <a:p>
+            <a:endParaRPr lang="en-AU" dirty="0"/>
+          </a:p>
+          <a:p>
+            <a:r>
+              <a:rPr lang="en-AU" dirty="0"/>
+              <a:t>https://www.sciencedirect.com/science/article/pii/S1935861X19302943</a:t>
+            </a:r>
+          </a:p>
+        </p:txBody>
+      </p:sp>
+    </p:spTree>
+    <p:extLst>
+      <p:ext uri="{BB962C8B-B14F-4D97-AF65-F5344CB8AC3E}">
+        <p14:creationId xmlns:p14="http://schemas.microsoft.com/office/powerpoint/2010/main" val="754413377"/>
+      </p:ext>
+    </p:extLst>
+  </p:cSld>
+  <p:clrMapOvr>
+    <a:masterClrMapping/>
+  </p:clrMapOvr>
+</p:sld>
+</file>
+
+<file path=ppt/slides/slide6.xml><?xml version="1.0" encoding="utf-8"?>
+<p:sld xmlns:a="http://schemas.openxmlformats.org/drawingml/2006/main" xmlns:r="http://schemas.openxmlformats.org/officeDocument/2006/relationships" xmlns:p="http://schemas.openxmlformats.org/presentationml/2006/main">
+  <p:cSld>
+    <p:spTree>
+      <p:nvGrpSpPr>
+        <p:cNvPr id="1" name="">
+          <a:extLst>
+            <a:ext uri="{FF2B5EF4-FFF2-40B4-BE49-F238E27FC236}">
+              <a16:creationId xmlns:a16="http://schemas.microsoft.com/office/drawing/2014/main" id="{061E8EAB-2D98-F9BB-91C7-2DADB1CE754C}"/>
+            </a:ext>
+          </a:extLst>
+        </p:cNvPr>
+        <p:cNvGrpSpPr/>
+        <p:nvPr/>
+      </p:nvGrpSpPr>
+      <p:grpSpPr>
+        <a:xfrm>
+          <a:off x="0" y="0"/>
+          <a:ext cx="0" cy="0"/>
+          <a:chOff x="0" y="0"/>
+          <a:chExt cx="0" cy="0"/>
+        </a:xfrm>
+      </p:grpSpPr>
+      <p:graphicFrame>
+        <p:nvGraphicFramePr>
+          <p:cNvPr id="4" name="Table 3">
+            <a:extLst>
+              <a:ext uri="{FF2B5EF4-FFF2-40B4-BE49-F238E27FC236}">
+                <a16:creationId xmlns:a16="http://schemas.microsoft.com/office/drawing/2014/main" id="{BE751F37-3130-7140-E58B-4F6A4C536330}"/>
+              </a:ext>
+            </a:extLst>
+          </p:cNvPr>
+          <p:cNvGraphicFramePr>
+            <a:graphicFrameLocks noGrp="1"/>
+          </p:cNvGraphicFramePr>
+          <p:nvPr>
+            <p:extLst>
+              <p:ext uri="{D42A27DB-BD31-4B8C-83A1-F6EECF244321}">
+                <p14:modId xmlns:p14="http://schemas.microsoft.com/office/powerpoint/2010/main" val="3978683899"/>
+              </p:ext>
+            </p:extLst>
+          </p:nvPr>
+        </p:nvGraphicFramePr>
+        <p:xfrm>
+          <a:off x="322385" y="1453008"/>
+          <a:ext cx="11594121" cy="4932552"/>
+        </p:xfrm>
+        <a:graphic>
+          <a:graphicData uri="http://schemas.openxmlformats.org/drawingml/2006/table">
+            <a:tbl>
+              <a:tblPr firstRow="1" bandRow="1">
+                <a:tableStyleId>{5C22544A-7EE6-4342-B048-85BDC9FD1C3A}</a:tableStyleId>
+              </a:tblPr>
+              <a:tblGrid>
+                <a:gridCol w="2573927">
+                  <a:extLst>
+                    <a:ext uri="{9D8B030D-6E8A-4147-A177-3AD203B41FA5}">
+                      <a16:colId xmlns:a16="http://schemas.microsoft.com/office/drawing/2014/main" val="3539826412"/>
+                    </a:ext>
+                  </a:extLst>
+                </a:gridCol>
+                <a:gridCol w="2833729">
+                  <a:extLst>
+                    <a:ext uri="{9D8B030D-6E8A-4147-A177-3AD203B41FA5}">
+                      <a16:colId xmlns:a16="http://schemas.microsoft.com/office/drawing/2014/main" val="1863496724"/>
+                    </a:ext>
+                  </a:extLst>
+                </a:gridCol>
+                <a:gridCol w="3327331">
+                  <a:extLst>
+                    <a:ext uri="{9D8B030D-6E8A-4147-A177-3AD203B41FA5}">
+                      <a16:colId xmlns:a16="http://schemas.microsoft.com/office/drawing/2014/main" val="299769321"/>
+                    </a:ext>
+                  </a:extLst>
+                </a:gridCol>
+                <a:gridCol w="2859134">
+                  <a:extLst>
+                    <a:ext uri="{9D8B030D-6E8A-4147-A177-3AD203B41FA5}">
+                      <a16:colId xmlns:a16="http://schemas.microsoft.com/office/drawing/2014/main" val="3776062356"/>
+                    </a:ext>
+                  </a:extLst>
+                </a:gridCol>
+              </a:tblGrid>
+              <a:tr h="658664">
+                <a:tc>
+                  <a:txBody>
+                    <a:bodyPr/>
+                    <a:lstStyle/>
+                    <a:p>
+                      <a:r>
+                        <a:rPr lang="en-AU" dirty="0"/>
+                        <a:t>Property</a:t>
+                      </a:r>
+                    </a:p>
+                  </a:txBody>
+                  <a:tcPr/>
+                </a:tc>
+                <a:tc>
+                  <a:txBody>
+                    <a:bodyPr/>
+                    <a:lstStyle/>
+                    <a:p>
+                      <a:r>
+                        <a:rPr lang="en-AU" dirty="0"/>
+                        <a:t>Nigel</a:t>
+                      </a:r>
+                    </a:p>
+                  </a:txBody>
+                  <a:tcPr/>
+                </a:tc>
+                <a:tc>
+                  <a:txBody>
+                    <a:bodyPr/>
+                    <a:lstStyle/>
+                    <a:p>
+                      <a:r>
+                        <a:rPr lang="en-AU" dirty="0"/>
+                        <a:t>Additions</a:t>
+                      </a:r>
+                    </a:p>
+                  </a:txBody>
+                  <a:tcPr/>
+                </a:tc>
+                <a:tc>
+                  <a:txBody>
+                    <a:bodyPr/>
+                    <a:lstStyle/>
+                    <a:p>
+                      <a:r>
+                        <a:rPr lang="en-AU" dirty="0"/>
+                        <a:t>Alternatives</a:t>
+                      </a:r>
+                    </a:p>
+                  </a:txBody>
+                  <a:tcPr/>
+                </a:tc>
+                <a:extLst>
+                  <a:ext uri="{0D108BD9-81ED-4DB2-BD59-A6C34878D82A}">
+                    <a16:rowId xmlns:a16="http://schemas.microsoft.com/office/drawing/2014/main" val="2955893253"/>
+                  </a:ext>
+                </a:extLst>
+              </a:tr>
+              <a:tr h="658664">
+                <a:tc>
+                  <a:txBody>
+                    <a:bodyPr/>
+                    <a:lstStyle/>
+                    <a:p>
+                      <a:r>
+                        <a:rPr lang="en-AU" sz="1100" dirty="0"/>
+                        <a:t>Waveform/shape</a:t>
+                      </a:r>
+                    </a:p>
+                    <a:p>
+                      <a:r>
+                        <a:rPr lang="en-AU" sz="1100" dirty="0"/>
+                        <a:t>(Are waveform and shape separate parameters? – stimulus waveform typically describes the entire stimulation so perhaps shape is better)</a:t>
+                      </a:r>
+                    </a:p>
+                  </a:txBody>
+                  <a:tcPr/>
+                </a:tc>
+                <a:tc>
+                  <a:txBody>
+                    <a:bodyPr/>
+                    <a:lstStyle/>
+                    <a:p>
+                      <a:r>
+                        <a:rPr lang="en-AU" sz="1100" dirty="0" err="1"/>
+                        <a:t>stimulus_shape</a:t>
+                      </a:r>
+                      <a:endParaRPr lang="en-AU" sz="1100" dirty="0"/>
+                    </a:p>
+                  </a:txBody>
+                  <a:tcPr/>
+                </a:tc>
+                <a:tc>
+                  <a:txBody>
+                    <a:bodyPr/>
+                    <a:lstStyle/>
+                    <a:p>
+                      <a:r>
+                        <a:rPr lang="en-AU" sz="1100" dirty="0"/>
+                        <a:t>If = ‘sinusoid’:</a:t>
+                      </a:r>
+                    </a:p>
+                    <a:p>
+                      <a:r>
+                        <a:rPr lang="en-AU" sz="1100" dirty="0" err="1"/>
+                        <a:t>stimulus_operating_frequency</a:t>
+                      </a:r>
+                      <a:endParaRPr lang="en-AU" sz="1100" dirty="0"/>
+                    </a:p>
+                    <a:p>
+                      <a:r>
+                        <a:rPr lang="en-AU" sz="1100" dirty="0" err="1"/>
+                        <a:t>stimulus_operating_phase</a:t>
+                      </a:r>
+                      <a:endParaRPr lang="en-AU" sz="1100" dirty="0"/>
+                    </a:p>
+                  </a:txBody>
+                  <a:tcPr/>
+                </a:tc>
+                <a:tc>
+                  <a:txBody>
+                    <a:bodyPr/>
+                    <a:lstStyle/>
+                    <a:p>
+                      <a:endParaRPr lang="en-AU" sz="1100" dirty="0"/>
+                    </a:p>
+                  </a:txBody>
+                  <a:tcPr/>
+                </a:tc>
+                <a:extLst>
+                  <a:ext uri="{0D108BD9-81ED-4DB2-BD59-A6C34878D82A}">
+                    <a16:rowId xmlns:a16="http://schemas.microsoft.com/office/drawing/2014/main" val="252285933"/>
+                  </a:ext>
+                </a:extLst>
+              </a:tr>
+              <a:tr h="658664">
+                <a:tc>
+                  <a:txBody>
+                    <a:bodyPr/>
+                    <a:lstStyle/>
+                    <a:p>
+                      <a:r>
+                        <a:rPr lang="en-AU" sz="1100" dirty="0"/>
+                        <a:t>Duration</a:t>
+                      </a:r>
+                    </a:p>
+                  </a:txBody>
+                  <a:tcPr/>
+                </a:tc>
+                <a:tc>
+                  <a:txBody>
+                    <a:bodyPr/>
+                    <a:lstStyle/>
+                    <a:p>
+                      <a:r>
+                        <a:rPr lang="en-AU" sz="1100" dirty="0" err="1"/>
+                        <a:t>stimulus_duration</a:t>
+                      </a:r>
+                      <a:endParaRPr lang="en-AU" sz="1100" dirty="0"/>
+                    </a:p>
+                  </a:txBody>
+                  <a:tcPr/>
+                </a:tc>
+                <a:tc>
+                  <a:txBody>
+                    <a:bodyPr/>
+                    <a:lstStyle/>
+                    <a:p>
+                      <a:endParaRPr lang="en-AU" sz="1100" dirty="0"/>
+                    </a:p>
+                  </a:txBody>
+                  <a:tcPr/>
+                </a:tc>
+                <a:tc>
+                  <a:txBody>
+                    <a:bodyPr/>
+                    <a:lstStyle/>
+                    <a:p>
+                      <a:r>
+                        <a:rPr lang="en-AU" sz="1100" dirty="0" err="1"/>
+                        <a:t>stimulus_width</a:t>
+                      </a:r>
+                      <a:endParaRPr lang="en-AU" sz="1100" dirty="0"/>
+                    </a:p>
+                  </a:txBody>
+                  <a:tcPr/>
+                </a:tc>
+                <a:extLst>
+                  <a:ext uri="{0D108BD9-81ED-4DB2-BD59-A6C34878D82A}">
+                    <a16:rowId xmlns:a16="http://schemas.microsoft.com/office/drawing/2014/main" val="139951084"/>
+                  </a:ext>
+                </a:extLst>
+              </a:tr>
+              <a:tr h="658664">
+                <a:tc>
+                  <a:txBody>
+                    <a:bodyPr/>
+                    <a:lstStyle/>
+                    <a:p>
+                      <a:r>
+                        <a:rPr lang="en-AU" sz="1100" dirty="0"/>
+                        <a:t>Amplitude</a:t>
+                      </a:r>
+                    </a:p>
+                  </a:txBody>
+                  <a:tcPr/>
+                </a:tc>
+                <a:tc>
+                  <a:txBody>
+                    <a:bodyPr/>
+                    <a:lstStyle/>
+                    <a:p>
+                      <a:r>
+                        <a:rPr lang="en-AU" sz="1100" dirty="0" err="1"/>
+                        <a:t>stimulus_intensity</a:t>
+                      </a:r>
+                      <a:r>
+                        <a:rPr lang="en-AU" sz="1100" dirty="0"/>
+                        <a:t> (TMS)</a:t>
+                      </a:r>
+                    </a:p>
+                    <a:p>
+                      <a:r>
+                        <a:rPr lang="en-AU" sz="1100" dirty="0" err="1"/>
+                        <a:t>stimulus_peak_positive_pressure</a:t>
+                      </a:r>
+                      <a:r>
+                        <a:rPr lang="en-AU" sz="1100" dirty="0"/>
+                        <a:t> (TUS)</a:t>
+                      </a:r>
+                    </a:p>
+                    <a:p>
+                      <a:r>
+                        <a:rPr lang="en-AU" sz="1100" dirty="0" err="1"/>
+                        <a:t>stimulus_peak_negative_pressure</a:t>
+                      </a:r>
+                      <a:r>
+                        <a:rPr lang="en-AU" sz="1100" dirty="0"/>
+                        <a:t> (TUS)</a:t>
+                      </a:r>
+                    </a:p>
+                    <a:p>
+                      <a:r>
+                        <a:rPr lang="en-AU" sz="1100" dirty="0" err="1"/>
+                        <a:t>stimulus_peak_positive_current</a:t>
+                      </a:r>
+                      <a:r>
+                        <a:rPr lang="en-AU" sz="1100" dirty="0"/>
+                        <a:t> (</a:t>
+                      </a:r>
+                      <a:r>
+                        <a:rPr lang="en-AU" sz="1100" dirty="0" err="1"/>
+                        <a:t>tES</a:t>
+                      </a:r>
+                      <a:r>
+                        <a:rPr lang="en-AU" sz="1100" dirty="0"/>
+                        <a:t>)</a:t>
+                      </a:r>
+                    </a:p>
+                    <a:p>
+                      <a:r>
+                        <a:rPr lang="en-AU" sz="1100" dirty="0" err="1"/>
+                        <a:t>stimulus_peak_negative_current</a:t>
+                      </a:r>
+                      <a:r>
+                        <a:rPr lang="en-AU" sz="1100" dirty="0"/>
+                        <a:t> (</a:t>
+                      </a:r>
+                      <a:r>
+                        <a:rPr lang="en-AU" sz="1100" dirty="0" err="1"/>
+                        <a:t>tES</a:t>
+                      </a:r>
+                      <a:r>
+                        <a:rPr lang="en-AU" sz="1100" dirty="0"/>
+                        <a:t>)</a:t>
+                      </a:r>
+                    </a:p>
+                    <a:p>
+                      <a:endParaRPr lang="en-AU" sz="1100" dirty="0"/>
+                    </a:p>
+                  </a:txBody>
+                  <a:tcPr/>
+                </a:tc>
+                <a:tc>
+                  <a:txBody>
+                    <a:bodyPr/>
+                    <a:lstStyle/>
+                    <a:p>
+                      <a:endParaRPr lang="en-AU" sz="1100" dirty="0"/>
+                    </a:p>
+                  </a:txBody>
+                  <a:tcPr/>
+                </a:tc>
+                <a:tc>
+                  <a:txBody>
+                    <a:bodyPr/>
+                    <a:lstStyle/>
+                    <a:p>
+                      <a:r>
+                        <a:rPr lang="en-AU" sz="1100" dirty="0" err="1"/>
+                        <a:t>stimulus_amplitude_machine</a:t>
+                      </a:r>
+                      <a:r>
+                        <a:rPr lang="en-AU" sz="1100" dirty="0"/>
+                        <a:t> (TMS)</a:t>
+                      </a:r>
+                    </a:p>
+                    <a:p>
+                      <a:pPr marL="0" marR="0" lvl="0" indent="0" algn="l" defTabSz="914400" rtl="0" eaLnBrk="1" fontAlgn="auto" latinLnBrk="0" hangingPunct="1">
+                        <a:lnSpc>
+                          <a:spcPct val="100000"/>
+                        </a:lnSpc>
+                        <a:spcBef>
+                          <a:spcPts val="0"/>
+                        </a:spcBef>
+                        <a:spcAft>
+                          <a:spcPts val="0"/>
+                        </a:spcAft>
+                        <a:buClrTx/>
+                        <a:buSzTx/>
+                        <a:buFontTx/>
+                        <a:buNone/>
+                        <a:tabLst/>
+                        <a:defRPr/>
+                      </a:pPr>
+                      <a:r>
+                        <a:rPr lang="en-AU" sz="1100" dirty="0" err="1"/>
+                        <a:t>stimulus_amplitude_mso</a:t>
+                      </a:r>
+                      <a:r>
+                        <a:rPr lang="en-AU" sz="1100" dirty="0"/>
+                        <a:t> (TMS)</a:t>
+                      </a:r>
+                    </a:p>
+                    <a:p>
+                      <a:r>
+                        <a:rPr lang="en-AU" sz="1100" dirty="0" err="1"/>
+                        <a:t>stimulus_amplitude_didt</a:t>
+                      </a:r>
+                      <a:r>
+                        <a:rPr lang="en-AU" sz="1100" dirty="0"/>
+                        <a:t> (TMS)</a:t>
+                      </a:r>
+                    </a:p>
+                    <a:p>
+                      <a:r>
+                        <a:rPr lang="en-AU" sz="1100" dirty="0" err="1"/>
+                        <a:t>stimulus_amplitude_maximum</a:t>
+                      </a:r>
+                      <a:r>
+                        <a:rPr lang="en-AU" sz="1100" dirty="0"/>
+                        <a:t> (TUS, </a:t>
+                      </a:r>
+                      <a:r>
+                        <a:rPr lang="en-AU" sz="1100" dirty="0" err="1"/>
+                        <a:t>tES</a:t>
+                      </a:r>
+                      <a:r>
+                        <a:rPr lang="en-AU" sz="1100" dirty="0"/>
+                        <a:t>)</a:t>
+                      </a:r>
+                    </a:p>
+                    <a:p>
+                      <a:r>
+                        <a:rPr lang="en-AU" sz="1100" dirty="0" err="1"/>
+                        <a:t>stimulus_amplitude_minimum</a:t>
+                      </a:r>
+                      <a:r>
+                        <a:rPr lang="en-AU" sz="1100" dirty="0"/>
+                        <a:t> (TUS, </a:t>
+                      </a:r>
+                      <a:r>
+                        <a:rPr lang="en-AU" sz="1100" dirty="0" err="1"/>
+                        <a:t>tES</a:t>
+                      </a:r>
+                      <a:r>
+                        <a:rPr lang="en-AU" sz="1100" dirty="0"/>
+                        <a:t>)</a:t>
+                      </a:r>
+                    </a:p>
+                  </a:txBody>
+                  <a:tcPr/>
+                </a:tc>
+                <a:extLst>
+                  <a:ext uri="{0D108BD9-81ED-4DB2-BD59-A6C34878D82A}">
+                    <a16:rowId xmlns:a16="http://schemas.microsoft.com/office/drawing/2014/main" val="2479919590"/>
+                  </a:ext>
+                </a:extLst>
+              </a:tr>
+              <a:tr h="658664">
+                <a:tc>
+                  <a:txBody>
+                    <a:bodyPr/>
+                    <a:lstStyle/>
+                    <a:p>
+                      <a:r>
+                        <a:rPr lang="en-AU" sz="1100" dirty="0"/>
+                        <a:t>Amplitude ramp</a:t>
+                      </a:r>
+                    </a:p>
+                  </a:txBody>
+                  <a:tcPr/>
+                </a:tc>
+                <a:tc>
+                  <a:txBody>
+                    <a:bodyPr/>
+                    <a:lstStyle/>
+                    <a:p>
+                      <a:r>
+                        <a:rPr lang="en-AU" sz="1100" dirty="0" err="1"/>
+                        <a:t>stimulus_ramp_duration</a:t>
+                      </a:r>
+                      <a:endParaRPr lang="en-AU" sz="1100" dirty="0"/>
+                    </a:p>
+                    <a:p>
+                      <a:r>
+                        <a:rPr lang="en-AU" sz="1100" dirty="0" err="1"/>
+                        <a:t>stimulus_ramp_shape</a:t>
+                      </a:r>
+                      <a:endParaRPr lang="en-AU" sz="1100" dirty="0"/>
+                    </a:p>
+                  </a:txBody>
+                  <a:tcPr/>
+                </a:tc>
+                <a:tc>
+                  <a:txBody>
+                    <a:bodyPr/>
+                    <a:lstStyle/>
+                    <a:p>
+                      <a:endParaRPr lang="en-AU" sz="1100" dirty="0"/>
+                    </a:p>
+                  </a:txBody>
+                  <a:tcPr/>
+                </a:tc>
+                <a:tc>
+                  <a:txBody>
+                    <a:bodyPr/>
+                    <a:lstStyle/>
+                    <a:p>
+                      <a:r>
+                        <a:rPr lang="en-AU" sz="1100" dirty="0" err="1"/>
+                        <a:t>stimulus_ramp_up_duration</a:t>
+                      </a:r>
+                      <a:endParaRPr lang="en-AU" sz="1100" dirty="0"/>
+                    </a:p>
+                    <a:p>
+                      <a:r>
+                        <a:rPr lang="en-AU" sz="1100" dirty="0" err="1"/>
+                        <a:t>stimulus_ramp_down_duration</a:t>
+                      </a:r>
+                      <a:endParaRPr lang="en-AU" sz="1100" dirty="0"/>
+                    </a:p>
+                  </a:txBody>
+                  <a:tcPr/>
+                </a:tc>
+                <a:extLst>
+                  <a:ext uri="{0D108BD9-81ED-4DB2-BD59-A6C34878D82A}">
+                    <a16:rowId xmlns:a16="http://schemas.microsoft.com/office/drawing/2014/main" val="2408620604"/>
+                  </a:ext>
+                </a:extLst>
+              </a:tr>
+              <a:tr h="658664">
+                <a:tc>
+                  <a:txBody>
+                    <a:bodyPr/>
+                    <a:lstStyle/>
+                    <a:p>
+                      <a:r>
+                        <a:rPr lang="en-AU" sz="1100" dirty="0"/>
+                        <a:t>Polarity</a:t>
+                      </a:r>
+                    </a:p>
+                    <a:p>
+                      <a:endParaRPr lang="en-AU" sz="1100" dirty="0"/>
+                    </a:p>
+                    <a:p>
+                      <a:r>
+                        <a:rPr lang="en-AU" sz="1100" dirty="0"/>
+                        <a:t>Related to current direction (not sure if this fits here – perhaps fits under coil position for TMS)</a:t>
+                      </a:r>
+                    </a:p>
+                  </a:txBody>
+                  <a:tcPr/>
+                </a:tc>
+                <a:tc>
+                  <a:txBody>
+                    <a:bodyPr/>
+                    <a:lstStyle/>
+                    <a:p>
+                      <a:endParaRPr lang="en-AU" sz="1100" dirty="0"/>
+                    </a:p>
+                  </a:txBody>
+                  <a:tcPr/>
+                </a:tc>
+                <a:tc>
+                  <a:txBody>
+                    <a:bodyPr/>
+                    <a:lstStyle/>
+                    <a:p>
+                      <a:endParaRPr lang="en-AU" sz="1100" dirty="0"/>
+                    </a:p>
+                  </a:txBody>
+                  <a:tcPr/>
+                </a:tc>
+                <a:tc>
+                  <a:txBody>
+                    <a:bodyPr/>
+                    <a:lstStyle/>
+                    <a:p>
+                      <a:endParaRPr lang="en-AU" sz="1100" dirty="0"/>
+                    </a:p>
+                  </a:txBody>
+                  <a:tcPr/>
+                </a:tc>
+                <a:extLst>
+                  <a:ext uri="{0D108BD9-81ED-4DB2-BD59-A6C34878D82A}">
+                    <a16:rowId xmlns:a16="http://schemas.microsoft.com/office/drawing/2014/main" val="2952362299"/>
+                  </a:ext>
+                </a:extLst>
+              </a:tr>
+            </a:tbl>
+          </a:graphicData>
+        </a:graphic>
+      </p:graphicFrame>
+      <p:sp>
+        <p:nvSpPr>
+          <p:cNvPr id="5" name="TextBox 4">
+            <a:extLst>
+              <a:ext uri="{FF2B5EF4-FFF2-40B4-BE49-F238E27FC236}">
+                <a16:creationId xmlns:a16="http://schemas.microsoft.com/office/drawing/2014/main" id="{DFC3C5E4-14E4-32CC-C5B3-54D26E9ADF66}"/>
+              </a:ext>
+            </a:extLst>
+          </p:cNvPr>
+          <p:cNvSpPr txBox="1"/>
+          <p:nvPr/>
+        </p:nvSpPr>
+        <p:spPr>
+          <a:xfrm>
+            <a:off x="2979127" y="126924"/>
+            <a:ext cx="6796454" cy="461665"/>
+          </a:xfrm>
+          <a:prstGeom prst="rect">
+            <a:avLst/>
+          </a:prstGeom>
+          <a:noFill/>
+        </p:spPr>
+        <p:txBody>
+          <a:bodyPr wrap="square" rtlCol="0">
+            <a:spAutoFit/>
+          </a:bodyPr>
+          <a:lstStyle/>
+          <a:p>
+            <a:pPr algn="ctr"/>
+            <a:r>
+              <a:rPr lang="en-AU" sz="2400" dirty="0"/>
+              <a:t>Nomenclature for stimulus/pulse (generalise)</a:t>
+            </a:r>
+          </a:p>
+        </p:txBody>
+      </p:sp>
+      <p:sp>
+        <p:nvSpPr>
+          <p:cNvPr id="2" name="TextBox 1">
+            <a:extLst>
+              <a:ext uri="{FF2B5EF4-FFF2-40B4-BE49-F238E27FC236}">
+                <a16:creationId xmlns:a16="http://schemas.microsoft.com/office/drawing/2014/main" id="{C62A9978-F0AB-1B15-26B4-6E735AE3C2A5}"/>
+              </a:ext>
+            </a:extLst>
+          </p:cNvPr>
+          <p:cNvSpPr txBox="1"/>
+          <p:nvPr/>
+        </p:nvSpPr>
+        <p:spPr>
+          <a:xfrm>
+            <a:off x="562708" y="661285"/>
+            <a:ext cx="11629292" cy="646331"/>
+          </a:xfrm>
+          <a:prstGeom prst="rect">
+            <a:avLst/>
+          </a:prstGeom>
+          <a:noFill/>
+        </p:spPr>
+        <p:txBody>
+          <a:bodyPr wrap="square">
+            <a:spAutoFit/>
+          </a:bodyPr>
+          <a:lstStyle/>
+          <a:p>
+            <a:r>
+              <a:rPr lang="en-AU" dirty="0"/>
+              <a:t>Event waveform = time varying signal making up an event.</a:t>
+            </a:r>
+          </a:p>
+          <a:p>
+            <a:r>
+              <a:rPr lang="en-AU" dirty="0"/>
+              <a:t>Event stimulus =  individual stimulation unit (might be problematic as stimulus is semantically loaded).</a:t>
+            </a:r>
+          </a:p>
+        </p:txBody>
+      </p:sp>
+    </p:spTree>
+    <p:extLst>
+      <p:ext uri="{BB962C8B-B14F-4D97-AF65-F5344CB8AC3E}">
+        <p14:creationId xmlns:p14="http://schemas.microsoft.com/office/powerpoint/2010/main" val="2068669509"/>
+      </p:ext>
+    </p:extLst>
+  </p:cSld>
+  <p:clrMapOvr>
+    <a:masterClrMapping/>
+  </p:clrMapOvr>
+</p:sld>
+</file>
+
+<file path=ppt/slides/slide7.xml><?xml version="1.0" encoding="utf-8"?>
+<p:sld xmlns:a="http://schemas.openxmlformats.org/drawingml/2006/main" xmlns:r="http://schemas.openxmlformats.org/officeDocument/2006/relationships" xmlns:p="http://schemas.openxmlformats.org/presentationml/2006/main">
+  <p:cSld>
+    <p:spTree>
+      <p:nvGrpSpPr>
+        <p:cNvPr id="1" name="">
+          <a:extLst>
+            <a:ext uri="{FF2B5EF4-FFF2-40B4-BE49-F238E27FC236}">
+              <a16:creationId xmlns:a16="http://schemas.microsoft.com/office/drawing/2014/main" id="{A4B401C2-B4B5-8868-BB80-E8386162A047}"/>
+            </a:ext>
+          </a:extLst>
+        </p:cNvPr>
+        <p:cNvGrpSpPr/>
+        <p:nvPr/>
+      </p:nvGrpSpPr>
+      <p:grpSpPr>
+        <a:xfrm>
+          <a:off x="0" y="0"/>
+          <a:ext cx="0" cy="0"/>
+          <a:chOff x="0" y="0"/>
+          <a:chExt cx="0" cy="0"/>
+        </a:xfrm>
+      </p:grpSpPr>
+      <p:graphicFrame>
+        <p:nvGraphicFramePr>
+          <p:cNvPr id="4" name="Table 3">
+            <a:extLst>
+              <a:ext uri="{FF2B5EF4-FFF2-40B4-BE49-F238E27FC236}">
+                <a16:creationId xmlns:a16="http://schemas.microsoft.com/office/drawing/2014/main" id="{09EA5616-3CA8-45C3-DD2D-42D681B1775F}"/>
+              </a:ext>
+            </a:extLst>
+          </p:cNvPr>
+          <p:cNvGraphicFramePr>
+            <a:graphicFrameLocks noGrp="1"/>
+          </p:cNvGraphicFramePr>
+          <p:nvPr>
+            <p:extLst>
+              <p:ext uri="{D42A27DB-BD31-4B8C-83A1-F6EECF244321}">
+                <p14:modId xmlns:p14="http://schemas.microsoft.com/office/powerpoint/2010/main" val="2448953947"/>
+              </p:ext>
+            </p:extLst>
+          </p:nvPr>
+        </p:nvGraphicFramePr>
+        <p:xfrm>
+          <a:off x="322385" y="1453008"/>
+          <a:ext cx="11594121" cy="4932552"/>
+        </p:xfrm>
+        <a:graphic>
+          <a:graphicData uri="http://schemas.openxmlformats.org/drawingml/2006/table">
+            <a:tbl>
+              <a:tblPr firstRow="1" bandRow="1">
+                <a:tableStyleId>{5C22544A-7EE6-4342-B048-85BDC9FD1C3A}</a:tableStyleId>
+              </a:tblPr>
+              <a:tblGrid>
+                <a:gridCol w="2573927">
+                  <a:extLst>
+                    <a:ext uri="{9D8B030D-6E8A-4147-A177-3AD203B41FA5}">
+                      <a16:colId xmlns:a16="http://schemas.microsoft.com/office/drawing/2014/main" val="3539826412"/>
+                    </a:ext>
+                  </a:extLst>
+                </a:gridCol>
+                <a:gridCol w="2833729">
+                  <a:extLst>
+                    <a:ext uri="{9D8B030D-6E8A-4147-A177-3AD203B41FA5}">
+                      <a16:colId xmlns:a16="http://schemas.microsoft.com/office/drawing/2014/main" val="1863496724"/>
+                    </a:ext>
+                  </a:extLst>
+                </a:gridCol>
+                <a:gridCol w="3327331">
+                  <a:extLst>
+                    <a:ext uri="{9D8B030D-6E8A-4147-A177-3AD203B41FA5}">
+                      <a16:colId xmlns:a16="http://schemas.microsoft.com/office/drawing/2014/main" val="299769321"/>
+                    </a:ext>
+                  </a:extLst>
+                </a:gridCol>
+                <a:gridCol w="2859134">
+                  <a:extLst>
+                    <a:ext uri="{9D8B030D-6E8A-4147-A177-3AD203B41FA5}">
+                      <a16:colId xmlns:a16="http://schemas.microsoft.com/office/drawing/2014/main" val="3776062356"/>
+                    </a:ext>
+                  </a:extLst>
+                </a:gridCol>
+              </a:tblGrid>
+              <a:tr h="658664">
+                <a:tc>
+                  <a:txBody>
+                    <a:bodyPr/>
+                    <a:lstStyle/>
+                    <a:p>
+                      <a:r>
+                        <a:rPr lang="en-AU" dirty="0"/>
+                        <a:t>Property</a:t>
+                      </a:r>
+                    </a:p>
+                  </a:txBody>
+                  <a:tcPr/>
+                </a:tc>
+                <a:tc>
+                  <a:txBody>
+                    <a:bodyPr/>
+                    <a:lstStyle/>
+                    <a:p>
+                      <a:r>
+                        <a:rPr lang="en-AU" dirty="0"/>
+                        <a:t>Nigel</a:t>
+                      </a:r>
+                    </a:p>
+                  </a:txBody>
+                  <a:tcPr/>
+                </a:tc>
+                <a:tc>
+                  <a:txBody>
+                    <a:bodyPr/>
+                    <a:lstStyle/>
+                    <a:p>
+                      <a:r>
+                        <a:rPr lang="en-AU" dirty="0"/>
+                        <a:t>Additions</a:t>
+                      </a:r>
+                    </a:p>
+                  </a:txBody>
+                  <a:tcPr/>
+                </a:tc>
+                <a:tc>
+                  <a:txBody>
+                    <a:bodyPr/>
+                    <a:lstStyle/>
+                    <a:p>
+                      <a:r>
+                        <a:rPr lang="en-AU" dirty="0"/>
+                        <a:t>Alternatives</a:t>
+                      </a:r>
+                    </a:p>
+                  </a:txBody>
+                  <a:tcPr/>
+                </a:tc>
+                <a:extLst>
+                  <a:ext uri="{0D108BD9-81ED-4DB2-BD59-A6C34878D82A}">
+                    <a16:rowId xmlns:a16="http://schemas.microsoft.com/office/drawing/2014/main" val="2955893253"/>
+                  </a:ext>
+                </a:extLst>
+              </a:tr>
+              <a:tr h="658664">
+                <a:tc>
+                  <a:txBody>
+                    <a:bodyPr/>
+                    <a:lstStyle/>
+                    <a:p>
+                      <a:r>
+                        <a:rPr lang="en-AU" sz="1100" dirty="0"/>
+                        <a:t>Waveform/shape</a:t>
+                      </a:r>
+                    </a:p>
+                    <a:p>
+                      <a:r>
+                        <a:rPr lang="en-AU" sz="1100" dirty="0"/>
+                        <a:t>(Are waveform and shape separate parameters? – stimulus waveform typically describes the entire stimulation so perhaps shape is better)</a:t>
+                      </a:r>
+                    </a:p>
+                  </a:txBody>
+                  <a:tcPr/>
+                </a:tc>
+                <a:tc>
+                  <a:txBody>
+                    <a:bodyPr/>
+                    <a:lstStyle/>
+                    <a:p>
+                      <a:r>
+                        <a:rPr lang="en-AU" sz="1100" dirty="0" err="1"/>
+                        <a:t>component_shape</a:t>
+                      </a:r>
+                      <a:r>
+                        <a:rPr lang="en-AU" sz="1100" dirty="0"/>
+                        <a:t> = ‘rectangular’, ‘sinusoidal’,</a:t>
+                      </a:r>
+                    </a:p>
+                  </a:txBody>
+                  <a:tcPr/>
+                </a:tc>
+                <a:tc>
+                  <a:txBody>
+                    <a:bodyPr/>
+                    <a:lstStyle/>
+                    <a:p>
+                      <a:r>
+                        <a:rPr lang="en-AU" sz="1100" dirty="0"/>
+                        <a:t>If = ‘sinusoid’:</a:t>
+                      </a:r>
+                    </a:p>
+                    <a:p>
+                      <a:r>
+                        <a:rPr lang="en-AU" sz="1100" dirty="0" err="1"/>
+                        <a:t>component_operating_frequency</a:t>
+                      </a:r>
+                      <a:endParaRPr lang="en-AU" sz="1100" dirty="0"/>
+                    </a:p>
+                    <a:p>
+                      <a:r>
+                        <a:rPr lang="en-AU" sz="1100" dirty="0" err="1"/>
+                        <a:t>component_operating_phase</a:t>
+                      </a:r>
+                      <a:endParaRPr lang="en-AU" sz="1100" dirty="0"/>
+                    </a:p>
+                  </a:txBody>
+                  <a:tcPr/>
+                </a:tc>
+                <a:tc>
+                  <a:txBody>
+                    <a:bodyPr/>
+                    <a:lstStyle/>
+                    <a:p>
+                      <a:endParaRPr lang="en-AU" sz="1100" dirty="0"/>
+                    </a:p>
+                  </a:txBody>
+                  <a:tcPr/>
+                </a:tc>
+                <a:extLst>
+                  <a:ext uri="{0D108BD9-81ED-4DB2-BD59-A6C34878D82A}">
+                    <a16:rowId xmlns:a16="http://schemas.microsoft.com/office/drawing/2014/main" val="252285933"/>
+                  </a:ext>
+                </a:extLst>
+              </a:tr>
+              <a:tr h="658664">
+                <a:tc>
+                  <a:txBody>
+                    <a:bodyPr/>
+                    <a:lstStyle/>
+                    <a:p>
+                      <a:r>
+                        <a:rPr lang="en-AU" sz="1100" dirty="0"/>
+                        <a:t>Duration</a:t>
+                      </a:r>
+                    </a:p>
+                  </a:txBody>
+                  <a:tcPr/>
+                </a:tc>
+                <a:tc>
+                  <a:txBody>
+                    <a:bodyPr/>
+                    <a:lstStyle/>
+                    <a:p>
+                      <a:r>
+                        <a:rPr lang="en-AU" sz="1100" dirty="0" err="1"/>
+                        <a:t>component_duration</a:t>
+                      </a:r>
+                      <a:endParaRPr lang="en-AU" sz="1100" dirty="0"/>
+                    </a:p>
+                  </a:txBody>
+                  <a:tcPr/>
+                </a:tc>
+                <a:tc>
+                  <a:txBody>
+                    <a:bodyPr/>
+                    <a:lstStyle/>
+                    <a:p>
+                      <a:endParaRPr lang="en-AU" sz="1100" dirty="0"/>
+                    </a:p>
+                  </a:txBody>
+                  <a:tcPr/>
+                </a:tc>
+                <a:tc>
+                  <a:txBody>
+                    <a:bodyPr/>
+                    <a:lstStyle/>
+                    <a:p>
+                      <a:r>
+                        <a:rPr lang="en-AU" sz="1100" dirty="0" err="1"/>
+                        <a:t>component_width</a:t>
+                      </a:r>
+                      <a:endParaRPr lang="en-AU" sz="1100" dirty="0"/>
+                    </a:p>
+                  </a:txBody>
+                  <a:tcPr/>
+                </a:tc>
+                <a:extLst>
+                  <a:ext uri="{0D108BD9-81ED-4DB2-BD59-A6C34878D82A}">
+                    <a16:rowId xmlns:a16="http://schemas.microsoft.com/office/drawing/2014/main" val="139951084"/>
+                  </a:ext>
+                </a:extLst>
+              </a:tr>
+              <a:tr h="658664">
+                <a:tc>
+                  <a:txBody>
+                    <a:bodyPr/>
+                    <a:lstStyle/>
+                    <a:p>
+                      <a:r>
+                        <a:rPr lang="en-AU" sz="1100" dirty="0"/>
+                        <a:t>Amplitude</a:t>
+                      </a:r>
+                    </a:p>
+                  </a:txBody>
+                  <a:tcPr/>
+                </a:tc>
+                <a:tc>
+                  <a:txBody>
+                    <a:bodyPr/>
+                    <a:lstStyle/>
+                    <a:p>
+                      <a:r>
+                        <a:rPr lang="en-AU" sz="1100" dirty="0" err="1"/>
+                        <a:t>component_intensity</a:t>
+                      </a:r>
+                      <a:r>
+                        <a:rPr lang="en-AU" sz="1100" dirty="0"/>
+                        <a:t> (TMS)</a:t>
+                      </a:r>
+                    </a:p>
+                    <a:p>
+                      <a:r>
+                        <a:rPr lang="en-AU" sz="1100" dirty="0" err="1"/>
+                        <a:t>component_peak_positive_pressure</a:t>
+                      </a:r>
+                      <a:r>
+                        <a:rPr lang="en-AU" sz="1100" dirty="0"/>
+                        <a:t> (TUS)</a:t>
+                      </a:r>
+                    </a:p>
+                    <a:p>
+                      <a:r>
+                        <a:rPr lang="en-AU" sz="1100" dirty="0" err="1"/>
+                        <a:t>component_peak_negative_pressure</a:t>
+                      </a:r>
+                      <a:r>
+                        <a:rPr lang="en-AU" sz="1100" dirty="0"/>
+                        <a:t> (TUS)</a:t>
+                      </a:r>
+                    </a:p>
+                    <a:p>
+                      <a:r>
+                        <a:rPr lang="en-AU" sz="1100" dirty="0" err="1"/>
+                        <a:t>component_peak_positive_current</a:t>
+                      </a:r>
+                      <a:r>
+                        <a:rPr lang="en-AU" sz="1100" dirty="0"/>
+                        <a:t> (</a:t>
+                      </a:r>
+                      <a:r>
+                        <a:rPr lang="en-AU" sz="1100" dirty="0" err="1"/>
+                        <a:t>tES</a:t>
+                      </a:r>
+                      <a:r>
+                        <a:rPr lang="en-AU" sz="1100" dirty="0"/>
+                        <a:t>)</a:t>
+                      </a:r>
+                    </a:p>
+                    <a:p>
+                      <a:r>
+                        <a:rPr lang="en-AU" sz="1100" dirty="0" err="1"/>
+                        <a:t>component_peak_negative_current</a:t>
+                      </a:r>
+                      <a:r>
+                        <a:rPr lang="en-AU" sz="1100" dirty="0"/>
+                        <a:t> (</a:t>
+                      </a:r>
+                      <a:r>
+                        <a:rPr lang="en-AU" sz="1100" dirty="0" err="1"/>
+                        <a:t>tES</a:t>
+                      </a:r>
+                      <a:r>
+                        <a:rPr lang="en-AU" sz="1100" dirty="0"/>
+                        <a:t>)</a:t>
+                      </a:r>
+                    </a:p>
+                    <a:p>
+                      <a:endParaRPr lang="en-AU" sz="1100" dirty="0"/>
+                    </a:p>
+                  </a:txBody>
+                  <a:tcPr/>
+                </a:tc>
+                <a:tc>
+                  <a:txBody>
+                    <a:bodyPr/>
+                    <a:lstStyle/>
+                    <a:p>
+                      <a:endParaRPr lang="en-AU" sz="1100" dirty="0"/>
+                    </a:p>
+                  </a:txBody>
+                  <a:tcPr/>
+                </a:tc>
+                <a:tc>
+                  <a:txBody>
+                    <a:bodyPr/>
+                    <a:lstStyle/>
+                    <a:p>
+                      <a:r>
+                        <a:rPr lang="en-AU" sz="1100" dirty="0" err="1"/>
+                        <a:t>component_amplitude_machine</a:t>
+                      </a:r>
+                      <a:r>
+                        <a:rPr lang="en-AU" sz="1100" dirty="0"/>
+                        <a:t> (TMS)</a:t>
+                      </a:r>
+                    </a:p>
+                    <a:p>
+                      <a:pPr marL="0" marR="0" lvl="0" indent="0" algn="l" defTabSz="914400" rtl="0" eaLnBrk="1" fontAlgn="auto" latinLnBrk="0" hangingPunct="1">
+                        <a:lnSpc>
+                          <a:spcPct val="100000"/>
+                        </a:lnSpc>
+                        <a:spcBef>
+                          <a:spcPts val="0"/>
+                        </a:spcBef>
+                        <a:spcAft>
+                          <a:spcPts val="0"/>
+                        </a:spcAft>
+                        <a:buClrTx/>
+                        <a:buSzTx/>
+                        <a:buFontTx/>
+                        <a:buNone/>
+                        <a:tabLst/>
+                        <a:defRPr/>
+                      </a:pPr>
+                      <a:r>
+                        <a:rPr lang="en-AU" sz="1100" dirty="0" err="1"/>
+                        <a:t>component_amplitude_mso</a:t>
+                      </a:r>
+                      <a:r>
+                        <a:rPr lang="en-AU" sz="1100" dirty="0"/>
+                        <a:t> (TMS)</a:t>
+                      </a:r>
+                    </a:p>
+                    <a:p>
+                      <a:r>
+                        <a:rPr lang="en-AU" sz="1100" dirty="0" err="1"/>
+                        <a:t>component_amplitude_didt</a:t>
+                      </a:r>
+                      <a:r>
+                        <a:rPr lang="en-AU" sz="1100" dirty="0"/>
+                        <a:t> (TMS)</a:t>
+                      </a:r>
+                    </a:p>
+                    <a:p>
+                      <a:r>
+                        <a:rPr lang="en-AU" sz="1100" dirty="0" err="1"/>
+                        <a:t>component_amplitude_maximum</a:t>
+                      </a:r>
+                      <a:r>
+                        <a:rPr lang="en-AU" sz="1100" dirty="0"/>
+                        <a:t> (TUS, </a:t>
+                      </a:r>
+                      <a:r>
+                        <a:rPr lang="en-AU" sz="1100" dirty="0" err="1"/>
+                        <a:t>tES</a:t>
+                      </a:r>
+                      <a:r>
+                        <a:rPr lang="en-AU" sz="1100" dirty="0"/>
+                        <a:t>)</a:t>
+                      </a:r>
+                    </a:p>
+                    <a:p>
+                      <a:r>
+                        <a:rPr lang="en-AU" sz="1100" dirty="0" err="1"/>
+                        <a:t>component_amplitude_minimum</a:t>
+                      </a:r>
+                      <a:r>
+                        <a:rPr lang="en-AU" sz="1100" dirty="0"/>
+                        <a:t> (TUS, </a:t>
+                      </a:r>
+                      <a:r>
+                        <a:rPr lang="en-AU" sz="1100" dirty="0" err="1"/>
+                        <a:t>tES</a:t>
+                      </a:r>
+                      <a:r>
+                        <a:rPr lang="en-AU" sz="1100" dirty="0"/>
+                        <a:t>)</a:t>
+                      </a:r>
+                    </a:p>
+                  </a:txBody>
+                  <a:tcPr/>
+                </a:tc>
+                <a:extLst>
+                  <a:ext uri="{0D108BD9-81ED-4DB2-BD59-A6C34878D82A}">
+                    <a16:rowId xmlns:a16="http://schemas.microsoft.com/office/drawing/2014/main" val="2479919590"/>
+                  </a:ext>
+                </a:extLst>
+              </a:tr>
+              <a:tr h="658664">
+                <a:tc>
+                  <a:txBody>
+                    <a:bodyPr/>
+                    <a:lstStyle/>
+                    <a:p>
+                      <a:r>
+                        <a:rPr lang="en-AU" sz="1100" dirty="0"/>
+                        <a:t>Amplitude ramp</a:t>
+                      </a:r>
+                    </a:p>
+                  </a:txBody>
+                  <a:tcPr/>
+                </a:tc>
+                <a:tc>
+                  <a:txBody>
+                    <a:bodyPr/>
+                    <a:lstStyle/>
+                    <a:p>
+                      <a:r>
+                        <a:rPr lang="en-AU" sz="1100" dirty="0" err="1"/>
+                        <a:t>component_ramp_duration</a:t>
+                      </a:r>
+                      <a:endParaRPr lang="en-AU" sz="1100" dirty="0"/>
+                    </a:p>
+                    <a:p>
+                      <a:r>
+                        <a:rPr lang="en-AU" sz="1100" dirty="0" err="1"/>
+                        <a:t>component_ramp_shape</a:t>
+                      </a:r>
+                      <a:endParaRPr lang="en-AU" sz="1100" dirty="0"/>
+                    </a:p>
+                  </a:txBody>
+                  <a:tcPr/>
+                </a:tc>
+                <a:tc>
+                  <a:txBody>
+                    <a:bodyPr/>
+                    <a:lstStyle/>
+                    <a:p>
+                      <a:endParaRPr lang="en-AU" sz="1100" dirty="0"/>
+                    </a:p>
+                  </a:txBody>
+                  <a:tcPr/>
+                </a:tc>
+                <a:tc>
+                  <a:txBody>
+                    <a:bodyPr/>
+                    <a:lstStyle/>
+                    <a:p>
+                      <a:r>
+                        <a:rPr lang="en-AU" sz="1100" dirty="0" err="1"/>
+                        <a:t>component_ramp_up_duration</a:t>
+                      </a:r>
+                      <a:endParaRPr lang="en-AU" sz="1100" dirty="0"/>
+                    </a:p>
+                    <a:p>
+                      <a:r>
+                        <a:rPr lang="en-AU" sz="1100" dirty="0" err="1"/>
+                        <a:t>component_ramp_down_duration</a:t>
+                      </a:r>
+                      <a:endParaRPr lang="en-AU" sz="1100" dirty="0"/>
+                    </a:p>
+                  </a:txBody>
+                  <a:tcPr/>
+                </a:tc>
+                <a:extLst>
+                  <a:ext uri="{0D108BD9-81ED-4DB2-BD59-A6C34878D82A}">
+                    <a16:rowId xmlns:a16="http://schemas.microsoft.com/office/drawing/2014/main" val="2408620604"/>
+                  </a:ext>
+                </a:extLst>
+              </a:tr>
+              <a:tr h="658664">
+                <a:tc>
+                  <a:txBody>
+                    <a:bodyPr/>
+                    <a:lstStyle/>
+                    <a:p>
+                      <a:r>
+                        <a:rPr lang="en-AU" sz="1100" dirty="0"/>
+                        <a:t>Polarity</a:t>
+                      </a:r>
+                    </a:p>
+                    <a:p>
+                      <a:endParaRPr lang="en-AU" sz="1100" dirty="0"/>
+                    </a:p>
+                    <a:p>
+                      <a:r>
+                        <a:rPr lang="en-AU" sz="1100" dirty="0"/>
+                        <a:t>Related to current direction (not sure if this fits here – perhaps fits under coil position for TMS)</a:t>
+                      </a:r>
+                    </a:p>
+                  </a:txBody>
+                  <a:tcPr/>
+                </a:tc>
+                <a:tc>
+                  <a:txBody>
+                    <a:bodyPr/>
+                    <a:lstStyle/>
+                    <a:p>
+                      <a:endParaRPr lang="en-AU" sz="1100" dirty="0"/>
+                    </a:p>
+                  </a:txBody>
+                  <a:tcPr/>
+                </a:tc>
+                <a:tc>
+                  <a:txBody>
+                    <a:bodyPr/>
+                    <a:lstStyle/>
+                    <a:p>
+                      <a:endParaRPr lang="en-AU" sz="1100" dirty="0"/>
+                    </a:p>
+                  </a:txBody>
+                  <a:tcPr/>
+                </a:tc>
+                <a:tc>
+                  <a:txBody>
+                    <a:bodyPr/>
+                    <a:lstStyle/>
+                    <a:p>
+                      <a:endParaRPr lang="en-AU" sz="1100" dirty="0"/>
+                    </a:p>
+                  </a:txBody>
+                  <a:tcPr/>
+                </a:tc>
+                <a:extLst>
+                  <a:ext uri="{0D108BD9-81ED-4DB2-BD59-A6C34878D82A}">
+                    <a16:rowId xmlns:a16="http://schemas.microsoft.com/office/drawing/2014/main" val="2952362299"/>
+                  </a:ext>
+                </a:extLst>
+              </a:tr>
+            </a:tbl>
+          </a:graphicData>
+        </a:graphic>
+      </p:graphicFrame>
+      <p:sp>
+        <p:nvSpPr>
+          <p:cNvPr id="2" name="TextBox 1">
+            <a:extLst>
+              <a:ext uri="{FF2B5EF4-FFF2-40B4-BE49-F238E27FC236}">
+                <a16:creationId xmlns:a16="http://schemas.microsoft.com/office/drawing/2014/main" id="{D95ED526-91AD-D5EB-7FCF-8A44D86F5079}"/>
+              </a:ext>
+            </a:extLst>
+          </p:cNvPr>
+          <p:cNvSpPr txBox="1"/>
+          <p:nvPr/>
+        </p:nvSpPr>
+        <p:spPr>
+          <a:xfrm>
+            <a:off x="562708" y="661285"/>
+            <a:ext cx="11629292" cy="646331"/>
+          </a:xfrm>
+          <a:prstGeom prst="rect">
+            <a:avLst/>
+          </a:prstGeom>
+          <a:noFill/>
+        </p:spPr>
+        <p:txBody>
+          <a:bodyPr wrap="square">
+            <a:spAutoFit/>
+          </a:bodyPr>
+          <a:lstStyle/>
+          <a:p>
+            <a:r>
+              <a:rPr lang="en-AU" dirty="0"/>
+              <a:t>Event waveform = time varying signal making up an event.</a:t>
+            </a:r>
+          </a:p>
+          <a:p>
+            <a:r>
+              <a:rPr lang="en-AU" dirty="0"/>
+              <a:t>Event component =  individual stimulation unit.</a:t>
+            </a:r>
+          </a:p>
+        </p:txBody>
+      </p:sp>
+      <p:sp>
+        <p:nvSpPr>
+          <p:cNvPr id="3" name="TextBox 2">
+            <a:extLst>
+              <a:ext uri="{FF2B5EF4-FFF2-40B4-BE49-F238E27FC236}">
+                <a16:creationId xmlns:a16="http://schemas.microsoft.com/office/drawing/2014/main" id="{838EEE21-39AA-4AD5-7313-B96F6A983EED}"/>
+              </a:ext>
+            </a:extLst>
+          </p:cNvPr>
+          <p:cNvSpPr txBox="1"/>
+          <p:nvPr/>
+        </p:nvSpPr>
+        <p:spPr>
+          <a:xfrm>
+            <a:off x="2979127" y="126924"/>
+            <a:ext cx="6796454" cy="461665"/>
+          </a:xfrm>
+          <a:prstGeom prst="rect">
+            <a:avLst/>
+          </a:prstGeom>
+          <a:noFill/>
+        </p:spPr>
+        <p:txBody>
+          <a:bodyPr wrap="square" rtlCol="0">
+            <a:spAutoFit/>
+          </a:bodyPr>
+          <a:lstStyle/>
+          <a:p>
+            <a:pPr algn="ctr"/>
+            <a:r>
+              <a:rPr lang="en-AU" sz="2400" dirty="0"/>
+              <a:t>Nomenclature for stimulus/pulse (generalise)</a:t>
+            </a:r>
+          </a:p>
+        </p:txBody>
+      </p:sp>
+    </p:spTree>
+    <p:extLst>
+      <p:ext uri="{BB962C8B-B14F-4D97-AF65-F5344CB8AC3E}">
+        <p14:creationId xmlns:p14="http://schemas.microsoft.com/office/powerpoint/2010/main" val="119870899"/>
+      </p:ext>
+    </p:extLst>
+  </p:cSld>
+  <p:clrMapOvr>
+    <a:masterClrMapping/>
+  </p:clrMapOvr>
+</p:sld>
+</file>
+
+<file path=ppt/slides/slide8.xml><?xml version="1.0" encoding="utf-8"?>
+<p:sld xmlns:a="http://schemas.openxmlformats.org/drawingml/2006/main" xmlns:r="http://schemas.openxmlformats.org/officeDocument/2006/relationships" xmlns:p="http://schemas.openxmlformats.org/presentationml/2006/main">
+  <p:cSld>
+    <p:spTree>
+      <p:nvGrpSpPr>
+        <p:cNvPr id="1" name="">
+          <a:extLst>
+            <a:ext uri="{FF2B5EF4-FFF2-40B4-BE49-F238E27FC236}">
+              <a16:creationId xmlns:a16="http://schemas.microsoft.com/office/drawing/2014/main" id="{1E81EF9B-521E-CDE4-946E-0FD877693E61}"/>
+            </a:ext>
+          </a:extLst>
+        </p:cNvPr>
+        <p:cNvGrpSpPr/>
+        <p:nvPr/>
+      </p:nvGrpSpPr>
+      <p:grpSpPr>
+        <a:xfrm>
+          <a:off x="0" y="0"/>
+          <a:ext cx="0" cy="0"/>
+          <a:chOff x="0" y="0"/>
+          <a:chExt cx="0" cy="0"/>
+        </a:xfrm>
+      </p:grpSpPr>
+      <p:graphicFrame>
+        <p:nvGraphicFramePr>
+          <p:cNvPr id="4" name="Table 3">
+            <a:extLst>
+              <a:ext uri="{FF2B5EF4-FFF2-40B4-BE49-F238E27FC236}">
+                <a16:creationId xmlns:a16="http://schemas.microsoft.com/office/drawing/2014/main" id="{83CDE426-0BCD-E800-513F-67950AE255BA}"/>
+              </a:ext>
+            </a:extLst>
+          </p:cNvPr>
+          <p:cNvGraphicFramePr>
+            <a:graphicFrameLocks noGrp="1"/>
+          </p:cNvGraphicFramePr>
+          <p:nvPr>
+            <p:extLst>
+              <p:ext uri="{D42A27DB-BD31-4B8C-83A1-F6EECF244321}">
+                <p14:modId xmlns:p14="http://schemas.microsoft.com/office/powerpoint/2010/main" val="1965526433"/>
+              </p:ext>
+            </p:extLst>
+          </p:nvPr>
+        </p:nvGraphicFramePr>
+        <p:xfrm>
+          <a:off x="322385" y="1710920"/>
+          <a:ext cx="11594121" cy="4932552"/>
+        </p:xfrm>
+        <a:graphic>
+          <a:graphicData uri="http://schemas.openxmlformats.org/drawingml/2006/table">
+            <a:tbl>
+              <a:tblPr firstRow="1" bandRow="1">
+                <a:tableStyleId>{5C22544A-7EE6-4342-B048-85BDC9FD1C3A}</a:tableStyleId>
+              </a:tblPr>
+              <a:tblGrid>
+                <a:gridCol w="2573927">
+                  <a:extLst>
+                    <a:ext uri="{9D8B030D-6E8A-4147-A177-3AD203B41FA5}">
+                      <a16:colId xmlns:a16="http://schemas.microsoft.com/office/drawing/2014/main" val="3539826412"/>
+                    </a:ext>
+                  </a:extLst>
+                </a:gridCol>
+                <a:gridCol w="2833729">
+                  <a:extLst>
+                    <a:ext uri="{9D8B030D-6E8A-4147-A177-3AD203B41FA5}">
+                      <a16:colId xmlns:a16="http://schemas.microsoft.com/office/drawing/2014/main" val="1863496724"/>
+                    </a:ext>
+                  </a:extLst>
+                </a:gridCol>
+                <a:gridCol w="3327331">
+                  <a:extLst>
+                    <a:ext uri="{9D8B030D-6E8A-4147-A177-3AD203B41FA5}">
+                      <a16:colId xmlns:a16="http://schemas.microsoft.com/office/drawing/2014/main" val="299769321"/>
+                    </a:ext>
+                  </a:extLst>
+                </a:gridCol>
+                <a:gridCol w="2859134">
+                  <a:extLst>
+                    <a:ext uri="{9D8B030D-6E8A-4147-A177-3AD203B41FA5}">
+                      <a16:colId xmlns:a16="http://schemas.microsoft.com/office/drawing/2014/main" val="3776062356"/>
+                    </a:ext>
+                  </a:extLst>
+                </a:gridCol>
+              </a:tblGrid>
+              <a:tr h="658664">
+                <a:tc>
+                  <a:txBody>
+                    <a:bodyPr/>
+                    <a:lstStyle/>
+                    <a:p>
+                      <a:r>
+                        <a:rPr lang="en-AU" dirty="0"/>
+                        <a:t>Property</a:t>
+                      </a:r>
+                    </a:p>
+                  </a:txBody>
+                  <a:tcPr/>
+                </a:tc>
+                <a:tc>
+                  <a:txBody>
+                    <a:bodyPr/>
+                    <a:lstStyle/>
+                    <a:p>
+                      <a:r>
+                        <a:rPr lang="en-AU" dirty="0"/>
+                        <a:t>Nigel</a:t>
+                      </a:r>
+                    </a:p>
+                  </a:txBody>
+                  <a:tcPr/>
+                </a:tc>
+                <a:tc>
+                  <a:txBody>
+                    <a:bodyPr/>
+                    <a:lstStyle/>
+                    <a:p>
+                      <a:r>
+                        <a:rPr lang="en-AU" dirty="0"/>
+                        <a:t>Additions</a:t>
+                      </a:r>
+                    </a:p>
+                  </a:txBody>
+                  <a:tcPr/>
+                </a:tc>
+                <a:tc>
+                  <a:txBody>
+                    <a:bodyPr/>
+                    <a:lstStyle/>
+                    <a:p>
+                      <a:r>
+                        <a:rPr lang="en-AU" dirty="0"/>
+                        <a:t>Alternatives</a:t>
+                      </a:r>
+                    </a:p>
+                  </a:txBody>
+                  <a:tcPr/>
+                </a:tc>
+                <a:extLst>
+                  <a:ext uri="{0D108BD9-81ED-4DB2-BD59-A6C34878D82A}">
+                    <a16:rowId xmlns:a16="http://schemas.microsoft.com/office/drawing/2014/main" val="2955893253"/>
+                  </a:ext>
+                </a:extLst>
+              </a:tr>
+              <a:tr h="658664">
+                <a:tc>
+                  <a:txBody>
+                    <a:bodyPr/>
+                    <a:lstStyle/>
+                    <a:p>
+                      <a:r>
+                        <a:rPr lang="en-AU" sz="1100" dirty="0"/>
+                        <a:t>Waveform/shape</a:t>
+                      </a:r>
+                    </a:p>
+                    <a:p>
+                      <a:r>
+                        <a:rPr lang="en-AU" sz="1100" dirty="0"/>
+                        <a:t>(Are waveform and shape separate parameters? – stimulus waveform typically describes the entire stimulation so perhaps shape is better)</a:t>
+                      </a:r>
+                    </a:p>
+                  </a:txBody>
+                  <a:tcPr/>
+                </a:tc>
+                <a:tc>
+                  <a:txBody>
+                    <a:bodyPr/>
+                    <a:lstStyle/>
+                    <a:p>
+                      <a:r>
+                        <a:rPr lang="en-AU" sz="1100" dirty="0"/>
+                        <a:t>shape = ‘rectangular’, ‘sinusoidal’</a:t>
+                      </a:r>
+                    </a:p>
+                    <a:p>
+                      <a:endParaRPr lang="en-AU" sz="1100" dirty="0"/>
+                    </a:p>
+                    <a:p>
+                      <a:r>
+                        <a:rPr lang="en-AU" sz="1100" dirty="0"/>
+                        <a:t>Where does monophasic/biphasic fit?</a:t>
+                      </a:r>
+                    </a:p>
+                  </a:txBody>
+                  <a:tcPr/>
+                </a:tc>
+                <a:tc>
+                  <a:txBody>
+                    <a:bodyPr/>
+                    <a:lstStyle/>
+                    <a:p>
+                      <a:r>
+                        <a:rPr lang="en-AU" sz="1100" dirty="0"/>
+                        <a:t>If = ‘sinusoidal’:</a:t>
+                      </a:r>
+                    </a:p>
+                    <a:p>
+                      <a:r>
+                        <a:rPr lang="en-AU" sz="1100" dirty="0" err="1"/>
+                        <a:t>operating_frequency</a:t>
+                      </a:r>
+                      <a:endParaRPr lang="en-AU" sz="1100" dirty="0"/>
+                    </a:p>
+                    <a:p>
+                      <a:r>
+                        <a:rPr lang="en-AU" sz="1100" dirty="0" err="1"/>
+                        <a:t>operating_phase</a:t>
+                      </a:r>
+                      <a:endParaRPr lang="en-AU" sz="1100" dirty="0"/>
+                    </a:p>
+                  </a:txBody>
+                  <a:tcPr/>
+                </a:tc>
+                <a:tc>
+                  <a:txBody>
+                    <a:bodyPr/>
+                    <a:lstStyle/>
+                    <a:p>
+                      <a:endParaRPr lang="en-AU" sz="1100" dirty="0"/>
+                    </a:p>
+                  </a:txBody>
+                  <a:tcPr/>
+                </a:tc>
+                <a:extLst>
+                  <a:ext uri="{0D108BD9-81ED-4DB2-BD59-A6C34878D82A}">
+                    <a16:rowId xmlns:a16="http://schemas.microsoft.com/office/drawing/2014/main" val="252285933"/>
+                  </a:ext>
+                </a:extLst>
+              </a:tr>
+              <a:tr h="658664">
+                <a:tc>
+                  <a:txBody>
+                    <a:bodyPr/>
+                    <a:lstStyle/>
+                    <a:p>
+                      <a:r>
+                        <a:rPr lang="en-AU" sz="1100" dirty="0"/>
+                        <a:t>Duration</a:t>
+                      </a:r>
+                    </a:p>
+                  </a:txBody>
+                  <a:tcPr/>
+                </a:tc>
+                <a:tc>
+                  <a:txBody>
+                    <a:bodyPr/>
+                    <a:lstStyle/>
+                    <a:p>
+                      <a:r>
+                        <a:rPr lang="en-AU" sz="1100" dirty="0"/>
+                        <a:t>duration</a:t>
+                      </a:r>
+                    </a:p>
+                  </a:txBody>
+                  <a:tcPr/>
+                </a:tc>
+                <a:tc>
+                  <a:txBody>
+                    <a:bodyPr/>
+                    <a:lstStyle/>
+                    <a:p>
+                      <a:endParaRPr lang="en-AU" sz="1100" dirty="0"/>
+                    </a:p>
+                  </a:txBody>
+                  <a:tcPr/>
+                </a:tc>
+                <a:tc>
+                  <a:txBody>
+                    <a:bodyPr/>
+                    <a:lstStyle/>
+                    <a:p>
+                      <a:r>
+                        <a:rPr lang="en-AU" sz="1100" dirty="0"/>
+                        <a:t>width</a:t>
+                      </a:r>
+                    </a:p>
+                  </a:txBody>
+                  <a:tcPr/>
+                </a:tc>
+                <a:extLst>
+                  <a:ext uri="{0D108BD9-81ED-4DB2-BD59-A6C34878D82A}">
+                    <a16:rowId xmlns:a16="http://schemas.microsoft.com/office/drawing/2014/main" val="139951084"/>
+                  </a:ext>
+                </a:extLst>
+              </a:tr>
+              <a:tr h="658664">
+                <a:tc>
+                  <a:txBody>
+                    <a:bodyPr/>
+                    <a:lstStyle/>
+                    <a:p>
+                      <a:r>
+                        <a:rPr lang="en-AU" sz="1100" dirty="0"/>
+                        <a:t>Amplitude</a:t>
+                      </a:r>
+                    </a:p>
+                  </a:txBody>
+                  <a:tcPr/>
+                </a:tc>
+                <a:tc>
+                  <a:txBody>
+                    <a:bodyPr/>
+                    <a:lstStyle/>
+                    <a:p>
+                      <a:r>
+                        <a:rPr lang="en-AU" sz="1100" dirty="0"/>
+                        <a:t>intensity (TMS)</a:t>
+                      </a:r>
+                    </a:p>
+                    <a:p>
+                      <a:r>
+                        <a:rPr lang="en-AU" sz="1100" dirty="0" err="1"/>
+                        <a:t>peak_positive_pressure</a:t>
+                      </a:r>
+                      <a:r>
+                        <a:rPr lang="en-AU" sz="1100" dirty="0"/>
+                        <a:t> (TUS)</a:t>
+                      </a:r>
+                    </a:p>
+                    <a:p>
+                      <a:r>
+                        <a:rPr lang="en-AU" sz="1100" dirty="0" err="1"/>
+                        <a:t>peak_negative_pressure</a:t>
+                      </a:r>
+                      <a:r>
+                        <a:rPr lang="en-AU" sz="1100" dirty="0"/>
+                        <a:t> (TUS)</a:t>
+                      </a:r>
+                    </a:p>
+                    <a:p>
+                      <a:r>
+                        <a:rPr lang="en-AU" sz="1100" dirty="0" err="1"/>
+                        <a:t>peak_positive_current</a:t>
+                      </a:r>
+                      <a:r>
+                        <a:rPr lang="en-AU" sz="1100" dirty="0"/>
+                        <a:t> (</a:t>
+                      </a:r>
+                      <a:r>
+                        <a:rPr lang="en-AU" sz="1100" dirty="0" err="1"/>
+                        <a:t>tES</a:t>
+                      </a:r>
+                      <a:r>
+                        <a:rPr lang="en-AU" sz="1100" dirty="0"/>
+                        <a:t>)</a:t>
+                      </a:r>
+                    </a:p>
+                    <a:p>
+                      <a:r>
+                        <a:rPr lang="en-AU" sz="1100" dirty="0" err="1"/>
+                        <a:t>peak_negative_current</a:t>
+                      </a:r>
+                      <a:r>
+                        <a:rPr lang="en-AU" sz="1100" dirty="0"/>
+                        <a:t> (</a:t>
+                      </a:r>
+                      <a:r>
+                        <a:rPr lang="en-AU" sz="1100" dirty="0" err="1"/>
+                        <a:t>tES</a:t>
+                      </a:r>
+                      <a:r>
+                        <a:rPr lang="en-AU" sz="1100" dirty="0"/>
+                        <a:t>)</a:t>
+                      </a:r>
+                    </a:p>
+                    <a:p>
+                      <a:endParaRPr lang="en-AU" sz="1100" dirty="0"/>
+                    </a:p>
+                  </a:txBody>
+                  <a:tcPr/>
+                </a:tc>
+                <a:tc>
+                  <a:txBody>
+                    <a:bodyPr/>
+                    <a:lstStyle/>
+                    <a:p>
+                      <a:endParaRPr lang="en-AU" sz="1100" dirty="0"/>
+                    </a:p>
+                  </a:txBody>
+                  <a:tcPr/>
+                </a:tc>
+                <a:tc>
+                  <a:txBody>
+                    <a:bodyPr/>
+                    <a:lstStyle/>
+                    <a:p>
+                      <a:r>
+                        <a:rPr lang="en-AU" sz="1100" dirty="0" err="1"/>
+                        <a:t>amplitude_machine</a:t>
+                      </a:r>
+                      <a:r>
+                        <a:rPr lang="en-AU" sz="1100" dirty="0"/>
+                        <a:t> (TMS)</a:t>
+                      </a:r>
+                    </a:p>
+                    <a:p>
+                      <a:pPr marL="0" marR="0" lvl="0" indent="0" algn="l" defTabSz="914400" rtl="0" eaLnBrk="1" fontAlgn="auto" latinLnBrk="0" hangingPunct="1">
+                        <a:lnSpc>
+                          <a:spcPct val="100000"/>
+                        </a:lnSpc>
+                        <a:spcBef>
+                          <a:spcPts val="0"/>
+                        </a:spcBef>
+                        <a:spcAft>
+                          <a:spcPts val="0"/>
+                        </a:spcAft>
+                        <a:buClrTx/>
+                        <a:buSzTx/>
+                        <a:buFontTx/>
+                        <a:buNone/>
+                        <a:tabLst/>
+                        <a:defRPr/>
+                      </a:pPr>
+                      <a:r>
+                        <a:rPr lang="en-AU" sz="1100" dirty="0" err="1"/>
+                        <a:t>amplitude_mso</a:t>
+                      </a:r>
+                      <a:r>
+                        <a:rPr lang="en-AU" sz="1100" dirty="0"/>
+                        <a:t> (TMS)</a:t>
+                      </a:r>
+                    </a:p>
+                    <a:p>
+                      <a:r>
+                        <a:rPr lang="en-AU" sz="1100" dirty="0" err="1"/>
+                        <a:t>amplitude_didt</a:t>
+                      </a:r>
+                      <a:r>
+                        <a:rPr lang="en-AU" sz="1100" dirty="0"/>
+                        <a:t> (TMS)</a:t>
+                      </a:r>
+                    </a:p>
+                    <a:p>
+                      <a:r>
+                        <a:rPr lang="en-AU" sz="1100" dirty="0" err="1"/>
+                        <a:t>amplitude_maximum</a:t>
+                      </a:r>
+                      <a:r>
+                        <a:rPr lang="en-AU" sz="1100" dirty="0"/>
+                        <a:t> (TUS, </a:t>
+                      </a:r>
+                      <a:r>
+                        <a:rPr lang="en-AU" sz="1100" dirty="0" err="1"/>
+                        <a:t>tES</a:t>
+                      </a:r>
+                      <a:r>
+                        <a:rPr lang="en-AU" sz="1100" dirty="0"/>
+                        <a:t>)</a:t>
+                      </a:r>
+                    </a:p>
+                    <a:p>
+                      <a:r>
+                        <a:rPr lang="en-AU" sz="1100" dirty="0" err="1"/>
+                        <a:t>amplitude_minimum</a:t>
+                      </a:r>
+                      <a:r>
+                        <a:rPr lang="en-AU" sz="1100" dirty="0"/>
+                        <a:t> (TUS, </a:t>
+                      </a:r>
+                      <a:r>
+                        <a:rPr lang="en-AU" sz="1100" dirty="0" err="1"/>
+                        <a:t>tES</a:t>
+                      </a:r>
+                      <a:r>
+                        <a:rPr lang="en-AU" sz="1100" dirty="0"/>
+                        <a:t>)</a:t>
+                      </a:r>
+                    </a:p>
+                  </a:txBody>
+                  <a:tcPr/>
+                </a:tc>
+                <a:extLst>
+                  <a:ext uri="{0D108BD9-81ED-4DB2-BD59-A6C34878D82A}">
+                    <a16:rowId xmlns:a16="http://schemas.microsoft.com/office/drawing/2014/main" val="2479919590"/>
+                  </a:ext>
+                </a:extLst>
+              </a:tr>
+              <a:tr h="658664">
+                <a:tc>
+                  <a:txBody>
+                    <a:bodyPr/>
+                    <a:lstStyle/>
+                    <a:p>
+                      <a:r>
+                        <a:rPr lang="en-AU" sz="1100" dirty="0"/>
+                        <a:t>Amplitude ramp</a:t>
+                      </a:r>
+                    </a:p>
+                  </a:txBody>
+                  <a:tcPr/>
+                </a:tc>
+                <a:tc>
+                  <a:txBody>
+                    <a:bodyPr/>
+                    <a:lstStyle/>
+                    <a:p>
+                      <a:r>
+                        <a:rPr lang="en-AU" sz="1100" dirty="0" err="1"/>
+                        <a:t>ramp_duration</a:t>
+                      </a:r>
+                      <a:endParaRPr lang="en-AU" sz="1100" dirty="0"/>
+                    </a:p>
+                    <a:p>
+                      <a:r>
+                        <a:rPr lang="en-AU" sz="1100" dirty="0" err="1"/>
+                        <a:t>ramp_shape</a:t>
+                      </a:r>
+                      <a:endParaRPr lang="en-AU" sz="1100" dirty="0"/>
+                    </a:p>
+                  </a:txBody>
+                  <a:tcPr/>
+                </a:tc>
+                <a:tc>
+                  <a:txBody>
+                    <a:bodyPr/>
+                    <a:lstStyle/>
+                    <a:p>
+                      <a:endParaRPr lang="en-AU" sz="1100" dirty="0"/>
+                    </a:p>
+                  </a:txBody>
+                  <a:tcPr/>
+                </a:tc>
+                <a:tc>
+                  <a:txBody>
+                    <a:bodyPr/>
+                    <a:lstStyle/>
+                    <a:p>
+                      <a:r>
+                        <a:rPr lang="en-AU" sz="1100" dirty="0" err="1"/>
+                        <a:t>ramp_up_duration</a:t>
+                      </a:r>
+                      <a:endParaRPr lang="en-AU" sz="1100" dirty="0"/>
+                    </a:p>
+                    <a:p>
+                      <a:r>
+                        <a:rPr lang="en-AU" sz="1100" dirty="0" err="1"/>
+                        <a:t>ramp_down_duration</a:t>
+                      </a:r>
+                      <a:endParaRPr lang="en-AU" sz="1100" dirty="0"/>
+                    </a:p>
+                  </a:txBody>
+                  <a:tcPr/>
+                </a:tc>
+                <a:extLst>
+                  <a:ext uri="{0D108BD9-81ED-4DB2-BD59-A6C34878D82A}">
+                    <a16:rowId xmlns:a16="http://schemas.microsoft.com/office/drawing/2014/main" val="2408620604"/>
+                  </a:ext>
+                </a:extLst>
+              </a:tr>
+              <a:tr h="658664">
+                <a:tc>
+                  <a:txBody>
+                    <a:bodyPr/>
+                    <a:lstStyle/>
+                    <a:p>
+                      <a:r>
+                        <a:rPr lang="en-AU" sz="1100" dirty="0"/>
+                        <a:t>Polarity</a:t>
+                      </a:r>
+                    </a:p>
+                    <a:p>
+                      <a:endParaRPr lang="en-AU" sz="1100" dirty="0"/>
+                    </a:p>
+                    <a:p>
+                      <a:r>
+                        <a:rPr lang="en-AU" sz="1100" dirty="0"/>
+                        <a:t>Related to current direction (not sure if this fits here – perhaps fits under coil position for TMS)</a:t>
+                      </a:r>
+                    </a:p>
+                  </a:txBody>
+                  <a:tcPr/>
+                </a:tc>
+                <a:tc>
+                  <a:txBody>
+                    <a:bodyPr/>
+                    <a:lstStyle/>
+                    <a:p>
+                      <a:endParaRPr lang="en-AU" sz="1100" dirty="0"/>
+                    </a:p>
+                  </a:txBody>
+                  <a:tcPr/>
+                </a:tc>
+                <a:tc>
+                  <a:txBody>
+                    <a:bodyPr/>
+                    <a:lstStyle/>
+                    <a:p>
+                      <a:endParaRPr lang="en-AU" sz="1100" dirty="0"/>
+                    </a:p>
+                  </a:txBody>
+                  <a:tcPr/>
+                </a:tc>
+                <a:tc>
+                  <a:txBody>
+                    <a:bodyPr/>
+                    <a:lstStyle/>
+                    <a:p>
+                      <a:endParaRPr lang="en-AU" sz="1100" dirty="0"/>
+                    </a:p>
+                  </a:txBody>
+                  <a:tcPr/>
+                </a:tc>
+                <a:extLst>
+                  <a:ext uri="{0D108BD9-81ED-4DB2-BD59-A6C34878D82A}">
+                    <a16:rowId xmlns:a16="http://schemas.microsoft.com/office/drawing/2014/main" val="2952362299"/>
+                  </a:ext>
+                </a:extLst>
+              </a:tr>
+            </a:tbl>
+          </a:graphicData>
+        </a:graphic>
+      </p:graphicFrame>
+      <p:sp>
+        <p:nvSpPr>
+          <p:cNvPr id="5" name="TextBox 4">
+            <a:extLst>
+              <a:ext uri="{FF2B5EF4-FFF2-40B4-BE49-F238E27FC236}">
+                <a16:creationId xmlns:a16="http://schemas.microsoft.com/office/drawing/2014/main" id="{E8F6ADDE-0805-B756-C5FA-F524B7BE6391}"/>
+              </a:ext>
+            </a:extLst>
+          </p:cNvPr>
+          <p:cNvSpPr txBox="1"/>
+          <p:nvPr/>
+        </p:nvSpPr>
+        <p:spPr>
+          <a:xfrm>
+            <a:off x="3533042" y="136467"/>
+            <a:ext cx="5688624" cy="461665"/>
+          </a:xfrm>
+          <a:prstGeom prst="rect">
+            <a:avLst/>
+          </a:prstGeom>
+          <a:noFill/>
+        </p:spPr>
+        <p:txBody>
+          <a:bodyPr wrap="square" rtlCol="0">
+            <a:spAutoFit/>
+          </a:bodyPr>
+          <a:lstStyle/>
+          <a:p>
+            <a:pPr algn="ctr"/>
+            <a:r>
+              <a:rPr lang="en-AU" sz="2400" dirty="0"/>
+              <a:t>Nomenclature for stimulus/pulse (split)</a:t>
+            </a:r>
+          </a:p>
+        </p:txBody>
+      </p:sp>
+      <p:sp>
+        <p:nvSpPr>
+          <p:cNvPr id="2" name="TextBox 1">
+            <a:extLst>
+              <a:ext uri="{FF2B5EF4-FFF2-40B4-BE49-F238E27FC236}">
+                <a16:creationId xmlns:a16="http://schemas.microsoft.com/office/drawing/2014/main" id="{4683E7CA-BCD6-65E6-B4D6-B0015476520A}"/>
+              </a:ext>
+            </a:extLst>
+          </p:cNvPr>
+          <p:cNvSpPr txBox="1"/>
+          <p:nvPr/>
+        </p:nvSpPr>
+        <p:spPr>
+          <a:xfrm>
+            <a:off x="562708" y="661285"/>
+            <a:ext cx="11629292" cy="923330"/>
+          </a:xfrm>
+          <a:prstGeom prst="rect">
+            <a:avLst/>
+          </a:prstGeom>
+          <a:noFill/>
+        </p:spPr>
+        <p:txBody>
+          <a:bodyPr wrap="square">
+            <a:spAutoFit/>
+          </a:bodyPr>
+          <a:lstStyle/>
+          <a:p>
+            <a:r>
+              <a:rPr lang="en-AU" dirty="0" err="1"/>
+              <a:t>Event_waveform_type</a:t>
+            </a:r>
+            <a:r>
+              <a:rPr lang="en-AU" dirty="0"/>
+              <a:t> = ‘pulse-based’ or ‘continuous’.</a:t>
+            </a:r>
+          </a:p>
+          <a:p>
+            <a:r>
+              <a:rPr lang="en-AU" dirty="0"/>
+              <a:t>If ‘pulse-based’, parameters refer to individual pulses (e.g., TMS, TUS, TPCS). If ‘continuous’, parameters refer to continuous waveform (e.g., </a:t>
+            </a:r>
+            <a:r>
+              <a:rPr lang="en-AU" dirty="0" err="1"/>
+              <a:t>tDCS</a:t>
+            </a:r>
+            <a:r>
+              <a:rPr lang="en-AU" dirty="0"/>
+              <a:t>, </a:t>
+            </a:r>
+            <a:r>
+              <a:rPr lang="en-AU" dirty="0" err="1"/>
+              <a:t>tACS</a:t>
+            </a:r>
+            <a:r>
+              <a:rPr lang="en-AU" dirty="0"/>
+              <a:t>, </a:t>
+            </a:r>
+            <a:r>
+              <a:rPr lang="en-AU" dirty="0" err="1"/>
+              <a:t>tRNS</a:t>
+            </a:r>
+            <a:r>
+              <a:rPr lang="en-AU" dirty="0"/>
+              <a:t>). Need a definition of what constitutes ‘pulse-based’ vs ‘continuous’.</a:t>
+            </a:r>
+          </a:p>
+        </p:txBody>
+      </p:sp>
+    </p:spTree>
+    <p:extLst>
+      <p:ext uri="{BB962C8B-B14F-4D97-AF65-F5344CB8AC3E}">
+        <p14:creationId xmlns:p14="http://schemas.microsoft.com/office/powerpoint/2010/main" val="2643460916"/>
+      </p:ext>
+    </p:extLst>
+  </p:cSld>
+  <p:clrMapOvr>
+    <a:masterClrMapping/>
+  </p:clrMapOvr>
+</p:sld>
+</file>
+
+<file path=ppt/slides/slide9.xml><?xml version="1.0" encoding="utf-8"?>
 <p:sld xmlns:a="http://schemas.openxmlformats.org/drawingml/2006/main" xmlns:r="http://schemas.openxmlformats.org/officeDocument/2006/relationships" xmlns:p="http://schemas.openxmlformats.org/presentationml/2006/main">
   <p:cSld>
     <p:spTree>
@@ -50701,14 +59914,14 @@
           <p:nvPr>
             <p:extLst>
               <p:ext uri="{D42A27DB-BD31-4B8C-83A1-F6EECF244321}">
-                <p14:modId xmlns:p14="http://schemas.microsoft.com/office/powerpoint/2010/main" val="2891846755"/>
+                <p14:modId xmlns:p14="http://schemas.microsoft.com/office/powerpoint/2010/main" val="1634243723"/>
               </p:ext>
             </p:extLst>
           </p:nvPr>
         </p:nvGraphicFramePr>
         <p:xfrm>
           <a:off x="1400905" y="1453008"/>
-          <a:ext cx="9677403" cy="3951984"/>
+          <a:ext cx="9677403" cy="4482040"/>
         </p:xfrm>
         <a:graphic>
           <a:graphicData uri="http://schemas.openxmlformats.org/drawingml/2006/table">
@@ -50798,7 +60011,10 @@
                     <a:bodyPr/>
                     <a:lstStyle/>
                     <a:p>
-                      <a:endParaRPr lang="en-AU"/>
+                      <a:r>
+                        <a:rPr lang="en-AU" dirty="0"/>
+                        <a:t>Nigel (alt)</a:t>
+                      </a:r>
                     </a:p>
                   </a:txBody>
                   <a:tcPr/>
@@ -50808,7 +60024,30 @@
                     <a:bodyPr/>
                     <a:lstStyle/>
                     <a:p>
-                      <a:endParaRPr lang="en-AU"/>
+                      <a:pPr marL="0" marR="0" lvl="0" indent="0" algn="l" defTabSz="914400" rtl="0" eaLnBrk="1" fontAlgn="auto" latinLnBrk="0" hangingPunct="1">
+                        <a:lnSpc>
+                          <a:spcPct val="100000"/>
+                        </a:lnSpc>
+                        <a:spcBef>
+                          <a:spcPts val="0"/>
+                        </a:spcBef>
+                        <a:spcAft>
+                          <a:spcPts val="0"/>
+                        </a:spcAft>
+                        <a:buClrTx/>
+                        <a:buSzTx/>
+                        <a:buFontTx/>
+                        <a:buNone/>
+                        <a:tabLst/>
+                        <a:defRPr/>
+                      </a:pPr>
+                      <a:r>
+                        <a:rPr lang="en-AU" dirty="0"/>
+                        <a:t>Nigel (alt 2)</a:t>
+                      </a:r>
+                    </a:p>
+                    <a:p>
+                      <a:endParaRPr lang="en-AU" dirty="0"/>
                     </a:p>
                   </a:txBody>
                   <a:tcPr/>
@@ -50864,7 +60103,10 @@
                     <a:bodyPr/>
                     <a:lstStyle/>
                     <a:p>
-                      <a:endParaRPr lang="en-AU"/>
+                      <a:r>
+                        <a:rPr lang="en-AU" dirty="0"/>
+                        <a:t>Stimulus</a:t>
+                      </a:r>
                     </a:p>
                   </a:txBody>
                   <a:tcPr/>
@@ -50874,7 +60116,10 @@
                     <a:bodyPr/>
                     <a:lstStyle/>
                     <a:p>
-                      <a:endParaRPr lang="en-AU"/>
+                      <a:r>
+                        <a:rPr lang="en-AU" dirty="0"/>
+                        <a:t>Component</a:t>
+                      </a:r>
                     </a:p>
                   </a:txBody>
                   <a:tcPr/>
@@ -50942,7 +60187,10 @@
                     <a:bodyPr/>
                     <a:lstStyle/>
                     <a:p>
-                      <a:endParaRPr lang="en-AU"/>
+                      <a:r>
+                        <a:rPr lang="en-AU" dirty="0"/>
+                        <a:t>Stimulus train</a:t>
+                      </a:r>
                     </a:p>
                   </a:txBody>
                   <a:tcPr/>
@@ -50952,7 +60200,10 @@
                     <a:bodyPr/>
                     <a:lstStyle/>
                     <a:p>
-                      <a:endParaRPr lang="en-AU"/>
+                      <a:r>
+                        <a:rPr lang="en-AU" dirty="0"/>
+                        <a:t>Component train</a:t>
+                      </a:r>
                     </a:p>
                   </a:txBody>
                   <a:tcPr/>
@@ -51008,7 +60259,10 @@
                     <a:bodyPr/>
                     <a:lstStyle/>
                     <a:p>
-                      <a:endParaRPr lang="en-AU"/>
+                      <a:r>
+                        <a:rPr lang="en-AU" dirty="0"/>
+                        <a:t>Stimulus train repeat</a:t>
+                      </a:r>
                     </a:p>
                   </a:txBody>
                   <a:tcPr/>
@@ -51018,7 +60272,10 @@
                     <a:bodyPr/>
                     <a:lstStyle/>
                     <a:p>
-                      <a:endParaRPr lang="en-AU"/>
+                      <a:r>
+                        <a:rPr lang="en-AU" dirty="0"/>
+                        <a:t>Component train repeat</a:t>
+                      </a:r>
                     </a:p>
                   </a:txBody>
                   <a:tcPr/>
@@ -51074,7 +60331,10 @@
                     <a:bodyPr/>
                     <a:lstStyle/>
                     <a:p>
-                      <a:endParaRPr lang="en-AU"/>
+                      <a:r>
+                        <a:rPr lang="en-AU" dirty="0"/>
+                        <a:t>Repeat 2</a:t>
+                      </a:r>
                     </a:p>
                   </a:txBody>
                   <a:tcPr/>
@@ -51084,7 +60344,10 @@
                     <a:bodyPr/>
                     <a:lstStyle/>
                     <a:p>
-                      <a:endParaRPr lang="en-AU"/>
+                      <a:r>
+                        <a:rPr lang="en-AU" dirty="0"/>
+                        <a:t>Repeat 2</a:t>
+                      </a:r>
                     </a:p>
                   </a:txBody>
                   <a:tcPr/>
@@ -51140,7 +60403,30 @@
                     <a:bodyPr/>
                     <a:lstStyle/>
                     <a:p>
-                      <a:endParaRPr lang="en-AU"/>
+                      <a:pPr marL="0" marR="0" lvl="0" indent="0" algn="l" defTabSz="914400" rtl="0" eaLnBrk="1" fontAlgn="auto" latinLnBrk="0" hangingPunct="1">
+                        <a:lnSpc>
+                          <a:spcPct val="100000"/>
+                        </a:lnSpc>
+                        <a:spcBef>
+                          <a:spcPts val="0"/>
+                        </a:spcBef>
+                        <a:spcAft>
+                          <a:spcPts val="0"/>
+                        </a:spcAft>
+                        <a:buClrTx/>
+                        <a:buSzTx/>
+                        <a:buFontTx/>
+                        <a:buNone/>
+                        <a:tabLst/>
+                        <a:defRPr/>
+                      </a:pPr>
+                      <a:r>
+                        <a:rPr lang="en-AU" dirty="0"/>
+                        <a:t>Undefined (could use repeat 3)</a:t>
+                      </a:r>
+                    </a:p>
+                    <a:p>
+                      <a:endParaRPr lang="en-AU" dirty="0"/>
                     </a:p>
                   </a:txBody>
                   <a:tcPr/>
@@ -51149,6 +60435,29 @@
                   <a:txBody>
                     <a:bodyPr/>
                     <a:lstStyle/>
+                    <a:p>
+                      <a:pPr marL="0" marR="0" lvl="0" indent="0" algn="l" defTabSz="914400" rtl="0" eaLnBrk="1" fontAlgn="auto" latinLnBrk="0" hangingPunct="1">
+                        <a:lnSpc>
+                          <a:spcPct val="100000"/>
+                        </a:lnSpc>
+                        <a:spcBef>
+                          <a:spcPts val="0"/>
+                        </a:spcBef>
+                        <a:spcAft>
+                          <a:spcPts val="0"/>
+                        </a:spcAft>
+                        <a:buClrTx/>
+                        <a:buSzTx/>
+                        <a:buFontTx/>
+                        <a:buNone/>
+                        <a:tabLst/>
+                        <a:defRPr/>
+                      </a:pPr>
+                      <a:r>
+                        <a:rPr lang="en-AU" dirty="0"/>
+                        <a:t>Undefined (could use repeat 3)</a:t>
+                      </a:r>
+                    </a:p>
                     <a:p>
                       <a:endParaRPr lang="en-AU" dirty="0"/>
                     </a:p>
@@ -51179,8 +60488,8 @@
         </p:nvSpPr>
         <p:spPr>
           <a:xfrm>
-            <a:off x="3766037" y="351715"/>
-            <a:ext cx="4659923" cy="461665"/>
+            <a:off x="2872155" y="351715"/>
+            <a:ext cx="6787660" cy="830997"/>
           </a:xfrm>
           <a:prstGeom prst="rect">
             <a:avLst/>
@@ -51196,7 +60505,7 @@
             <a:pPr algn="ctr"/>
             <a:r>
               <a:rPr lang="en-AU" sz="2400" dirty="0"/>
-              <a:t>Nomenclature for timings</a:t>
+              <a:t>Nomenclature for timings (generalise or only for ‘pulse-based’)</a:t>
             </a:r>
           </a:p>
         </p:txBody>

--- a/parameter-visualisation/parameter_visualisation.pptx
+++ b/parameter-visualisation/parameter_visualisation.pptx
@@ -19607,7 +19607,7 @@
           <a:p>
             <a:fld id="{830D4AAE-87F1-49BA-A98E-415997C9383F}" type="datetimeFigureOut">
               <a:rPr lang="en-AU" smtClean="0"/>
-              <a:t>20/04/2026</a:t>
+              <a:t>22/04/2026</a:t>
             </a:fld>
             <a:endParaRPr lang="en-AU"/>
           </a:p>
@@ -19807,7 +19807,7 @@
           <a:p>
             <a:fld id="{830D4AAE-87F1-49BA-A98E-415997C9383F}" type="datetimeFigureOut">
               <a:rPr lang="en-AU" smtClean="0"/>
-              <a:t>20/04/2026</a:t>
+              <a:t>22/04/2026</a:t>
             </a:fld>
             <a:endParaRPr lang="en-AU"/>
           </a:p>
@@ -20017,7 +20017,7 @@
           <a:p>
             <a:fld id="{830D4AAE-87F1-49BA-A98E-415997C9383F}" type="datetimeFigureOut">
               <a:rPr lang="en-AU" smtClean="0"/>
-              <a:t>20/04/2026</a:t>
+              <a:t>22/04/2026</a:t>
             </a:fld>
             <a:endParaRPr lang="en-AU"/>
           </a:p>
@@ -20217,7 +20217,7 @@
           <a:p>
             <a:fld id="{830D4AAE-87F1-49BA-A98E-415997C9383F}" type="datetimeFigureOut">
               <a:rPr lang="en-AU" smtClean="0"/>
-              <a:t>20/04/2026</a:t>
+              <a:t>22/04/2026</a:t>
             </a:fld>
             <a:endParaRPr lang="en-AU"/>
           </a:p>
@@ -20493,7 +20493,7 @@
           <a:p>
             <a:fld id="{830D4AAE-87F1-49BA-A98E-415997C9383F}" type="datetimeFigureOut">
               <a:rPr lang="en-AU" smtClean="0"/>
-              <a:t>20/04/2026</a:t>
+              <a:t>22/04/2026</a:t>
             </a:fld>
             <a:endParaRPr lang="en-AU"/>
           </a:p>
@@ -20761,7 +20761,7 @@
           <a:p>
             <a:fld id="{830D4AAE-87F1-49BA-A98E-415997C9383F}" type="datetimeFigureOut">
               <a:rPr lang="en-AU" smtClean="0"/>
-              <a:t>20/04/2026</a:t>
+              <a:t>22/04/2026</a:t>
             </a:fld>
             <a:endParaRPr lang="en-AU"/>
           </a:p>
@@ -21176,7 +21176,7 @@
           <a:p>
             <a:fld id="{830D4AAE-87F1-49BA-A98E-415997C9383F}" type="datetimeFigureOut">
               <a:rPr lang="en-AU" smtClean="0"/>
-              <a:t>20/04/2026</a:t>
+              <a:t>22/04/2026</a:t>
             </a:fld>
             <a:endParaRPr lang="en-AU"/>
           </a:p>
@@ -21318,7 +21318,7 @@
           <a:p>
             <a:fld id="{830D4AAE-87F1-49BA-A98E-415997C9383F}" type="datetimeFigureOut">
               <a:rPr lang="en-AU" smtClean="0"/>
-              <a:t>20/04/2026</a:t>
+              <a:t>22/04/2026</a:t>
             </a:fld>
             <a:endParaRPr lang="en-AU"/>
           </a:p>
@@ -21431,7 +21431,7 @@
           <a:p>
             <a:fld id="{830D4AAE-87F1-49BA-A98E-415997C9383F}" type="datetimeFigureOut">
               <a:rPr lang="en-AU" smtClean="0"/>
-              <a:t>20/04/2026</a:t>
+              <a:t>22/04/2026</a:t>
             </a:fld>
             <a:endParaRPr lang="en-AU"/>
           </a:p>
@@ -21744,7 +21744,7 @@
           <a:p>
             <a:fld id="{830D4AAE-87F1-49BA-A98E-415997C9383F}" type="datetimeFigureOut">
               <a:rPr lang="en-AU" smtClean="0"/>
-              <a:t>20/04/2026</a:t>
+              <a:t>22/04/2026</a:t>
             </a:fld>
             <a:endParaRPr lang="en-AU"/>
           </a:p>
@@ -22033,7 +22033,7 @@
           <a:p>
             <a:fld id="{830D4AAE-87F1-49BA-A98E-415997C9383F}" type="datetimeFigureOut">
               <a:rPr lang="en-AU" smtClean="0"/>
-              <a:t>20/04/2026</a:t>
+              <a:t>22/04/2026</a:t>
             </a:fld>
             <a:endParaRPr lang="en-AU"/>
           </a:p>
@@ -22276,7 +22276,7 @@
           <a:p>
             <a:fld id="{830D4AAE-87F1-49BA-A98E-415997C9383F}" type="datetimeFigureOut">
               <a:rPr lang="en-AU" smtClean="0"/>
-              <a:t>20/04/2026</a:t>
+              <a:t>22/04/2026</a:t>
             </a:fld>
             <a:endParaRPr lang="en-AU"/>
           </a:p>
